--- a/outputs/mobile_edge_workflow_jury_report_20261011.pptx
+++ b/outputs/mobile_edge_workflow_jury_report_20261011.pptx
@@ -2,35 +2,35 @@
 <file path=ppt/presentation.xml><?xml version="1.0" encoding="utf-8"?>
 <p:presentation xmlns:p="http://schemas.openxmlformats.org/presentationml/2006/main">
   <p:sldMasterIdLst>
-    <p:sldMasterId xmlns:r="http://schemas.openxmlformats.org/officeDocument/2006/relationships" id="2147483648" r:id="R42318efd455d4e41"/>
+    <p:sldMasterId xmlns:r="http://schemas.openxmlformats.org/officeDocument/2006/relationships" id="2147483648" r:id="R7270010e3adf4a5c"/>
   </p:sldMasterIdLst>
   <p:notesMasterIdLst>
-    <p:notesMasterId xmlns:r="http://schemas.openxmlformats.org/officeDocument/2006/relationships" r:id="R48fd87c437f94589"/>
+    <p:notesMasterId xmlns:r="http://schemas.openxmlformats.org/officeDocument/2006/relationships" r:id="R58bdac1218b14156"/>
   </p:notesMasterIdLst>
   <p:sldIdLst>
-    <p:sldId xmlns:r="http://schemas.openxmlformats.org/officeDocument/2006/relationships" id="256" r:id="Rb4b904c662f245a5"/>
-    <p:sldId xmlns:r="http://schemas.openxmlformats.org/officeDocument/2006/relationships" id="257" r:id="R73980d2892384666"/>
-    <p:sldId xmlns:r="http://schemas.openxmlformats.org/officeDocument/2006/relationships" id="258" r:id="R766cfe9b50b94345"/>
-    <p:sldId xmlns:r="http://schemas.openxmlformats.org/officeDocument/2006/relationships" id="259" r:id="R884ab45326e54f50"/>
-    <p:sldId xmlns:r="http://schemas.openxmlformats.org/officeDocument/2006/relationships" id="260" r:id="Re4db5d133df64bab"/>
-    <p:sldId xmlns:r="http://schemas.openxmlformats.org/officeDocument/2006/relationships" id="261" r:id="R0b43ef19b87e47a0"/>
-    <p:sldId xmlns:r="http://schemas.openxmlformats.org/officeDocument/2006/relationships" id="262" r:id="Rac9926514b9a4edf"/>
-    <p:sldId xmlns:r="http://schemas.openxmlformats.org/officeDocument/2006/relationships" id="263" r:id="R17beb00b54e645e6"/>
-    <p:sldId xmlns:r="http://schemas.openxmlformats.org/officeDocument/2006/relationships" id="264" r:id="R72a632371aa045d9"/>
-    <p:sldId xmlns:r="http://schemas.openxmlformats.org/officeDocument/2006/relationships" id="265" r:id="R1b661ea74e5e4307"/>
-    <p:sldId xmlns:r="http://schemas.openxmlformats.org/officeDocument/2006/relationships" id="266" r:id="Rd5d996144f7842a9"/>
-    <p:sldId xmlns:r="http://schemas.openxmlformats.org/officeDocument/2006/relationships" id="267" r:id="Rf0a702cd47fa4a9b"/>
-    <p:sldId xmlns:r="http://schemas.openxmlformats.org/officeDocument/2006/relationships" id="268" r:id="R4ef531fe609f48c3"/>
-    <p:sldId xmlns:r="http://schemas.openxmlformats.org/officeDocument/2006/relationships" id="269" r:id="Rf159bde678e94336"/>
-    <p:sldId xmlns:r="http://schemas.openxmlformats.org/officeDocument/2006/relationships" id="270" r:id="R74e2281e9a7b47a1"/>
-    <p:sldId xmlns:r="http://schemas.openxmlformats.org/officeDocument/2006/relationships" id="271" r:id="R080db3fe2cc440ec"/>
-    <p:sldId xmlns:r="http://schemas.openxmlformats.org/officeDocument/2006/relationships" id="272" r:id="R554c699b8e534396"/>
-    <p:sldId xmlns:r="http://schemas.openxmlformats.org/officeDocument/2006/relationships" id="273" r:id="Ra5fd5e05992f4264"/>
-    <p:sldId xmlns:r="http://schemas.openxmlformats.org/officeDocument/2006/relationships" id="274" r:id="R2dc77ac1ea6d4036"/>
-    <p:sldId xmlns:r="http://schemas.openxmlformats.org/officeDocument/2006/relationships" id="275" r:id="R07fdf51671de4bf1"/>
-    <p:sldId xmlns:r="http://schemas.openxmlformats.org/officeDocument/2006/relationships" id="276" r:id="Re036259febd44faa"/>
-    <p:sldId xmlns:r="http://schemas.openxmlformats.org/officeDocument/2006/relationships" id="277" r:id="R024b9a8bf25b4ccd"/>
-    <p:sldId xmlns:r="http://schemas.openxmlformats.org/officeDocument/2006/relationships" id="278" r:id="Rd596ede2ff6c4ec7"/>
+    <p:sldId xmlns:r="http://schemas.openxmlformats.org/officeDocument/2006/relationships" id="256" r:id="R049333b53e0e4815"/>
+    <p:sldId xmlns:r="http://schemas.openxmlformats.org/officeDocument/2006/relationships" id="257" r:id="Rfd7ad1fcccbf47d6"/>
+    <p:sldId xmlns:r="http://schemas.openxmlformats.org/officeDocument/2006/relationships" id="258" r:id="Rbb7e5e3577e04c60"/>
+    <p:sldId xmlns:r="http://schemas.openxmlformats.org/officeDocument/2006/relationships" id="259" r:id="Rf600e9fd74f040bd"/>
+    <p:sldId xmlns:r="http://schemas.openxmlformats.org/officeDocument/2006/relationships" id="260" r:id="R6bbe35b364cc4d90"/>
+    <p:sldId xmlns:r="http://schemas.openxmlformats.org/officeDocument/2006/relationships" id="261" r:id="R70541890349440d2"/>
+    <p:sldId xmlns:r="http://schemas.openxmlformats.org/officeDocument/2006/relationships" id="262" r:id="Rfca703bf74a84d5e"/>
+    <p:sldId xmlns:r="http://schemas.openxmlformats.org/officeDocument/2006/relationships" id="263" r:id="Rd9b668c54f144783"/>
+    <p:sldId xmlns:r="http://schemas.openxmlformats.org/officeDocument/2006/relationships" id="264" r:id="R8777a8d818684243"/>
+    <p:sldId xmlns:r="http://schemas.openxmlformats.org/officeDocument/2006/relationships" id="265" r:id="Rf0d2e467a45c4cb4"/>
+    <p:sldId xmlns:r="http://schemas.openxmlformats.org/officeDocument/2006/relationships" id="266" r:id="R1290112a4da84a48"/>
+    <p:sldId xmlns:r="http://schemas.openxmlformats.org/officeDocument/2006/relationships" id="267" r:id="R58c10f58b6ea4087"/>
+    <p:sldId xmlns:r="http://schemas.openxmlformats.org/officeDocument/2006/relationships" id="268" r:id="R61159026b70c4658"/>
+    <p:sldId xmlns:r="http://schemas.openxmlformats.org/officeDocument/2006/relationships" id="269" r:id="Rf675074f30cf4fc7"/>
+    <p:sldId xmlns:r="http://schemas.openxmlformats.org/officeDocument/2006/relationships" id="270" r:id="R6c1ca46b998f4c6c"/>
+    <p:sldId xmlns:r="http://schemas.openxmlformats.org/officeDocument/2006/relationships" id="271" r:id="R493bbe83cca746b9"/>
+    <p:sldId xmlns:r="http://schemas.openxmlformats.org/officeDocument/2006/relationships" id="272" r:id="R034bff6b66f14494"/>
+    <p:sldId xmlns:r="http://schemas.openxmlformats.org/officeDocument/2006/relationships" id="273" r:id="Re1f26c85dc974ae0"/>
+    <p:sldId xmlns:r="http://schemas.openxmlformats.org/officeDocument/2006/relationships" id="274" r:id="R84a3fbbc5c994741"/>
+    <p:sldId xmlns:r="http://schemas.openxmlformats.org/officeDocument/2006/relationships" id="275" r:id="R74f89f87da6f4211"/>
+    <p:sldId xmlns:r="http://schemas.openxmlformats.org/officeDocument/2006/relationships" id="276" r:id="R1e11ab1fb5284a0b"/>
+    <p:sldId xmlns:r="http://schemas.openxmlformats.org/officeDocument/2006/relationships" id="277" r:id="R53d9177cd71e4945"/>
+    <p:sldId xmlns:r="http://schemas.openxmlformats.org/officeDocument/2006/relationships" id="278" r:id="Rafb60d000b324022"/>
   </p:sldIdLst>
   <p:sldSz cx="12192000" cy="6858000"/>
   <p:notesSz cx="6858000" cy="9144000"/>
@@ -2416,7 +2416,7 @@
           <p:cNvPr id="4" name="Accent rule">
             <a:extLst xmlns:a="http://schemas.openxmlformats.org/drawingml/2006/main">
               <a:ext uri="{FF2B5EF4-FFF2-40B4-BE49-F238E27FC236}">
-                <a16:creationId xmlns:a16="http://schemas.microsoft.com/office/drawing/2014/main" id="{812325E6-0D25-420D-B068-169B1C320FB9}"/>
+                <a16:creationId xmlns:a16="http://schemas.microsoft.com/office/drawing/2014/main" id="{3D03C661-53E4-4C3C-AAEC-0CCF33F6D80C}"/>
               </a:ext>
             </a:extLst>
           </p:cNvPr>
@@ -2447,7 +2447,7 @@
           <p:cNvPr id="2" name="Title">
             <a:extLst xmlns:a="http://schemas.openxmlformats.org/drawingml/2006/main">
               <a:ext uri="{FF2B5EF4-FFF2-40B4-BE49-F238E27FC236}">
-                <a16:creationId xmlns:a16="http://schemas.microsoft.com/office/drawing/2014/main" id="{76A9CAAD-7E2F-4F0A-8517-221CF9D1B87C}"/>
+                <a16:creationId xmlns:a16="http://schemas.microsoft.com/office/drawing/2014/main" id="{8F88CFF9-04D2-48A9-A136-85FD77FB094A}"/>
               </a:ext>
             </a:extLst>
           </p:cNvPr>
@@ -2594,7 +2594,7 @@
           <p:cNvPr id="3" name="Subtitle">
             <a:extLst xmlns:a="http://schemas.openxmlformats.org/drawingml/2006/main">
               <a:ext uri="{FF2B5EF4-FFF2-40B4-BE49-F238E27FC236}">
-                <a16:creationId xmlns:a16="http://schemas.microsoft.com/office/drawing/2014/main" id="{5B880A64-7465-4989-AF6A-061906815D97}"/>
+                <a16:creationId xmlns:a16="http://schemas.microsoft.com/office/drawing/2014/main" id="{10F13228-8A2B-4A3C-9B39-29741B4CAE68}"/>
               </a:ext>
             </a:extLst>
           </p:cNvPr>
@@ -2758,7 +2758,7 @@
           <p:cNvPr id="3" name="Accent rule">
             <a:extLst xmlns:a="http://schemas.openxmlformats.org/drawingml/2006/main">
               <a:ext uri="{FF2B5EF4-FFF2-40B4-BE49-F238E27FC236}">
-                <a16:creationId xmlns:a16="http://schemas.microsoft.com/office/drawing/2014/main" id="{0BAB88A8-1387-4FD2-BBB4-D93B5BA9AAB7}"/>
+                <a16:creationId xmlns:a16="http://schemas.microsoft.com/office/drawing/2014/main" id="{84E81D45-355E-4BA2-8ED9-342788F8BF7A}"/>
               </a:ext>
             </a:extLst>
           </p:cNvPr>
@@ -2789,7 +2789,7 @@
           <p:cNvPr id="2" name="Section title">
             <a:extLst xmlns:a="http://schemas.openxmlformats.org/drawingml/2006/main">
               <a:ext uri="{FF2B5EF4-FFF2-40B4-BE49-F238E27FC236}">
-                <a16:creationId xmlns:a16="http://schemas.microsoft.com/office/drawing/2014/main" id="{E7192511-E28B-4248-BE07-60EA621C416F}"/>
+                <a16:creationId xmlns:a16="http://schemas.microsoft.com/office/drawing/2014/main" id="{432E4426-DBEF-4A27-AB9D-035831055D05}"/>
               </a:ext>
             </a:extLst>
           </p:cNvPr>
@@ -2953,7 +2953,7 @@
           <p:cNvPr id="4" name="Accent rule">
             <a:extLst xmlns:a="http://schemas.openxmlformats.org/drawingml/2006/main">
               <a:ext uri="{FF2B5EF4-FFF2-40B4-BE49-F238E27FC236}">
-                <a16:creationId xmlns:a16="http://schemas.microsoft.com/office/drawing/2014/main" id="{84BBC28C-6F86-4756-9F63-13DDB84CE7F2}"/>
+                <a16:creationId xmlns:a16="http://schemas.microsoft.com/office/drawing/2014/main" id="{CD5CC644-79C9-4BEE-8FDE-6F6471307B7D}"/>
               </a:ext>
             </a:extLst>
           </p:cNvPr>
@@ -2984,7 +2984,7 @@
           <p:cNvPr id="2" name="Title">
             <a:extLst xmlns:a="http://schemas.openxmlformats.org/drawingml/2006/main">
               <a:ext uri="{FF2B5EF4-FFF2-40B4-BE49-F238E27FC236}">
-                <a16:creationId xmlns:a16="http://schemas.microsoft.com/office/drawing/2014/main" id="{E36F2312-3327-4D92-9535-A71EB19622E0}"/>
+                <a16:creationId xmlns:a16="http://schemas.microsoft.com/office/drawing/2014/main" id="{3CAE2E52-F62D-45FE-B768-037F9172E102}"/>
               </a:ext>
             </a:extLst>
           </p:cNvPr>
@@ -3131,7 +3131,7 @@
           <p:cNvPr id="3" name="Body">
             <a:extLst xmlns:a="http://schemas.openxmlformats.org/drawingml/2006/main">
               <a:ext uri="{FF2B5EF4-FFF2-40B4-BE49-F238E27FC236}">
-                <a16:creationId xmlns:a16="http://schemas.microsoft.com/office/drawing/2014/main" id="{425195BB-6725-4E12-8E1E-451F76D2D818}"/>
+                <a16:creationId xmlns:a16="http://schemas.microsoft.com/office/drawing/2014/main" id="{D6F0EBB3-BACF-4C51-B1A8-35A4D2D933CB}"/>
               </a:ext>
             </a:extLst>
           </p:cNvPr>
@@ -3295,7 +3295,7 @@
           <p:cNvPr id="5" name="Accent rule">
             <a:extLst xmlns:a="http://schemas.openxmlformats.org/drawingml/2006/main">
               <a:ext uri="{FF2B5EF4-FFF2-40B4-BE49-F238E27FC236}">
-                <a16:creationId xmlns:a16="http://schemas.microsoft.com/office/drawing/2014/main" id="{1DCFEC24-A825-4712-AEB2-CC2B87184EB1}"/>
+                <a16:creationId xmlns:a16="http://schemas.microsoft.com/office/drawing/2014/main" id="{2216544F-9D0B-4B1C-9C66-EF40BDCCF137}"/>
               </a:ext>
             </a:extLst>
           </p:cNvPr>
@@ -3326,7 +3326,7 @@
           <p:cNvPr id="2" name="Title">
             <a:extLst xmlns:a="http://schemas.openxmlformats.org/drawingml/2006/main">
               <a:ext uri="{FF2B5EF4-FFF2-40B4-BE49-F238E27FC236}">
-                <a16:creationId xmlns:a16="http://schemas.microsoft.com/office/drawing/2014/main" id="{DB5335C2-387B-4A1A-8144-C20A6EDC848B}"/>
+                <a16:creationId xmlns:a16="http://schemas.microsoft.com/office/drawing/2014/main" id="{A4912A9A-EC8D-4D16-9D52-334ED3EFDFCC}"/>
               </a:ext>
             </a:extLst>
           </p:cNvPr>
@@ -3473,7 +3473,7 @@
           <p:cNvPr id="3" name="Left column">
             <a:extLst xmlns:a="http://schemas.openxmlformats.org/drawingml/2006/main">
               <a:ext uri="{FF2B5EF4-FFF2-40B4-BE49-F238E27FC236}">
-                <a16:creationId xmlns:a16="http://schemas.microsoft.com/office/drawing/2014/main" id="{1719D258-A147-47E9-B69B-58D4A8B84041}"/>
+                <a16:creationId xmlns:a16="http://schemas.microsoft.com/office/drawing/2014/main" id="{AD09AD23-0504-45EE-BFA1-32E5B9097ADA}"/>
               </a:ext>
             </a:extLst>
           </p:cNvPr>
@@ -3620,7 +3620,7 @@
           <p:cNvPr id="4" name="Right column">
             <a:extLst xmlns:a="http://schemas.openxmlformats.org/drawingml/2006/main">
               <a:ext uri="{FF2B5EF4-FFF2-40B4-BE49-F238E27FC236}">
-                <a16:creationId xmlns:a16="http://schemas.microsoft.com/office/drawing/2014/main" id="{F948F71F-BDBB-42DA-B497-87A41B071803}"/>
+                <a16:creationId xmlns:a16="http://schemas.microsoft.com/office/drawing/2014/main" id="{6C0355CD-E00C-41C6-9FB0-2FE68E231A57}"/>
               </a:ext>
             </a:extLst>
           </p:cNvPr>
@@ -3784,7 +3784,7 @@
           <p:cNvPr id="4" name="Accent rule">
             <a:extLst xmlns:a="http://schemas.openxmlformats.org/drawingml/2006/main">
               <a:ext uri="{FF2B5EF4-FFF2-40B4-BE49-F238E27FC236}">
-                <a16:creationId xmlns:a16="http://schemas.microsoft.com/office/drawing/2014/main" id="{0E9CFDB2-D499-4437-9669-2B3347580F01}"/>
+                <a16:creationId xmlns:a16="http://schemas.microsoft.com/office/drawing/2014/main" id="{64D50D5E-89DE-4D00-8393-39808D4C33F7}"/>
               </a:ext>
             </a:extLst>
           </p:cNvPr>
@@ -3815,7 +3815,7 @@
           <p:cNvPr id="2" name="Title">
             <a:extLst xmlns:a="http://schemas.openxmlformats.org/drawingml/2006/main">
               <a:ext uri="{FF2B5EF4-FFF2-40B4-BE49-F238E27FC236}">
-                <a16:creationId xmlns:a16="http://schemas.microsoft.com/office/drawing/2014/main" id="{3041DA5D-0028-4BFB-AE6E-7C1AF54071F1}"/>
+                <a16:creationId xmlns:a16="http://schemas.microsoft.com/office/drawing/2014/main" id="{3F3CCFF2-3B0F-402E-8F3A-68781150A113}"/>
               </a:ext>
             </a:extLst>
           </p:cNvPr>
@@ -3962,7 +3962,7 @@
           <p:cNvPr id="3" name="Left column">
             <a:extLst xmlns:a="http://schemas.openxmlformats.org/drawingml/2006/main">
               <a:ext uri="{FF2B5EF4-FFF2-40B4-BE49-F238E27FC236}">
-                <a16:creationId xmlns:a16="http://schemas.microsoft.com/office/drawing/2014/main" id="{7D4F5ED0-8E92-4CD5-B2BA-72411F738792}"/>
+                <a16:creationId xmlns:a16="http://schemas.microsoft.com/office/drawing/2014/main" id="{C72DB290-A509-4CFC-B0A8-3F2323EE3686}"/>
               </a:ext>
             </a:extLst>
           </p:cNvPr>
@@ -4147,12 +4147,12 @@
   </p:cSld>
   <p:clrMap bg1="lt1" tx1="dk1" bg2="lt2" tx2="dk2" accent1="accent1" accent2="accent2" accent3="accent3" accent4="accent4" accent5="accent5" accent6="accent6" hlink="hlink" folHlink="folHlink"/>
   <p:sldLayoutIdLst>
-    <p:sldLayoutId xmlns:r="http://schemas.openxmlformats.org/officeDocument/2006/relationships" id="2147483649" r:id="R7b0ea29f75654589"/>
-    <p:sldLayoutId xmlns:r="http://schemas.openxmlformats.org/officeDocument/2006/relationships" id="2147483650" r:id="Re9c920892e4b4977"/>
-    <p:sldLayoutId xmlns:r="http://schemas.openxmlformats.org/officeDocument/2006/relationships" id="2147483651" r:id="R0e3aed5c143e4eb2"/>
-    <p:sldLayoutId xmlns:r="http://schemas.openxmlformats.org/officeDocument/2006/relationships" id="2147483652" r:id="Rbdd0b817d6974bca"/>
-    <p:sldLayoutId xmlns:r="http://schemas.openxmlformats.org/officeDocument/2006/relationships" id="2147483653" r:id="R82e407ccd8db40d7"/>
-    <p:sldLayoutId xmlns:r="http://schemas.openxmlformats.org/officeDocument/2006/relationships" id="2147483654" r:id="Raafba181260b4a11"/>
+    <p:sldLayoutId xmlns:r="http://schemas.openxmlformats.org/officeDocument/2006/relationships" id="2147483649" r:id="R72fa03ce11c2411d"/>
+    <p:sldLayoutId xmlns:r="http://schemas.openxmlformats.org/officeDocument/2006/relationships" id="2147483650" r:id="Racf50f746a1b4575"/>
+    <p:sldLayoutId xmlns:r="http://schemas.openxmlformats.org/officeDocument/2006/relationships" id="2147483651" r:id="Rd90419d61f7f4eb6"/>
+    <p:sldLayoutId xmlns:r="http://schemas.openxmlformats.org/officeDocument/2006/relationships" id="2147483652" r:id="R97cc578f1f224457"/>
+    <p:sldLayoutId xmlns:r="http://schemas.openxmlformats.org/officeDocument/2006/relationships" id="2147483653" r:id="Ra3a0ed8edde143b8"/>
+    <p:sldLayoutId xmlns:r="http://schemas.openxmlformats.org/officeDocument/2006/relationships" id="2147483654" r:id="Rcae2c45391f64c55"/>
   </p:sldLayoutIdLst>
   <p:txStyles>
     <p:titleStyle>
@@ -4700,10 +4700,10 @@
       </p:grpSpPr>
       <p:sp>
         <p:nvSpPr>
-          <p:cNvPr id="14" name="">
-            <a:extLst xmlns:a="http://schemas.openxmlformats.org/drawingml/2006/main">
-              <a:ext uri="{FF2B5EF4-FFF2-40B4-BE49-F238E27FC236}">
-                <a16:creationId xmlns:a16="http://schemas.microsoft.com/office/drawing/2014/main" id="{339A9CC4-47A9-4D3D-AE8C-0DCA787CFA25}"/>
+          <p:cNvPr id="12" name="">
+            <a:extLst xmlns:a="http://schemas.openxmlformats.org/drawingml/2006/main">
+              <a:ext uri="{FF2B5EF4-FFF2-40B4-BE49-F238E27FC236}">
+                <a16:creationId xmlns:a16="http://schemas.microsoft.com/office/drawing/2014/main" id="{BB770465-186C-4E89-AC4E-175B26EEB8C1}"/>
               </a:ext>
             </a:extLst>
           </p:cNvPr>
@@ -4736,7 +4736,7 @@
           <p:cNvPr id="2" name="">
             <a:extLst xmlns:a="http://schemas.openxmlformats.org/drawingml/2006/main">
               <a:ext uri="{FF2B5EF4-FFF2-40B4-BE49-F238E27FC236}">
-                <a16:creationId xmlns:a16="http://schemas.microsoft.com/office/drawing/2014/main" id="{C4F545A5-AD48-40A3-85B8-DAD5E86826C1}"/>
+                <a16:creationId xmlns:a16="http://schemas.microsoft.com/office/drawing/2014/main" id="{2ED51A78-29A5-4E7D-A5FD-82B3F231C388}"/>
               </a:ext>
             </a:extLst>
           </p:cNvPr>
@@ -4766,14 +4766,14 @@
       </p:sp>
       <p:pic>
         <p:nvPicPr>
-          <p:cNvPr id="16" name=""/>
+          <p:cNvPr id="14" name=""/>
           <p:cNvPicPr>
             <a:picLocks xmlns:a="http://schemas.openxmlformats.org/drawingml/2006/main" noChangeAspect="1"/>
           </p:cNvPicPr>
           <p:nvPr/>
         </p:nvPicPr>
         <p:blipFill>
-          <a:blip xmlns:r="http://schemas.openxmlformats.org/officeDocument/2006/relationships" xmlns:a="http://schemas.openxmlformats.org/drawingml/2006/main" r:embed="R254417f8f8b24363"/>
+          <a:blip xmlns:r="http://schemas.openxmlformats.org/officeDocument/2006/relationships" xmlns:a="http://schemas.openxmlformats.org/drawingml/2006/main" r:embed="Rfdcf7f72e55e48cd"/>
           <a:stretch xmlns:a="http://schemas.openxmlformats.org/drawingml/2006/main"/>
         </p:blipFill>
         <p:spPr>
@@ -4791,7 +4791,7 @@
           <p:cNvPr id="4" name="">
             <a:extLst xmlns:a="http://schemas.openxmlformats.org/drawingml/2006/main">
               <a:ext uri="{FF2B5EF4-FFF2-40B4-BE49-F238E27FC236}">
-                <a16:creationId xmlns:a16="http://schemas.microsoft.com/office/drawing/2014/main" id="{F8746B5E-15CB-401E-923F-FDD7EF78EEBF}"/>
+                <a16:creationId xmlns:a16="http://schemas.microsoft.com/office/drawing/2014/main" id="{D96B7D38-985D-4278-A10E-8DF5571727EF}"/>
               </a:ext>
             </a:extLst>
           </p:cNvPr>
@@ -4852,7 +4852,7 @@
           <p:cNvPr id="5" name="">
             <a:extLst xmlns:a="http://schemas.openxmlformats.org/drawingml/2006/main">
               <a:ext uri="{FF2B5EF4-FFF2-40B4-BE49-F238E27FC236}">
-                <a16:creationId xmlns:a16="http://schemas.microsoft.com/office/drawing/2014/main" id="{892CEF80-B627-4B6C-9AB2-0F306596BB5F}"/>
+                <a16:creationId xmlns:a16="http://schemas.microsoft.com/office/drawing/2014/main" id="{912E95A1-821A-4DB9-8F87-1FDFC165FECE}"/>
               </a:ext>
             </a:extLst>
           </p:cNvPr>
@@ -4913,7 +4913,7 @@
           <p:cNvPr id="6" name="">
             <a:extLst xmlns:a="http://schemas.openxmlformats.org/drawingml/2006/main">
               <a:ext uri="{FF2B5EF4-FFF2-40B4-BE49-F238E27FC236}">
-                <a16:creationId xmlns:a16="http://schemas.microsoft.com/office/drawing/2014/main" id="{6849D518-0258-4780-BFC9-B4C3AF5E970E}"/>
+                <a16:creationId xmlns:a16="http://schemas.microsoft.com/office/drawing/2014/main" id="{1F577CC1-EA7F-4B94-9CB7-1780E9F9275B}"/>
               </a:ext>
             </a:extLst>
           </p:cNvPr>
@@ -4946,68 +4946,7 @@
           <p:cNvPr id="7" name="">
             <a:extLst xmlns:a="http://schemas.openxmlformats.org/drawingml/2006/main">
               <a:ext uri="{FF2B5EF4-FFF2-40B4-BE49-F238E27FC236}">
-                <a16:creationId xmlns:a16="http://schemas.microsoft.com/office/drawing/2014/main" id="{DB6EFAF2-5B9D-4093-82D3-946D3FA4D678}"/>
-              </a:ext>
-            </a:extLst>
-          </p:cNvPr>
-          <p:cNvSpPr>
-            <a:spLocks xmlns:a="http://schemas.openxmlformats.org/drawingml/2006/main" noGrp="1"/>
-          </p:cNvSpPr>
-          <p:nvPr/>
-        </p:nvSpPr>
-        <p:spPr>
-          <a:xfrm xmlns:a="http://schemas.openxmlformats.org/drawingml/2006/main">
-            <a:off x="733425" y="6457950"/>
-            <a:ext cx="6191250" cy="209550"/>
-          </a:xfrm>
-          <a:prstGeom xmlns:a="http://schemas.openxmlformats.org/drawingml/2006/main" prst="rect">
-            <a:avLst/>
-          </a:prstGeom>
-          <a:noFill xmlns:a="http://schemas.openxmlformats.org/drawingml/2006/main"/>
-          <a:ln xmlns:a="http://schemas.openxmlformats.org/drawingml/2006/main" w="0">
-            <a:noFill/>
-          </a:ln>
-        </p:spPr>
-        <p:txBody>
-          <a:bodyPr xmlns:a="http://schemas.openxmlformats.org/drawingml/2006/main" lIns="19050" tIns="19050" rIns="19050" bIns="19050" anchor="ctr">
-            <a:normAutofit fontScale="100000"/>
-          </a:bodyPr>
-          <a:lstStyle xmlns:a="http://schemas.openxmlformats.org/drawingml/2006/main"/>
-          <a:p xmlns:a="http://schemas.openxmlformats.org/drawingml/2006/main">
-            <a:pPr algn="l">
-              <a:lnSpc>
-                <a:spcPct val="105000"/>
-              </a:lnSpc>
-              <a:buNone/>
-              <a:defRPr sz="1050" b="0">
-                <a:solidFill>
-                  <a:srgbClr val="E5EDFF"/>
-                </a:solidFill>
-                <a:latin typeface="PingFang SC"/>
-                <a:ea typeface="PingFang SC"/>
-                <a:cs typeface="PingFang SC"/>
-              </a:defRPr>
-            </a:pPr>
-            <a:r>
-              <a:rPr sz="1050" b="0">
-                <a:solidFill>
-                  <a:srgbClr val="E5EDFF"/>
-                </a:solidFill>
-                <a:latin typeface="PingFang SC"/>
-                <a:ea typeface="PingFang SC"/>
-                <a:cs typeface="PingFang SC"/>
-              </a:rPr>
-              <a:t>广东工业大学 · 学术研究汇报</a:t>
-            </a:r>
-          </a:p>
-        </p:txBody>
-      </p:sp>
-      <p:sp>
-        <p:nvSpPr>
-          <p:cNvPr id="8" name="">
-            <a:extLst xmlns:a="http://schemas.openxmlformats.org/drawingml/2006/main">
-              <a:ext uri="{FF2B5EF4-FFF2-40B4-BE49-F238E27FC236}">
-                <a16:creationId xmlns:a16="http://schemas.microsoft.com/office/drawing/2014/main" id="{E9B85A86-1A29-4DB0-A2C5-F481C4320068}"/>
+                <a16:creationId xmlns:a16="http://schemas.microsoft.com/office/drawing/2014/main" id="{35D80CC6-57BD-429C-B3F5-A512A90DD1CB}"/>
               </a:ext>
             </a:extLst>
           </p:cNvPr>
@@ -5065,10 +5004,10 @@
       </p:sp>
       <p:sp>
         <p:nvSpPr>
-          <p:cNvPr id="9" name="">
-            <a:extLst xmlns:a="http://schemas.openxmlformats.org/drawingml/2006/main">
-              <a:ext uri="{FF2B5EF4-FFF2-40B4-BE49-F238E27FC236}">
-                <a16:creationId xmlns:a16="http://schemas.microsoft.com/office/drawing/2014/main" id="{CEA094CF-E267-4080-B068-78FFF9C9630B}"/>
+          <p:cNvPr id="8" name="">
+            <a:extLst xmlns:a="http://schemas.openxmlformats.org/drawingml/2006/main">
+              <a:ext uri="{FF2B5EF4-FFF2-40B4-BE49-F238E27FC236}">
+                <a16:creationId xmlns:a16="http://schemas.microsoft.com/office/drawing/2014/main" id="{EFDDF21E-2C60-4525-AE48-602253492048}"/>
               </a:ext>
             </a:extLst>
           </p:cNvPr>
@@ -5126,10 +5065,10 @@
       </p:sp>
       <p:sp>
         <p:nvSpPr>
-          <p:cNvPr id="10" name="">
-            <a:extLst xmlns:a="http://schemas.openxmlformats.org/drawingml/2006/main">
-              <a:ext uri="{FF2B5EF4-FFF2-40B4-BE49-F238E27FC236}">
-                <a16:creationId xmlns:a16="http://schemas.microsoft.com/office/drawing/2014/main" id="{1F1D7188-016F-4740-A987-0A41A832C948}"/>
+          <p:cNvPr id="9" name="">
+            <a:extLst xmlns:a="http://schemas.openxmlformats.org/drawingml/2006/main">
+              <a:ext uri="{FF2B5EF4-FFF2-40B4-BE49-F238E27FC236}">
+                <a16:creationId xmlns:a16="http://schemas.microsoft.com/office/drawing/2014/main" id="{80FF83E6-EE0B-4567-87DD-F9ECBE7BA05F}"/>
               </a:ext>
             </a:extLst>
           </p:cNvPr>
@@ -5187,10 +5126,10 @@
       </p:sp>
       <p:sp>
         <p:nvSpPr>
-          <p:cNvPr id="11" name="">
-            <a:extLst xmlns:a="http://schemas.openxmlformats.org/drawingml/2006/main">
-              <a:ext uri="{FF2B5EF4-FFF2-40B4-BE49-F238E27FC236}">
-                <a16:creationId xmlns:a16="http://schemas.microsoft.com/office/drawing/2014/main" id="{7268E547-1EC8-4714-A24B-4747AB02CA8B}"/>
+          <p:cNvPr id="10" name="">
+            <a:extLst xmlns:a="http://schemas.openxmlformats.org/drawingml/2006/main">
+              <a:ext uri="{FF2B5EF4-FFF2-40B4-BE49-F238E27FC236}">
+                <a16:creationId xmlns:a16="http://schemas.microsoft.com/office/drawing/2014/main" id="{729ECB90-C779-4A21-AD73-D98F65DE5417}"/>
               </a:ext>
             </a:extLst>
           </p:cNvPr>
@@ -5220,10 +5159,10 @@
       </p:sp>
       <p:sp>
         <p:nvSpPr>
-          <p:cNvPr id="12" name="">
-            <a:extLst xmlns:a="http://schemas.openxmlformats.org/drawingml/2006/main">
-              <a:ext uri="{FF2B5EF4-FFF2-40B4-BE49-F238E27FC236}">
-                <a16:creationId xmlns:a16="http://schemas.microsoft.com/office/drawing/2014/main" id="{3F26F412-6609-498F-9135-2067346263E2}"/>
+          <p:cNvPr id="11" name="">
+            <a:extLst xmlns:a="http://schemas.openxmlformats.org/drawingml/2006/main">
+              <a:ext uri="{FF2B5EF4-FFF2-40B4-BE49-F238E27FC236}">
+                <a16:creationId xmlns:a16="http://schemas.microsoft.com/office/drawing/2014/main" id="{65E0B77D-C82E-4207-AD90-C2CC79DBBE99}"/>
               </a:ext>
             </a:extLst>
           </p:cNvPr>
@@ -5275,67 +5214,6 @@
                 <a:cs typeface="PingFang SC"/>
               </a:rPr>
               <a:t>Dependency-Aware Preparation for Mobile Edge Workflows</a:t>
-            </a:r>
-          </a:p>
-        </p:txBody>
-      </p:sp>
-      <p:sp>
-        <p:nvSpPr>
-          <p:cNvPr id="13" name="">
-            <a:extLst xmlns:a="http://schemas.openxmlformats.org/drawingml/2006/main">
-              <a:ext uri="{FF2B5EF4-FFF2-40B4-BE49-F238E27FC236}">
-                <a16:creationId xmlns:a16="http://schemas.microsoft.com/office/drawing/2014/main" id="{80612C60-0440-478E-93A6-15F5EB098C5F}"/>
-              </a:ext>
-            </a:extLst>
-          </p:cNvPr>
-          <p:cNvSpPr>
-            <a:spLocks xmlns:a="http://schemas.openxmlformats.org/drawingml/2006/main" noGrp="1"/>
-          </p:cNvSpPr>
-          <p:nvPr/>
-        </p:nvSpPr>
-        <p:spPr>
-          <a:xfrm xmlns:a="http://schemas.openxmlformats.org/drawingml/2006/main">
-            <a:off x="762000" y="5715000"/>
-            <a:ext cx="9525000" cy="323850"/>
-          </a:xfrm>
-          <a:prstGeom xmlns:a="http://schemas.openxmlformats.org/drawingml/2006/main" prst="rect">
-            <a:avLst/>
-          </a:prstGeom>
-          <a:noFill xmlns:a="http://schemas.openxmlformats.org/drawingml/2006/main"/>
-          <a:ln xmlns:a="http://schemas.openxmlformats.org/drawingml/2006/main" w="0">
-            <a:noFill/>
-          </a:ln>
-        </p:spPr>
-        <p:txBody>
-          <a:bodyPr xmlns:a="http://schemas.openxmlformats.org/drawingml/2006/main" lIns="19050" tIns="19050" rIns="19050" bIns="19050" anchor="ctr">
-            <a:normAutofit fontScale="100000"/>
-          </a:bodyPr>
-          <a:lstStyle xmlns:a="http://schemas.openxmlformats.org/drawingml/2006/main"/>
-          <a:p xmlns:a="http://schemas.openxmlformats.org/drawingml/2006/main">
-            <a:pPr algn="l">
-              <a:lnSpc>
-                <a:spcPct val="105000"/>
-              </a:lnSpc>
-              <a:buNone/>
-              <a:defRPr sz="1425" b="0">
-                <a:solidFill>
-                  <a:srgbClr val="E5EDFF"/>
-                </a:solidFill>
-                <a:latin typeface="PingFang SC"/>
-                <a:ea typeface="PingFang SC"/>
-                <a:cs typeface="PingFang SC"/>
-              </a:defRPr>
-            </a:pPr>
-            <a:r>
-              <a:rPr sz="1425" b="0">
-                <a:solidFill>
-                  <a:srgbClr val="E5EDFF"/>
-                </a:solidFill>
-                <a:latin typeface="PingFang SC"/>
-                <a:ea typeface="PingFang SC"/>
-                <a:cs typeface="PingFang SC"/>
-              </a:rPr>
-              <a:t>研究汇报｜2026 年 10 月</a:t>
             </a:r>
           </a:p>
         </p:txBody>
@@ -5343,7 +5221,7 @@
     </p:spTree>
     <p:extLst>
       <p:ext uri="{BB962C8B-B14F-4D97-AF65-F5344CB8AC3E}">
-        <p14:creationId xmlns:p14="http://schemas.microsoft.com/office/powerpoint/2010/main" val="1759895288"/>
+        <p14:creationId xmlns:p14="http://schemas.microsoft.com/office/powerpoint/2010/main" val="111671833"/>
       </p:ext>
     </p:extLst>
   </p:cSld>
@@ -5371,10 +5249,10 @@
       </p:grpSpPr>
       <p:cxnSp>
         <p:nvCxnSpPr>
-          <p:cNvPr id="18" name=""/>
+          <p:cNvPr id="17" name=""/>
           <p:cNvCxnSpPr>
-            <a:stCxn xmlns:a="http://schemas.openxmlformats.org/drawingml/2006/main" id="11" idx="3"/>
-            <a:endCxn xmlns:a="http://schemas.openxmlformats.org/drawingml/2006/main" id="12" idx="1"/>
+            <a:stCxn xmlns:a="http://schemas.openxmlformats.org/drawingml/2006/main" id="10" idx="3"/>
+            <a:endCxn xmlns:a="http://schemas.openxmlformats.org/drawingml/2006/main" id="11" idx="1"/>
           </p:cNvCxnSpPr>
           <p:nvPr/>
         </p:nvCxnSpPr>
@@ -5397,10 +5275,10 @@
       </p:cxnSp>
       <p:cxnSp>
         <p:nvCxnSpPr>
-          <p:cNvPr id="19" name=""/>
+          <p:cNvPr id="18" name=""/>
           <p:cNvCxnSpPr>
-            <a:stCxn xmlns:a="http://schemas.openxmlformats.org/drawingml/2006/main" id="10" idx="3"/>
-            <a:endCxn xmlns:a="http://schemas.openxmlformats.org/drawingml/2006/main" id="11" idx="1"/>
+            <a:stCxn xmlns:a="http://schemas.openxmlformats.org/drawingml/2006/main" id="9" idx="3"/>
+            <a:endCxn xmlns:a="http://schemas.openxmlformats.org/drawingml/2006/main" id="10" idx="1"/>
           </p:cNvCxnSpPr>
           <p:nvPr/>
         </p:nvCxnSpPr>
@@ -5423,10 +5301,10 @@
       </p:cxnSp>
       <p:cxnSp>
         <p:nvCxnSpPr>
-          <p:cNvPr id="20" name=""/>
+          <p:cNvPr id="19" name=""/>
           <p:cNvCxnSpPr>
-            <a:stCxn xmlns:a="http://schemas.openxmlformats.org/drawingml/2006/main" id="9" idx="3"/>
-            <a:endCxn xmlns:a="http://schemas.openxmlformats.org/drawingml/2006/main" id="10" idx="1"/>
+            <a:stCxn xmlns:a="http://schemas.openxmlformats.org/drawingml/2006/main" id="8" idx="3"/>
+            <a:endCxn xmlns:a="http://schemas.openxmlformats.org/drawingml/2006/main" id="9" idx="1"/>
           </p:cNvCxnSpPr>
           <p:nvPr/>
         </p:nvCxnSpPr>
@@ -5449,10 +5327,10 @@
       </p:cxnSp>
       <p:sp>
         <p:nvSpPr>
-          <p:cNvPr id="21" name="">
-            <a:extLst xmlns:a="http://schemas.openxmlformats.org/drawingml/2006/main">
-              <a:ext uri="{FF2B5EF4-FFF2-40B4-BE49-F238E27FC236}">
-                <a16:creationId xmlns:a16="http://schemas.microsoft.com/office/drawing/2014/main" id="{FF4FFFDB-6A85-40D7-9EDB-AD67931EF463}"/>
+          <p:cNvPr id="20" name="">
+            <a:extLst xmlns:a="http://schemas.openxmlformats.org/drawingml/2006/main">
+              <a:ext uri="{FF2B5EF4-FFF2-40B4-BE49-F238E27FC236}">
+                <a16:creationId xmlns:a16="http://schemas.microsoft.com/office/drawing/2014/main" id="{2F22FEB5-EBED-40D5-A42C-A182337B35BF}"/>
               </a:ext>
             </a:extLst>
           </p:cNvPr>
@@ -5485,7 +5363,7 @@
           <p:cNvPr id="2" name="">
             <a:extLst xmlns:a="http://schemas.openxmlformats.org/drawingml/2006/main">
               <a:ext uri="{FF2B5EF4-FFF2-40B4-BE49-F238E27FC236}">
-                <a16:creationId xmlns:a16="http://schemas.microsoft.com/office/drawing/2014/main" id="{F05BE38B-82E6-42A5-B2C7-15991647D8CF}"/>
+                <a16:creationId xmlns:a16="http://schemas.microsoft.com/office/drawing/2014/main" id="{1B0A62FC-9C00-463C-B4E0-7D0BDADD9D76}"/>
               </a:ext>
             </a:extLst>
           </p:cNvPr>
@@ -5515,14 +5393,14 @@
       </p:sp>
       <p:pic>
         <p:nvPicPr>
-          <p:cNvPr id="23" name=""/>
+          <p:cNvPr id="22" name=""/>
           <p:cNvPicPr>
             <a:picLocks xmlns:a="http://schemas.openxmlformats.org/drawingml/2006/main" noChangeAspect="1"/>
           </p:cNvPicPr>
           <p:nvPr/>
         </p:nvPicPr>
         <p:blipFill>
-          <a:blip xmlns:r="http://schemas.openxmlformats.org/officeDocument/2006/relationships" xmlns:a="http://schemas.openxmlformats.org/drawingml/2006/main" r:embed="R32027407a9c4441d"/>
+          <a:blip xmlns:r="http://schemas.openxmlformats.org/officeDocument/2006/relationships" xmlns:a="http://schemas.openxmlformats.org/drawingml/2006/main" r:embed="R991ae04b89b844fe"/>
           <a:stretch xmlns:a="http://schemas.openxmlformats.org/drawingml/2006/main"/>
         </p:blipFill>
         <p:spPr>
@@ -5540,7 +5418,7 @@
           <p:cNvPr id="4" name="">
             <a:extLst xmlns:a="http://schemas.openxmlformats.org/drawingml/2006/main">
               <a:ext uri="{FF2B5EF4-FFF2-40B4-BE49-F238E27FC236}">
-                <a16:creationId xmlns:a16="http://schemas.microsoft.com/office/drawing/2014/main" id="{91D8292D-6EAF-4B70-9E07-6D5D55D8ABFE}"/>
+                <a16:creationId xmlns:a16="http://schemas.microsoft.com/office/drawing/2014/main" id="{6ECA3CD1-AEA8-4234-9E6C-E59250B86DB0}"/>
               </a:ext>
             </a:extLst>
           </p:cNvPr>
@@ -5601,7 +5479,7 @@
           <p:cNvPr id="5" name="">
             <a:extLst xmlns:a="http://schemas.openxmlformats.org/drawingml/2006/main">
               <a:ext uri="{FF2B5EF4-FFF2-40B4-BE49-F238E27FC236}">
-                <a16:creationId xmlns:a16="http://schemas.microsoft.com/office/drawing/2014/main" id="{FEB6339A-364A-4816-B465-C547CEF275A3}"/>
+                <a16:creationId xmlns:a16="http://schemas.microsoft.com/office/drawing/2014/main" id="{D541AE77-C4CE-451E-9F7D-8B28DC5F3B58}"/>
               </a:ext>
             </a:extLst>
           </p:cNvPr>
@@ -5662,7 +5540,7 @@
           <p:cNvPr id="6" name="">
             <a:extLst xmlns:a="http://schemas.openxmlformats.org/drawingml/2006/main">
               <a:ext uri="{FF2B5EF4-FFF2-40B4-BE49-F238E27FC236}">
-                <a16:creationId xmlns:a16="http://schemas.microsoft.com/office/drawing/2014/main" id="{E06DFA75-2DA8-428F-90E2-2FCA2A63C0CB}"/>
+                <a16:creationId xmlns:a16="http://schemas.microsoft.com/office/drawing/2014/main" id="{2767850D-A932-40F7-8806-EC897A788B74}"/>
               </a:ext>
             </a:extLst>
           </p:cNvPr>
@@ -5695,68 +5573,7 @@
           <p:cNvPr id="7" name="">
             <a:extLst xmlns:a="http://schemas.openxmlformats.org/drawingml/2006/main">
               <a:ext uri="{FF2B5EF4-FFF2-40B4-BE49-F238E27FC236}">
-                <a16:creationId xmlns:a16="http://schemas.microsoft.com/office/drawing/2014/main" id="{FAD13E67-F8F2-4DCD-B822-78A647083430}"/>
-              </a:ext>
-            </a:extLst>
-          </p:cNvPr>
-          <p:cNvSpPr>
-            <a:spLocks xmlns:a="http://schemas.openxmlformats.org/drawingml/2006/main" noGrp="1"/>
-          </p:cNvSpPr>
-          <p:nvPr/>
-        </p:nvSpPr>
-        <p:spPr>
-          <a:xfrm xmlns:a="http://schemas.openxmlformats.org/drawingml/2006/main">
-            <a:off x="733425" y="6457950"/>
-            <a:ext cx="6191250" cy="209550"/>
-          </a:xfrm>
-          <a:prstGeom xmlns:a="http://schemas.openxmlformats.org/drawingml/2006/main" prst="rect">
-            <a:avLst/>
-          </a:prstGeom>
-          <a:noFill xmlns:a="http://schemas.openxmlformats.org/drawingml/2006/main"/>
-          <a:ln xmlns:a="http://schemas.openxmlformats.org/drawingml/2006/main" w="0">
-            <a:noFill/>
-          </a:ln>
-        </p:spPr>
-        <p:txBody>
-          <a:bodyPr xmlns:a="http://schemas.openxmlformats.org/drawingml/2006/main" lIns="19050" tIns="19050" rIns="19050" bIns="19050" anchor="ctr">
-            <a:normAutofit fontScale="100000"/>
-          </a:bodyPr>
-          <a:lstStyle xmlns:a="http://schemas.openxmlformats.org/drawingml/2006/main"/>
-          <a:p xmlns:a="http://schemas.openxmlformats.org/drawingml/2006/main">
-            <a:pPr algn="l">
-              <a:lnSpc>
-                <a:spcPct val="105000"/>
-              </a:lnSpc>
-              <a:buNone/>
-              <a:defRPr sz="1050" b="0">
-                <a:solidFill>
-                  <a:srgbClr val="E5EDFF"/>
-                </a:solidFill>
-                <a:latin typeface="PingFang SC"/>
-                <a:ea typeface="PingFang SC"/>
-                <a:cs typeface="PingFang SC"/>
-              </a:defRPr>
-            </a:pPr>
-            <a:r>
-              <a:rPr sz="1050" b="0">
-                <a:solidFill>
-                  <a:srgbClr val="E5EDFF"/>
-                </a:solidFill>
-                <a:latin typeface="PingFang SC"/>
-                <a:ea typeface="PingFang SC"/>
-                <a:cs typeface="PingFang SC"/>
-              </a:rPr>
-              <a:t>广东工业大学 · 学术研究汇报</a:t>
-            </a:r>
-          </a:p>
-        </p:txBody>
-      </p:sp>
-      <p:sp>
-        <p:nvSpPr>
-          <p:cNvPr id="8" name="">
-            <a:extLst xmlns:a="http://schemas.openxmlformats.org/drawingml/2006/main">
-              <a:ext uri="{FF2B5EF4-FFF2-40B4-BE49-F238E27FC236}">
-                <a16:creationId xmlns:a16="http://schemas.microsoft.com/office/drawing/2014/main" id="{E5DCDFEB-D230-4640-98BF-EB1750C8174A}"/>
+                <a16:creationId xmlns:a16="http://schemas.microsoft.com/office/drawing/2014/main" id="{22763218-FBE1-4EC1-9C5C-47FA9402534E}"/>
               </a:ext>
             </a:extLst>
           </p:cNvPr>
@@ -5814,10 +5631,10 @@
       </p:sp>
       <p:sp>
         <p:nvSpPr>
-          <p:cNvPr id="9" name="">
-            <a:extLst xmlns:a="http://schemas.openxmlformats.org/drawingml/2006/main">
-              <a:ext uri="{FF2B5EF4-FFF2-40B4-BE49-F238E27FC236}">
-                <a16:creationId xmlns:a16="http://schemas.microsoft.com/office/drawing/2014/main" id="{9F395219-CE72-419B-A4D0-6B7775085F4E}"/>
+          <p:cNvPr id="8" name="">
+            <a:extLst xmlns:a="http://schemas.openxmlformats.org/drawingml/2006/main">
+              <a:ext uri="{FF2B5EF4-FFF2-40B4-BE49-F238E27FC236}">
+                <a16:creationId xmlns:a16="http://schemas.microsoft.com/office/drawing/2014/main" id="{C1E6BD8B-24B0-4947-AC0E-1DA44FA79C21}"/>
               </a:ext>
             </a:extLst>
           </p:cNvPr>
@@ -5907,10 +5724,10 @@
       </p:sp>
       <p:sp>
         <p:nvSpPr>
-          <p:cNvPr id="10" name="">
-            <a:extLst xmlns:a="http://schemas.openxmlformats.org/drawingml/2006/main">
-              <a:ext uri="{FF2B5EF4-FFF2-40B4-BE49-F238E27FC236}">
-                <a16:creationId xmlns:a16="http://schemas.microsoft.com/office/drawing/2014/main" id="{0F3F7DC2-5BD4-42CE-A2C4-E3734C2B9791}"/>
+          <p:cNvPr id="9" name="">
+            <a:extLst xmlns:a="http://schemas.openxmlformats.org/drawingml/2006/main">
+              <a:ext uri="{FF2B5EF4-FFF2-40B4-BE49-F238E27FC236}">
+                <a16:creationId xmlns:a16="http://schemas.microsoft.com/office/drawing/2014/main" id="{005C85C4-5113-4F0C-AC6E-CC79885BDBD2}"/>
               </a:ext>
             </a:extLst>
           </p:cNvPr>
@@ -6000,10 +5817,10 @@
       </p:sp>
       <p:sp>
         <p:nvSpPr>
-          <p:cNvPr id="11" name="">
-            <a:extLst xmlns:a="http://schemas.openxmlformats.org/drawingml/2006/main">
-              <a:ext uri="{FF2B5EF4-FFF2-40B4-BE49-F238E27FC236}">
-                <a16:creationId xmlns:a16="http://schemas.microsoft.com/office/drawing/2014/main" id="{505BC399-9384-4512-8350-F1898B3D030D}"/>
+          <p:cNvPr id="10" name="">
+            <a:extLst xmlns:a="http://schemas.openxmlformats.org/drawingml/2006/main">
+              <a:ext uri="{FF2B5EF4-FFF2-40B4-BE49-F238E27FC236}">
+                <a16:creationId xmlns:a16="http://schemas.microsoft.com/office/drawing/2014/main" id="{620FA68C-C499-485D-81EA-72195784AEAA}"/>
               </a:ext>
             </a:extLst>
           </p:cNvPr>
@@ -6093,10 +5910,10 @@
       </p:sp>
       <p:sp>
         <p:nvSpPr>
-          <p:cNvPr id="12" name="">
-            <a:extLst xmlns:a="http://schemas.openxmlformats.org/drawingml/2006/main">
-              <a:ext uri="{FF2B5EF4-FFF2-40B4-BE49-F238E27FC236}">
-                <a16:creationId xmlns:a16="http://schemas.microsoft.com/office/drawing/2014/main" id="{F36D8004-1B99-43A8-AF4A-5045B90DD32A}"/>
+          <p:cNvPr id="11" name="">
+            <a:extLst xmlns:a="http://schemas.openxmlformats.org/drawingml/2006/main">
+              <a:ext uri="{FF2B5EF4-FFF2-40B4-BE49-F238E27FC236}">
+                <a16:creationId xmlns:a16="http://schemas.microsoft.com/office/drawing/2014/main" id="{B7C87243-D4DA-4831-8900-C99CB1A5F31D}"/>
               </a:ext>
             </a:extLst>
           </p:cNvPr>
@@ -6186,10 +6003,10 @@
       </p:sp>
       <p:sp>
         <p:nvSpPr>
-          <p:cNvPr id="16" name="">
-            <a:extLst xmlns:a="http://schemas.openxmlformats.org/drawingml/2006/main">
-              <a:ext uri="{FF2B5EF4-FFF2-40B4-BE49-F238E27FC236}">
-                <a16:creationId xmlns:a16="http://schemas.microsoft.com/office/drawing/2014/main" id="{12E72468-CA43-48F5-97BA-A7CBE5D508E9}"/>
+          <p:cNvPr id="15" name="">
+            <a:extLst xmlns:a="http://schemas.openxmlformats.org/drawingml/2006/main">
+              <a:ext uri="{FF2B5EF4-FFF2-40B4-BE49-F238E27FC236}">
+                <a16:creationId xmlns:a16="http://schemas.microsoft.com/office/drawing/2014/main" id="{D71155BC-B043-478C-B3B0-8E26BBBD6D61}"/>
               </a:ext>
             </a:extLst>
           </p:cNvPr>
@@ -6247,10 +6064,10 @@
       </p:sp>
       <p:sp>
         <p:nvSpPr>
-          <p:cNvPr id="17" name="">
-            <a:extLst xmlns:a="http://schemas.openxmlformats.org/drawingml/2006/main">
-              <a:ext uri="{FF2B5EF4-FFF2-40B4-BE49-F238E27FC236}">
-                <a16:creationId xmlns:a16="http://schemas.microsoft.com/office/drawing/2014/main" id="{16C53B0F-E54A-4209-8BBA-29EC4D469446}"/>
+          <p:cNvPr id="16" name="">
+            <a:extLst xmlns:a="http://schemas.openxmlformats.org/drawingml/2006/main">
+              <a:ext uri="{FF2B5EF4-FFF2-40B4-BE49-F238E27FC236}">
+                <a16:creationId xmlns:a16="http://schemas.microsoft.com/office/drawing/2014/main" id="{F56C78BC-28FD-4E07-9A1E-C780D871A537}"/>
               </a:ext>
             </a:extLst>
           </p:cNvPr>
@@ -6309,7 +6126,7 @@
     </p:spTree>
     <p:extLst>
       <p:ext uri="{BB962C8B-B14F-4D97-AF65-F5344CB8AC3E}">
-        <p14:creationId xmlns:p14="http://schemas.microsoft.com/office/powerpoint/2010/main" val="1359225183"/>
+        <p14:creationId xmlns:p14="http://schemas.microsoft.com/office/powerpoint/2010/main" val="321624296"/>
       </p:ext>
     </p:extLst>
   </p:cSld>
@@ -6337,10 +6154,10 @@
       </p:grpSpPr>
       <p:sp>
         <p:nvSpPr>
-          <p:cNvPr id="14" name="">
-            <a:extLst xmlns:a="http://schemas.openxmlformats.org/drawingml/2006/main">
-              <a:ext uri="{FF2B5EF4-FFF2-40B4-BE49-F238E27FC236}">
-                <a16:creationId xmlns:a16="http://schemas.microsoft.com/office/drawing/2014/main" id="{5F6ABCAC-29EB-4BD9-9A7B-7C0FE3438552}"/>
+          <p:cNvPr id="13" name="">
+            <a:extLst xmlns:a="http://schemas.openxmlformats.org/drawingml/2006/main">
+              <a:ext uri="{FF2B5EF4-FFF2-40B4-BE49-F238E27FC236}">
+                <a16:creationId xmlns:a16="http://schemas.microsoft.com/office/drawing/2014/main" id="{45167F84-9F39-4812-8E7F-2E1DF26D1EC4}"/>
               </a:ext>
             </a:extLst>
           </p:cNvPr>
@@ -6373,7 +6190,7 @@
           <p:cNvPr id="2" name="">
             <a:extLst xmlns:a="http://schemas.openxmlformats.org/drawingml/2006/main">
               <a:ext uri="{FF2B5EF4-FFF2-40B4-BE49-F238E27FC236}">
-                <a16:creationId xmlns:a16="http://schemas.microsoft.com/office/drawing/2014/main" id="{CD8D4913-E34C-41EB-B1FA-F72E53D873F3}"/>
+                <a16:creationId xmlns:a16="http://schemas.microsoft.com/office/drawing/2014/main" id="{72C330A3-E9DC-45D9-A3CA-8E6DAEEA4671}"/>
               </a:ext>
             </a:extLst>
           </p:cNvPr>
@@ -6403,14 +6220,14 @@
       </p:sp>
       <p:pic>
         <p:nvPicPr>
-          <p:cNvPr id="16" name=""/>
+          <p:cNvPr id="15" name=""/>
           <p:cNvPicPr>
             <a:picLocks xmlns:a="http://schemas.openxmlformats.org/drawingml/2006/main" noChangeAspect="1"/>
           </p:cNvPicPr>
           <p:nvPr/>
         </p:nvPicPr>
         <p:blipFill>
-          <a:blip xmlns:r="http://schemas.openxmlformats.org/officeDocument/2006/relationships" xmlns:a="http://schemas.openxmlformats.org/drawingml/2006/main" r:embed="Rbfafb58d5af849a3"/>
+          <a:blip xmlns:r="http://schemas.openxmlformats.org/officeDocument/2006/relationships" xmlns:a="http://schemas.openxmlformats.org/drawingml/2006/main" r:embed="R21b1fdb0f7024941"/>
           <a:stretch xmlns:a="http://schemas.openxmlformats.org/drawingml/2006/main"/>
         </p:blipFill>
         <p:spPr>
@@ -6428,7 +6245,7 @@
           <p:cNvPr id="4" name="">
             <a:extLst xmlns:a="http://schemas.openxmlformats.org/drawingml/2006/main">
               <a:ext uri="{FF2B5EF4-FFF2-40B4-BE49-F238E27FC236}">
-                <a16:creationId xmlns:a16="http://schemas.microsoft.com/office/drawing/2014/main" id="{962D461C-0CA0-4855-B1DF-EFED9D4478D8}"/>
+                <a16:creationId xmlns:a16="http://schemas.microsoft.com/office/drawing/2014/main" id="{026001B1-A294-45DE-8412-B415BD67C9E8}"/>
               </a:ext>
             </a:extLst>
           </p:cNvPr>
@@ -6489,7 +6306,7 @@
           <p:cNvPr id="5" name="">
             <a:extLst xmlns:a="http://schemas.openxmlformats.org/drawingml/2006/main">
               <a:ext uri="{FF2B5EF4-FFF2-40B4-BE49-F238E27FC236}">
-                <a16:creationId xmlns:a16="http://schemas.microsoft.com/office/drawing/2014/main" id="{729E56B3-BF6F-4EBB-880A-AB33FDD0A542}"/>
+                <a16:creationId xmlns:a16="http://schemas.microsoft.com/office/drawing/2014/main" id="{5915950D-6317-4389-9CD4-65C889DDC9D4}"/>
               </a:ext>
             </a:extLst>
           </p:cNvPr>
@@ -6550,7 +6367,7 @@
           <p:cNvPr id="6" name="">
             <a:extLst xmlns:a="http://schemas.openxmlformats.org/drawingml/2006/main">
               <a:ext uri="{FF2B5EF4-FFF2-40B4-BE49-F238E27FC236}">
-                <a16:creationId xmlns:a16="http://schemas.microsoft.com/office/drawing/2014/main" id="{70429012-BB6F-4FB8-A632-4CF7DB463F96}"/>
+                <a16:creationId xmlns:a16="http://schemas.microsoft.com/office/drawing/2014/main" id="{D71761F2-910A-4CBD-8752-6700BB6D8741}"/>
               </a:ext>
             </a:extLst>
           </p:cNvPr>
@@ -6583,68 +6400,7 @@
           <p:cNvPr id="7" name="">
             <a:extLst xmlns:a="http://schemas.openxmlformats.org/drawingml/2006/main">
               <a:ext uri="{FF2B5EF4-FFF2-40B4-BE49-F238E27FC236}">
-                <a16:creationId xmlns:a16="http://schemas.microsoft.com/office/drawing/2014/main" id="{D2D0651F-17B4-4776-A4C1-33157FA69DBE}"/>
-              </a:ext>
-            </a:extLst>
-          </p:cNvPr>
-          <p:cNvSpPr>
-            <a:spLocks xmlns:a="http://schemas.openxmlformats.org/drawingml/2006/main" noGrp="1"/>
-          </p:cNvSpPr>
-          <p:nvPr/>
-        </p:nvSpPr>
-        <p:spPr>
-          <a:xfrm xmlns:a="http://schemas.openxmlformats.org/drawingml/2006/main">
-            <a:off x="733425" y="6457950"/>
-            <a:ext cx="6191250" cy="209550"/>
-          </a:xfrm>
-          <a:prstGeom xmlns:a="http://schemas.openxmlformats.org/drawingml/2006/main" prst="rect">
-            <a:avLst/>
-          </a:prstGeom>
-          <a:noFill xmlns:a="http://schemas.openxmlformats.org/drawingml/2006/main"/>
-          <a:ln xmlns:a="http://schemas.openxmlformats.org/drawingml/2006/main" w="0">
-            <a:noFill/>
-          </a:ln>
-        </p:spPr>
-        <p:txBody>
-          <a:bodyPr xmlns:a="http://schemas.openxmlformats.org/drawingml/2006/main" lIns="19050" tIns="19050" rIns="19050" bIns="19050" anchor="ctr">
-            <a:normAutofit fontScale="100000"/>
-          </a:bodyPr>
-          <a:lstStyle xmlns:a="http://schemas.openxmlformats.org/drawingml/2006/main"/>
-          <a:p xmlns:a="http://schemas.openxmlformats.org/drawingml/2006/main">
-            <a:pPr algn="l">
-              <a:lnSpc>
-                <a:spcPct val="105000"/>
-              </a:lnSpc>
-              <a:buNone/>
-              <a:defRPr sz="1050" b="0">
-                <a:solidFill>
-                  <a:srgbClr val="E5EDFF"/>
-                </a:solidFill>
-                <a:latin typeface="PingFang SC"/>
-                <a:ea typeface="PingFang SC"/>
-                <a:cs typeface="PingFang SC"/>
-              </a:defRPr>
-            </a:pPr>
-            <a:r>
-              <a:rPr sz="1050" b="0">
-                <a:solidFill>
-                  <a:srgbClr val="E5EDFF"/>
-                </a:solidFill>
-                <a:latin typeface="PingFang SC"/>
-                <a:ea typeface="PingFang SC"/>
-                <a:cs typeface="PingFang SC"/>
-              </a:rPr>
-              <a:t>广东工业大学 · 学术研究汇报</a:t>
-            </a:r>
-          </a:p>
-        </p:txBody>
-      </p:sp>
-      <p:sp>
-        <p:nvSpPr>
-          <p:cNvPr id="8" name="">
-            <a:extLst xmlns:a="http://schemas.openxmlformats.org/drawingml/2006/main">
-              <a:ext uri="{FF2B5EF4-FFF2-40B4-BE49-F238E27FC236}">
-                <a16:creationId xmlns:a16="http://schemas.microsoft.com/office/drawing/2014/main" id="{3C9C5EBD-54BB-4965-8F10-9A67DFB89B66}"/>
+                <a16:creationId xmlns:a16="http://schemas.microsoft.com/office/drawing/2014/main" id="{A9BBB785-EB78-435F-A69F-DCA0C03D414A}"/>
               </a:ext>
             </a:extLst>
           </p:cNvPr>
@@ -6702,10 +6458,10 @@
       </p:sp>
       <p:sp>
         <p:nvSpPr>
-          <p:cNvPr id="9" name="">
-            <a:extLst xmlns:a="http://schemas.openxmlformats.org/drawingml/2006/main">
-              <a:ext uri="{FF2B5EF4-FFF2-40B4-BE49-F238E27FC236}">
-                <a16:creationId xmlns:a16="http://schemas.microsoft.com/office/drawing/2014/main" id="{5681252A-D5F9-4AA4-A789-B14807AE677A}"/>
+          <p:cNvPr id="8" name="">
+            <a:extLst xmlns:a="http://schemas.openxmlformats.org/drawingml/2006/main">
+              <a:ext uri="{FF2B5EF4-FFF2-40B4-BE49-F238E27FC236}">
+                <a16:creationId xmlns:a16="http://schemas.microsoft.com/office/drawing/2014/main" id="{6488BE76-D5F6-43C3-BD48-9B94258C35E0}"/>
               </a:ext>
             </a:extLst>
           </p:cNvPr>
@@ -6795,10 +6551,10 @@
       </p:sp>
       <p:sp>
         <p:nvSpPr>
-          <p:cNvPr id="10" name="">
-            <a:extLst xmlns:a="http://schemas.openxmlformats.org/drawingml/2006/main">
-              <a:ext uri="{FF2B5EF4-FFF2-40B4-BE49-F238E27FC236}">
-                <a16:creationId xmlns:a16="http://schemas.microsoft.com/office/drawing/2014/main" id="{FDE937F6-D48B-473C-9621-F3DC38853A01}"/>
+          <p:cNvPr id="9" name="">
+            <a:extLst xmlns:a="http://schemas.openxmlformats.org/drawingml/2006/main">
+              <a:ext uri="{FF2B5EF4-FFF2-40B4-BE49-F238E27FC236}">
+                <a16:creationId xmlns:a16="http://schemas.microsoft.com/office/drawing/2014/main" id="{2781D812-8C86-43D4-ADBF-BEE654E9F2D1}"/>
               </a:ext>
             </a:extLst>
           </p:cNvPr>
@@ -6888,10 +6644,10 @@
       </p:sp>
       <p:sp>
         <p:nvSpPr>
-          <p:cNvPr id="11" name="">
-            <a:extLst xmlns:a="http://schemas.openxmlformats.org/drawingml/2006/main">
-              <a:ext uri="{FF2B5EF4-FFF2-40B4-BE49-F238E27FC236}">
-                <a16:creationId xmlns:a16="http://schemas.microsoft.com/office/drawing/2014/main" id="{4F99EB7E-A57D-44DC-A742-C702A55ED8E0}"/>
+          <p:cNvPr id="10" name="">
+            <a:extLst xmlns:a="http://schemas.openxmlformats.org/drawingml/2006/main">
+              <a:ext uri="{FF2B5EF4-FFF2-40B4-BE49-F238E27FC236}">
+                <a16:creationId xmlns:a16="http://schemas.microsoft.com/office/drawing/2014/main" id="{A69B1991-791C-4C5A-A47F-22307E0FB1AA}"/>
               </a:ext>
             </a:extLst>
           </p:cNvPr>
@@ -6981,10 +6737,10 @@
       </p:sp>
       <p:sp>
         <p:nvSpPr>
-          <p:cNvPr id="12" name="">
-            <a:extLst xmlns:a="http://schemas.openxmlformats.org/drawingml/2006/main">
-              <a:ext uri="{FF2B5EF4-FFF2-40B4-BE49-F238E27FC236}">
-                <a16:creationId xmlns:a16="http://schemas.microsoft.com/office/drawing/2014/main" id="{99B14686-3FA2-4B16-9EA5-C36F8656E162}"/>
+          <p:cNvPr id="11" name="">
+            <a:extLst xmlns:a="http://schemas.openxmlformats.org/drawingml/2006/main">
+              <a:ext uri="{FF2B5EF4-FFF2-40B4-BE49-F238E27FC236}">
+                <a16:creationId xmlns:a16="http://schemas.microsoft.com/office/drawing/2014/main" id="{2F56319A-602F-4DB2-BB04-9E7E696E062C}"/>
               </a:ext>
             </a:extLst>
           </p:cNvPr>
@@ -7042,10 +6798,10 @@
       </p:sp>
       <p:sp>
         <p:nvSpPr>
-          <p:cNvPr id="13" name="">
-            <a:extLst xmlns:a="http://schemas.openxmlformats.org/drawingml/2006/main">
-              <a:ext uri="{FF2B5EF4-FFF2-40B4-BE49-F238E27FC236}">
-                <a16:creationId xmlns:a16="http://schemas.microsoft.com/office/drawing/2014/main" id="{ACDDF0AD-02CC-4172-B16D-7D4C76D282BC}"/>
+          <p:cNvPr id="12" name="">
+            <a:extLst xmlns:a="http://schemas.openxmlformats.org/drawingml/2006/main">
+              <a:ext uri="{FF2B5EF4-FFF2-40B4-BE49-F238E27FC236}">
+                <a16:creationId xmlns:a16="http://schemas.microsoft.com/office/drawing/2014/main" id="{ACA90000-C8D5-4B91-A171-6706887A515E}"/>
               </a:ext>
             </a:extLst>
           </p:cNvPr>
@@ -7104,7 +6860,7 @@
     </p:spTree>
     <p:extLst>
       <p:ext uri="{BB962C8B-B14F-4D97-AF65-F5344CB8AC3E}">
-        <p14:creationId xmlns:p14="http://schemas.microsoft.com/office/powerpoint/2010/main" val="1970374124"/>
+        <p14:creationId xmlns:p14="http://schemas.microsoft.com/office/powerpoint/2010/main" val="1550465846"/>
       </p:ext>
     </p:extLst>
   </p:cSld>
@@ -7132,10 +6888,10 @@
       </p:grpSpPr>
       <p:cxnSp>
         <p:nvCxnSpPr>
-          <p:cNvPr id="26" name=""/>
+          <p:cNvPr id="25" name=""/>
           <p:cNvCxnSpPr>
-            <a:stCxn xmlns:a="http://schemas.openxmlformats.org/drawingml/2006/main" id="18" idx="2"/>
-            <a:endCxn xmlns:a="http://schemas.openxmlformats.org/drawingml/2006/main" id="19" idx="0"/>
+            <a:stCxn xmlns:a="http://schemas.openxmlformats.org/drawingml/2006/main" id="17" idx="2"/>
+            <a:endCxn xmlns:a="http://schemas.openxmlformats.org/drawingml/2006/main" id="18" idx="0"/>
           </p:cNvCxnSpPr>
           <p:nvPr/>
         </p:nvCxnSpPr>
@@ -7158,10 +6914,10 @@
       </p:cxnSp>
       <p:cxnSp>
         <p:nvCxnSpPr>
-          <p:cNvPr id="27" name=""/>
+          <p:cNvPr id="26" name=""/>
           <p:cNvCxnSpPr>
-            <a:stCxn xmlns:a="http://schemas.openxmlformats.org/drawingml/2006/main" id="17" idx="3"/>
-            <a:endCxn xmlns:a="http://schemas.openxmlformats.org/drawingml/2006/main" id="18" idx="1"/>
+            <a:stCxn xmlns:a="http://schemas.openxmlformats.org/drawingml/2006/main" id="16" idx="3"/>
+            <a:endCxn xmlns:a="http://schemas.openxmlformats.org/drawingml/2006/main" id="17" idx="1"/>
           </p:cNvCxnSpPr>
           <p:nvPr/>
         </p:nvCxnSpPr>
@@ -7186,10 +6942,10 @@
       </p:cxnSp>
       <p:cxnSp>
         <p:nvCxnSpPr>
-          <p:cNvPr id="28" name=""/>
+          <p:cNvPr id="27" name=""/>
           <p:cNvCxnSpPr>
-            <a:stCxn xmlns:a="http://schemas.openxmlformats.org/drawingml/2006/main" id="16" idx="2"/>
-            <a:endCxn xmlns:a="http://schemas.openxmlformats.org/drawingml/2006/main" id="17" idx="0"/>
+            <a:stCxn xmlns:a="http://schemas.openxmlformats.org/drawingml/2006/main" id="15" idx="2"/>
+            <a:endCxn xmlns:a="http://schemas.openxmlformats.org/drawingml/2006/main" id="16" idx="0"/>
           </p:cNvCxnSpPr>
           <p:nvPr/>
         </p:nvCxnSpPr>
@@ -7212,10 +6968,10 @@
       </p:cxnSp>
       <p:cxnSp>
         <p:nvCxnSpPr>
-          <p:cNvPr id="29" name=""/>
+          <p:cNvPr id="28" name=""/>
           <p:cNvCxnSpPr>
-            <a:stCxn xmlns:a="http://schemas.openxmlformats.org/drawingml/2006/main" id="12" idx="3"/>
-            <a:endCxn xmlns:a="http://schemas.openxmlformats.org/drawingml/2006/main" id="16" idx="1"/>
+            <a:stCxn xmlns:a="http://schemas.openxmlformats.org/drawingml/2006/main" id="11" idx="3"/>
+            <a:endCxn xmlns:a="http://schemas.openxmlformats.org/drawingml/2006/main" id="15" idx="1"/>
           </p:cNvCxnSpPr>
           <p:nvPr/>
         </p:nvCxnSpPr>
@@ -7240,10 +6996,10 @@
       </p:cxnSp>
       <p:cxnSp>
         <p:nvCxnSpPr>
-          <p:cNvPr id="30" name=""/>
+          <p:cNvPr id="29" name=""/>
           <p:cNvCxnSpPr>
-            <a:stCxn xmlns:a="http://schemas.openxmlformats.org/drawingml/2006/main" id="11" idx="3"/>
-            <a:endCxn xmlns:a="http://schemas.openxmlformats.org/drawingml/2006/main" id="12" idx="1"/>
+            <a:stCxn xmlns:a="http://schemas.openxmlformats.org/drawingml/2006/main" id="10" idx="3"/>
+            <a:endCxn xmlns:a="http://schemas.openxmlformats.org/drawingml/2006/main" id="11" idx="1"/>
           </p:cNvCxnSpPr>
           <p:nvPr/>
         </p:nvCxnSpPr>
@@ -7268,10 +7024,10 @@
       </p:cxnSp>
       <p:cxnSp>
         <p:nvCxnSpPr>
-          <p:cNvPr id="31" name=""/>
+          <p:cNvPr id="30" name=""/>
           <p:cNvCxnSpPr>
-            <a:stCxn xmlns:a="http://schemas.openxmlformats.org/drawingml/2006/main" id="10" idx="3"/>
-            <a:endCxn xmlns:a="http://schemas.openxmlformats.org/drawingml/2006/main" id="12" idx="1"/>
+            <a:stCxn xmlns:a="http://schemas.openxmlformats.org/drawingml/2006/main" id="9" idx="3"/>
+            <a:endCxn xmlns:a="http://schemas.openxmlformats.org/drawingml/2006/main" id="11" idx="1"/>
           </p:cNvCxnSpPr>
           <p:nvPr/>
         </p:nvCxnSpPr>
@@ -7296,10 +7052,10 @@
       </p:cxnSp>
       <p:cxnSp>
         <p:nvCxnSpPr>
-          <p:cNvPr id="32" name=""/>
+          <p:cNvPr id="31" name=""/>
           <p:cNvCxnSpPr>
-            <a:stCxn xmlns:a="http://schemas.openxmlformats.org/drawingml/2006/main" id="9" idx="3"/>
-            <a:endCxn xmlns:a="http://schemas.openxmlformats.org/drawingml/2006/main" id="12" idx="1"/>
+            <a:stCxn xmlns:a="http://schemas.openxmlformats.org/drawingml/2006/main" id="8" idx="3"/>
+            <a:endCxn xmlns:a="http://schemas.openxmlformats.org/drawingml/2006/main" id="11" idx="1"/>
           </p:cNvCxnSpPr>
           <p:nvPr/>
         </p:nvCxnSpPr>
@@ -7324,10 +7080,10 @@
       </p:cxnSp>
       <p:sp>
         <p:nvSpPr>
-          <p:cNvPr id="33" name="">
-            <a:extLst xmlns:a="http://schemas.openxmlformats.org/drawingml/2006/main">
-              <a:ext uri="{FF2B5EF4-FFF2-40B4-BE49-F238E27FC236}">
-                <a16:creationId xmlns:a16="http://schemas.microsoft.com/office/drawing/2014/main" id="{0E0B68BB-61B0-4C3B-9A77-F465033FBD0A}"/>
+          <p:cNvPr id="32" name="">
+            <a:extLst xmlns:a="http://schemas.openxmlformats.org/drawingml/2006/main">
+              <a:ext uri="{FF2B5EF4-FFF2-40B4-BE49-F238E27FC236}">
+                <a16:creationId xmlns:a16="http://schemas.microsoft.com/office/drawing/2014/main" id="{335D0DBC-2836-4E05-85C7-880167519274}"/>
               </a:ext>
             </a:extLst>
           </p:cNvPr>
@@ -7360,7 +7116,7 @@
           <p:cNvPr id="2" name="">
             <a:extLst xmlns:a="http://schemas.openxmlformats.org/drawingml/2006/main">
               <a:ext uri="{FF2B5EF4-FFF2-40B4-BE49-F238E27FC236}">
-                <a16:creationId xmlns:a16="http://schemas.microsoft.com/office/drawing/2014/main" id="{90D623DD-1BCA-44EF-9AA7-FDB7E084DB98}"/>
+                <a16:creationId xmlns:a16="http://schemas.microsoft.com/office/drawing/2014/main" id="{E3C817A7-1E91-4D2A-9680-91F34BC00FD9}"/>
               </a:ext>
             </a:extLst>
           </p:cNvPr>
@@ -7390,14 +7146,14 @@
       </p:sp>
       <p:pic>
         <p:nvPicPr>
-          <p:cNvPr id="35" name=""/>
+          <p:cNvPr id="34" name=""/>
           <p:cNvPicPr>
             <a:picLocks xmlns:a="http://schemas.openxmlformats.org/drawingml/2006/main" noChangeAspect="1"/>
           </p:cNvPicPr>
           <p:nvPr/>
         </p:nvPicPr>
         <p:blipFill>
-          <a:blip xmlns:r="http://schemas.openxmlformats.org/officeDocument/2006/relationships" xmlns:a="http://schemas.openxmlformats.org/drawingml/2006/main" r:embed="Radd03e1f9fdc4fcb"/>
+          <a:blip xmlns:r="http://schemas.openxmlformats.org/officeDocument/2006/relationships" xmlns:a="http://schemas.openxmlformats.org/drawingml/2006/main" r:embed="Ra5afb9972dc44d8f"/>
           <a:stretch xmlns:a="http://schemas.openxmlformats.org/drawingml/2006/main"/>
         </p:blipFill>
         <p:spPr>
@@ -7415,7 +7171,7 @@
           <p:cNvPr id="4" name="">
             <a:extLst xmlns:a="http://schemas.openxmlformats.org/drawingml/2006/main">
               <a:ext uri="{FF2B5EF4-FFF2-40B4-BE49-F238E27FC236}">
-                <a16:creationId xmlns:a16="http://schemas.microsoft.com/office/drawing/2014/main" id="{AC860D5A-201F-4A90-BC89-07900C731A93}"/>
+                <a16:creationId xmlns:a16="http://schemas.microsoft.com/office/drawing/2014/main" id="{5C9B7645-FF14-42D7-B189-814FAE08F593}"/>
               </a:ext>
             </a:extLst>
           </p:cNvPr>
@@ -7476,7 +7232,7 @@
           <p:cNvPr id="5" name="">
             <a:extLst xmlns:a="http://schemas.openxmlformats.org/drawingml/2006/main">
               <a:ext uri="{FF2B5EF4-FFF2-40B4-BE49-F238E27FC236}">
-                <a16:creationId xmlns:a16="http://schemas.microsoft.com/office/drawing/2014/main" id="{062CD3AB-0865-4E49-827E-37C37DCBFAD5}"/>
+                <a16:creationId xmlns:a16="http://schemas.microsoft.com/office/drawing/2014/main" id="{A4B8DE54-B0F2-49C6-BC5E-BC6B76D4D081}"/>
               </a:ext>
             </a:extLst>
           </p:cNvPr>
@@ -7537,7 +7293,7 @@
           <p:cNvPr id="6" name="">
             <a:extLst xmlns:a="http://schemas.openxmlformats.org/drawingml/2006/main">
               <a:ext uri="{FF2B5EF4-FFF2-40B4-BE49-F238E27FC236}">
-                <a16:creationId xmlns:a16="http://schemas.microsoft.com/office/drawing/2014/main" id="{C55A7CCB-25DB-4398-93B1-09A07C9A8156}"/>
+                <a16:creationId xmlns:a16="http://schemas.microsoft.com/office/drawing/2014/main" id="{0809D501-7893-4568-930D-48A55B6C91DA}"/>
               </a:ext>
             </a:extLst>
           </p:cNvPr>
@@ -7570,68 +7326,7 @@
           <p:cNvPr id="7" name="">
             <a:extLst xmlns:a="http://schemas.openxmlformats.org/drawingml/2006/main">
               <a:ext uri="{FF2B5EF4-FFF2-40B4-BE49-F238E27FC236}">
-                <a16:creationId xmlns:a16="http://schemas.microsoft.com/office/drawing/2014/main" id="{62A25D43-BCDE-42F9-B8DC-407AD3F58358}"/>
-              </a:ext>
-            </a:extLst>
-          </p:cNvPr>
-          <p:cNvSpPr>
-            <a:spLocks xmlns:a="http://schemas.openxmlformats.org/drawingml/2006/main" noGrp="1"/>
-          </p:cNvSpPr>
-          <p:nvPr/>
-        </p:nvSpPr>
-        <p:spPr>
-          <a:xfrm xmlns:a="http://schemas.openxmlformats.org/drawingml/2006/main">
-            <a:off x="733425" y="6457950"/>
-            <a:ext cx="6191250" cy="209550"/>
-          </a:xfrm>
-          <a:prstGeom xmlns:a="http://schemas.openxmlformats.org/drawingml/2006/main" prst="rect">
-            <a:avLst/>
-          </a:prstGeom>
-          <a:noFill xmlns:a="http://schemas.openxmlformats.org/drawingml/2006/main"/>
-          <a:ln xmlns:a="http://schemas.openxmlformats.org/drawingml/2006/main" w="0">
-            <a:noFill/>
-          </a:ln>
-        </p:spPr>
-        <p:txBody>
-          <a:bodyPr xmlns:a="http://schemas.openxmlformats.org/drawingml/2006/main" lIns="19050" tIns="19050" rIns="19050" bIns="19050" anchor="ctr">
-            <a:normAutofit fontScale="100000"/>
-          </a:bodyPr>
-          <a:lstStyle xmlns:a="http://schemas.openxmlformats.org/drawingml/2006/main"/>
-          <a:p xmlns:a="http://schemas.openxmlformats.org/drawingml/2006/main">
-            <a:pPr algn="l">
-              <a:lnSpc>
-                <a:spcPct val="105000"/>
-              </a:lnSpc>
-              <a:buNone/>
-              <a:defRPr sz="1050" b="0">
-                <a:solidFill>
-                  <a:srgbClr val="E5EDFF"/>
-                </a:solidFill>
-                <a:latin typeface="PingFang SC"/>
-                <a:ea typeface="PingFang SC"/>
-                <a:cs typeface="PingFang SC"/>
-              </a:defRPr>
-            </a:pPr>
-            <a:r>
-              <a:rPr sz="1050" b="0">
-                <a:solidFill>
-                  <a:srgbClr val="E5EDFF"/>
-                </a:solidFill>
-                <a:latin typeface="PingFang SC"/>
-                <a:ea typeface="PingFang SC"/>
-                <a:cs typeface="PingFang SC"/>
-              </a:rPr>
-              <a:t>广东工业大学 · 学术研究汇报</a:t>
-            </a:r>
-          </a:p>
-        </p:txBody>
-      </p:sp>
-      <p:sp>
-        <p:nvSpPr>
-          <p:cNvPr id="8" name="">
-            <a:extLst xmlns:a="http://schemas.openxmlformats.org/drawingml/2006/main">
-              <a:ext uri="{FF2B5EF4-FFF2-40B4-BE49-F238E27FC236}">
-                <a16:creationId xmlns:a16="http://schemas.microsoft.com/office/drawing/2014/main" id="{F0AFFA2B-0704-40CE-845F-8183D3195F65}"/>
+                <a16:creationId xmlns:a16="http://schemas.microsoft.com/office/drawing/2014/main" id="{E6F0F3DC-E199-4639-8A8E-8C263331AF56}"/>
               </a:ext>
             </a:extLst>
           </p:cNvPr>
@@ -7689,10 +7384,10 @@
       </p:sp>
       <p:sp>
         <p:nvSpPr>
-          <p:cNvPr id="9" name="">
-            <a:extLst xmlns:a="http://schemas.openxmlformats.org/drawingml/2006/main">
-              <a:ext uri="{FF2B5EF4-FFF2-40B4-BE49-F238E27FC236}">
-                <a16:creationId xmlns:a16="http://schemas.microsoft.com/office/drawing/2014/main" id="{EF620F78-BC10-4E46-B8C2-1808AB307BD7}"/>
+          <p:cNvPr id="8" name="">
+            <a:extLst xmlns:a="http://schemas.openxmlformats.org/drawingml/2006/main">
+              <a:ext uri="{FF2B5EF4-FFF2-40B4-BE49-F238E27FC236}">
+                <a16:creationId xmlns:a16="http://schemas.microsoft.com/office/drawing/2014/main" id="{66B67B0C-ADE6-4CCA-B3AF-FF9F5E2AB0E0}"/>
               </a:ext>
             </a:extLst>
           </p:cNvPr>
@@ -7755,10 +7450,10 @@
       </p:sp>
       <p:sp>
         <p:nvSpPr>
-          <p:cNvPr id="10" name="">
-            <a:extLst xmlns:a="http://schemas.openxmlformats.org/drawingml/2006/main">
-              <a:ext uri="{FF2B5EF4-FFF2-40B4-BE49-F238E27FC236}">
-                <a16:creationId xmlns:a16="http://schemas.microsoft.com/office/drawing/2014/main" id="{E7BD4727-2C7D-46B3-9D46-32920DB2D16C}"/>
+          <p:cNvPr id="9" name="">
+            <a:extLst xmlns:a="http://schemas.openxmlformats.org/drawingml/2006/main">
+              <a:ext uri="{FF2B5EF4-FFF2-40B4-BE49-F238E27FC236}">
+                <a16:creationId xmlns:a16="http://schemas.microsoft.com/office/drawing/2014/main" id="{F454BD10-45DF-4E81-826F-185EACBCCD65}"/>
               </a:ext>
             </a:extLst>
           </p:cNvPr>
@@ -7821,10 +7516,10 @@
       </p:sp>
       <p:sp>
         <p:nvSpPr>
-          <p:cNvPr id="11" name="">
-            <a:extLst xmlns:a="http://schemas.openxmlformats.org/drawingml/2006/main">
-              <a:ext uri="{FF2B5EF4-FFF2-40B4-BE49-F238E27FC236}">
-                <a16:creationId xmlns:a16="http://schemas.microsoft.com/office/drawing/2014/main" id="{A05F397E-2122-474A-A2FA-EE5DB8C50CAF}"/>
+          <p:cNvPr id="10" name="">
+            <a:extLst xmlns:a="http://schemas.openxmlformats.org/drawingml/2006/main">
+              <a:ext uri="{FF2B5EF4-FFF2-40B4-BE49-F238E27FC236}">
+                <a16:creationId xmlns:a16="http://schemas.microsoft.com/office/drawing/2014/main" id="{B0188CCE-5C98-49D4-A2F5-2EFE14796A58}"/>
               </a:ext>
             </a:extLst>
           </p:cNvPr>
@@ -7887,10 +7582,10 @@
       </p:sp>
       <p:sp>
         <p:nvSpPr>
-          <p:cNvPr id="12" name="">
-            <a:extLst xmlns:a="http://schemas.openxmlformats.org/drawingml/2006/main">
-              <a:ext uri="{FF2B5EF4-FFF2-40B4-BE49-F238E27FC236}">
-                <a16:creationId xmlns:a16="http://schemas.microsoft.com/office/drawing/2014/main" id="{5D61053E-0616-4266-8FA9-F5AF2671B594}"/>
+          <p:cNvPr id="11" name="">
+            <a:extLst xmlns:a="http://schemas.openxmlformats.org/drawingml/2006/main">
+              <a:ext uri="{FF2B5EF4-FFF2-40B4-BE49-F238E27FC236}">
+                <a16:creationId xmlns:a16="http://schemas.microsoft.com/office/drawing/2014/main" id="{A8755F23-D4B0-4653-BF7E-903F5D53FFF9}"/>
               </a:ext>
             </a:extLst>
           </p:cNvPr>
@@ -7980,10 +7675,10 @@
       </p:sp>
       <p:sp>
         <p:nvSpPr>
-          <p:cNvPr id="16" name="">
-            <a:extLst xmlns:a="http://schemas.openxmlformats.org/drawingml/2006/main">
-              <a:ext uri="{FF2B5EF4-FFF2-40B4-BE49-F238E27FC236}">
-                <a16:creationId xmlns:a16="http://schemas.microsoft.com/office/drawing/2014/main" id="{23AEB0AC-2BA3-42AD-9062-A91485A81C54}"/>
+          <p:cNvPr id="15" name="">
+            <a:extLst xmlns:a="http://schemas.openxmlformats.org/drawingml/2006/main">
+              <a:ext uri="{FF2B5EF4-FFF2-40B4-BE49-F238E27FC236}">
+                <a16:creationId xmlns:a16="http://schemas.microsoft.com/office/drawing/2014/main" id="{DD5BD948-7A19-4F1F-8F0F-1AF3924AFC87}"/>
               </a:ext>
             </a:extLst>
           </p:cNvPr>
@@ -8073,10 +7768,10 @@
       </p:sp>
       <p:sp>
         <p:nvSpPr>
-          <p:cNvPr id="17" name="">
-            <a:extLst xmlns:a="http://schemas.openxmlformats.org/drawingml/2006/main">
-              <a:ext uri="{FF2B5EF4-FFF2-40B4-BE49-F238E27FC236}">
-                <a16:creationId xmlns:a16="http://schemas.microsoft.com/office/drawing/2014/main" id="{DA18560F-858C-4113-A8D2-FC50BA23C7A9}"/>
+          <p:cNvPr id="16" name="">
+            <a:extLst xmlns:a="http://schemas.openxmlformats.org/drawingml/2006/main">
+              <a:ext uri="{FF2B5EF4-FFF2-40B4-BE49-F238E27FC236}">
+                <a16:creationId xmlns:a16="http://schemas.microsoft.com/office/drawing/2014/main" id="{D9CE2A2D-3DE7-4DB8-942A-AE2DDD9E8461}"/>
               </a:ext>
             </a:extLst>
           </p:cNvPr>
@@ -8166,10 +7861,10 @@
       </p:sp>
       <p:sp>
         <p:nvSpPr>
-          <p:cNvPr id="18" name="">
-            <a:extLst xmlns:a="http://schemas.openxmlformats.org/drawingml/2006/main">
-              <a:ext uri="{FF2B5EF4-FFF2-40B4-BE49-F238E27FC236}">
-                <a16:creationId xmlns:a16="http://schemas.microsoft.com/office/drawing/2014/main" id="{6360CDCC-8A59-4E3B-BBAC-1ED5006731D7}"/>
+          <p:cNvPr id="17" name="">
+            <a:extLst xmlns:a="http://schemas.openxmlformats.org/drawingml/2006/main">
+              <a:ext uri="{FF2B5EF4-FFF2-40B4-BE49-F238E27FC236}">
+                <a16:creationId xmlns:a16="http://schemas.microsoft.com/office/drawing/2014/main" id="{D1EC236A-2219-4948-BAF1-4FEC569E4941}"/>
               </a:ext>
             </a:extLst>
           </p:cNvPr>
@@ -8259,10 +7954,10 @@
       </p:sp>
       <p:sp>
         <p:nvSpPr>
-          <p:cNvPr id="19" name="">
-            <a:extLst xmlns:a="http://schemas.openxmlformats.org/drawingml/2006/main">
-              <a:ext uri="{FF2B5EF4-FFF2-40B4-BE49-F238E27FC236}">
-                <a16:creationId xmlns:a16="http://schemas.microsoft.com/office/drawing/2014/main" id="{5A85350E-7F87-4B90-AA16-822D1A7D6FFF}"/>
+          <p:cNvPr id="18" name="">
+            <a:extLst xmlns:a="http://schemas.openxmlformats.org/drawingml/2006/main">
+              <a:ext uri="{FF2B5EF4-FFF2-40B4-BE49-F238E27FC236}">
+                <a16:creationId xmlns:a16="http://schemas.microsoft.com/office/drawing/2014/main" id="{68AA09DA-7608-4CEA-8081-CB4B5FC548B8}"/>
               </a:ext>
             </a:extLst>
           </p:cNvPr>
@@ -8352,10 +8047,10 @@
       </p:sp>
       <p:sp>
         <p:nvSpPr>
-          <p:cNvPr id="24" name="">
-            <a:extLst xmlns:a="http://schemas.openxmlformats.org/drawingml/2006/main">
-              <a:ext uri="{FF2B5EF4-FFF2-40B4-BE49-F238E27FC236}">
-                <a16:creationId xmlns:a16="http://schemas.microsoft.com/office/drawing/2014/main" id="{FB6DB03F-442D-4894-B042-4E3F341FBDAF}"/>
+          <p:cNvPr id="23" name="">
+            <a:extLst xmlns:a="http://schemas.openxmlformats.org/drawingml/2006/main">
+              <a:ext uri="{FF2B5EF4-FFF2-40B4-BE49-F238E27FC236}">
+                <a16:creationId xmlns:a16="http://schemas.microsoft.com/office/drawing/2014/main" id="{86BAF96E-338C-4EC8-BF7E-D643E2EBD81C}"/>
               </a:ext>
             </a:extLst>
           </p:cNvPr>
@@ -8413,10 +8108,10 @@
       </p:sp>
       <p:sp>
         <p:nvSpPr>
-          <p:cNvPr id="25" name="">
-            <a:extLst xmlns:a="http://schemas.openxmlformats.org/drawingml/2006/main">
-              <a:ext uri="{FF2B5EF4-FFF2-40B4-BE49-F238E27FC236}">
-                <a16:creationId xmlns:a16="http://schemas.microsoft.com/office/drawing/2014/main" id="{1C22AD6A-09CA-4709-883F-0829CC9F977C}"/>
+          <p:cNvPr id="24" name="">
+            <a:extLst xmlns:a="http://schemas.openxmlformats.org/drawingml/2006/main">
+              <a:ext uri="{FF2B5EF4-FFF2-40B4-BE49-F238E27FC236}">
+                <a16:creationId xmlns:a16="http://schemas.microsoft.com/office/drawing/2014/main" id="{92A8C530-098F-4CBB-96C4-27AA4C5FDF1A}"/>
               </a:ext>
             </a:extLst>
           </p:cNvPr>
@@ -8475,7 +8170,7 @@
     </p:spTree>
     <p:extLst>
       <p:ext uri="{BB962C8B-B14F-4D97-AF65-F5344CB8AC3E}">
-        <p14:creationId xmlns:p14="http://schemas.microsoft.com/office/powerpoint/2010/main" val="1798632093"/>
+        <p14:creationId xmlns:p14="http://schemas.microsoft.com/office/powerpoint/2010/main" val="1910065532"/>
       </p:ext>
     </p:extLst>
   </p:cSld>
@@ -8503,10 +8198,10 @@
       </p:grpSpPr>
       <p:sp>
         <p:nvSpPr>
-          <p:cNvPr id="15" name="">
-            <a:extLst xmlns:a="http://schemas.openxmlformats.org/drawingml/2006/main">
-              <a:ext uri="{FF2B5EF4-FFF2-40B4-BE49-F238E27FC236}">
-                <a16:creationId xmlns:a16="http://schemas.microsoft.com/office/drawing/2014/main" id="{DC645FDD-7D86-4F50-953A-990949CA6F66}"/>
+          <p:cNvPr id="14" name="">
+            <a:extLst xmlns:a="http://schemas.openxmlformats.org/drawingml/2006/main">
+              <a:ext uri="{FF2B5EF4-FFF2-40B4-BE49-F238E27FC236}">
+                <a16:creationId xmlns:a16="http://schemas.microsoft.com/office/drawing/2014/main" id="{24022282-CAE8-420E-93F0-ED5FDD40DABF}"/>
               </a:ext>
             </a:extLst>
           </p:cNvPr>
@@ -8539,7 +8234,7 @@
           <p:cNvPr id="2" name="">
             <a:extLst xmlns:a="http://schemas.openxmlformats.org/drawingml/2006/main">
               <a:ext uri="{FF2B5EF4-FFF2-40B4-BE49-F238E27FC236}">
-                <a16:creationId xmlns:a16="http://schemas.microsoft.com/office/drawing/2014/main" id="{34DEEB10-D3B3-4722-85D3-3843983825B9}"/>
+                <a16:creationId xmlns:a16="http://schemas.microsoft.com/office/drawing/2014/main" id="{9A20DBA9-3D45-4765-800D-F5776DB9082E}"/>
               </a:ext>
             </a:extLst>
           </p:cNvPr>
@@ -8569,14 +8264,14 @@
       </p:sp>
       <p:pic>
         <p:nvPicPr>
-          <p:cNvPr id="17" name=""/>
+          <p:cNvPr id="16" name=""/>
           <p:cNvPicPr>
             <a:picLocks xmlns:a="http://schemas.openxmlformats.org/drawingml/2006/main" noChangeAspect="1"/>
           </p:cNvPicPr>
           <p:nvPr/>
         </p:nvPicPr>
         <p:blipFill>
-          <a:blip xmlns:r="http://schemas.openxmlformats.org/officeDocument/2006/relationships" xmlns:a="http://schemas.openxmlformats.org/drawingml/2006/main" r:embed="Rb41b11194d654581"/>
+          <a:blip xmlns:r="http://schemas.openxmlformats.org/officeDocument/2006/relationships" xmlns:a="http://schemas.openxmlformats.org/drawingml/2006/main" r:embed="R09a845d6853249fb"/>
           <a:stretch xmlns:a="http://schemas.openxmlformats.org/drawingml/2006/main"/>
         </p:blipFill>
         <p:spPr>
@@ -8594,7 +8289,7 @@
           <p:cNvPr id="4" name="">
             <a:extLst xmlns:a="http://schemas.openxmlformats.org/drawingml/2006/main">
               <a:ext uri="{FF2B5EF4-FFF2-40B4-BE49-F238E27FC236}">
-                <a16:creationId xmlns:a16="http://schemas.microsoft.com/office/drawing/2014/main" id="{108A0046-6670-42E0-B363-B0ECB2D02DBA}"/>
+                <a16:creationId xmlns:a16="http://schemas.microsoft.com/office/drawing/2014/main" id="{96404E49-5174-45D7-9B31-798661CB2633}"/>
               </a:ext>
             </a:extLst>
           </p:cNvPr>
@@ -8655,7 +8350,7 @@
           <p:cNvPr id="5" name="">
             <a:extLst xmlns:a="http://schemas.openxmlformats.org/drawingml/2006/main">
               <a:ext uri="{FF2B5EF4-FFF2-40B4-BE49-F238E27FC236}">
-                <a16:creationId xmlns:a16="http://schemas.microsoft.com/office/drawing/2014/main" id="{3587A1CD-BF10-4744-A6C2-1FC99DA024B7}"/>
+                <a16:creationId xmlns:a16="http://schemas.microsoft.com/office/drawing/2014/main" id="{6B3BAD2B-820E-4866-835A-E90DA44860CA}"/>
               </a:ext>
             </a:extLst>
           </p:cNvPr>
@@ -8716,7 +8411,7 @@
           <p:cNvPr id="6" name="">
             <a:extLst xmlns:a="http://schemas.openxmlformats.org/drawingml/2006/main">
               <a:ext uri="{FF2B5EF4-FFF2-40B4-BE49-F238E27FC236}">
-                <a16:creationId xmlns:a16="http://schemas.microsoft.com/office/drawing/2014/main" id="{5F1FB8EE-A734-4D5A-8084-31D1EC4F7DBE}"/>
+                <a16:creationId xmlns:a16="http://schemas.microsoft.com/office/drawing/2014/main" id="{CFA518F9-2D38-4C20-A378-0C2CB60AB742}"/>
               </a:ext>
             </a:extLst>
           </p:cNvPr>
@@ -8749,68 +8444,7 @@
           <p:cNvPr id="7" name="">
             <a:extLst xmlns:a="http://schemas.openxmlformats.org/drawingml/2006/main">
               <a:ext uri="{FF2B5EF4-FFF2-40B4-BE49-F238E27FC236}">
-                <a16:creationId xmlns:a16="http://schemas.microsoft.com/office/drawing/2014/main" id="{E9DB3CEE-0414-48A4-BD69-63917BDED801}"/>
-              </a:ext>
-            </a:extLst>
-          </p:cNvPr>
-          <p:cNvSpPr>
-            <a:spLocks xmlns:a="http://schemas.openxmlformats.org/drawingml/2006/main" noGrp="1"/>
-          </p:cNvSpPr>
-          <p:nvPr/>
-        </p:nvSpPr>
-        <p:spPr>
-          <a:xfrm xmlns:a="http://schemas.openxmlformats.org/drawingml/2006/main">
-            <a:off x="733425" y="6457950"/>
-            <a:ext cx="6191250" cy="209550"/>
-          </a:xfrm>
-          <a:prstGeom xmlns:a="http://schemas.openxmlformats.org/drawingml/2006/main" prst="rect">
-            <a:avLst/>
-          </a:prstGeom>
-          <a:noFill xmlns:a="http://schemas.openxmlformats.org/drawingml/2006/main"/>
-          <a:ln xmlns:a="http://schemas.openxmlformats.org/drawingml/2006/main" w="0">
-            <a:noFill/>
-          </a:ln>
-        </p:spPr>
-        <p:txBody>
-          <a:bodyPr xmlns:a="http://schemas.openxmlformats.org/drawingml/2006/main" lIns="19050" tIns="19050" rIns="19050" bIns="19050" anchor="ctr">
-            <a:normAutofit fontScale="100000"/>
-          </a:bodyPr>
-          <a:lstStyle xmlns:a="http://schemas.openxmlformats.org/drawingml/2006/main"/>
-          <a:p xmlns:a="http://schemas.openxmlformats.org/drawingml/2006/main">
-            <a:pPr algn="l">
-              <a:lnSpc>
-                <a:spcPct val="105000"/>
-              </a:lnSpc>
-              <a:buNone/>
-              <a:defRPr sz="1050" b="0">
-                <a:solidFill>
-                  <a:srgbClr val="E5EDFF"/>
-                </a:solidFill>
-                <a:latin typeface="PingFang SC"/>
-                <a:ea typeface="PingFang SC"/>
-                <a:cs typeface="PingFang SC"/>
-              </a:defRPr>
-            </a:pPr>
-            <a:r>
-              <a:rPr sz="1050" b="0">
-                <a:solidFill>
-                  <a:srgbClr val="E5EDFF"/>
-                </a:solidFill>
-                <a:latin typeface="PingFang SC"/>
-                <a:ea typeface="PingFang SC"/>
-                <a:cs typeface="PingFang SC"/>
-              </a:rPr>
-              <a:t>广东工业大学 · 学术研究汇报</a:t>
-            </a:r>
-          </a:p>
-        </p:txBody>
-      </p:sp>
-      <p:sp>
-        <p:nvSpPr>
-          <p:cNvPr id="8" name="">
-            <a:extLst xmlns:a="http://schemas.openxmlformats.org/drawingml/2006/main">
-              <a:ext uri="{FF2B5EF4-FFF2-40B4-BE49-F238E27FC236}">
-                <a16:creationId xmlns:a16="http://schemas.microsoft.com/office/drawing/2014/main" id="{3FB5F2BA-6FF4-4771-88E5-A50806F277B0}"/>
+                <a16:creationId xmlns:a16="http://schemas.microsoft.com/office/drawing/2014/main" id="{48A34099-E74E-47D4-8DC8-94D4C1A75489}"/>
               </a:ext>
             </a:extLst>
           </p:cNvPr>
@@ -8868,10 +8502,10 @@
       </p:sp>
       <p:sp>
         <p:nvSpPr>
-          <p:cNvPr id="9" name="">
-            <a:extLst xmlns:a="http://schemas.openxmlformats.org/drawingml/2006/main">
-              <a:ext uri="{FF2B5EF4-FFF2-40B4-BE49-F238E27FC236}">
-                <a16:creationId xmlns:a16="http://schemas.microsoft.com/office/drawing/2014/main" id="{5E3766D0-E41B-4A9C-BE94-A7D012705AB1}"/>
+          <p:cNvPr id="8" name="">
+            <a:extLst xmlns:a="http://schemas.openxmlformats.org/drawingml/2006/main">
+              <a:ext uri="{FF2B5EF4-FFF2-40B4-BE49-F238E27FC236}">
+                <a16:creationId xmlns:a16="http://schemas.microsoft.com/office/drawing/2014/main" id="{43D119D8-F62E-4548-917E-1FA7BA01A397}"/>
               </a:ext>
             </a:extLst>
           </p:cNvPr>
@@ -8961,10 +8595,10 @@
       </p:sp>
       <p:sp>
         <p:nvSpPr>
-          <p:cNvPr id="10" name="">
-            <a:extLst xmlns:a="http://schemas.openxmlformats.org/drawingml/2006/main">
-              <a:ext uri="{FF2B5EF4-FFF2-40B4-BE49-F238E27FC236}">
-                <a16:creationId xmlns:a16="http://schemas.microsoft.com/office/drawing/2014/main" id="{BEF1E151-3951-44ED-B3D1-435C58D1071F}"/>
+          <p:cNvPr id="9" name="">
+            <a:extLst xmlns:a="http://schemas.openxmlformats.org/drawingml/2006/main">
+              <a:ext uri="{FF2B5EF4-FFF2-40B4-BE49-F238E27FC236}">
+                <a16:creationId xmlns:a16="http://schemas.microsoft.com/office/drawing/2014/main" id="{008C42BD-3666-4EE8-9180-F3CD924488F1}"/>
               </a:ext>
             </a:extLst>
           </p:cNvPr>
@@ -9054,10 +8688,10 @@
       </p:sp>
       <p:sp>
         <p:nvSpPr>
-          <p:cNvPr id="11" name="">
-            <a:extLst xmlns:a="http://schemas.openxmlformats.org/drawingml/2006/main">
-              <a:ext uri="{FF2B5EF4-FFF2-40B4-BE49-F238E27FC236}">
-                <a16:creationId xmlns:a16="http://schemas.microsoft.com/office/drawing/2014/main" id="{B2BEEF98-90E2-4A76-A569-3B847A1BD240}"/>
+          <p:cNvPr id="10" name="">
+            <a:extLst xmlns:a="http://schemas.openxmlformats.org/drawingml/2006/main">
+              <a:ext uri="{FF2B5EF4-FFF2-40B4-BE49-F238E27FC236}">
+                <a16:creationId xmlns:a16="http://schemas.microsoft.com/office/drawing/2014/main" id="{D9B2FA9F-1C8C-47C7-BFE3-A5BF7C694E40}"/>
               </a:ext>
             </a:extLst>
           </p:cNvPr>
@@ -9147,10 +8781,10 @@
       </p:sp>
       <p:sp>
         <p:nvSpPr>
-          <p:cNvPr id="12" name="">
-            <a:extLst xmlns:a="http://schemas.openxmlformats.org/drawingml/2006/main">
-              <a:ext uri="{FF2B5EF4-FFF2-40B4-BE49-F238E27FC236}">
-                <a16:creationId xmlns:a16="http://schemas.microsoft.com/office/drawing/2014/main" id="{29449B34-DCDC-484C-97BA-5B82F1939D99}"/>
+          <p:cNvPr id="11" name="">
+            <a:extLst xmlns:a="http://schemas.openxmlformats.org/drawingml/2006/main">
+              <a:ext uri="{FF2B5EF4-FFF2-40B4-BE49-F238E27FC236}">
+                <a16:creationId xmlns:a16="http://schemas.microsoft.com/office/drawing/2014/main" id="{169740EC-CDEE-408F-8275-6B921B599038}"/>
               </a:ext>
             </a:extLst>
           </p:cNvPr>
@@ -9208,10 +8842,10 @@
       </p:sp>
       <p:sp>
         <p:nvSpPr>
-          <p:cNvPr id="13" name="">
-            <a:extLst xmlns:a="http://schemas.openxmlformats.org/drawingml/2006/main">
-              <a:ext uri="{FF2B5EF4-FFF2-40B4-BE49-F238E27FC236}">
-                <a16:creationId xmlns:a16="http://schemas.microsoft.com/office/drawing/2014/main" id="{272C40CA-A490-4FFD-B6E0-22F45FD83664}"/>
+          <p:cNvPr id="12" name="">
+            <a:extLst xmlns:a="http://schemas.openxmlformats.org/drawingml/2006/main">
+              <a:ext uri="{FF2B5EF4-FFF2-40B4-BE49-F238E27FC236}">
+                <a16:creationId xmlns:a16="http://schemas.microsoft.com/office/drawing/2014/main" id="{033FFA22-CD09-4B6A-A866-605D5A95BF46}"/>
               </a:ext>
             </a:extLst>
           </p:cNvPr>
@@ -9269,10 +8903,10 @@
       </p:sp>
       <p:sp>
         <p:nvSpPr>
-          <p:cNvPr id="14" name="">
-            <a:extLst xmlns:a="http://schemas.openxmlformats.org/drawingml/2006/main">
-              <a:ext uri="{FF2B5EF4-FFF2-40B4-BE49-F238E27FC236}">
-                <a16:creationId xmlns:a16="http://schemas.microsoft.com/office/drawing/2014/main" id="{817B72FA-1C31-4989-BDCD-30A5A2F7531F}"/>
+          <p:cNvPr id="13" name="">
+            <a:extLst xmlns:a="http://schemas.openxmlformats.org/drawingml/2006/main">
+              <a:ext uri="{FF2B5EF4-FFF2-40B4-BE49-F238E27FC236}">
+                <a16:creationId xmlns:a16="http://schemas.microsoft.com/office/drawing/2014/main" id="{AFFCF81A-22DF-4949-9220-CC3FC6C115C1}"/>
               </a:ext>
             </a:extLst>
           </p:cNvPr>
@@ -9331,7 +8965,7 @@
     </p:spTree>
     <p:extLst>
       <p:ext uri="{BB962C8B-B14F-4D97-AF65-F5344CB8AC3E}">
-        <p14:creationId xmlns:p14="http://schemas.microsoft.com/office/powerpoint/2010/main" val="1630721278"/>
+        <p14:creationId xmlns:p14="http://schemas.microsoft.com/office/powerpoint/2010/main" val="975305518"/>
       </p:ext>
     </p:extLst>
   </p:cSld>
@@ -9359,10 +8993,10 @@
       </p:grpSpPr>
       <p:sp>
         <p:nvSpPr>
-          <p:cNvPr id="24" name="">
-            <a:extLst xmlns:a="http://schemas.openxmlformats.org/drawingml/2006/main">
-              <a:ext uri="{FF2B5EF4-FFF2-40B4-BE49-F238E27FC236}">
-                <a16:creationId xmlns:a16="http://schemas.microsoft.com/office/drawing/2014/main" id="{6BD23295-5D4D-4555-BF0B-4A98077BFBF0}"/>
+          <p:cNvPr id="23" name="">
+            <a:extLst xmlns:a="http://schemas.openxmlformats.org/drawingml/2006/main">
+              <a:ext uri="{FF2B5EF4-FFF2-40B4-BE49-F238E27FC236}">
+                <a16:creationId xmlns:a16="http://schemas.microsoft.com/office/drawing/2014/main" id="{B9300ED2-44B5-4D86-9B51-B531D9C10769}"/>
               </a:ext>
             </a:extLst>
           </p:cNvPr>
@@ -9395,7 +9029,7 @@
           <p:cNvPr id="2" name="">
             <a:extLst xmlns:a="http://schemas.openxmlformats.org/drawingml/2006/main">
               <a:ext uri="{FF2B5EF4-FFF2-40B4-BE49-F238E27FC236}">
-                <a16:creationId xmlns:a16="http://schemas.microsoft.com/office/drawing/2014/main" id="{6F25773F-02D1-4A36-9444-D3C1D4F10740}"/>
+                <a16:creationId xmlns:a16="http://schemas.microsoft.com/office/drawing/2014/main" id="{0E2E01A9-D6D3-4AEF-A258-871885F64D31}"/>
               </a:ext>
             </a:extLst>
           </p:cNvPr>
@@ -9425,14 +9059,14 @@
       </p:sp>
       <p:pic>
         <p:nvPicPr>
-          <p:cNvPr id="26" name=""/>
+          <p:cNvPr id="25" name=""/>
           <p:cNvPicPr>
             <a:picLocks xmlns:a="http://schemas.openxmlformats.org/drawingml/2006/main" noChangeAspect="1"/>
           </p:cNvPicPr>
           <p:nvPr/>
         </p:nvPicPr>
         <p:blipFill>
-          <a:blip xmlns:r="http://schemas.openxmlformats.org/officeDocument/2006/relationships" xmlns:a="http://schemas.openxmlformats.org/drawingml/2006/main" r:embed="Rbcdb7be8cd5a4bb4"/>
+          <a:blip xmlns:r="http://schemas.openxmlformats.org/officeDocument/2006/relationships" xmlns:a="http://schemas.openxmlformats.org/drawingml/2006/main" r:embed="R59144fcc270c4ec8"/>
           <a:stretch xmlns:a="http://schemas.openxmlformats.org/drawingml/2006/main"/>
         </p:blipFill>
         <p:spPr>
@@ -9450,7 +9084,7 @@
           <p:cNvPr id="4" name="">
             <a:extLst xmlns:a="http://schemas.openxmlformats.org/drawingml/2006/main">
               <a:ext uri="{FF2B5EF4-FFF2-40B4-BE49-F238E27FC236}">
-                <a16:creationId xmlns:a16="http://schemas.microsoft.com/office/drawing/2014/main" id="{F8F68253-F7FA-4069-B625-DF2FFCF6AE19}"/>
+                <a16:creationId xmlns:a16="http://schemas.microsoft.com/office/drawing/2014/main" id="{AF58FF7C-70CA-40AF-ACA3-88282DB59B13}"/>
               </a:ext>
             </a:extLst>
           </p:cNvPr>
@@ -9511,7 +9145,7 @@
           <p:cNvPr id="5" name="">
             <a:extLst xmlns:a="http://schemas.openxmlformats.org/drawingml/2006/main">
               <a:ext uri="{FF2B5EF4-FFF2-40B4-BE49-F238E27FC236}">
-                <a16:creationId xmlns:a16="http://schemas.microsoft.com/office/drawing/2014/main" id="{077EC103-D20B-46B0-B7D5-3B7C6CED9080}"/>
+                <a16:creationId xmlns:a16="http://schemas.microsoft.com/office/drawing/2014/main" id="{1EADFB08-A749-487B-A6C8-9E0DF8B5F906}"/>
               </a:ext>
             </a:extLst>
           </p:cNvPr>
@@ -9572,7 +9206,7 @@
           <p:cNvPr id="6" name="">
             <a:extLst xmlns:a="http://schemas.openxmlformats.org/drawingml/2006/main">
               <a:ext uri="{FF2B5EF4-FFF2-40B4-BE49-F238E27FC236}">
-                <a16:creationId xmlns:a16="http://schemas.microsoft.com/office/drawing/2014/main" id="{89D01222-05AB-40E7-BEBB-5B47A889D6EE}"/>
+                <a16:creationId xmlns:a16="http://schemas.microsoft.com/office/drawing/2014/main" id="{38C7DBFF-F5B9-4A2B-9E04-85E458EB3F36}"/>
               </a:ext>
             </a:extLst>
           </p:cNvPr>
@@ -9605,68 +9239,7 @@
           <p:cNvPr id="7" name="">
             <a:extLst xmlns:a="http://schemas.openxmlformats.org/drawingml/2006/main">
               <a:ext uri="{FF2B5EF4-FFF2-40B4-BE49-F238E27FC236}">
-                <a16:creationId xmlns:a16="http://schemas.microsoft.com/office/drawing/2014/main" id="{3A4F7ECE-14D4-4534-BB1B-D86FFFE1E5C9}"/>
-              </a:ext>
-            </a:extLst>
-          </p:cNvPr>
-          <p:cNvSpPr>
-            <a:spLocks xmlns:a="http://schemas.openxmlformats.org/drawingml/2006/main" noGrp="1"/>
-          </p:cNvSpPr>
-          <p:nvPr/>
-        </p:nvSpPr>
-        <p:spPr>
-          <a:xfrm xmlns:a="http://schemas.openxmlformats.org/drawingml/2006/main">
-            <a:off x="733425" y="6457950"/>
-            <a:ext cx="6191250" cy="209550"/>
-          </a:xfrm>
-          <a:prstGeom xmlns:a="http://schemas.openxmlformats.org/drawingml/2006/main" prst="rect">
-            <a:avLst/>
-          </a:prstGeom>
-          <a:noFill xmlns:a="http://schemas.openxmlformats.org/drawingml/2006/main"/>
-          <a:ln xmlns:a="http://schemas.openxmlformats.org/drawingml/2006/main" w="0">
-            <a:noFill/>
-          </a:ln>
-        </p:spPr>
-        <p:txBody>
-          <a:bodyPr xmlns:a="http://schemas.openxmlformats.org/drawingml/2006/main" lIns="19050" tIns="19050" rIns="19050" bIns="19050" anchor="ctr">
-            <a:normAutofit fontScale="100000"/>
-          </a:bodyPr>
-          <a:lstStyle xmlns:a="http://schemas.openxmlformats.org/drawingml/2006/main"/>
-          <a:p xmlns:a="http://schemas.openxmlformats.org/drawingml/2006/main">
-            <a:pPr algn="l">
-              <a:lnSpc>
-                <a:spcPct val="105000"/>
-              </a:lnSpc>
-              <a:buNone/>
-              <a:defRPr sz="1050" b="0">
-                <a:solidFill>
-                  <a:srgbClr val="E5EDFF"/>
-                </a:solidFill>
-                <a:latin typeface="PingFang SC"/>
-                <a:ea typeface="PingFang SC"/>
-                <a:cs typeface="PingFang SC"/>
-              </a:defRPr>
-            </a:pPr>
-            <a:r>
-              <a:rPr sz="1050" b="0">
-                <a:solidFill>
-                  <a:srgbClr val="E5EDFF"/>
-                </a:solidFill>
-                <a:latin typeface="PingFang SC"/>
-                <a:ea typeface="PingFang SC"/>
-                <a:cs typeface="PingFang SC"/>
-              </a:rPr>
-              <a:t>广东工业大学 · 学术研究汇报</a:t>
-            </a:r>
-          </a:p>
-        </p:txBody>
-      </p:sp>
-      <p:sp>
-        <p:nvSpPr>
-          <p:cNvPr id="8" name="">
-            <a:extLst xmlns:a="http://schemas.openxmlformats.org/drawingml/2006/main">
-              <a:ext uri="{FF2B5EF4-FFF2-40B4-BE49-F238E27FC236}">
-                <a16:creationId xmlns:a16="http://schemas.microsoft.com/office/drawing/2014/main" id="{4E360DC6-2347-4904-9892-DAB3DB65F34B}"/>
+                <a16:creationId xmlns:a16="http://schemas.microsoft.com/office/drawing/2014/main" id="{8EC69817-0944-485E-AA1F-8C489310766C}"/>
               </a:ext>
             </a:extLst>
           </p:cNvPr>
@@ -9724,10 +9297,10 @@
       </p:sp>
       <p:sp>
         <p:nvSpPr>
-          <p:cNvPr id="9" name="">
-            <a:extLst xmlns:a="http://schemas.openxmlformats.org/drawingml/2006/main">
-              <a:ext uri="{FF2B5EF4-FFF2-40B4-BE49-F238E27FC236}">
-                <a16:creationId xmlns:a16="http://schemas.microsoft.com/office/drawing/2014/main" id="{DB571432-6162-4ACA-9499-6C6EF741AAE4}"/>
+          <p:cNvPr id="8" name="">
+            <a:extLst xmlns:a="http://schemas.openxmlformats.org/drawingml/2006/main">
+              <a:ext uri="{FF2B5EF4-FFF2-40B4-BE49-F238E27FC236}">
+                <a16:creationId xmlns:a16="http://schemas.microsoft.com/office/drawing/2014/main" id="{0D63F78A-9621-4CB0-B1F0-AE09F135E944}"/>
               </a:ext>
             </a:extLst>
           </p:cNvPr>
@@ -9790,10 +9363,10 @@
       </p:sp>
       <p:sp>
         <p:nvSpPr>
-          <p:cNvPr id="10" name="">
-            <a:extLst xmlns:a="http://schemas.openxmlformats.org/drawingml/2006/main">
-              <a:ext uri="{FF2B5EF4-FFF2-40B4-BE49-F238E27FC236}">
-                <a16:creationId xmlns:a16="http://schemas.microsoft.com/office/drawing/2014/main" id="{BDE22A63-9423-4280-94D4-D45009BA5B01}"/>
+          <p:cNvPr id="9" name="">
+            <a:extLst xmlns:a="http://schemas.openxmlformats.org/drawingml/2006/main">
+              <a:ext uri="{FF2B5EF4-FFF2-40B4-BE49-F238E27FC236}">
+                <a16:creationId xmlns:a16="http://schemas.microsoft.com/office/drawing/2014/main" id="{683EE3A8-ACD4-451D-AA22-408C6544F263}"/>
               </a:ext>
             </a:extLst>
           </p:cNvPr>
@@ -9851,10 +9424,10 @@
       </p:sp>
       <p:sp>
         <p:nvSpPr>
-          <p:cNvPr id="11" name="">
-            <a:extLst xmlns:a="http://schemas.openxmlformats.org/drawingml/2006/main">
-              <a:ext uri="{FF2B5EF4-FFF2-40B4-BE49-F238E27FC236}">
-                <a16:creationId xmlns:a16="http://schemas.microsoft.com/office/drawing/2014/main" id="{6D9C63F4-2DF5-4772-935B-4077B246D54E}"/>
+          <p:cNvPr id="10" name="">
+            <a:extLst xmlns:a="http://schemas.openxmlformats.org/drawingml/2006/main">
+              <a:ext uri="{FF2B5EF4-FFF2-40B4-BE49-F238E27FC236}">
+                <a16:creationId xmlns:a16="http://schemas.microsoft.com/office/drawing/2014/main" id="{E91E0A8E-15CE-4B22-BE3D-FF5F890761C0}"/>
               </a:ext>
             </a:extLst>
           </p:cNvPr>
@@ -9884,10 +9457,10 @@
       </p:sp>
       <p:sp>
         <p:nvSpPr>
-          <p:cNvPr id="12" name="">
-            <a:extLst xmlns:a="http://schemas.openxmlformats.org/drawingml/2006/main">
-              <a:ext uri="{FF2B5EF4-FFF2-40B4-BE49-F238E27FC236}">
-                <a16:creationId xmlns:a16="http://schemas.microsoft.com/office/drawing/2014/main" id="{07631A52-6A72-4FE5-A03A-86700332D88C}"/>
+          <p:cNvPr id="11" name="">
+            <a:extLst xmlns:a="http://schemas.openxmlformats.org/drawingml/2006/main">
+              <a:ext uri="{FF2B5EF4-FFF2-40B4-BE49-F238E27FC236}">
+                <a16:creationId xmlns:a16="http://schemas.microsoft.com/office/drawing/2014/main" id="{6D885D51-8D37-4D3B-AA08-16BA1128BF6B}"/>
               </a:ext>
             </a:extLst>
           </p:cNvPr>
@@ -9950,10 +9523,10 @@
       </p:sp>
       <p:sp>
         <p:nvSpPr>
-          <p:cNvPr id="13" name="">
-            <a:extLst xmlns:a="http://schemas.openxmlformats.org/drawingml/2006/main">
-              <a:ext uri="{FF2B5EF4-FFF2-40B4-BE49-F238E27FC236}">
-                <a16:creationId xmlns:a16="http://schemas.microsoft.com/office/drawing/2014/main" id="{94005211-DB3B-4F9A-AFCA-F10662A81032}"/>
+          <p:cNvPr id="12" name="">
+            <a:extLst xmlns:a="http://schemas.openxmlformats.org/drawingml/2006/main">
+              <a:ext uri="{FF2B5EF4-FFF2-40B4-BE49-F238E27FC236}">
+                <a16:creationId xmlns:a16="http://schemas.microsoft.com/office/drawing/2014/main" id="{F04B3613-B42D-4888-B161-479D4B3DA2A4}"/>
               </a:ext>
             </a:extLst>
           </p:cNvPr>
@@ -10011,10 +9584,10 @@
       </p:sp>
       <p:sp>
         <p:nvSpPr>
-          <p:cNvPr id="14" name="">
-            <a:extLst xmlns:a="http://schemas.openxmlformats.org/drawingml/2006/main">
-              <a:ext uri="{FF2B5EF4-FFF2-40B4-BE49-F238E27FC236}">
-                <a16:creationId xmlns:a16="http://schemas.microsoft.com/office/drawing/2014/main" id="{5A56A3A8-5414-43B8-B073-B0CDF8D3EF12}"/>
+          <p:cNvPr id="13" name="">
+            <a:extLst xmlns:a="http://schemas.openxmlformats.org/drawingml/2006/main">
+              <a:ext uri="{FF2B5EF4-FFF2-40B4-BE49-F238E27FC236}">
+                <a16:creationId xmlns:a16="http://schemas.microsoft.com/office/drawing/2014/main" id="{99B3DE44-8B89-4B06-A432-357697B0CA3D}"/>
               </a:ext>
             </a:extLst>
           </p:cNvPr>
@@ -10044,10 +9617,10 @@
       </p:sp>
       <p:sp>
         <p:nvSpPr>
-          <p:cNvPr id="15" name="">
-            <a:extLst xmlns:a="http://schemas.openxmlformats.org/drawingml/2006/main">
-              <a:ext uri="{FF2B5EF4-FFF2-40B4-BE49-F238E27FC236}">
-                <a16:creationId xmlns:a16="http://schemas.microsoft.com/office/drawing/2014/main" id="{1CEA9636-492B-417F-94CB-E9B159A0503A}"/>
+          <p:cNvPr id="14" name="">
+            <a:extLst xmlns:a="http://schemas.openxmlformats.org/drawingml/2006/main">
+              <a:ext uri="{FF2B5EF4-FFF2-40B4-BE49-F238E27FC236}">
+                <a16:creationId xmlns:a16="http://schemas.microsoft.com/office/drawing/2014/main" id="{857FFB8D-9865-4C9E-8998-76E718E51B5E}"/>
               </a:ext>
             </a:extLst>
           </p:cNvPr>
@@ -10110,10 +9683,10 @@
       </p:sp>
       <p:sp>
         <p:nvSpPr>
-          <p:cNvPr id="16" name="">
-            <a:extLst xmlns:a="http://schemas.openxmlformats.org/drawingml/2006/main">
-              <a:ext uri="{FF2B5EF4-FFF2-40B4-BE49-F238E27FC236}">
-                <a16:creationId xmlns:a16="http://schemas.microsoft.com/office/drawing/2014/main" id="{4853A0D5-A682-4A3C-80F5-B36EB508E584}"/>
+          <p:cNvPr id="15" name="">
+            <a:extLst xmlns:a="http://schemas.openxmlformats.org/drawingml/2006/main">
+              <a:ext uri="{FF2B5EF4-FFF2-40B4-BE49-F238E27FC236}">
+                <a16:creationId xmlns:a16="http://schemas.microsoft.com/office/drawing/2014/main" id="{9027B62D-A162-41A5-872A-7B85BBF3EBF6}"/>
               </a:ext>
             </a:extLst>
           </p:cNvPr>
@@ -10171,10 +9744,10 @@
       </p:sp>
       <p:sp>
         <p:nvSpPr>
-          <p:cNvPr id="17" name="">
-            <a:extLst xmlns:a="http://schemas.openxmlformats.org/drawingml/2006/main">
-              <a:ext uri="{FF2B5EF4-FFF2-40B4-BE49-F238E27FC236}">
-                <a16:creationId xmlns:a16="http://schemas.microsoft.com/office/drawing/2014/main" id="{9F4F59F2-1F62-4F4E-8BEA-079F1164F49F}"/>
+          <p:cNvPr id="16" name="">
+            <a:extLst xmlns:a="http://schemas.openxmlformats.org/drawingml/2006/main">
+              <a:ext uri="{FF2B5EF4-FFF2-40B4-BE49-F238E27FC236}">
+                <a16:creationId xmlns:a16="http://schemas.microsoft.com/office/drawing/2014/main" id="{29C47D40-7C1A-4643-A6BA-9D01C53F9BCA}"/>
               </a:ext>
             </a:extLst>
           </p:cNvPr>
@@ -10204,10 +9777,10 @@
       </p:sp>
       <p:sp>
         <p:nvSpPr>
-          <p:cNvPr id="18" name="">
-            <a:extLst xmlns:a="http://schemas.openxmlformats.org/drawingml/2006/main">
-              <a:ext uri="{FF2B5EF4-FFF2-40B4-BE49-F238E27FC236}">
-                <a16:creationId xmlns:a16="http://schemas.microsoft.com/office/drawing/2014/main" id="{D4858779-E25A-4CCC-B9DB-26645A413BA8}"/>
+          <p:cNvPr id="17" name="">
+            <a:extLst xmlns:a="http://schemas.openxmlformats.org/drawingml/2006/main">
+              <a:ext uri="{FF2B5EF4-FFF2-40B4-BE49-F238E27FC236}">
+                <a16:creationId xmlns:a16="http://schemas.microsoft.com/office/drawing/2014/main" id="{FC5A907F-4715-4744-B9B9-0C643BA92B8B}"/>
               </a:ext>
             </a:extLst>
           </p:cNvPr>
@@ -10270,10 +9843,10 @@
       </p:sp>
       <p:sp>
         <p:nvSpPr>
-          <p:cNvPr id="19" name="">
-            <a:extLst xmlns:a="http://schemas.openxmlformats.org/drawingml/2006/main">
-              <a:ext uri="{FF2B5EF4-FFF2-40B4-BE49-F238E27FC236}">
-                <a16:creationId xmlns:a16="http://schemas.microsoft.com/office/drawing/2014/main" id="{3033C505-CE9D-4933-8096-4FBDA72E8B87}"/>
+          <p:cNvPr id="18" name="">
+            <a:extLst xmlns:a="http://schemas.openxmlformats.org/drawingml/2006/main">
+              <a:ext uri="{FF2B5EF4-FFF2-40B4-BE49-F238E27FC236}">
+                <a16:creationId xmlns:a16="http://schemas.microsoft.com/office/drawing/2014/main" id="{B2D26ED4-B06A-4297-9605-D24968110C01}"/>
               </a:ext>
             </a:extLst>
           </p:cNvPr>
@@ -10331,10 +9904,10 @@
       </p:sp>
       <p:sp>
         <p:nvSpPr>
-          <p:cNvPr id="20" name="">
-            <a:extLst xmlns:a="http://schemas.openxmlformats.org/drawingml/2006/main">
-              <a:ext uri="{FF2B5EF4-FFF2-40B4-BE49-F238E27FC236}">
-                <a16:creationId xmlns:a16="http://schemas.microsoft.com/office/drawing/2014/main" id="{08A18729-9CD7-4B9D-ABB9-A5ECA1AF5E26}"/>
+          <p:cNvPr id="19" name="">
+            <a:extLst xmlns:a="http://schemas.openxmlformats.org/drawingml/2006/main">
+              <a:ext uri="{FF2B5EF4-FFF2-40B4-BE49-F238E27FC236}">
+                <a16:creationId xmlns:a16="http://schemas.microsoft.com/office/drawing/2014/main" id="{52178BCC-4768-4829-9F12-D7D29CF957F2}"/>
               </a:ext>
             </a:extLst>
           </p:cNvPr>
@@ -10364,10 +9937,10 @@
       </p:sp>
       <p:sp>
         <p:nvSpPr>
-          <p:cNvPr id="21" name="">
-            <a:extLst xmlns:a="http://schemas.openxmlformats.org/drawingml/2006/main">
-              <a:ext uri="{FF2B5EF4-FFF2-40B4-BE49-F238E27FC236}">
-                <a16:creationId xmlns:a16="http://schemas.microsoft.com/office/drawing/2014/main" id="{5D5DA632-114E-49B1-9E0B-732D856E1820}"/>
+          <p:cNvPr id="20" name="">
+            <a:extLst xmlns:a="http://schemas.openxmlformats.org/drawingml/2006/main">
+              <a:ext uri="{FF2B5EF4-FFF2-40B4-BE49-F238E27FC236}">
+                <a16:creationId xmlns:a16="http://schemas.microsoft.com/office/drawing/2014/main" id="{F7C9B5CB-419A-40A3-9842-66C94FC9F5EE}"/>
               </a:ext>
             </a:extLst>
           </p:cNvPr>
@@ -10430,10 +10003,10 @@
       </p:sp>
       <p:sp>
         <p:nvSpPr>
-          <p:cNvPr id="22" name="">
-            <a:extLst xmlns:a="http://schemas.openxmlformats.org/drawingml/2006/main">
-              <a:ext uri="{FF2B5EF4-FFF2-40B4-BE49-F238E27FC236}">
-                <a16:creationId xmlns:a16="http://schemas.microsoft.com/office/drawing/2014/main" id="{B652B3AD-D99B-4033-BD82-E5B599606754}"/>
+          <p:cNvPr id="21" name="">
+            <a:extLst xmlns:a="http://schemas.openxmlformats.org/drawingml/2006/main">
+              <a:ext uri="{FF2B5EF4-FFF2-40B4-BE49-F238E27FC236}">
+                <a16:creationId xmlns:a16="http://schemas.microsoft.com/office/drawing/2014/main" id="{3C993AF7-481F-4B16-AECA-F501D991B361}"/>
               </a:ext>
             </a:extLst>
           </p:cNvPr>
@@ -10491,10 +10064,10 @@
       </p:sp>
       <p:sp>
         <p:nvSpPr>
-          <p:cNvPr id="23" name="">
-            <a:extLst xmlns:a="http://schemas.openxmlformats.org/drawingml/2006/main">
-              <a:ext uri="{FF2B5EF4-FFF2-40B4-BE49-F238E27FC236}">
-                <a16:creationId xmlns:a16="http://schemas.microsoft.com/office/drawing/2014/main" id="{8DBDEB90-436C-41BF-9512-04DE5075AFC2}"/>
+          <p:cNvPr id="22" name="">
+            <a:extLst xmlns:a="http://schemas.openxmlformats.org/drawingml/2006/main">
+              <a:ext uri="{FF2B5EF4-FFF2-40B4-BE49-F238E27FC236}">
+                <a16:creationId xmlns:a16="http://schemas.microsoft.com/office/drawing/2014/main" id="{3E0D57D3-06A6-49CE-8585-DBCFCB260E22}"/>
               </a:ext>
             </a:extLst>
           </p:cNvPr>
@@ -10553,7 +10126,7 @@
     </p:spTree>
     <p:extLst>
       <p:ext uri="{BB962C8B-B14F-4D97-AF65-F5344CB8AC3E}">
-        <p14:creationId xmlns:p14="http://schemas.microsoft.com/office/powerpoint/2010/main" val="1094365077"/>
+        <p14:creationId xmlns:p14="http://schemas.microsoft.com/office/powerpoint/2010/main" val="1770861124"/>
       </p:ext>
     </p:extLst>
   </p:cSld>
@@ -10581,10 +10154,10 @@
       </p:grpSpPr>
       <p:cxnSp>
         <p:nvCxnSpPr>
-          <p:cNvPr id="25" name=""/>
+          <p:cNvPr id="24" name=""/>
           <p:cNvCxnSpPr>
-            <a:stCxn xmlns:a="http://schemas.openxmlformats.org/drawingml/2006/main" id="12" idx="2"/>
-            <a:endCxn xmlns:a="http://schemas.openxmlformats.org/drawingml/2006/main" id="19" idx="0"/>
+            <a:stCxn xmlns:a="http://schemas.openxmlformats.org/drawingml/2006/main" id="11" idx="2"/>
+            <a:endCxn xmlns:a="http://schemas.openxmlformats.org/drawingml/2006/main" id="18" idx="0"/>
           </p:cNvCxnSpPr>
           <p:nvPr/>
         </p:nvCxnSpPr>
@@ -10610,10 +10183,10 @@
       </p:cxnSp>
       <p:cxnSp>
         <p:nvCxnSpPr>
-          <p:cNvPr id="26" name=""/>
+          <p:cNvPr id="25" name=""/>
           <p:cNvCxnSpPr>
-            <a:stCxn xmlns:a="http://schemas.openxmlformats.org/drawingml/2006/main" id="12" idx="2"/>
-            <a:endCxn xmlns:a="http://schemas.openxmlformats.org/drawingml/2006/main" id="18" idx="0"/>
+            <a:stCxn xmlns:a="http://schemas.openxmlformats.org/drawingml/2006/main" id="11" idx="2"/>
+            <a:endCxn xmlns:a="http://schemas.openxmlformats.org/drawingml/2006/main" id="17" idx="0"/>
           </p:cNvCxnSpPr>
           <p:nvPr/>
         </p:nvCxnSpPr>
@@ -10639,10 +10212,10 @@
       </p:cxnSp>
       <p:cxnSp>
         <p:nvCxnSpPr>
-          <p:cNvPr id="27" name=""/>
+          <p:cNvPr id="26" name=""/>
           <p:cNvCxnSpPr>
-            <a:stCxn xmlns:a="http://schemas.openxmlformats.org/drawingml/2006/main" id="12" idx="2"/>
-            <a:endCxn xmlns:a="http://schemas.openxmlformats.org/drawingml/2006/main" id="17" idx="0"/>
+            <a:stCxn xmlns:a="http://schemas.openxmlformats.org/drawingml/2006/main" id="11" idx="2"/>
+            <a:endCxn xmlns:a="http://schemas.openxmlformats.org/drawingml/2006/main" id="16" idx="0"/>
           </p:cNvCxnSpPr>
           <p:nvPr/>
         </p:nvCxnSpPr>
@@ -10668,10 +10241,10 @@
       </p:cxnSp>
       <p:cxnSp>
         <p:nvCxnSpPr>
-          <p:cNvPr id="28" name=""/>
+          <p:cNvPr id="27" name=""/>
           <p:cNvCxnSpPr>
-            <a:stCxn xmlns:a="http://schemas.openxmlformats.org/drawingml/2006/main" id="12" idx="2"/>
-            <a:endCxn xmlns:a="http://schemas.openxmlformats.org/drawingml/2006/main" id="16" idx="0"/>
+            <a:stCxn xmlns:a="http://schemas.openxmlformats.org/drawingml/2006/main" id="11" idx="2"/>
+            <a:endCxn xmlns:a="http://schemas.openxmlformats.org/drawingml/2006/main" id="15" idx="0"/>
           </p:cNvCxnSpPr>
           <p:nvPr/>
         </p:nvCxnSpPr>
@@ -10697,10 +10270,10 @@
       </p:cxnSp>
       <p:cxnSp>
         <p:nvCxnSpPr>
-          <p:cNvPr id="29" name=""/>
+          <p:cNvPr id="28" name=""/>
           <p:cNvCxnSpPr>
-            <a:stCxn xmlns:a="http://schemas.openxmlformats.org/drawingml/2006/main" id="11" idx="2"/>
-            <a:endCxn xmlns:a="http://schemas.openxmlformats.org/drawingml/2006/main" id="12" idx="0"/>
+            <a:stCxn xmlns:a="http://schemas.openxmlformats.org/drawingml/2006/main" id="10" idx="2"/>
+            <a:endCxn xmlns:a="http://schemas.openxmlformats.org/drawingml/2006/main" id="11" idx="0"/>
           </p:cNvCxnSpPr>
           <p:nvPr/>
         </p:nvCxnSpPr>
@@ -10726,10 +10299,10 @@
       </p:cxnSp>
       <p:cxnSp>
         <p:nvCxnSpPr>
-          <p:cNvPr id="30" name=""/>
+          <p:cNvPr id="29" name=""/>
           <p:cNvCxnSpPr>
-            <a:stCxn xmlns:a="http://schemas.openxmlformats.org/drawingml/2006/main" id="10" idx="2"/>
-            <a:endCxn xmlns:a="http://schemas.openxmlformats.org/drawingml/2006/main" id="12" idx="0"/>
+            <a:stCxn xmlns:a="http://schemas.openxmlformats.org/drawingml/2006/main" id="9" idx="2"/>
+            <a:endCxn xmlns:a="http://schemas.openxmlformats.org/drawingml/2006/main" id="11" idx="0"/>
           </p:cNvCxnSpPr>
           <p:nvPr/>
         </p:nvCxnSpPr>
@@ -10755,10 +10328,10 @@
       </p:cxnSp>
       <p:cxnSp>
         <p:nvCxnSpPr>
-          <p:cNvPr id="31" name=""/>
+          <p:cNvPr id="30" name=""/>
           <p:cNvCxnSpPr>
-            <a:stCxn xmlns:a="http://schemas.openxmlformats.org/drawingml/2006/main" id="9" idx="2"/>
-            <a:endCxn xmlns:a="http://schemas.openxmlformats.org/drawingml/2006/main" id="12" idx="0"/>
+            <a:stCxn xmlns:a="http://schemas.openxmlformats.org/drawingml/2006/main" id="8" idx="2"/>
+            <a:endCxn xmlns:a="http://schemas.openxmlformats.org/drawingml/2006/main" id="11" idx="0"/>
           </p:cNvCxnSpPr>
           <p:nvPr/>
         </p:nvCxnSpPr>
@@ -10784,10 +10357,10 @@
       </p:cxnSp>
       <p:sp>
         <p:nvSpPr>
-          <p:cNvPr id="32" name="">
-            <a:extLst xmlns:a="http://schemas.openxmlformats.org/drawingml/2006/main">
-              <a:ext uri="{FF2B5EF4-FFF2-40B4-BE49-F238E27FC236}">
-                <a16:creationId xmlns:a16="http://schemas.microsoft.com/office/drawing/2014/main" id="{809F1AB2-4B27-43EC-AC31-C44211B6371D}"/>
+          <p:cNvPr id="31" name="">
+            <a:extLst xmlns:a="http://schemas.openxmlformats.org/drawingml/2006/main">
+              <a:ext uri="{FF2B5EF4-FFF2-40B4-BE49-F238E27FC236}">
+                <a16:creationId xmlns:a16="http://schemas.microsoft.com/office/drawing/2014/main" id="{67E4ED90-9F39-484B-B842-5F8118C3E561}"/>
               </a:ext>
             </a:extLst>
           </p:cNvPr>
@@ -10820,7 +10393,7 @@
           <p:cNvPr id="2" name="">
             <a:extLst xmlns:a="http://schemas.openxmlformats.org/drawingml/2006/main">
               <a:ext uri="{FF2B5EF4-FFF2-40B4-BE49-F238E27FC236}">
-                <a16:creationId xmlns:a16="http://schemas.microsoft.com/office/drawing/2014/main" id="{996208CA-E0F8-48B6-9409-D39BF72E427D}"/>
+                <a16:creationId xmlns:a16="http://schemas.microsoft.com/office/drawing/2014/main" id="{B6B7E410-D980-46B3-A4FA-0A20454CC976}"/>
               </a:ext>
             </a:extLst>
           </p:cNvPr>
@@ -10850,14 +10423,14 @@
       </p:sp>
       <p:pic>
         <p:nvPicPr>
-          <p:cNvPr id="34" name=""/>
+          <p:cNvPr id="33" name=""/>
           <p:cNvPicPr>
             <a:picLocks xmlns:a="http://schemas.openxmlformats.org/drawingml/2006/main" noChangeAspect="1"/>
           </p:cNvPicPr>
           <p:nvPr/>
         </p:nvPicPr>
         <p:blipFill>
-          <a:blip xmlns:r="http://schemas.openxmlformats.org/officeDocument/2006/relationships" xmlns:a="http://schemas.openxmlformats.org/drawingml/2006/main" r:embed="R08eb821d1a5f4aa9"/>
+          <a:blip xmlns:r="http://schemas.openxmlformats.org/officeDocument/2006/relationships" xmlns:a="http://schemas.openxmlformats.org/drawingml/2006/main" r:embed="R73c29abe824a4677"/>
           <a:stretch xmlns:a="http://schemas.openxmlformats.org/drawingml/2006/main"/>
         </p:blipFill>
         <p:spPr>
@@ -10875,7 +10448,7 @@
           <p:cNvPr id="4" name="">
             <a:extLst xmlns:a="http://schemas.openxmlformats.org/drawingml/2006/main">
               <a:ext uri="{FF2B5EF4-FFF2-40B4-BE49-F238E27FC236}">
-                <a16:creationId xmlns:a16="http://schemas.microsoft.com/office/drawing/2014/main" id="{92328D69-9D4B-4638-BF0B-A2522907680C}"/>
+                <a16:creationId xmlns:a16="http://schemas.microsoft.com/office/drawing/2014/main" id="{6EF8E67C-1C04-49B9-9916-279BD20DF603}"/>
               </a:ext>
             </a:extLst>
           </p:cNvPr>
@@ -10936,7 +10509,7 @@
           <p:cNvPr id="5" name="">
             <a:extLst xmlns:a="http://schemas.openxmlformats.org/drawingml/2006/main">
               <a:ext uri="{FF2B5EF4-FFF2-40B4-BE49-F238E27FC236}">
-                <a16:creationId xmlns:a16="http://schemas.microsoft.com/office/drawing/2014/main" id="{5ED17006-10F9-4DCB-91CC-7E1F5901428E}"/>
+                <a16:creationId xmlns:a16="http://schemas.microsoft.com/office/drawing/2014/main" id="{85E7BC65-7C91-4D3C-8E0A-6EA57276C3AD}"/>
               </a:ext>
             </a:extLst>
           </p:cNvPr>
@@ -10997,7 +10570,7 @@
           <p:cNvPr id="6" name="">
             <a:extLst xmlns:a="http://schemas.openxmlformats.org/drawingml/2006/main">
               <a:ext uri="{FF2B5EF4-FFF2-40B4-BE49-F238E27FC236}">
-                <a16:creationId xmlns:a16="http://schemas.microsoft.com/office/drawing/2014/main" id="{54A4E6BE-465B-4340-8DF6-041B0F19F848}"/>
+                <a16:creationId xmlns:a16="http://schemas.microsoft.com/office/drawing/2014/main" id="{03083652-9D58-48D4-A50C-0483F240566C}"/>
               </a:ext>
             </a:extLst>
           </p:cNvPr>
@@ -11030,68 +10603,7 @@
           <p:cNvPr id="7" name="">
             <a:extLst xmlns:a="http://schemas.openxmlformats.org/drawingml/2006/main">
               <a:ext uri="{FF2B5EF4-FFF2-40B4-BE49-F238E27FC236}">
-                <a16:creationId xmlns:a16="http://schemas.microsoft.com/office/drawing/2014/main" id="{036C98E5-A87C-4E49-9BB5-4194FD087D18}"/>
-              </a:ext>
-            </a:extLst>
-          </p:cNvPr>
-          <p:cNvSpPr>
-            <a:spLocks xmlns:a="http://schemas.openxmlformats.org/drawingml/2006/main" noGrp="1"/>
-          </p:cNvSpPr>
-          <p:nvPr/>
-        </p:nvSpPr>
-        <p:spPr>
-          <a:xfrm xmlns:a="http://schemas.openxmlformats.org/drawingml/2006/main">
-            <a:off x="733425" y="6457950"/>
-            <a:ext cx="6191250" cy="209550"/>
-          </a:xfrm>
-          <a:prstGeom xmlns:a="http://schemas.openxmlformats.org/drawingml/2006/main" prst="rect">
-            <a:avLst/>
-          </a:prstGeom>
-          <a:noFill xmlns:a="http://schemas.openxmlformats.org/drawingml/2006/main"/>
-          <a:ln xmlns:a="http://schemas.openxmlformats.org/drawingml/2006/main" w="0">
-            <a:noFill/>
-          </a:ln>
-        </p:spPr>
-        <p:txBody>
-          <a:bodyPr xmlns:a="http://schemas.openxmlformats.org/drawingml/2006/main" lIns="19050" tIns="19050" rIns="19050" bIns="19050" anchor="ctr">
-            <a:normAutofit fontScale="100000"/>
-          </a:bodyPr>
-          <a:lstStyle xmlns:a="http://schemas.openxmlformats.org/drawingml/2006/main"/>
-          <a:p xmlns:a="http://schemas.openxmlformats.org/drawingml/2006/main">
-            <a:pPr algn="l">
-              <a:lnSpc>
-                <a:spcPct val="105000"/>
-              </a:lnSpc>
-              <a:buNone/>
-              <a:defRPr sz="1050" b="0">
-                <a:solidFill>
-                  <a:srgbClr val="E5EDFF"/>
-                </a:solidFill>
-                <a:latin typeface="PingFang SC"/>
-                <a:ea typeface="PingFang SC"/>
-                <a:cs typeface="PingFang SC"/>
-              </a:defRPr>
-            </a:pPr>
-            <a:r>
-              <a:rPr sz="1050" b="0">
-                <a:solidFill>
-                  <a:srgbClr val="E5EDFF"/>
-                </a:solidFill>
-                <a:latin typeface="PingFang SC"/>
-                <a:ea typeface="PingFang SC"/>
-                <a:cs typeface="PingFang SC"/>
-              </a:rPr>
-              <a:t>广东工业大学 · 学术研究汇报</a:t>
-            </a:r>
-          </a:p>
-        </p:txBody>
-      </p:sp>
-      <p:sp>
-        <p:nvSpPr>
-          <p:cNvPr id="8" name="">
-            <a:extLst xmlns:a="http://schemas.openxmlformats.org/drawingml/2006/main">
-              <a:ext uri="{FF2B5EF4-FFF2-40B4-BE49-F238E27FC236}">
-                <a16:creationId xmlns:a16="http://schemas.microsoft.com/office/drawing/2014/main" id="{03987B51-5323-4280-8C43-EE3C90937F4E}"/>
+                <a16:creationId xmlns:a16="http://schemas.microsoft.com/office/drawing/2014/main" id="{853D6070-59A9-4939-B2FF-44C8464B69DD}"/>
               </a:ext>
             </a:extLst>
           </p:cNvPr>
@@ -11149,10 +10661,10 @@
       </p:sp>
       <p:sp>
         <p:nvSpPr>
-          <p:cNvPr id="9" name="">
-            <a:extLst xmlns:a="http://schemas.openxmlformats.org/drawingml/2006/main">
-              <a:ext uri="{FF2B5EF4-FFF2-40B4-BE49-F238E27FC236}">
-                <a16:creationId xmlns:a16="http://schemas.microsoft.com/office/drawing/2014/main" id="{652B21A9-EF2F-4A9C-89EB-55F7AD7B0718}"/>
+          <p:cNvPr id="8" name="">
+            <a:extLst xmlns:a="http://schemas.openxmlformats.org/drawingml/2006/main">
+              <a:ext uri="{FF2B5EF4-FFF2-40B4-BE49-F238E27FC236}">
+                <a16:creationId xmlns:a16="http://schemas.microsoft.com/office/drawing/2014/main" id="{766DFDAB-38C2-4AB0-953C-D0F90EE13C5C}"/>
               </a:ext>
             </a:extLst>
           </p:cNvPr>
@@ -11242,10 +10754,10 @@
       </p:sp>
       <p:sp>
         <p:nvSpPr>
-          <p:cNvPr id="10" name="">
-            <a:extLst xmlns:a="http://schemas.openxmlformats.org/drawingml/2006/main">
-              <a:ext uri="{FF2B5EF4-FFF2-40B4-BE49-F238E27FC236}">
-                <a16:creationId xmlns:a16="http://schemas.microsoft.com/office/drawing/2014/main" id="{B1471B7C-9EDB-4AB1-B5F5-3184A59A2478}"/>
+          <p:cNvPr id="9" name="">
+            <a:extLst xmlns:a="http://schemas.openxmlformats.org/drawingml/2006/main">
+              <a:ext uri="{FF2B5EF4-FFF2-40B4-BE49-F238E27FC236}">
+                <a16:creationId xmlns:a16="http://schemas.microsoft.com/office/drawing/2014/main" id="{5CBE1CC2-B2EF-48A8-BCAF-749389C3EB00}"/>
               </a:ext>
             </a:extLst>
           </p:cNvPr>
@@ -11335,10 +10847,10 @@
       </p:sp>
       <p:sp>
         <p:nvSpPr>
-          <p:cNvPr id="11" name="">
-            <a:extLst xmlns:a="http://schemas.openxmlformats.org/drawingml/2006/main">
-              <a:ext uri="{FF2B5EF4-FFF2-40B4-BE49-F238E27FC236}">
-                <a16:creationId xmlns:a16="http://schemas.microsoft.com/office/drawing/2014/main" id="{090BA2B1-25D7-40AE-95B9-7999CD96ADA5}"/>
+          <p:cNvPr id="10" name="">
+            <a:extLst xmlns:a="http://schemas.openxmlformats.org/drawingml/2006/main">
+              <a:ext uri="{FF2B5EF4-FFF2-40B4-BE49-F238E27FC236}">
+                <a16:creationId xmlns:a16="http://schemas.microsoft.com/office/drawing/2014/main" id="{C8DFDA9F-B81A-4F83-969B-CA6E7D7382E3}"/>
               </a:ext>
             </a:extLst>
           </p:cNvPr>
@@ -11428,10 +10940,10 @@
       </p:sp>
       <p:sp>
         <p:nvSpPr>
-          <p:cNvPr id="12" name="">
-            <a:extLst xmlns:a="http://schemas.openxmlformats.org/drawingml/2006/main">
-              <a:ext uri="{FF2B5EF4-FFF2-40B4-BE49-F238E27FC236}">
-                <a16:creationId xmlns:a16="http://schemas.microsoft.com/office/drawing/2014/main" id="{709FE4FA-37EF-4DD2-A716-91703488C2CD}"/>
+          <p:cNvPr id="11" name="">
+            <a:extLst xmlns:a="http://schemas.openxmlformats.org/drawingml/2006/main">
+              <a:ext uri="{FF2B5EF4-FFF2-40B4-BE49-F238E27FC236}">
+                <a16:creationId xmlns:a16="http://schemas.microsoft.com/office/drawing/2014/main" id="{94A121BA-BAE7-4C8E-B0C2-4FE08DFA745C}"/>
               </a:ext>
             </a:extLst>
           </p:cNvPr>
@@ -11521,10 +11033,10 @@
       </p:sp>
       <p:sp>
         <p:nvSpPr>
-          <p:cNvPr id="16" name="">
-            <a:extLst xmlns:a="http://schemas.openxmlformats.org/drawingml/2006/main">
-              <a:ext uri="{FF2B5EF4-FFF2-40B4-BE49-F238E27FC236}">
-                <a16:creationId xmlns:a16="http://schemas.microsoft.com/office/drawing/2014/main" id="{728F1BE5-A9A7-4E44-BFEB-D386E67FD12F}"/>
+          <p:cNvPr id="15" name="">
+            <a:extLst xmlns:a="http://schemas.openxmlformats.org/drawingml/2006/main">
+              <a:ext uri="{FF2B5EF4-FFF2-40B4-BE49-F238E27FC236}">
+                <a16:creationId xmlns:a16="http://schemas.microsoft.com/office/drawing/2014/main" id="{4BE6E5F4-C0A4-402D-A015-17AA78D8C670}"/>
               </a:ext>
             </a:extLst>
           </p:cNvPr>
@@ -11614,10 +11126,10 @@
       </p:sp>
       <p:sp>
         <p:nvSpPr>
-          <p:cNvPr id="17" name="">
-            <a:extLst xmlns:a="http://schemas.openxmlformats.org/drawingml/2006/main">
-              <a:ext uri="{FF2B5EF4-FFF2-40B4-BE49-F238E27FC236}">
-                <a16:creationId xmlns:a16="http://schemas.microsoft.com/office/drawing/2014/main" id="{4261DAC7-58D9-4BE7-BE00-F1EB29D43937}"/>
+          <p:cNvPr id="16" name="">
+            <a:extLst xmlns:a="http://schemas.openxmlformats.org/drawingml/2006/main">
+              <a:ext uri="{FF2B5EF4-FFF2-40B4-BE49-F238E27FC236}">
+                <a16:creationId xmlns:a16="http://schemas.microsoft.com/office/drawing/2014/main" id="{EEEA4E08-BEDB-470C-8329-A42739FDC6DC}"/>
               </a:ext>
             </a:extLst>
           </p:cNvPr>
@@ -11707,10 +11219,10 @@
       </p:sp>
       <p:sp>
         <p:nvSpPr>
-          <p:cNvPr id="18" name="">
-            <a:extLst xmlns:a="http://schemas.openxmlformats.org/drawingml/2006/main">
-              <a:ext uri="{FF2B5EF4-FFF2-40B4-BE49-F238E27FC236}">
-                <a16:creationId xmlns:a16="http://schemas.microsoft.com/office/drawing/2014/main" id="{40329F16-B4D1-4271-8FE3-BFE5D5012EAE}"/>
+          <p:cNvPr id="17" name="">
+            <a:extLst xmlns:a="http://schemas.openxmlformats.org/drawingml/2006/main">
+              <a:ext uri="{FF2B5EF4-FFF2-40B4-BE49-F238E27FC236}">
+                <a16:creationId xmlns:a16="http://schemas.microsoft.com/office/drawing/2014/main" id="{9FA5F547-0ACD-4133-AD10-B2FDEEED7153}"/>
               </a:ext>
             </a:extLst>
           </p:cNvPr>
@@ -11800,10 +11312,10 @@
       </p:sp>
       <p:sp>
         <p:nvSpPr>
-          <p:cNvPr id="19" name="">
-            <a:extLst xmlns:a="http://schemas.openxmlformats.org/drawingml/2006/main">
-              <a:ext uri="{FF2B5EF4-FFF2-40B4-BE49-F238E27FC236}">
-                <a16:creationId xmlns:a16="http://schemas.microsoft.com/office/drawing/2014/main" id="{B76DEF3B-2920-4E75-9A4C-FFBC41F63AE3}"/>
+          <p:cNvPr id="18" name="">
+            <a:extLst xmlns:a="http://schemas.openxmlformats.org/drawingml/2006/main">
+              <a:ext uri="{FF2B5EF4-FFF2-40B4-BE49-F238E27FC236}">
+                <a16:creationId xmlns:a16="http://schemas.microsoft.com/office/drawing/2014/main" id="{14F43596-A114-4463-B1A4-551864EB4F15}"/>
               </a:ext>
             </a:extLst>
           </p:cNvPr>
@@ -11893,10 +11405,10 @@
       </p:sp>
       <p:sp>
         <p:nvSpPr>
-          <p:cNvPr id="24" name="">
-            <a:extLst xmlns:a="http://schemas.openxmlformats.org/drawingml/2006/main">
-              <a:ext uri="{FF2B5EF4-FFF2-40B4-BE49-F238E27FC236}">
-                <a16:creationId xmlns:a16="http://schemas.microsoft.com/office/drawing/2014/main" id="{78B1A20A-2EA0-49A2-A79C-7B0175378469}"/>
+          <p:cNvPr id="23" name="">
+            <a:extLst xmlns:a="http://schemas.openxmlformats.org/drawingml/2006/main">
+              <a:ext uri="{FF2B5EF4-FFF2-40B4-BE49-F238E27FC236}">
+                <a16:creationId xmlns:a16="http://schemas.microsoft.com/office/drawing/2014/main" id="{42CEF8FA-9456-45A4-B418-1C658869C992}"/>
               </a:ext>
             </a:extLst>
           </p:cNvPr>
@@ -11955,7 +11467,7 @@
     </p:spTree>
     <p:extLst>
       <p:ext uri="{BB962C8B-B14F-4D97-AF65-F5344CB8AC3E}">
-        <p14:creationId xmlns:p14="http://schemas.microsoft.com/office/powerpoint/2010/main" val="1452581356"/>
+        <p14:creationId xmlns:p14="http://schemas.microsoft.com/office/powerpoint/2010/main" val="2113279323"/>
       </p:ext>
     </p:extLst>
   </p:cSld>
@@ -11983,10 +11495,10 @@
       </p:grpSpPr>
       <p:sp>
         <p:nvSpPr>
-          <p:cNvPr id="14" name="">
-            <a:extLst xmlns:a="http://schemas.openxmlformats.org/drawingml/2006/main">
-              <a:ext uri="{FF2B5EF4-FFF2-40B4-BE49-F238E27FC236}">
-                <a16:creationId xmlns:a16="http://schemas.microsoft.com/office/drawing/2014/main" id="{9947E347-95C0-4258-A6BE-CFAC3EEA96FF}"/>
+          <p:cNvPr id="13" name="">
+            <a:extLst xmlns:a="http://schemas.openxmlformats.org/drawingml/2006/main">
+              <a:ext uri="{FF2B5EF4-FFF2-40B4-BE49-F238E27FC236}">
+                <a16:creationId xmlns:a16="http://schemas.microsoft.com/office/drawing/2014/main" id="{083BF3CF-57F3-4900-8990-C4D886207F77}"/>
               </a:ext>
             </a:extLst>
           </p:cNvPr>
@@ -12019,7 +11531,7 @@
           <p:cNvPr id="2" name="">
             <a:extLst xmlns:a="http://schemas.openxmlformats.org/drawingml/2006/main">
               <a:ext uri="{FF2B5EF4-FFF2-40B4-BE49-F238E27FC236}">
-                <a16:creationId xmlns:a16="http://schemas.microsoft.com/office/drawing/2014/main" id="{6B2253EA-F914-430C-B394-96E4AF269072}"/>
+                <a16:creationId xmlns:a16="http://schemas.microsoft.com/office/drawing/2014/main" id="{78CB3E27-8090-495C-AB67-E18357F0FFC7}"/>
               </a:ext>
             </a:extLst>
           </p:cNvPr>
@@ -12049,14 +11561,14 @@
       </p:sp>
       <p:pic>
         <p:nvPicPr>
-          <p:cNvPr id="16" name=""/>
+          <p:cNvPr id="15" name=""/>
           <p:cNvPicPr>
             <a:picLocks xmlns:a="http://schemas.openxmlformats.org/drawingml/2006/main" noChangeAspect="1"/>
           </p:cNvPicPr>
           <p:nvPr/>
         </p:nvPicPr>
         <p:blipFill>
-          <a:blip xmlns:r="http://schemas.openxmlformats.org/officeDocument/2006/relationships" xmlns:a="http://schemas.openxmlformats.org/drawingml/2006/main" r:embed="R24fb31f013184e96"/>
+          <a:blip xmlns:r="http://schemas.openxmlformats.org/officeDocument/2006/relationships" xmlns:a="http://schemas.openxmlformats.org/drawingml/2006/main" r:embed="R63d7b17c09e34598"/>
           <a:stretch xmlns:a="http://schemas.openxmlformats.org/drawingml/2006/main"/>
         </p:blipFill>
         <p:spPr>
@@ -12074,7 +11586,7 @@
           <p:cNvPr id="4" name="">
             <a:extLst xmlns:a="http://schemas.openxmlformats.org/drawingml/2006/main">
               <a:ext uri="{FF2B5EF4-FFF2-40B4-BE49-F238E27FC236}">
-                <a16:creationId xmlns:a16="http://schemas.microsoft.com/office/drawing/2014/main" id="{B3D6C7C2-47D8-4D6D-A369-37792088799F}"/>
+                <a16:creationId xmlns:a16="http://schemas.microsoft.com/office/drawing/2014/main" id="{954A2DDA-DA7B-4012-84DE-048FABE2D0FB}"/>
               </a:ext>
             </a:extLst>
           </p:cNvPr>
@@ -12135,7 +11647,7 @@
           <p:cNvPr id="5" name="">
             <a:extLst xmlns:a="http://schemas.openxmlformats.org/drawingml/2006/main">
               <a:ext uri="{FF2B5EF4-FFF2-40B4-BE49-F238E27FC236}">
-                <a16:creationId xmlns:a16="http://schemas.microsoft.com/office/drawing/2014/main" id="{840DBE51-543E-4851-B8BA-5DC127166C40}"/>
+                <a16:creationId xmlns:a16="http://schemas.microsoft.com/office/drawing/2014/main" id="{F49F4C30-D94E-40FB-BB77-B57186F3F472}"/>
               </a:ext>
             </a:extLst>
           </p:cNvPr>
@@ -12196,7 +11708,7 @@
           <p:cNvPr id="6" name="">
             <a:extLst xmlns:a="http://schemas.openxmlformats.org/drawingml/2006/main">
               <a:ext uri="{FF2B5EF4-FFF2-40B4-BE49-F238E27FC236}">
-                <a16:creationId xmlns:a16="http://schemas.microsoft.com/office/drawing/2014/main" id="{5E62B61B-5630-4259-BEAC-C57C64CE3EAF}"/>
+                <a16:creationId xmlns:a16="http://schemas.microsoft.com/office/drawing/2014/main" id="{2C3CD577-81D8-47F1-8911-7A2FF556D980}"/>
               </a:ext>
             </a:extLst>
           </p:cNvPr>
@@ -12229,68 +11741,7 @@
           <p:cNvPr id="7" name="">
             <a:extLst xmlns:a="http://schemas.openxmlformats.org/drawingml/2006/main">
               <a:ext uri="{FF2B5EF4-FFF2-40B4-BE49-F238E27FC236}">
-                <a16:creationId xmlns:a16="http://schemas.microsoft.com/office/drawing/2014/main" id="{C2B1C2E3-2768-429E-9049-827CF9A78F23}"/>
-              </a:ext>
-            </a:extLst>
-          </p:cNvPr>
-          <p:cNvSpPr>
-            <a:spLocks xmlns:a="http://schemas.openxmlformats.org/drawingml/2006/main" noGrp="1"/>
-          </p:cNvSpPr>
-          <p:nvPr/>
-        </p:nvSpPr>
-        <p:spPr>
-          <a:xfrm xmlns:a="http://schemas.openxmlformats.org/drawingml/2006/main">
-            <a:off x="733425" y="6457950"/>
-            <a:ext cx="6191250" cy="209550"/>
-          </a:xfrm>
-          <a:prstGeom xmlns:a="http://schemas.openxmlformats.org/drawingml/2006/main" prst="rect">
-            <a:avLst/>
-          </a:prstGeom>
-          <a:noFill xmlns:a="http://schemas.openxmlformats.org/drawingml/2006/main"/>
-          <a:ln xmlns:a="http://schemas.openxmlformats.org/drawingml/2006/main" w="0">
-            <a:noFill/>
-          </a:ln>
-        </p:spPr>
-        <p:txBody>
-          <a:bodyPr xmlns:a="http://schemas.openxmlformats.org/drawingml/2006/main" lIns="19050" tIns="19050" rIns="19050" bIns="19050" anchor="ctr">
-            <a:normAutofit fontScale="100000"/>
-          </a:bodyPr>
-          <a:lstStyle xmlns:a="http://schemas.openxmlformats.org/drawingml/2006/main"/>
-          <a:p xmlns:a="http://schemas.openxmlformats.org/drawingml/2006/main">
-            <a:pPr algn="l">
-              <a:lnSpc>
-                <a:spcPct val="105000"/>
-              </a:lnSpc>
-              <a:buNone/>
-              <a:defRPr sz="1050" b="0">
-                <a:solidFill>
-                  <a:srgbClr val="E5EDFF"/>
-                </a:solidFill>
-                <a:latin typeface="PingFang SC"/>
-                <a:ea typeface="PingFang SC"/>
-                <a:cs typeface="PingFang SC"/>
-              </a:defRPr>
-            </a:pPr>
-            <a:r>
-              <a:rPr sz="1050" b="0">
-                <a:solidFill>
-                  <a:srgbClr val="E5EDFF"/>
-                </a:solidFill>
-                <a:latin typeface="PingFang SC"/>
-                <a:ea typeface="PingFang SC"/>
-                <a:cs typeface="PingFang SC"/>
-              </a:rPr>
-              <a:t>广东工业大学 · 学术研究汇报</a:t>
-            </a:r>
-          </a:p>
-        </p:txBody>
-      </p:sp>
-      <p:sp>
-        <p:nvSpPr>
-          <p:cNvPr id="8" name="">
-            <a:extLst xmlns:a="http://schemas.openxmlformats.org/drawingml/2006/main">
-              <a:ext uri="{FF2B5EF4-FFF2-40B4-BE49-F238E27FC236}">
-                <a16:creationId xmlns:a16="http://schemas.microsoft.com/office/drawing/2014/main" id="{6F3EEA48-EA5C-49EE-9A54-142C7E63842A}"/>
+                <a16:creationId xmlns:a16="http://schemas.microsoft.com/office/drawing/2014/main" id="{33F84275-76B5-4B6B-B317-D99B7E2C825F}"/>
               </a:ext>
             </a:extLst>
           </p:cNvPr>
@@ -12348,10 +11799,10 @@
       </p:sp>
       <p:sp>
         <p:nvSpPr>
-          <p:cNvPr id="9" name="">
-            <a:extLst xmlns:a="http://schemas.openxmlformats.org/drawingml/2006/main">
-              <a:ext uri="{FF2B5EF4-FFF2-40B4-BE49-F238E27FC236}">
-                <a16:creationId xmlns:a16="http://schemas.microsoft.com/office/drawing/2014/main" id="{FC261C1B-74EA-44F8-A117-B5B0145D0AB3}"/>
+          <p:cNvPr id="8" name="">
+            <a:extLst xmlns:a="http://schemas.openxmlformats.org/drawingml/2006/main">
+              <a:ext uri="{FF2B5EF4-FFF2-40B4-BE49-F238E27FC236}">
+                <a16:creationId xmlns:a16="http://schemas.microsoft.com/office/drawing/2014/main" id="{9936D19D-60E1-4CAB-8D0F-F3F193E21C4A}"/>
               </a:ext>
             </a:extLst>
           </p:cNvPr>
@@ -12409,10 +11860,10 @@
       </p:sp>
       <p:sp>
         <p:nvSpPr>
-          <p:cNvPr id="10" name="">
-            <a:extLst xmlns:a="http://schemas.openxmlformats.org/drawingml/2006/main">
-              <a:ext uri="{FF2B5EF4-FFF2-40B4-BE49-F238E27FC236}">
-                <a16:creationId xmlns:a16="http://schemas.microsoft.com/office/drawing/2014/main" id="{70F88CD1-7B34-45BD-9DAA-11C9B4462FA4}"/>
+          <p:cNvPr id="9" name="">
+            <a:extLst xmlns:a="http://schemas.openxmlformats.org/drawingml/2006/main">
+              <a:ext uri="{FF2B5EF4-FFF2-40B4-BE49-F238E27FC236}">
+                <a16:creationId xmlns:a16="http://schemas.microsoft.com/office/drawing/2014/main" id="{52247385-479D-4A26-9AF5-55FC6D16C7F8}"/>
               </a:ext>
             </a:extLst>
           </p:cNvPr>
@@ -12442,10 +11893,10 @@
       </p:sp>
       <p:sp>
         <p:nvSpPr>
-          <p:cNvPr id="11" name="">
-            <a:extLst xmlns:a="http://schemas.openxmlformats.org/drawingml/2006/main">
-              <a:ext uri="{FF2B5EF4-FFF2-40B4-BE49-F238E27FC236}">
-                <a16:creationId xmlns:a16="http://schemas.microsoft.com/office/drawing/2014/main" id="{A8036FD0-49DE-4333-8658-26FFE78E7564}"/>
+          <p:cNvPr id="10" name="">
+            <a:extLst xmlns:a="http://schemas.openxmlformats.org/drawingml/2006/main">
+              <a:ext uri="{FF2B5EF4-FFF2-40B4-BE49-F238E27FC236}">
+                <a16:creationId xmlns:a16="http://schemas.microsoft.com/office/drawing/2014/main" id="{21A70A85-DF55-4FEB-858B-7CBBA65F6EDB}"/>
               </a:ext>
             </a:extLst>
           </p:cNvPr>
@@ -12535,10 +11986,10 @@
       </p:sp>
       <p:sp>
         <p:nvSpPr>
-          <p:cNvPr id="12" name="">
-            <a:extLst xmlns:a="http://schemas.openxmlformats.org/drawingml/2006/main">
-              <a:ext uri="{FF2B5EF4-FFF2-40B4-BE49-F238E27FC236}">
-                <a16:creationId xmlns:a16="http://schemas.microsoft.com/office/drawing/2014/main" id="{C90356BF-C78A-40E0-B659-63000E3A49BC}"/>
+          <p:cNvPr id="11" name="">
+            <a:extLst xmlns:a="http://schemas.openxmlformats.org/drawingml/2006/main">
+              <a:ext uri="{FF2B5EF4-FFF2-40B4-BE49-F238E27FC236}">
+                <a16:creationId xmlns:a16="http://schemas.microsoft.com/office/drawing/2014/main" id="{07E4BCFA-24ED-4C8E-B2C5-8A8FBD380E67}"/>
               </a:ext>
             </a:extLst>
           </p:cNvPr>
@@ -12628,10 +12079,10 @@
       </p:sp>
       <p:sp>
         <p:nvSpPr>
-          <p:cNvPr id="13" name="">
-            <a:extLst xmlns:a="http://schemas.openxmlformats.org/drawingml/2006/main">
-              <a:ext uri="{FF2B5EF4-FFF2-40B4-BE49-F238E27FC236}">
-                <a16:creationId xmlns:a16="http://schemas.microsoft.com/office/drawing/2014/main" id="{6E7F46EE-190B-45CE-A2A7-301F12B2D37B}"/>
+          <p:cNvPr id="12" name="">
+            <a:extLst xmlns:a="http://schemas.openxmlformats.org/drawingml/2006/main">
+              <a:ext uri="{FF2B5EF4-FFF2-40B4-BE49-F238E27FC236}">
+                <a16:creationId xmlns:a16="http://schemas.microsoft.com/office/drawing/2014/main" id="{3C9C6695-45F3-4BC3-AF20-B4190A9F0F27}"/>
               </a:ext>
             </a:extLst>
           </p:cNvPr>
@@ -12690,7 +12141,7 @@
     </p:spTree>
     <p:extLst>
       <p:ext uri="{BB962C8B-B14F-4D97-AF65-F5344CB8AC3E}">
-        <p14:creationId xmlns:p14="http://schemas.microsoft.com/office/powerpoint/2010/main" val="1118804973"/>
+        <p14:creationId xmlns:p14="http://schemas.microsoft.com/office/powerpoint/2010/main" val="590484343"/>
       </p:ext>
     </p:extLst>
   </p:cSld>
@@ -12718,10 +12169,10 @@
       </p:grpSpPr>
       <p:cxnSp>
         <p:nvCxnSpPr>
-          <p:cNvPr id="16" name=""/>
+          <p:cNvPr id="15" name=""/>
           <p:cNvCxnSpPr>
-            <a:stCxn xmlns:a="http://schemas.openxmlformats.org/drawingml/2006/main" id="10" idx="3"/>
-            <a:endCxn xmlns:a="http://schemas.openxmlformats.org/drawingml/2006/main" id="11" idx="1"/>
+            <a:stCxn xmlns:a="http://schemas.openxmlformats.org/drawingml/2006/main" id="9" idx="3"/>
+            <a:endCxn xmlns:a="http://schemas.openxmlformats.org/drawingml/2006/main" id="10" idx="1"/>
           </p:cNvCxnSpPr>
           <p:nvPr/>
         </p:nvCxnSpPr>
@@ -12744,10 +12195,10 @@
       </p:cxnSp>
       <p:cxnSp>
         <p:nvCxnSpPr>
-          <p:cNvPr id="17" name=""/>
+          <p:cNvPr id="16" name=""/>
           <p:cNvCxnSpPr>
-            <a:stCxn xmlns:a="http://schemas.openxmlformats.org/drawingml/2006/main" id="9" idx="3"/>
-            <a:endCxn xmlns:a="http://schemas.openxmlformats.org/drawingml/2006/main" id="10" idx="1"/>
+            <a:stCxn xmlns:a="http://schemas.openxmlformats.org/drawingml/2006/main" id="8" idx="3"/>
+            <a:endCxn xmlns:a="http://schemas.openxmlformats.org/drawingml/2006/main" id="9" idx="1"/>
           </p:cNvCxnSpPr>
           <p:nvPr/>
         </p:nvCxnSpPr>
@@ -12770,10 +12221,10 @@
       </p:cxnSp>
       <p:sp>
         <p:nvSpPr>
-          <p:cNvPr id="18" name="">
-            <a:extLst xmlns:a="http://schemas.openxmlformats.org/drawingml/2006/main">
-              <a:ext uri="{FF2B5EF4-FFF2-40B4-BE49-F238E27FC236}">
-                <a16:creationId xmlns:a16="http://schemas.microsoft.com/office/drawing/2014/main" id="{F177A653-E55F-4ECA-AED0-DF347D3BC4C8}"/>
+          <p:cNvPr id="17" name="">
+            <a:extLst xmlns:a="http://schemas.openxmlformats.org/drawingml/2006/main">
+              <a:ext uri="{FF2B5EF4-FFF2-40B4-BE49-F238E27FC236}">
+                <a16:creationId xmlns:a16="http://schemas.microsoft.com/office/drawing/2014/main" id="{C8BC5BA8-985C-407F-A74D-23EB0BF23E9B}"/>
               </a:ext>
             </a:extLst>
           </p:cNvPr>
@@ -12806,7 +12257,7 @@
           <p:cNvPr id="2" name="">
             <a:extLst xmlns:a="http://schemas.openxmlformats.org/drawingml/2006/main">
               <a:ext uri="{FF2B5EF4-FFF2-40B4-BE49-F238E27FC236}">
-                <a16:creationId xmlns:a16="http://schemas.microsoft.com/office/drawing/2014/main" id="{37A88B42-F7E8-4942-9FC4-65E02F24E8DB}"/>
+                <a16:creationId xmlns:a16="http://schemas.microsoft.com/office/drawing/2014/main" id="{C1E52464-6CAF-49EA-8E8F-A63134164E32}"/>
               </a:ext>
             </a:extLst>
           </p:cNvPr>
@@ -12836,14 +12287,14 @@
       </p:sp>
       <p:pic>
         <p:nvPicPr>
-          <p:cNvPr id="20" name=""/>
+          <p:cNvPr id="19" name=""/>
           <p:cNvPicPr>
             <a:picLocks xmlns:a="http://schemas.openxmlformats.org/drawingml/2006/main" noChangeAspect="1"/>
           </p:cNvPicPr>
           <p:nvPr/>
         </p:nvPicPr>
         <p:blipFill>
-          <a:blip xmlns:r="http://schemas.openxmlformats.org/officeDocument/2006/relationships" xmlns:a="http://schemas.openxmlformats.org/drawingml/2006/main" r:embed="R15c339f7576e43eb"/>
+          <a:blip xmlns:r="http://schemas.openxmlformats.org/officeDocument/2006/relationships" xmlns:a="http://schemas.openxmlformats.org/drawingml/2006/main" r:embed="R542b6d924a9d4e3e"/>
           <a:stretch xmlns:a="http://schemas.openxmlformats.org/drawingml/2006/main"/>
         </p:blipFill>
         <p:spPr>
@@ -12861,7 +12312,7 @@
           <p:cNvPr id="4" name="">
             <a:extLst xmlns:a="http://schemas.openxmlformats.org/drawingml/2006/main">
               <a:ext uri="{FF2B5EF4-FFF2-40B4-BE49-F238E27FC236}">
-                <a16:creationId xmlns:a16="http://schemas.microsoft.com/office/drawing/2014/main" id="{73031132-D0C6-435A-88F1-CA5F65D05598}"/>
+                <a16:creationId xmlns:a16="http://schemas.microsoft.com/office/drawing/2014/main" id="{4B41856E-CCAA-4A98-8B0E-562E73AED0D5}"/>
               </a:ext>
             </a:extLst>
           </p:cNvPr>
@@ -12922,7 +12373,7 @@
           <p:cNvPr id="5" name="">
             <a:extLst xmlns:a="http://schemas.openxmlformats.org/drawingml/2006/main">
               <a:ext uri="{FF2B5EF4-FFF2-40B4-BE49-F238E27FC236}">
-                <a16:creationId xmlns:a16="http://schemas.microsoft.com/office/drawing/2014/main" id="{8CABFA5F-E52C-496E-8D91-AF6B013E005A}"/>
+                <a16:creationId xmlns:a16="http://schemas.microsoft.com/office/drawing/2014/main" id="{6C107A7B-AA2C-4EF8-82FA-6D4BAA35D78C}"/>
               </a:ext>
             </a:extLst>
           </p:cNvPr>
@@ -12983,7 +12434,7 @@
           <p:cNvPr id="6" name="">
             <a:extLst xmlns:a="http://schemas.openxmlformats.org/drawingml/2006/main">
               <a:ext uri="{FF2B5EF4-FFF2-40B4-BE49-F238E27FC236}">
-                <a16:creationId xmlns:a16="http://schemas.microsoft.com/office/drawing/2014/main" id="{A4407DDC-8C2A-4600-BB07-DD253403F970}"/>
+                <a16:creationId xmlns:a16="http://schemas.microsoft.com/office/drawing/2014/main" id="{D724F6E2-6D76-4654-9B39-75843EAF92C7}"/>
               </a:ext>
             </a:extLst>
           </p:cNvPr>
@@ -13016,68 +12467,7 @@
           <p:cNvPr id="7" name="">
             <a:extLst xmlns:a="http://schemas.openxmlformats.org/drawingml/2006/main">
               <a:ext uri="{FF2B5EF4-FFF2-40B4-BE49-F238E27FC236}">
-                <a16:creationId xmlns:a16="http://schemas.microsoft.com/office/drawing/2014/main" id="{A2F2ED6D-186F-4C39-B6D1-6FE9A91A7331}"/>
-              </a:ext>
-            </a:extLst>
-          </p:cNvPr>
-          <p:cNvSpPr>
-            <a:spLocks xmlns:a="http://schemas.openxmlformats.org/drawingml/2006/main" noGrp="1"/>
-          </p:cNvSpPr>
-          <p:nvPr/>
-        </p:nvSpPr>
-        <p:spPr>
-          <a:xfrm xmlns:a="http://schemas.openxmlformats.org/drawingml/2006/main">
-            <a:off x="733425" y="6457950"/>
-            <a:ext cx="6191250" cy="209550"/>
-          </a:xfrm>
-          <a:prstGeom xmlns:a="http://schemas.openxmlformats.org/drawingml/2006/main" prst="rect">
-            <a:avLst/>
-          </a:prstGeom>
-          <a:noFill xmlns:a="http://schemas.openxmlformats.org/drawingml/2006/main"/>
-          <a:ln xmlns:a="http://schemas.openxmlformats.org/drawingml/2006/main" w="0">
-            <a:noFill/>
-          </a:ln>
-        </p:spPr>
-        <p:txBody>
-          <a:bodyPr xmlns:a="http://schemas.openxmlformats.org/drawingml/2006/main" lIns="19050" tIns="19050" rIns="19050" bIns="19050" anchor="ctr">
-            <a:normAutofit fontScale="100000"/>
-          </a:bodyPr>
-          <a:lstStyle xmlns:a="http://schemas.openxmlformats.org/drawingml/2006/main"/>
-          <a:p xmlns:a="http://schemas.openxmlformats.org/drawingml/2006/main">
-            <a:pPr algn="l">
-              <a:lnSpc>
-                <a:spcPct val="105000"/>
-              </a:lnSpc>
-              <a:buNone/>
-              <a:defRPr sz="1050" b="0">
-                <a:solidFill>
-                  <a:srgbClr val="E5EDFF"/>
-                </a:solidFill>
-                <a:latin typeface="PingFang SC"/>
-                <a:ea typeface="PingFang SC"/>
-                <a:cs typeface="PingFang SC"/>
-              </a:defRPr>
-            </a:pPr>
-            <a:r>
-              <a:rPr sz="1050" b="0">
-                <a:solidFill>
-                  <a:srgbClr val="E5EDFF"/>
-                </a:solidFill>
-                <a:latin typeface="PingFang SC"/>
-                <a:ea typeface="PingFang SC"/>
-                <a:cs typeface="PingFang SC"/>
-              </a:rPr>
-              <a:t>广东工业大学 · 学术研究汇报</a:t>
-            </a:r>
-          </a:p>
-        </p:txBody>
-      </p:sp>
-      <p:sp>
-        <p:nvSpPr>
-          <p:cNvPr id="8" name="">
-            <a:extLst xmlns:a="http://schemas.openxmlformats.org/drawingml/2006/main">
-              <a:ext uri="{FF2B5EF4-FFF2-40B4-BE49-F238E27FC236}">
-                <a16:creationId xmlns:a16="http://schemas.microsoft.com/office/drawing/2014/main" id="{CBF82B0C-C242-47D1-BFA1-90D3BB21114B}"/>
+                <a16:creationId xmlns:a16="http://schemas.microsoft.com/office/drawing/2014/main" id="{3064DFCC-1E7D-4147-BD3E-7387E59FEB85}"/>
               </a:ext>
             </a:extLst>
           </p:cNvPr>
@@ -13135,10 +12525,10 @@
       </p:sp>
       <p:sp>
         <p:nvSpPr>
-          <p:cNvPr id="9" name="">
-            <a:extLst xmlns:a="http://schemas.openxmlformats.org/drawingml/2006/main">
-              <a:ext uri="{FF2B5EF4-FFF2-40B4-BE49-F238E27FC236}">
-                <a16:creationId xmlns:a16="http://schemas.microsoft.com/office/drawing/2014/main" id="{377133FB-F2D4-42D4-A870-552FE083A31E}"/>
+          <p:cNvPr id="8" name="">
+            <a:extLst xmlns:a="http://schemas.openxmlformats.org/drawingml/2006/main">
+              <a:ext uri="{FF2B5EF4-FFF2-40B4-BE49-F238E27FC236}">
+                <a16:creationId xmlns:a16="http://schemas.microsoft.com/office/drawing/2014/main" id="{FB3DC2BC-D6C1-4F35-8C37-10F2E11FA1CE}"/>
               </a:ext>
             </a:extLst>
           </p:cNvPr>
@@ -13228,10 +12618,10 @@
       </p:sp>
       <p:sp>
         <p:nvSpPr>
-          <p:cNvPr id="10" name="">
-            <a:extLst xmlns:a="http://schemas.openxmlformats.org/drawingml/2006/main">
-              <a:ext uri="{FF2B5EF4-FFF2-40B4-BE49-F238E27FC236}">
-                <a16:creationId xmlns:a16="http://schemas.microsoft.com/office/drawing/2014/main" id="{680CCE9F-CB06-4D22-B694-F9A8401EE043}"/>
+          <p:cNvPr id="9" name="">
+            <a:extLst xmlns:a="http://schemas.openxmlformats.org/drawingml/2006/main">
+              <a:ext uri="{FF2B5EF4-FFF2-40B4-BE49-F238E27FC236}">
+                <a16:creationId xmlns:a16="http://schemas.microsoft.com/office/drawing/2014/main" id="{EBC9DDFB-BC17-42FB-8092-02C6237A8A83}"/>
               </a:ext>
             </a:extLst>
           </p:cNvPr>
@@ -13321,10 +12711,10 @@
       </p:sp>
       <p:sp>
         <p:nvSpPr>
-          <p:cNvPr id="11" name="">
-            <a:extLst xmlns:a="http://schemas.openxmlformats.org/drawingml/2006/main">
-              <a:ext uri="{FF2B5EF4-FFF2-40B4-BE49-F238E27FC236}">
-                <a16:creationId xmlns:a16="http://schemas.microsoft.com/office/drawing/2014/main" id="{1B85AB7D-906F-4FF0-B144-FD07ED24E49F}"/>
+          <p:cNvPr id="10" name="">
+            <a:extLst xmlns:a="http://schemas.openxmlformats.org/drawingml/2006/main">
+              <a:ext uri="{FF2B5EF4-FFF2-40B4-BE49-F238E27FC236}">
+                <a16:creationId xmlns:a16="http://schemas.microsoft.com/office/drawing/2014/main" id="{84E08810-34EE-4172-9632-BB1DFD9893A9}"/>
               </a:ext>
             </a:extLst>
           </p:cNvPr>
@@ -13414,10 +12804,10 @@
       </p:sp>
       <p:sp>
         <p:nvSpPr>
-          <p:cNvPr id="14" name="">
-            <a:extLst xmlns:a="http://schemas.openxmlformats.org/drawingml/2006/main">
-              <a:ext uri="{FF2B5EF4-FFF2-40B4-BE49-F238E27FC236}">
-                <a16:creationId xmlns:a16="http://schemas.microsoft.com/office/drawing/2014/main" id="{4D30683A-4A42-42BE-9AD5-EE3A35E96C95}"/>
+          <p:cNvPr id="13" name="">
+            <a:extLst xmlns:a="http://schemas.openxmlformats.org/drawingml/2006/main">
+              <a:ext uri="{FF2B5EF4-FFF2-40B4-BE49-F238E27FC236}">
+                <a16:creationId xmlns:a16="http://schemas.microsoft.com/office/drawing/2014/main" id="{53FDE0D9-5ECE-4A1A-896C-B7FBC89D9FB3}"/>
               </a:ext>
             </a:extLst>
           </p:cNvPr>
@@ -13475,10 +12865,10 @@
       </p:sp>
       <p:sp>
         <p:nvSpPr>
-          <p:cNvPr id="15" name="">
-            <a:extLst xmlns:a="http://schemas.openxmlformats.org/drawingml/2006/main">
-              <a:ext uri="{FF2B5EF4-FFF2-40B4-BE49-F238E27FC236}">
-                <a16:creationId xmlns:a16="http://schemas.microsoft.com/office/drawing/2014/main" id="{A62D06BA-EE56-48AF-98BA-9B775EA9DB52}"/>
+          <p:cNvPr id="14" name="">
+            <a:extLst xmlns:a="http://schemas.openxmlformats.org/drawingml/2006/main">
+              <a:ext uri="{FF2B5EF4-FFF2-40B4-BE49-F238E27FC236}">
+                <a16:creationId xmlns:a16="http://schemas.microsoft.com/office/drawing/2014/main" id="{16811965-5810-4623-88D4-C6E2D279EEEC}"/>
               </a:ext>
             </a:extLst>
           </p:cNvPr>
@@ -13537,7 +12927,7 @@
     </p:spTree>
     <p:extLst>
       <p:ext uri="{BB962C8B-B14F-4D97-AF65-F5344CB8AC3E}">
-        <p14:creationId xmlns:p14="http://schemas.microsoft.com/office/powerpoint/2010/main" val="1109456498"/>
+        <p14:creationId xmlns:p14="http://schemas.microsoft.com/office/powerpoint/2010/main" val="1612578508"/>
       </p:ext>
     </p:extLst>
   </p:cSld>
@@ -13565,10 +12955,10 @@
       </p:grpSpPr>
       <p:sp>
         <p:nvSpPr>
-          <p:cNvPr id="19" name="">
-            <a:extLst xmlns:a="http://schemas.openxmlformats.org/drawingml/2006/main">
-              <a:ext uri="{FF2B5EF4-FFF2-40B4-BE49-F238E27FC236}">
-                <a16:creationId xmlns:a16="http://schemas.microsoft.com/office/drawing/2014/main" id="{423C90E7-6C16-4313-A3F3-55DF7652F606}"/>
+          <p:cNvPr id="18" name="">
+            <a:extLst xmlns:a="http://schemas.openxmlformats.org/drawingml/2006/main">
+              <a:ext uri="{FF2B5EF4-FFF2-40B4-BE49-F238E27FC236}">
+                <a16:creationId xmlns:a16="http://schemas.microsoft.com/office/drawing/2014/main" id="{EE30A4C1-1C34-4277-B7F5-DD9C6D253AA5}"/>
               </a:ext>
             </a:extLst>
           </p:cNvPr>
@@ -13601,7 +12991,7 @@
           <p:cNvPr id="2" name="">
             <a:extLst xmlns:a="http://schemas.openxmlformats.org/drawingml/2006/main">
               <a:ext uri="{FF2B5EF4-FFF2-40B4-BE49-F238E27FC236}">
-                <a16:creationId xmlns:a16="http://schemas.microsoft.com/office/drawing/2014/main" id="{6C563A05-CB89-4A12-8738-59A958004596}"/>
+                <a16:creationId xmlns:a16="http://schemas.microsoft.com/office/drawing/2014/main" id="{E23CDD66-BBC4-4418-B961-08AF6B206AA0}"/>
               </a:ext>
             </a:extLst>
           </p:cNvPr>
@@ -13631,14 +13021,14 @@
       </p:sp>
       <p:pic>
         <p:nvPicPr>
-          <p:cNvPr id="21" name=""/>
+          <p:cNvPr id="20" name=""/>
           <p:cNvPicPr>
             <a:picLocks xmlns:a="http://schemas.openxmlformats.org/drawingml/2006/main" noChangeAspect="1"/>
           </p:cNvPicPr>
           <p:nvPr/>
         </p:nvPicPr>
         <p:blipFill>
-          <a:blip xmlns:r="http://schemas.openxmlformats.org/officeDocument/2006/relationships" xmlns:a="http://schemas.openxmlformats.org/drawingml/2006/main" r:embed="Rf510a0fe0de6467a"/>
+          <a:blip xmlns:r="http://schemas.openxmlformats.org/officeDocument/2006/relationships" xmlns:a="http://schemas.openxmlformats.org/drawingml/2006/main" r:embed="R8bbe0aa1d02c4cd8"/>
           <a:stretch xmlns:a="http://schemas.openxmlformats.org/drawingml/2006/main"/>
         </p:blipFill>
         <p:spPr>
@@ -13656,7 +13046,7 @@
           <p:cNvPr id="4" name="">
             <a:extLst xmlns:a="http://schemas.openxmlformats.org/drawingml/2006/main">
               <a:ext uri="{FF2B5EF4-FFF2-40B4-BE49-F238E27FC236}">
-                <a16:creationId xmlns:a16="http://schemas.microsoft.com/office/drawing/2014/main" id="{F78F8A14-D336-473A-A532-61D141ACDA4D}"/>
+                <a16:creationId xmlns:a16="http://schemas.microsoft.com/office/drawing/2014/main" id="{D1022751-10BE-4DB0-A83A-A4950B54B56A}"/>
               </a:ext>
             </a:extLst>
           </p:cNvPr>
@@ -13717,7 +13107,7 @@
           <p:cNvPr id="5" name="">
             <a:extLst xmlns:a="http://schemas.openxmlformats.org/drawingml/2006/main">
               <a:ext uri="{FF2B5EF4-FFF2-40B4-BE49-F238E27FC236}">
-                <a16:creationId xmlns:a16="http://schemas.microsoft.com/office/drawing/2014/main" id="{3BF68574-C218-49BC-BADF-41D8F7DB4B04}"/>
+                <a16:creationId xmlns:a16="http://schemas.microsoft.com/office/drawing/2014/main" id="{A94C3EBD-80C5-4DD7-BEB0-961D6FC44503}"/>
               </a:ext>
             </a:extLst>
           </p:cNvPr>
@@ -13778,7 +13168,7 @@
           <p:cNvPr id="6" name="">
             <a:extLst xmlns:a="http://schemas.openxmlformats.org/drawingml/2006/main">
               <a:ext uri="{FF2B5EF4-FFF2-40B4-BE49-F238E27FC236}">
-                <a16:creationId xmlns:a16="http://schemas.microsoft.com/office/drawing/2014/main" id="{120EA875-2BA1-48ED-B8E6-C441EFFE6D72}"/>
+                <a16:creationId xmlns:a16="http://schemas.microsoft.com/office/drawing/2014/main" id="{8DCDF7F0-76B6-4AE9-81F3-84632305EF15}"/>
               </a:ext>
             </a:extLst>
           </p:cNvPr>
@@ -13811,68 +13201,7 @@
           <p:cNvPr id="7" name="">
             <a:extLst xmlns:a="http://schemas.openxmlformats.org/drawingml/2006/main">
               <a:ext uri="{FF2B5EF4-FFF2-40B4-BE49-F238E27FC236}">
-                <a16:creationId xmlns:a16="http://schemas.microsoft.com/office/drawing/2014/main" id="{BAA923BF-44A9-4076-982D-8145EE005A42}"/>
-              </a:ext>
-            </a:extLst>
-          </p:cNvPr>
-          <p:cNvSpPr>
-            <a:spLocks xmlns:a="http://schemas.openxmlformats.org/drawingml/2006/main" noGrp="1"/>
-          </p:cNvSpPr>
-          <p:nvPr/>
-        </p:nvSpPr>
-        <p:spPr>
-          <a:xfrm xmlns:a="http://schemas.openxmlformats.org/drawingml/2006/main">
-            <a:off x="733425" y="6457950"/>
-            <a:ext cx="6191250" cy="209550"/>
-          </a:xfrm>
-          <a:prstGeom xmlns:a="http://schemas.openxmlformats.org/drawingml/2006/main" prst="rect">
-            <a:avLst/>
-          </a:prstGeom>
-          <a:noFill xmlns:a="http://schemas.openxmlformats.org/drawingml/2006/main"/>
-          <a:ln xmlns:a="http://schemas.openxmlformats.org/drawingml/2006/main" w="0">
-            <a:noFill/>
-          </a:ln>
-        </p:spPr>
-        <p:txBody>
-          <a:bodyPr xmlns:a="http://schemas.openxmlformats.org/drawingml/2006/main" lIns="19050" tIns="19050" rIns="19050" bIns="19050" anchor="ctr">
-            <a:normAutofit fontScale="100000"/>
-          </a:bodyPr>
-          <a:lstStyle xmlns:a="http://schemas.openxmlformats.org/drawingml/2006/main"/>
-          <a:p xmlns:a="http://schemas.openxmlformats.org/drawingml/2006/main">
-            <a:pPr algn="l">
-              <a:lnSpc>
-                <a:spcPct val="105000"/>
-              </a:lnSpc>
-              <a:buNone/>
-              <a:defRPr sz="1050" b="0">
-                <a:solidFill>
-                  <a:srgbClr val="E5EDFF"/>
-                </a:solidFill>
-                <a:latin typeface="PingFang SC"/>
-                <a:ea typeface="PingFang SC"/>
-                <a:cs typeface="PingFang SC"/>
-              </a:defRPr>
-            </a:pPr>
-            <a:r>
-              <a:rPr sz="1050" b="0">
-                <a:solidFill>
-                  <a:srgbClr val="E5EDFF"/>
-                </a:solidFill>
-                <a:latin typeface="PingFang SC"/>
-                <a:ea typeface="PingFang SC"/>
-                <a:cs typeface="PingFang SC"/>
-              </a:rPr>
-              <a:t>广东工业大学 · 学术研究汇报</a:t>
-            </a:r>
-          </a:p>
-        </p:txBody>
-      </p:sp>
-      <p:sp>
-        <p:nvSpPr>
-          <p:cNvPr id="8" name="">
-            <a:extLst xmlns:a="http://schemas.openxmlformats.org/drawingml/2006/main">
-              <a:ext uri="{FF2B5EF4-FFF2-40B4-BE49-F238E27FC236}">
-                <a16:creationId xmlns:a16="http://schemas.microsoft.com/office/drawing/2014/main" id="{48340368-D4C5-4527-BF57-905E5AB20135}"/>
+                <a16:creationId xmlns:a16="http://schemas.microsoft.com/office/drawing/2014/main" id="{FC469904-3AF2-406B-AF82-95A152470FF7}"/>
               </a:ext>
             </a:extLst>
           </p:cNvPr>
@@ -13930,10 +13259,10 @@
       </p:sp>
       <p:sp>
         <p:nvSpPr>
-          <p:cNvPr id="9" name="">
-            <a:extLst xmlns:a="http://schemas.openxmlformats.org/drawingml/2006/main">
-              <a:ext uri="{FF2B5EF4-FFF2-40B4-BE49-F238E27FC236}">
-                <a16:creationId xmlns:a16="http://schemas.microsoft.com/office/drawing/2014/main" id="{69BF5012-F33F-4AE4-A0EC-37DC8951EFD7}"/>
+          <p:cNvPr id="8" name="">
+            <a:extLst xmlns:a="http://schemas.openxmlformats.org/drawingml/2006/main">
+              <a:ext uri="{FF2B5EF4-FFF2-40B4-BE49-F238E27FC236}">
+                <a16:creationId xmlns:a16="http://schemas.microsoft.com/office/drawing/2014/main" id="{412A63B9-3995-4F24-A783-33586FD34044}"/>
               </a:ext>
             </a:extLst>
           </p:cNvPr>
@@ -13991,10 +13320,10 @@
       </p:sp>
       <p:sp>
         <p:nvSpPr>
-          <p:cNvPr id="10" name="">
-            <a:extLst xmlns:a="http://schemas.openxmlformats.org/drawingml/2006/main">
-              <a:ext uri="{FF2B5EF4-FFF2-40B4-BE49-F238E27FC236}">
-                <a16:creationId xmlns:a16="http://schemas.microsoft.com/office/drawing/2014/main" id="{A417E89C-0739-4CA3-8FA1-6B66D38B6733}"/>
+          <p:cNvPr id="9" name="">
+            <a:extLst xmlns:a="http://schemas.openxmlformats.org/drawingml/2006/main">
+              <a:ext uri="{FF2B5EF4-FFF2-40B4-BE49-F238E27FC236}">
+                <a16:creationId xmlns:a16="http://schemas.microsoft.com/office/drawing/2014/main" id="{DC54F694-B9F5-4714-9686-450571FDEDC5}"/>
               </a:ext>
             </a:extLst>
           </p:cNvPr>
@@ -14084,10 +13413,10 @@
       </p:sp>
       <p:sp>
         <p:nvSpPr>
-          <p:cNvPr id="11" name="">
-            <a:extLst xmlns:a="http://schemas.openxmlformats.org/drawingml/2006/main">
-              <a:ext uri="{FF2B5EF4-FFF2-40B4-BE49-F238E27FC236}">
-                <a16:creationId xmlns:a16="http://schemas.microsoft.com/office/drawing/2014/main" id="{31FA9DAC-23A6-4718-9EB7-7B5CFFDE270B}"/>
+          <p:cNvPr id="10" name="">
+            <a:extLst xmlns:a="http://schemas.openxmlformats.org/drawingml/2006/main">
+              <a:ext uri="{FF2B5EF4-FFF2-40B4-BE49-F238E27FC236}">
+                <a16:creationId xmlns:a16="http://schemas.microsoft.com/office/drawing/2014/main" id="{7874DEEF-32D6-46B4-90AB-2A38E410E1FF}"/>
               </a:ext>
             </a:extLst>
           </p:cNvPr>
@@ -14177,10 +13506,10 @@
       </p:sp>
       <p:sp>
         <p:nvSpPr>
-          <p:cNvPr id="12" name="">
-            <a:extLst xmlns:a="http://schemas.openxmlformats.org/drawingml/2006/main">
-              <a:ext uri="{FF2B5EF4-FFF2-40B4-BE49-F238E27FC236}">
-                <a16:creationId xmlns:a16="http://schemas.microsoft.com/office/drawing/2014/main" id="{879494AF-C0C2-47B7-8215-7152D4A20054}"/>
+          <p:cNvPr id="11" name="">
+            <a:extLst xmlns:a="http://schemas.openxmlformats.org/drawingml/2006/main">
+              <a:ext uri="{FF2B5EF4-FFF2-40B4-BE49-F238E27FC236}">
+                <a16:creationId xmlns:a16="http://schemas.microsoft.com/office/drawing/2014/main" id="{02A8A98D-18B3-4D29-BC5F-428C4658061D}"/>
               </a:ext>
             </a:extLst>
           </p:cNvPr>
@@ -14270,10 +13599,10 @@
       </p:sp>
       <p:sp>
         <p:nvSpPr>
-          <p:cNvPr id="13" name="">
-            <a:extLst xmlns:a="http://schemas.openxmlformats.org/drawingml/2006/main">
-              <a:ext uri="{FF2B5EF4-FFF2-40B4-BE49-F238E27FC236}">
-                <a16:creationId xmlns:a16="http://schemas.microsoft.com/office/drawing/2014/main" id="{31881BC8-64D4-4788-8EF0-3C42D37B0E60}"/>
+          <p:cNvPr id="12" name="">
+            <a:extLst xmlns:a="http://schemas.openxmlformats.org/drawingml/2006/main">
+              <a:ext uri="{FF2B5EF4-FFF2-40B4-BE49-F238E27FC236}">
+                <a16:creationId xmlns:a16="http://schemas.microsoft.com/office/drawing/2014/main" id="{0D9A726C-8D7A-4C87-9C43-979C7969D242}"/>
               </a:ext>
             </a:extLst>
           </p:cNvPr>
@@ -14363,10 +13692,10 @@
       </p:sp>
       <p:sp>
         <p:nvSpPr>
-          <p:cNvPr id="14" name="">
-            <a:extLst xmlns:a="http://schemas.openxmlformats.org/drawingml/2006/main">
-              <a:ext uri="{FF2B5EF4-FFF2-40B4-BE49-F238E27FC236}">
-                <a16:creationId xmlns:a16="http://schemas.microsoft.com/office/drawing/2014/main" id="{918D5D78-CF08-461A-9659-4D1FEC57171F}"/>
+          <p:cNvPr id="13" name="">
+            <a:extLst xmlns:a="http://schemas.openxmlformats.org/drawingml/2006/main">
+              <a:ext uri="{FF2B5EF4-FFF2-40B4-BE49-F238E27FC236}">
+                <a16:creationId xmlns:a16="http://schemas.microsoft.com/office/drawing/2014/main" id="{117B6903-B59B-48BB-AA5A-D9F5995275DB}"/>
               </a:ext>
             </a:extLst>
           </p:cNvPr>
@@ -14424,10 +13753,10 @@
       </p:sp>
       <p:sp>
         <p:nvSpPr>
-          <p:cNvPr id="15" name="">
-            <a:extLst xmlns:a="http://schemas.openxmlformats.org/drawingml/2006/main">
-              <a:ext uri="{FF2B5EF4-FFF2-40B4-BE49-F238E27FC236}">
-                <a16:creationId xmlns:a16="http://schemas.microsoft.com/office/drawing/2014/main" id="{18B03E8A-705D-4CD4-BB15-8B4A2F9201C9}"/>
+          <p:cNvPr id="14" name="">
+            <a:extLst xmlns:a="http://schemas.openxmlformats.org/drawingml/2006/main">
+              <a:ext uri="{FF2B5EF4-FFF2-40B4-BE49-F238E27FC236}">
+                <a16:creationId xmlns:a16="http://schemas.microsoft.com/office/drawing/2014/main" id="{4592AFD3-606E-4A0F-B84C-A0C3714762C0}"/>
               </a:ext>
             </a:extLst>
           </p:cNvPr>
@@ -14490,10 +13819,10 @@
       </p:sp>
       <p:sp>
         <p:nvSpPr>
-          <p:cNvPr id="16" name="">
-            <a:extLst xmlns:a="http://schemas.openxmlformats.org/drawingml/2006/main">
-              <a:ext uri="{FF2B5EF4-FFF2-40B4-BE49-F238E27FC236}">
-                <a16:creationId xmlns:a16="http://schemas.microsoft.com/office/drawing/2014/main" id="{03DB181E-4EF3-46C6-9D98-174C5F9461A7}"/>
+          <p:cNvPr id="15" name="">
+            <a:extLst xmlns:a="http://schemas.openxmlformats.org/drawingml/2006/main">
+              <a:ext uri="{FF2B5EF4-FFF2-40B4-BE49-F238E27FC236}">
+                <a16:creationId xmlns:a16="http://schemas.microsoft.com/office/drawing/2014/main" id="{84114E0C-9308-423E-B96A-0DD1DD15311C}"/>
               </a:ext>
             </a:extLst>
           </p:cNvPr>
@@ -14556,10 +13885,10 @@
       </p:sp>
       <p:sp>
         <p:nvSpPr>
-          <p:cNvPr id="17" name="">
-            <a:extLst xmlns:a="http://schemas.openxmlformats.org/drawingml/2006/main">
-              <a:ext uri="{FF2B5EF4-FFF2-40B4-BE49-F238E27FC236}">
-                <a16:creationId xmlns:a16="http://schemas.microsoft.com/office/drawing/2014/main" id="{17213020-EB16-430C-B4E6-4AD217BA0D3B}"/>
+          <p:cNvPr id="16" name="">
+            <a:extLst xmlns:a="http://schemas.openxmlformats.org/drawingml/2006/main">
+              <a:ext uri="{FF2B5EF4-FFF2-40B4-BE49-F238E27FC236}">
+                <a16:creationId xmlns:a16="http://schemas.microsoft.com/office/drawing/2014/main" id="{F2A351C0-BD39-4408-A9DF-20E40D1B3E46}"/>
               </a:ext>
             </a:extLst>
           </p:cNvPr>
@@ -14622,10 +13951,10 @@
       </p:sp>
       <p:sp>
         <p:nvSpPr>
-          <p:cNvPr id="18" name="">
-            <a:extLst xmlns:a="http://schemas.openxmlformats.org/drawingml/2006/main">
-              <a:ext uri="{FF2B5EF4-FFF2-40B4-BE49-F238E27FC236}">
-                <a16:creationId xmlns:a16="http://schemas.microsoft.com/office/drawing/2014/main" id="{C1DF580E-B418-4967-9EA6-35DB4706AFC2}"/>
+          <p:cNvPr id="17" name="">
+            <a:extLst xmlns:a="http://schemas.openxmlformats.org/drawingml/2006/main">
+              <a:ext uri="{FF2B5EF4-FFF2-40B4-BE49-F238E27FC236}">
+                <a16:creationId xmlns:a16="http://schemas.microsoft.com/office/drawing/2014/main" id="{F67A1ED6-7701-4062-A49C-40D897DDA439}"/>
               </a:ext>
             </a:extLst>
           </p:cNvPr>
@@ -14684,7 +14013,7 @@
     </p:spTree>
     <p:extLst>
       <p:ext uri="{BB962C8B-B14F-4D97-AF65-F5344CB8AC3E}">
-        <p14:creationId xmlns:p14="http://schemas.microsoft.com/office/powerpoint/2010/main" val="1385926563"/>
+        <p14:creationId xmlns:p14="http://schemas.microsoft.com/office/powerpoint/2010/main" val="1856700506"/>
       </p:ext>
     </p:extLst>
   </p:cSld>
@@ -14712,10 +14041,10 @@
       </p:grpSpPr>
       <p:sp>
         <p:nvSpPr>
-          <p:cNvPr id="52" name="">
-            <a:extLst xmlns:a="http://schemas.openxmlformats.org/drawingml/2006/main">
-              <a:ext uri="{FF2B5EF4-FFF2-40B4-BE49-F238E27FC236}">
-                <a16:creationId xmlns:a16="http://schemas.microsoft.com/office/drawing/2014/main" id="{C690C05D-2B0E-4786-AF94-C0B8596478FD}"/>
+          <p:cNvPr id="51" name="">
+            <a:extLst xmlns:a="http://schemas.openxmlformats.org/drawingml/2006/main">
+              <a:ext uri="{FF2B5EF4-FFF2-40B4-BE49-F238E27FC236}">
+                <a16:creationId xmlns:a16="http://schemas.microsoft.com/office/drawing/2014/main" id="{E9663DC1-B4AC-4A69-AEFA-D2990F382B54}"/>
               </a:ext>
             </a:extLst>
           </p:cNvPr>
@@ -14748,7 +14077,7 @@
           <p:cNvPr id="2" name="">
             <a:extLst xmlns:a="http://schemas.openxmlformats.org/drawingml/2006/main">
               <a:ext uri="{FF2B5EF4-FFF2-40B4-BE49-F238E27FC236}">
-                <a16:creationId xmlns:a16="http://schemas.microsoft.com/office/drawing/2014/main" id="{1939828B-4823-4087-83D1-7C2C9547E973}"/>
+                <a16:creationId xmlns:a16="http://schemas.microsoft.com/office/drawing/2014/main" id="{8E8A0E78-C674-41F5-A609-7B5D2675A4BE}"/>
               </a:ext>
             </a:extLst>
           </p:cNvPr>
@@ -14778,14 +14107,14 @@
       </p:sp>
       <p:pic>
         <p:nvPicPr>
-          <p:cNvPr id="54" name=""/>
+          <p:cNvPr id="53" name=""/>
           <p:cNvPicPr>
             <a:picLocks xmlns:a="http://schemas.openxmlformats.org/drawingml/2006/main" noChangeAspect="1"/>
           </p:cNvPicPr>
           <p:nvPr/>
         </p:nvPicPr>
         <p:blipFill>
-          <a:blip xmlns:r="http://schemas.openxmlformats.org/officeDocument/2006/relationships" xmlns:a="http://schemas.openxmlformats.org/drawingml/2006/main" r:embed="R262450c9121745e7"/>
+          <a:blip xmlns:r="http://schemas.openxmlformats.org/officeDocument/2006/relationships" xmlns:a="http://schemas.openxmlformats.org/drawingml/2006/main" r:embed="R1b268df926574580"/>
           <a:stretch xmlns:a="http://schemas.openxmlformats.org/drawingml/2006/main"/>
         </p:blipFill>
         <p:spPr>
@@ -14803,7 +14132,7 @@
           <p:cNvPr id="4" name="">
             <a:extLst xmlns:a="http://schemas.openxmlformats.org/drawingml/2006/main">
               <a:ext uri="{FF2B5EF4-FFF2-40B4-BE49-F238E27FC236}">
-                <a16:creationId xmlns:a16="http://schemas.microsoft.com/office/drawing/2014/main" id="{B76809B7-8CF8-4D0E-9807-ADB89E7B7236}"/>
+                <a16:creationId xmlns:a16="http://schemas.microsoft.com/office/drawing/2014/main" id="{95679DCB-7052-4640-8EDC-C17042CA1DF9}"/>
               </a:ext>
             </a:extLst>
           </p:cNvPr>
@@ -14864,7 +14193,7 @@
           <p:cNvPr id="5" name="">
             <a:extLst xmlns:a="http://schemas.openxmlformats.org/drawingml/2006/main">
               <a:ext uri="{FF2B5EF4-FFF2-40B4-BE49-F238E27FC236}">
-                <a16:creationId xmlns:a16="http://schemas.microsoft.com/office/drawing/2014/main" id="{4B182401-0E5E-458E-BC62-285349189505}"/>
+                <a16:creationId xmlns:a16="http://schemas.microsoft.com/office/drawing/2014/main" id="{6E075B39-E066-4AD4-81B1-91FAAD562FC2}"/>
               </a:ext>
             </a:extLst>
           </p:cNvPr>
@@ -14925,7 +14254,7 @@
           <p:cNvPr id="6" name="">
             <a:extLst xmlns:a="http://schemas.openxmlformats.org/drawingml/2006/main">
               <a:ext uri="{FF2B5EF4-FFF2-40B4-BE49-F238E27FC236}">
-                <a16:creationId xmlns:a16="http://schemas.microsoft.com/office/drawing/2014/main" id="{9085F456-B399-495E-A9A2-A155BF81A2F0}"/>
+                <a16:creationId xmlns:a16="http://schemas.microsoft.com/office/drawing/2014/main" id="{8909DDBA-67AA-42CE-89D5-499991F61151}"/>
               </a:ext>
             </a:extLst>
           </p:cNvPr>
@@ -14958,68 +14287,7 @@
           <p:cNvPr id="7" name="">
             <a:extLst xmlns:a="http://schemas.openxmlformats.org/drawingml/2006/main">
               <a:ext uri="{FF2B5EF4-FFF2-40B4-BE49-F238E27FC236}">
-                <a16:creationId xmlns:a16="http://schemas.microsoft.com/office/drawing/2014/main" id="{851F86ED-F5E6-4318-8003-8C208E1F1364}"/>
-              </a:ext>
-            </a:extLst>
-          </p:cNvPr>
-          <p:cNvSpPr>
-            <a:spLocks xmlns:a="http://schemas.openxmlformats.org/drawingml/2006/main" noGrp="1"/>
-          </p:cNvSpPr>
-          <p:nvPr/>
-        </p:nvSpPr>
-        <p:spPr>
-          <a:xfrm xmlns:a="http://schemas.openxmlformats.org/drawingml/2006/main">
-            <a:off x="733425" y="6457950"/>
-            <a:ext cx="6191250" cy="209550"/>
-          </a:xfrm>
-          <a:prstGeom xmlns:a="http://schemas.openxmlformats.org/drawingml/2006/main" prst="rect">
-            <a:avLst/>
-          </a:prstGeom>
-          <a:noFill xmlns:a="http://schemas.openxmlformats.org/drawingml/2006/main"/>
-          <a:ln xmlns:a="http://schemas.openxmlformats.org/drawingml/2006/main" w="0">
-            <a:noFill/>
-          </a:ln>
-        </p:spPr>
-        <p:txBody>
-          <a:bodyPr xmlns:a="http://schemas.openxmlformats.org/drawingml/2006/main" lIns="19050" tIns="19050" rIns="19050" bIns="19050" anchor="ctr">
-            <a:normAutofit fontScale="100000"/>
-          </a:bodyPr>
-          <a:lstStyle xmlns:a="http://schemas.openxmlformats.org/drawingml/2006/main"/>
-          <a:p xmlns:a="http://schemas.openxmlformats.org/drawingml/2006/main">
-            <a:pPr algn="l">
-              <a:lnSpc>
-                <a:spcPct val="105000"/>
-              </a:lnSpc>
-              <a:buNone/>
-              <a:defRPr sz="1050" b="0">
-                <a:solidFill>
-                  <a:srgbClr val="E5EDFF"/>
-                </a:solidFill>
-                <a:latin typeface="PingFang SC"/>
-                <a:ea typeface="PingFang SC"/>
-                <a:cs typeface="PingFang SC"/>
-              </a:defRPr>
-            </a:pPr>
-            <a:r>
-              <a:rPr sz="1050" b="0">
-                <a:solidFill>
-                  <a:srgbClr val="E5EDFF"/>
-                </a:solidFill>
-                <a:latin typeface="PingFang SC"/>
-                <a:ea typeface="PingFang SC"/>
-                <a:cs typeface="PingFang SC"/>
-              </a:rPr>
-              <a:t>广东工业大学 · 学术研究汇报</a:t>
-            </a:r>
-          </a:p>
-        </p:txBody>
-      </p:sp>
-      <p:sp>
-        <p:nvSpPr>
-          <p:cNvPr id="8" name="">
-            <a:extLst xmlns:a="http://schemas.openxmlformats.org/drawingml/2006/main">
-              <a:ext uri="{FF2B5EF4-FFF2-40B4-BE49-F238E27FC236}">
-                <a16:creationId xmlns:a16="http://schemas.microsoft.com/office/drawing/2014/main" id="{0E2428C1-7277-43FE-8037-30742BFD0DD4}"/>
+                <a16:creationId xmlns:a16="http://schemas.microsoft.com/office/drawing/2014/main" id="{2B005671-4DCA-4CAD-B4D1-06A4B35BFCE3}"/>
               </a:ext>
             </a:extLst>
           </p:cNvPr>
@@ -15077,10 +14345,10 @@
       </p:sp>
       <p:sp>
         <p:nvSpPr>
-          <p:cNvPr id="9" name="">
-            <a:extLst xmlns:a="http://schemas.openxmlformats.org/drawingml/2006/main">
-              <a:ext uri="{FF2B5EF4-FFF2-40B4-BE49-F238E27FC236}">
-                <a16:creationId xmlns:a16="http://schemas.microsoft.com/office/drawing/2014/main" id="{00CBE68D-FC1E-4643-955C-C5478B5D1D0A}"/>
+          <p:cNvPr id="8" name="">
+            <a:extLst xmlns:a="http://schemas.openxmlformats.org/drawingml/2006/main">
+              <a:ext uri="{FF2B5EF4-FFF2-40B4-BE49-F238E27FC236}">
+                <a16:creationId xmlns:a16="http://schemas.microsoft.com/office/drawing/2014/main" id="{767FED0B-F475-46B9-9966-34987701696E}"/>
               </a:ext>
             </a:extLst>
           </p:cNvPr>
@@ -15138,10 +14406,10 @@
       </p:sp>
       <p:sp>
         <p:nvSpPr>
-          <p:cNvPr id="10" name="">
-            <a:extLst xmlns:a="http://schemas.openxmlformats.org/drawingml/2006/main">
-              <a:ext uri="{FF2B5EF4-FFF2-40B4-BE49-F238E27FC236}">
-                <a16:creationId xmlns:a16="http://schemas.microsoft.com/office/drawing/2014/main" id="{85ACC357-44B3-4FDF-922D-B68BE311376A}"/>
+          <p:cNvPr id="9" name="">
+            <a:extLst xmlns:a="http://schemas.openxmlformats.org/drawingml/2006/main">
+              <a:ext uri="{FF2B5EF4-FFF2-40B4-BE49-F238E27FC236}">
+                <a16:creationId xmlns:a16="http://schemas.microsoft.com/office/drawing/2014/main" id="{6FE6362D-7CA6-4652-9E9E-218D83CF0951}"/>
               </a:ext>
             </a:extLst>
           </p:cNvPr>
@@ -15199,10 +14467,10 @@
       </p:sp>
       <p:sp>
         <p:nvSpPr>
-          <p:cNvPr id="11" name="">
-            <a:extLst xmlns:a="http://schemas.openxmlformats.org/drawingml/2006/main">
-              <a:ext uri="{FF2B5EF4-FFF2-40B4-BE49-F238E27FC236}">
-                <a16:creationId xmlns:a16="http://schemas.microsoft.com/office/drawing/2014/main" id="{D8B0BA8D-BEDB-40B5-BFCE-7A089354CBED}"/>
+          <p:cNvPr id="10" name="">
+            <a:extLst xmlns:a="http://schemas.openxmlformats.org/drawingml/2006/main">
+              <a:ext uri="{FF2B5EF4-FFF2-40B4-BE49-F238E27FC236}">
+                <a16:creationId xmlns:a16="http://schemas.microsoft.com/office/drawing/2014/main" id="{0B65E5C8-FFB2-4E57-9F81-6BD763CA6D43}"/>
               </a:ext>
             </a:extLst>
           </p:cNvPr>
@@ -15232,10 +14500,10 @@
       </p:sp>
       <p:sp>
         <p:nvSpPr>
-          <p:cNvPr id="12" name="">
-            <a:extLst xmlns:a="http://schemas.openxmlformats.org/drawingml/2006/main">
-              <a:ext uri="{FF2B5EF4-FFF2-40B4-BE49-F238E27FC236}">
-                <a16:creationId xmlns:a16="http://schemas.microsoft.com/office/drawing/2014/main" id="{7932F555-C67F-4545-B729-9B670DD21A07}"/>
+          <p:cNvPr id="11" name="">
+            <a:extLst xmlns:a="http://schemas.openxmlformats.org/drawingml/2006/main">
+              <a:ext uri="{FF2B5EF4-FFF2-40B4-BE49-F238E27FC236}">
+                <a16:creationId xmlns:a16="http://schemas.microsoft.com/office/drawing/2014/main" id="{762AB153-5DC3-4FAF-A50D-71D7B718C031}"/>
               </a:ext>
             </a:extLst>
           </p:cNvPr>
@@ -15293,10 +14561,10 @@
       </p:sp>
       <p:sp>
         <p:nvSpPr>
-          <p:cNvPr id="13" name="">
-            <a:extLst xmlns:a="http://schemas.openxmlformats.org/drawingml/2006/main">
-              <a:ext uri="{FF2B5EF4-FFF2-40B4-BE49-F238E27FC236}">
-                <a16:creationId xmlns:a16="http://schemas.microsoft.com/office/drawing/2014/main" id="{95BA3475-8E72-4FFC-BFEC-15241F93B023}"/>
+          <p:cNvPr id="12" name="">
+            <a:extLst xmlns:a="http://schemas.openxmlformats.org/drawingml/2006/main">
+              <a:ext uri="{FF2B5EF4-FFF2-40B4-BE49-F238E27FC236}">
+                <a16:creationId xmlns:a16="http://schemas.microsoft.com/office/drawing/2014/main" id="{B67ADD24-BE09-45BD-ADE0-AD30DEC8C2C5}"/>
               </a:ext>
             </a:extLst>
           </p:cNvPr>
@@ -15354,10 +14622,10 @@
       </p:sp>
       <p:sp>
         <p:nvSpPr>
-          <p:cNvPr id="14" name="">
-            <a:extLst xmlns:a="http://schemas.openxmlformats.org/drawingml/2006/main">
-              <a:ext uri="{FF2B5EF4-FFF2-40B4-BE49-F238E27FC236}">
-                <a16:creationId xmlns:a16="http://schemas.microsoft.com/office/drawing/2014/main" id="{3673E544-63C1-4124-934C-57F5725CC16A}"/>
+          <p:cNvPr id="13" name="">
+            <a:extLst xmlns:a="http://schemas.openxmlformats.org/drawingml/2006/main">
+              <a:ext uri="{FF2B5EF4-FFF2-40B4-BE49-F238E27FC236}">
+                <a16:creationId xmlns:a16="http://schemas.microsoft.com/office/drawing/2014/main" id="{6F5DE088-B6E3-4B7C-AF56-4B451ACDCCE0}"/>
               </a:ext>
             </a:extLst>
           </p:cNvPr>
@@ -15387,10 +14655,10 @@
       </p:sp>
       <p:sp>
         <p:nvSpPr>
-          <p:cNvPr id="15" name="">
-            <a:extLst xmlns:a="http://schemas.openxmlformats.org/drawingml/2006/main">
-              <a:ext uri="{FF2B5EF4-FFF2-40B4-BE49-F238E27FC236}">
-                <a16:creationId xmlns:a16="http://schemas.microsoft.com/office/drawing/2014/main" id="{29BEA9CC-012E-4D6D-BC6A-2AD89710DECF}"/>
+          <p:cNvPr id="14" name="">
+            <a:extLst xmlns:a="http://schemas.openxmlformats.org/drawingml/2006/main">
+              <a:ext uri="{FF2B5EF4-FFF2-40B4-BE49-F238E27FC236}">
+                <a16:creationId xmlns:a16="http://schemas.microsoft.com/office/drawing/2014/main" id="{7B5D39CE-71D6-498B-826F-FFE5DAE334D9}"/>
               </a:ext>
             </a:extLst>
           </p:cNvPr>
@@ -15448,10 +14716,10 @@
       </p:sp>
       <p:sp>
         <p:nvSpPr>
-          <p:cNvPr id="16" name="">
-            <a:extLst xmlns:a="http://schemas.openxmlformats.org/drawingml/2006/main">
-              <a:ext uri="{FF2B5EF4-FFF2-40B4-BE49-F238E27FC236}">
-                <a16:creationId xmlns:a16="http://schemas.microsoft.com/office/drawing/2014/main" id="{FE82FA0E-FC66-4373-B007-671D7E7F1CB1}"/>
+          <p:cNvPr id="15" name="">
+            <a:extLst xmlns:a="http://schemas.openxmlformats.org/drawingml/2006/main">
+              <a:ext uri="{FF2B5EF4-FFF2-40B4-BE49-F238E27FC236}">
+                <a16:creationId xmlns:a16="http://schemas.microsoft.com/office/drawing/2014/main" id="{7556D553-5E70-4D00-87FF-0846051CFFDC}"/>
               </a:ext>
             </a:extLst>
           </p:cNvPr>
@@ -15509,10 +14777,10 @@
       </p:sp>
       <p:sp>
         <p:nvSpPr>
-          <p:cNvPr id="17" name="">
-            <a:extLst xmlns:a="http://schemas.openxmlformats.org/drawingml/2006/main">
-              <a:ext uri="{FF2B5EF4-FFF2-40B4-BE49-F238E27FC236}">
-                <a16:creationId xmlns:a16="http://schemas.microsoft.com/office/drawing/2014/main" id="{0341AC51-734C-4E35-8F98-0598FCCE72B0}"/>
+          <p:cNvPr id="16" name="">
+            <a:extLst xmlns:a="http://schemas.openxmlformats.org/drawingml/2006/main">
+              <a:ext uri="{FF2B5EF4-FFF2-40B4-BE49-F238E27FC236}">
+                <a16:creationId xmlns:a16="http://schemas.microsoft.com/office/drawing/2014/main" id="{51E37F47-CD19-40E4-981D-4725F940225F}"/>
               </a:ext>
             </a:extLst>
           </p:cNvPr>
@@ -15542,10 +14810,10 @@
       </p:sp>
       <p:sp>
         <p:nvSpPr>
-          <p:cNvPr id="18" name="">
-            <a:extLst xmlns:a="http://schemas.openxmlformats.org/drawingml/2006/main">
-              <a:ext uri="{FF2B5EF4-FFF2-40B4-BE49-F238E27FC236}">
-                <a16:creationId xmlns:a16="http://schemas.microsoft.com/office/drawing/2014/main" id="{93A0C6A1-EC1F-4A10-839D-5FE7F73A7DCC}"/>
+          <p:cNvPr id="17" name="">
+            <a:extLst xmlns:a="http://schemas.openxmlformats.org/drawingml/2006/main">
+              <a:ext uri="{FF2B5EF4-FFF2-40B4-BE49-F238E27FC236}">
+                <a16:creationId xmlns:a16="http://schemas.microsoft.com/office/drawing/2014/main" id="{7CF73B7C-2C2B-4ACE-A429-70D6A0927DAC}"/>
               </a:ext>
             </a:extLst>
           </p:cNvPr>
@@ -15603,10 +14871,10 @@
       </p:sp>
       <p:sp>
         <p:nvSpPr>
-          <p:cNvPr id="19" name="">
-            <a:extLst xmlns:a="http://schemas.openxmlformats.org/drawingml/2006/main">
-              <a:ext uri="{FF2B5EF4-FFF2-40B4-BE49-F238E27FC236}">
-                <a16:creationId xmlns:a16="http://schemas.microsoft.com/office/drawing/2014/main" id="{27ACB24F-8054-439A-A63F-4771DD3C5686}"/>
+          <p:cNvPr id="18" name="">
+            <a:extLst xmlns:a="http://schemas.openxmlformats.org/drawingml/2006/main">
+              <a:ext uri="{FF2B5EF4-FFF2-40B4-BE49-F238E27FC236}">
+                <a16:creationId xmlns:a16="http://schemas.microsoft.com/office/drawing/2014/main" id="{1747773E-3A66-4DC3-98D1-EC191A54BE8E}"/>
               </a:ext>
             </a:extLst>
           </p:cNvPr>
@@ -15664,10 +14932,10 @@
       </p:sp>
       <p:sp>
         <p:nvSpPr>
-          <p:cNvPr id="20" name="">
-            <a:extLst xmlns:a="http://schemas.openxmlformats.org/drawingml/2006/main">
-              <a:ext uri="{FF2B5EF4-FFF2-40B4-BE49-F238E27FC236}">
-                <a16:creationId xmlns:a16="http://schemas.microsoft.com/office/drawing/2014/main" id="{5B39DBFB-5D45-45CD-8B5F-B6F8EBBCA401}"/>
+          <p:cNvPr id="19" name="">
+            <a:extLst xmlns:a="http://schemas.openxmlformats.org/drawingml/2006/main">
+              <a:ext uri="{FF2B5EF4-FFF2-40B4-BE49-F238E27FC236}">
+                <a16:creationId xmlns:a16="http://schemas.microsoft.com/office/drawing/2014/main" id="{1A936413-61BC-469E-A337-5A971870F9D6}"/>
               </a:ext>
             </a:extLst>
           </p:cNvPr>
@@ -15697,10 +14965,10 @@
       </p:sp>
       <p:sp>
         <p:nvSpPr>
-          <p:cNvPr id="21" name="">
-            <a:extLst xmlns:a="http://schemas.openxmlformats.org/drawingml/2006/main">
-              <a:ext uri="{FF2B5EF4-FFF2-40B4-BE49-F238E27FC236}">
-                <a16:creationId xmlns:a16="http://schemas.microsoft.com/office/drawing/2014/main" id="{306909C1-29A3-46CB-94CD-8F5FC8A1AA72}"/>
+          <p:cNvPr id="20" name="">
+            <a:extLst xmlns:a="http://schemas.openxmlformats.org/drawingml/2006/main">
+              <a:ext uri="{FF2B5EF4-FFF2-40B4-BE49-F238E27FC236}">
+                <a16:creationId xmlns:a16="http://schemas.microsoft.com/office/drawing/2014/main" id="{2F4A2E5D-DEF4-45C1-9E77-E788F21494FD}"/>
               </a:ext>
             </a:extLst>
           </p:cNvPr>
@@ -15758,10 +15026,10 @@
       </p:sp>
       <p:sp>
         <p:nvSpPr>
-          <p:cNvPr id="22" name="">
-            <a:extLst xmlns:a="http://schemas.openxmlformats.org/drawingml/2006/main">
-              <a:ext uri="{FF2B5EF4-FFF2-40B4-BE49-F238E27FC236}">
-                <a16:creationId xmlns:a16="http://schemas.microsoft.com/office/drawing/2014/main" id="{DE830760-443F-4D5E-BF7D-CDA9747CA675}"/>
+          <p:cNvPr id="21" name="">
+            <a:extLst xmlns:a="http://schemas.openxmlformats.org/drawingml/2006/main">
+              <a:ext uri="{FF2B5EF4-FFF2-40B4-BE49-F238E27FC236}">
+                <a16:creationId xmlns:a16="http://schemas.microsoft.com/office/drawing/2014/main" id="{5A5E4882-EE32-4059-8F5F-8B0F9793602B}"/>
               </a:ext>
             </a:extLst>
           </p:cNvPr>
@@ -15819,10 +15087,10 @@
       </p:sp>
       <p:sp>
         <p:nvSpPr>
-          <p:cNvPr id="23" name="">
-            <a:extLst xmlns:a="http://schemas.openxmlformats.org/drawingml/2006/main">
-              <a:ext uri="{FF2B5EF4-FFF2-40B4-BE49-F238E27FC236}">
-                <a16:creationId xmlns:a16="http://schemas.microsoft.com/office/drawing/2014/main" id="{5931D48B-F78D-44E3-A5EE-72109088F5E7}"/>
+          <p:cNvPr id="22" name="">
+            <a:extLst xmlns:a="http://schemas.openxmlformats.org/drawingml/2006/main">
+              <a:ext uri="{FF2B5EF4-FFF2-40B4-BE49-F238E27FC236}">
+                <a16:creationId xmlns:a16="http://schemas.microsoft.com/office/drawing/2014/main" id="{9515CBBB-FD2B-447C-AB65-397497EB3206}"/>
               </a:ext>
             </a:extLst>
           </p:cNvPr>
@@ -15852,10 +15120,10 @@
       </p:sp>
       <p:sp>
         <p:nvSpPr>
-          <p:cNvPr id="24" name="">
-            <a:extLst xmlns:a="http://schemas.openxmlformats.org/drawingml/2006/main">
-              <a:ext uri="{FF2B5EF4-FFF2-40B4-BE49-F238E27FC236}">
-                <a16:creationId xmlns:a16="http://schemas.microsoft.com/office/drawing/2014/main" id="{8E1B0C23-05F7-41C1-9A8D-B3794C469A03}"/>
+          <p:cNvPr id="23" name="">
+            <a:extLst xmlns:a="http://schemas.openxmlformats.org/drawingml/2006/main">
+              <a:ext uri="{FF2B5EF4-FFF2-40B4-BE49-F238E27FC236}">
+                <a16:creationId xmlns:a16="http://schemas.microsoft.com/office/drawing/2014/main" id="{FAF59AA1-7215-4EA8-9DF3-579FD890D9CB}"/>
               </a:ext>
             </a:extLst>
           </p:cNvPr>
@@ -15913,10 +15181,10 @@
       </p:sp>
       <p:sp>
         <p:nvSpPr>
-          <p:cNvPr id="25" name="">
-            <a:extLst xmlns:a="http://schemas.openxmlformats.org/drawingml/2006/main">
-              <a:ext uri="{FF2B5EF4-FFF2-40B4-BE49-F238E27FC236}">
-                <a16:creationId xmlns:a16="http://schemas.microsoft.com/office/drawing/2014/main" id="{838DED4F-FCA0-4FA6-854C-C621F0C5C901}"/>
+          <p:cNvPr id="24" name="">
+            <a:extLst xmlns:a="http://schemas.openxmlformats.org/drawingml/2006/main">
+              <a:ext uri="{FF2B5EF4-FFF2-40B4-BE49-F238E27FC236}">
+                <a16:creationId xmlns:a16="http://schemas.microsoft.com/office/drawing/2014/main" id="{B2EED804-67C0-478D-95BC-AF275E77D1D6}"/>
               </a:ext>
             </a:extLst>
           </p:cNvPr>
@@ -15974,10 +15242,10 @@
       </p:sp>
       <p:sp>
         <p:nvSpPr>
-          <p:cNvPr id="26" name="">
-            <a:extLst xmlns:a="http://schemas.openxmlformats.org/drawingml/2006/main">
-              <a:ext uri="{FF2B5EF4-FFF2-40B4-BE49-F238E27FC236}">
-                <a16:creationId xmlns:a16="http://schemas.microsoft.com/office/drawing/2014/main" id="{10E99B5B-3184-4145-90C0-9AAF2B94A4CB}"/>
+          <p:cNvPr id="25" name="">
+            <a:extLst xmlns:a="http://schemas.openxmlformats.org/drawingml/2006/main">
+              <a:ext uri="{FF2B5EF4-FFF2-40B4-BE49-F238E27FC236}">
+                <a16:creationId xmlns:a16="http://schemas.microsoft.com/office/drawing/2014/main" id="{52F0CB07-C050-461D-9949-B63238736FEB}"/>
               </a:ext>
             </a:extLst>
           </p:cNvPr>
@@ -16007,10 +15275,10 @@
       </p:sp>
       <p:sp>
         <p:nvSpPr>
-          <p:cNvPr id="27" name="">
-            <a:extLst xmlns:a="http://schemas.openxmlformats.org/drawingml/2006/main">
-              <a:ext uri="{FF2B5EF4-FFF2-40B4-BE49-F238E27FC236}">
-                <a16:creationId xmlns:a16="http://schemas.microsoft.com/office/drawing/2014/main" id="{8E8BC8E6-A5EB-4AAD-BA3B-B0512D5E194C}"/>
+          <p:cNvPr id="26" name="">
+            <a:extLst xmlns:a="http://schemas.openxmlformats.org/drawingml/2006/main">
+              <a:ext uri="{FF2B5EF4-FFF2-40B4-BE49-F238E27FC236}">
+                <a16:creationId xmlns:a16="http://schemas.microsoft.com/office/drawing/2014/main" id="{68588E9C-CDE0-44D8-9EEE-10CB7E1C1847}"/>
               </a:ext>
             </a:extLst>
           </p:cNvPr>
@@ -16068,10 +15336,10 @@
       </p:sp>
       <p:sp>
         <p:nvSpPr>
-          <p:cNvPr id="28" name="">
-            <a:extLst xmlns:a="http://schemas.openxmlformats.org/drawingml/2006/main">
-              <a:ext uri="{FF2B5EF4-FFF2-40B4-BE49-F238E27FC236}">
-                <a16:creationId xmlns:a16="http://schemas.microsoft.com/office/drawing/2014/main" id="{94A3ADF0-4857-4FE7-8EC1-A3F134B57315}"/>
+          <p:cNvPr id="27" name="">
+            <a:extLst xmlns:a="http://schemas.openxmlformats.org/drawingml/2006/main">
+              <a:ext uri="{FF2B5EF4-FFF2-40B4-BE49-F238E27FC236}">
+                <a16:creationId xmlns:a16="http://schemas.microsoft.com/office/drawing/2014/main" id="{8DED9A7E-3B3E-416C-B5CE-969DB789F9E0}"/>
               </a:ext>
             </a:extLst>
           </p:cNvPr>
@@ -16129,10 +15397,10 @@
       </p:sp>
       <p:sp>
         <p:nvSpPr>
-          <p:cNvPr id="29" name="">
-            <a:extLst xmlns:a="http://schemas.openxmlformats.org/drawingml/2006/main">
-              <a:ext uri="{FF2B5EF4-FFF2-40B4-BE49-F238E27FC236}">
-                <a16:creationId xmlns:a16="http://schemas.microsoft.com/office/drawing/2014/main" id="{3F482FC0-B8AF-4738-863F-A33F5DE79A57}"/>
+          <p:cNvPr id="28" name="">
+            <a:extLst xmlns:a="http://schemas.openxmlformats.org/drawingml/2006/main">
+              <a:ext uri="{FF2B5EF4-FFF2-40B4-BE49-F238E27FC236}">
+                <a16:creationId xmlns:a16="http://schemas.microsoft.com/office/drawing/2014/main" id="{46A51DC8-E428-4E2E-BDC9-AA70119225EC}"/>
               </a:ext>
             </a:extLst>
           </p:cNvPr>
@@ -16190,10 +15458,10 @@
       </p:sp>
       <p:sp>
         <p:nvSpPr>
-          <p:cNvPr id="30" name="">
-            <a:extLst xmlns:a="http://schemas.openxmlformats.org/drawingml/2006/main">
-              <a:ext uri="{FF2B5EF4-FFF2-40B4-BE49-F238E27FC236}">
-                <a16:creationId xmlns:a16="http://schemas.microsoft.com/office/drawing/2014/main" id="{E15BC12E-65B4-439B-BC3B-D755FFE58161}"/>
+          <p:cNvPr id="29" name="">
+            <a:extLst xmlns:a="http://schemas.openxmlformats.org/drawingml/2006/main">
+              <a:ext uri="{FF2B5EF4-FFF2-40B4-BE49-F238E27FC236}">
+                <a16:creationId xmlns:a16="http://schemas.microsoft.com/office/drawing/2014/main" id="{3650288D-11A2-4C03-BE2A-C3186DBFB115}"/>
               </a:ext>
             </a:extLst>
           </p:cNvPr>
@@ -16251,10 +15519,10 @@
       </p:sp>
       <p:sp>
         <p:nvSpPr>
-          <p:cNvPr id="31" name="">
-            <a:extLst xmlns:a="http://schemas.openxmlformats.org/drawingml/2006/main">
-              <a:ext uri="{FF2B5EF4-FFF2-40B4-BE49-F238E27FC236}">
-                <a16:creationId xmlns:a16="http://schemas.microsoft.com/office/drawing/2014/main" id="{7A84E4DE-A603-4FDF-B7C7-F5660A66EAB9}"/>
+          <p:cNvPr id="30" name="">
+            <a:extLst xmlns:a="http://schemas.openxmlformats.org/drawingml/2006/main">
+              <a:ext uri="{FF2B5EF4-FFF2-40B4-BE49-F238E27FC236}">
+                <a16:creationId xmlns:a16="http://schemas.microsoft.com/office/drawing/2014/main" id="{158FE8EF-1E4A-4985-95FB-3414EBD112CE}"/>
               </a:ext>
             </a:extLst>
           </p:cNvPr>
@@ -16312,10 +15580,10 @@
       </p:sp>
       <p:sp>
         <p:nvSpPr>
-          <p:cNvPr id="32" name="">
-            <a:extLst xmlns:a="http://schemas.openxmlformats.org/drawingml/2006/main">
-              <a:ext uri="{FF2B5EF4-FFF2-40B4-BE49-F238E27FC236}">
-                <a16:creationId xmlns:a16="http://schemas.microsoft.com/office/drawing/2014/main" id="{887C1F2E-958B-4CD8-BF93-2EB3B947FA05}"/>
+          <p:cNvPr id="31" name="">
+            <a:extLst xmlns:a="http://schemas.openxmlformats.org/drawingml/2006/main">
+              <a:ext uri="{FF2B5EF4-FFF2-40B4-BE49-F238E27FC236}">
+                <a16:creationId xmlns:a16="http://schemas.microsoft.com/office/drawing/2014/main" id="{8233D399-7032-43A7-BABE-D608094E8D5A}"/>
               </a:ext>
             </a:extLst>
           </p:cNvPr>
@@ -16345,10 +15613,10 @@
       </p:sp>
       <p:sp>
         <p:nvSpPr>
-          <p:cNvPr id="33" name="">
-            <a:extLst xmlns:a="http://schemas.openxmlformats.org/drawingml/2006/main">
-              <a:ext uri="{FF2B5EF4-FFF2-40B4-BE49-F238E27FC236}">
-                <a16:creationId xmlns:a16="http://schemas.microsoft.com/office/drawing/2014/main" id="{64B0A2AB-DB48-4F76-8E52-7BE7ECFA927F}"/>
+          <p:cNvPr id="32" name="">
+            <a:extLst xmlns:a="http://schemas.openxmlformats.org/drawingml/2006/main">
+              <a:ext uri="{FF2B5EF4-FFF2-40B4-BE49-F238E27FC236}">
+                <a16:creationId xmlns:a16="http://schemas.microsoft.com/office/drawing/2014/main" id="{AED668AC-FC69-40C3-8687-B4703B821F09}"/>
               </a:ext>
             </a:extLst>
           </p:cNvPr>
@@ -16406,10 +15674,10 @@
       </p:sp>
       <p:sp>
         <p:nvSpPr>
-          <p:cNvPr id="34" name="">
-            <a:extLst xmlns:a="http://schemas.openxmlformats.org/drawingml/2006/main">
-              <a:ext uri="{FF2B5EF4-FFF2-40B4-BE49-F238E27FC236}">
-                <a16:creationId xmlns:a16="http://schemas.microsoft.com/office/drawing/2014/main" id="{2D578038-06BE-481D-BABC-AF95934ACCCD}"/>
+          <p:cNvPr id="33" name="">
+            <a:extLst xmlns:a="http://schemas.openxmlformats.org/drawingml/2006/main">
+              <a:ext uri="{FF2B5EF4-FFF2-40B4-BE49-F238E27FC236}">
+                <a16:creationId xmlns:a16="http://schemas.microsoft.com/office/drawing/2014/main" id="{1A41FF2C-C9CE-453C-AB89-A364852A9EE0}"/>
               </a:ext>
             </a:extLst>
           </p:cNvPr>
@@ -16467,10 +15735,10 @@
       </p:sp>
       <p:sp>
         <p:nvSpPr>
-          <p:cNvPr id="35" name="">
-            <a:extLst xmlns:a="http://schemas.openxmlformats.org/drawingml/2006/main">
-              <a:ext uri="{FF2B5EF4-FFF2-40B4-BE49-F238E27FC236}">
-                <a16:creationId xmlns:a16="http://schemas.microsoft.com/office/drawing/2014/main" id="{F0CCFD58-5531-4C6D-B8B7-BFB07BCBB167}"/>
+          <p:cNvPr id="34" name="">
+            <a:extLst xmlns:a="http://schemas.openxmlformats.org/drawingml/2006/main">
+              <a:ext uri="{FF2B5EF4-FFF2-40B4-BE49-F238E27FC236}">
+                <a16:creationId xmlns:a16="http://schemas.microsoft.com/office/drawing/2014/main" id="{6937A0EE-4164-455B-A6BF-CF674AA42460}"/>
               </a:ext>
             </a:extLst>
           </p:cNvPr>
@@ -16500,10 +15768,10 @@
       </p:sp>
       <p:sp>
         <p:nvSpPr>
-          <p:cNvPr id="36" name="">
-            <a:extLst xmlns:a="http://schemas.openxmlformats.org/drawingml/2006/main">
-              <a:ext uri="{FF2B5EF4-FFF2-40B4-BE49-F238E27FC236}">
-                <a16:creationId xmlns:a16="http://schemas.microsoft.com/office/drawing/2014/main" id="{22F24498-AE09-44E4-B8EE-4AEAAED64125}"/>
+          <p:cNvPr id="35" name="">
+            <a:extLst xmlns:a="http://schemas.openxmlformats.org/drawingml/2006/main">
+              <a:ext uri="{FF2B5EF4-FFF2-40B4-BE49-F238E27FC236}">
+                <a16:creationId xmlns:a16="http://schemas.microsoft.com/office/drawing/2014/main" id="{2BFCE222-E47D-4DB8-AE31-82187F23098E}"/>
               </a:ext>
             </a:extLst>
           </p:cNvPr>
@@ -16561,10 +15829,10 @@
       </p:sp>
       <p:sp>
         <p:nvSpPr>
-          <p:cNvPr id="37" name="">
-            <a:extLst xmlns:a="http://schemas.openxmlformats.org/drawingml/2006/main">
-              <a:ext uri="{FF2B5EF4-FFF2-40B4-BE49-F238E27FC236}">
-                <a16:creationId xmlns:a16="http://schemas.microsoft.com/office/drawing/2014/main" id="{CDF0D945-124B-4C22-A65A-BEB5A24F47D9}"/>
+          <p:cNvPr id="36" name="">
+            <a:extLst xmlns:a="http://schemas.openxmlformats.org/drawingml/2006/main">
+              <a:ext uri="{FF2B5EF4-FFF2-40B4-BE49-F238E27FC236}">
+                <a16:creationId xmlns:a16="http://schemas.microsoft.com/office/drawing/2014/main" id="{9F596443-0D80-49E5-8FF4-7BD6E0C102B5}"/>
               </a:ext>
             </a:extLst>
           </p:cNvPr>
@@ -16622,10 +15890,10 @@
       </p:sp>
       <p:sp>
         <p:nvSpPr>
-          <p:cNvPr id="38" name="">
-            <a:extLst xmlns:a="http://schemas.openxmlformats.org/drawingml/2006/main">
-              <a:ext uri="{FF2B5EF4-FFF2-40B4-BE49-F238E27FC236}">
-                <a16:creationId xmlns:a16="http://schemas.microsoft.com/office/drawing/2014/main" id="{74A0F452-E3E3-4CE2-B547-D78ED918CB05}"/>
+          <p:cNvPr id="37" name="">
+            <a:extLst xmlns:a="http://schemas.openxmlformats.org/drawingml/2006/main">
+              <a:ext uri="{FF2B5EF4-FFF2-40B4-BE49-F238E27FC236}">
+                <a16:creationId xmlns:a16="http://schemas.microsoft.com/office/drawing/2014/main" id="{E966E0A5-EE19-4E81-9E61-352F701E97DD}"/>
               </a:ext>
             </a:extLst>
           </p:cNvPr>
@@ -16655,10 +15923,10 @@
       </p:sp>
       <p:sp>
         <p:nvSpPr>
-          <p:cNvPr id="39" name="">
-            <a:extLst xmlns:a="http://schemas.openxmlformats.org/drawingml/2006/main">
-              <a:ext uri="{FF2B5EF4-FFF2-40B4-BE49-F238E27FC236}">
-                <a16:creationId xmlns:a16="http://schemas.microsoft.com/office/drawing/2014/main" id="{2029081E-B16B-495D-ADBB-8FFCB18A2BB6}"/>
+          <p:cNvPr id="38" name="">
+            <a:extLst xmlns:a="http://schemas.openxmlformats.org/drawingml/2006/main">
+              <a:ext uri="{FF2B5EF4-FFF2-40B4-BE49-F238E27FC236}">
+                <a16:creationId xmlns:a16="http://schemas.microsoft.com/office/drawing/2014/main" id="{63F35C71-D99C-4700-8390-456D0C5FB97D}"/>
               </a:ext>
             </a:extLst>
           </p:cNvPr>
@@ -16716,10 +15984,10 @@
       </p:sp>
       <p:sp>
         <p:nvSpPr>
-          <p:cNvPr id="40" name="">
-            <a:extLst xmlns:a="http://schemas.openxmlformats.org/drawingml/2006/main">
-              <a:ext uri="{FF2B5EF4-FFF2-40B4-BE49-F238E27FC236}">
-                <a16:creationId xmlns:a16="http://schemas.microsoft.com/office/drawing/2014/main" id="{F758C3BA-706A-45AA-A49A-452C5A8E73E0}"/>
+          <p:cNvPr id="39" name="">
+            <a:extLst xmlns:a="http://schemas.openxmlformats.org/drawingml/2006/main">
+              <a:ext uri="{FF2B5EF4-FFF2-40B4-BE49-F238E27FC236}">
+                <a16:creationId xmlns:a16="http://schemas.microsoft.com/office/drawing/2014/main" id="{955B9580-FAF2-483F-AE4C-D5380C5B4843}"/>
               </a:ext>
             </a:extLst>
           </p:cNvPr>
@@ -16777,10 +16045,10 @@
       </p:sp>
       <p:sp>
         <p:nvSpPr>
-          <p:cNvPr id="41" name="">
-            <a:extLst xmlns:a="http://schemas.openxmlformats.org/drawingml/2006/main">
-              <a:ext uri="{FF2B5EF4-FFF2-40B4-BE49-F238E27FC236}">
-                <a16:creationId xmlns:a16="http://schemas.microsoft.com/office/drawing/2014/main" id="{27188F64-4250-4EA6-9866-7B34B3D3CA3C}"/>
+          <p:cNvPr id="40" name="">
+            <a:extLst xmlns:a="http://schemas.openxmlformats.org/drawingml/2006/main">
+              <a:ext uri="{FF2B5EF4-FFF2-40B4-BE49-F238E27FC236}">
+                <a16:creationId xmlns:a16="http://schemas.microsoft.com/office/drawing/2014/main" id="{40E29140-975B-4D47-8981-B8CCEA4A56C9}"/>
               </a:ext>
             </a:extLst>
           </p:cNvPr>
@@ -16810,10 +16078,10 @@
       </p:sp>
       <p:sp>
         <p:nvSpPr>
-          <p:cNvPr id="42" name="">
-            <a:extLst xmlns:a="http://schemas.openxmlformats.org/drawingml/2006/main">
-              <a:ext uri="{FF2B5EF4-FFF2-40B4-BE49-F238E27FC236}">
-                <a16:creationId xmlns:a16="http://schemas.microsoft.com/office/drawing/2014/main" id="{461267CF-B7C9-488A-9F67-AB4F50298A2F}"/>
+          <p:cNvPr id="41" name="">
+            <a:extLst xmlns:a="http://schemas.openxmlformats.org/drawingml/2006/main">
+              <a:ext uri="{FF2B5EF4-FFF2-40B4-BE49-F238E27FC236}">
+                <a16:creationId xmlns:a16="http://schemas.microsoft.com/office/drawing/2014/main" id="{6AE61143-739D-4004-80B1-C3D1FDD02660}"/>
               </a:ext>
             </a:extLst>
           </p:cNvPr>
@@ -16871,10 +16139,10 @@
       </p:sp>
       <p:sp>
         <p:nvSpPr>
-          <p:cNvPr id="43" name="">
-            <a:extLst xmlns:a="http://schemas.openxmlformats.org/drawingml/2006/main">
-              <a:ext uri="{FF2B5EF4-FFF2-40B4-BE49-F238E27FC236}">
-                <a16:creationId xmlns:a16="http://schemas.microsoft.com/office/drawing/2014/main" id="{D21FA432-E42D-4511-88BD-BF9221C50250}"/>
+          <p:cNvPr id="42" name="">
+            <a:extLst xmlns:a="http://schemas.openxmlformats.org/drawingml/2006/main">
+              <a:ext uri="{FF2B5EF4-FFF2-40B4-BE49-F238E27FC236}">
+                <a16:creationId xmlns:a16="http://schemas.microsoft.com/office/drawing/2014/main" id="{245C4B75-11CF-4571-A94C-414E4AA1EEE6}"/>
               </a:ext>
             </a:extLst>
           </p:cNvPr>
@@ -16932,10 +16200,10 @@
       </p:sp>
       <p:sp>
         <p:nvSpPr>
-          <p:cNvPr id="44" name="">
-            <a:extLst xmlns:a="http://schemas.openxmlformats.org/drawingml/2006/main">
-              <a:ext uri="{FF2B5EF4-FFF2-40B4-BE49-F238E27FC236}">
-                <a16:creationId xmlns:a16="http://schemas.microsoft.com/office/drawing/2014/main" id="{7737E6B1-9006-4B33-AB04-2E194269EB31}"/>
+          <p:cNvPr id="43" name="">
+            <a:extLst xmlns:a="http://schemas.openxmlformats.org/drawingml/2006/main">
+              <a:ext uri="{FF2B5EF4-FFF2-40B4-BE49-F238E27FC236}">
+                <a16:creationId xmlns:a16="http://schemas.microsoft.com/office/drawing/2014/main" id="{8980F7AC-B20D-4DEA-BD12-FC8353353DE8}"/>
               </a:ext>
             </a:extLst>
           </p:cNvPr>
@@ -16965,10 +16233,10 @@
       </p:sp>
       <p:sp>
         <p:nvSpPr>
-          <p:cNvPr id="45" name="">
-            <a:extLst xmlns:a="http://schemas.openxmlformats.org/drawingml/2006/main">
-              <a:ext uri="{FF2B5EF4-FFF2-40B4-BE49-F238E27FC236}">
-                <a16:creationId xmlns:a16="http://schemas.microsoft.com/office/drawing/2014/main" id="{71BE23C0-EAA3-4674-B89B-D9D89626FC6A}"/>
+          <p:cNvPr id="44" name="">
+            <a:extLst xmlns:a="http://schemas.openxmlformats.org/drawingml/2006/main">
+              <a:ext uri="{FF2B5EF4-FFF2-40B4-BE49-F238E27FC236}">
+                <a16:creationId xmlns:a16="http://schemas.microsoft.com/office/drawing/2014/main" id="{288E02D1-F0B9-48F3-BA90-AC6046AF7648}"/>
               </a:ext>
             </a:extLst>
           </p:cNvPr>
@@ -17026,10 +16294,10 @@
       </p:sp>
       <p:sp>
         <p:nvSpPr>
-          <p:cNvPr id="46" name="">
-            <a:extLst xmlns:a="http://schemas.openxmlformats.org/drawingml/2006/main">
-              <a:ext uri="{FF2B5EF4-FFF2-40B4-BE49-F238E27FC236}">
-                <a16:creationId xmlns:a16="http://schemas.microsoft.com/office/drawing/2014/main" id="{E6901366-F1D7-4168-9D18-E74B0A83A579}"/>
+          <p:cNvPr id="45" name="">
+            <a:extLst xmlns:a="http://schemas.openxmlformats.org/drawingml/2006/main">
+              <a:ext uri="{FF2B5EF4-FFF2-40B4-BE49-F238E27FC236}">
+                <a16:creationId xmlns:a16="http://schemas.microsoft.com/office/drawing/2014/main" id="{E1C52871-4019-4911-8175-43227A1B48BA}"/>
               </a:ext>
             </a:extLst>
           </p:cNvPr>
@@ -17087,10 +16355,10 @@
       </p:sp>
       <p:sp>
         <p:nvSpPr>
-          <p:cNvPr id="47" name="">
-            <a:extLst xmlns:a="http://schemas.openxmlformats.org/drawingml/2006/main">
-              <a:ext uri="{FF2B5EF4-FFF2-40B4-BE49-F238E27FC236}">
-                <a16:creationId xmlns:a16="http://schemas.microsoft.com/office/drawing/2014/main" id="{D766FFEA-B064-4A17-8C77-7A3730120304}"/>
+          <p:cNvPr id="46" name="">
+            <a:extLst xmlns:a="http://schemas.openxmlformats.org/drawingml/2006/main">
+              <a:ext uri="{FF2B5EF4-FFF2-40B4-BE49-F238E27FC236}">
+                <a16:creationId xmlns:a16="http://schemas.microsoft.com/office/drawing/2014/main" id="{9B979CDD-E2F3-402F-A50B-F9E8210477A1}"/>
               </a:ext>
             </a:extLst>
           </p:cNvPr>
@@ -17120,10 +16388,10 @@
       </p:sp>
       <p:sp>
         <p:nvSpPr>
-          <p:cNvPr id="48" name="">
-            <a:extLst xmlns:a="http://schemas.openxmlformats.org/drawingml/2006/main">
-              <a:ext uri="{FF2B5EF4-FFF2-40B4-BE49-F238E27FC236}">
-                <a16:creationId xmlns:a16="http://schemas.microsoft.com/office/drawing/2014/main" id="{571BD81B-0EA9-4FE6-8B76-28F82922633C}"/>
+          <p:cNvPr id="47" name="">
+            <a:extLst xmlns:a="http://schemas.openxmlformats.org/drawingml/2006/main">
+              <a:ext uri="{FF2B5EF4-FFF2-40B4-BE49-F238E27FC236}">
+                <a16:creationId xmlns:a16="http://schemas.microsoft.com/office/drawing/2014/main" id="{C3722B0E-830F-4E55-92F0-027AF4AF5F31}"/>
               </a:ext>
             </a:extLst>
           </p:cNvPr>
@@ -17181,10 +16449,10 @@
       </p:sp>
       <p:sp>
         <p:nvSpPr>
-          <p:cNvPr id="49" name="">
-            <a:extLst xmlns:a="http://schemas.openxmlformats.org/drawingml/2006/main">
-              <a:ext uri="{FF2B5EF4-FFF2-40B4-BE49-F238E27FC236}">
-                <a16:creationId xmlns:a16="http://schemas.microsoft.com/office/drawing/2014/main" id="{D2696959-9E71-4D90-B45D-206EEB3E66E7}"/>
+          <p:cNvPr id="48" name="">
+            <a:extLst xmlns:a="http://schemas.openxmlformats.org/drawingml/2006/main">
+              <a:ext uri="{FF2B5EF4-FFF2-40B4-BE49-F238E27FC236}">
+                <a16:creationId xmlns:a16="http://schemas.microsoft.com/office/drawing/2014/main" id="{C4ED33D0-E315-46D1-BE86-E9CC236CDE31}"/>
               </a:ext>
             </a:extLst>
           </p:cNvPr>
@@ -17242,10 +16510,10 @@
       </p:sp>
       <p:sp>
         <p:nvSpPr>
-          <p:cNvPr id="50" name="">
-            <a:extLst xmlns:a="http://schemas.openxmlformats.org/drawingml/2006/main">
-              <a:ext uri="{FF2B5EF4-FFF2-40B4-BE49-F238E27FC236}">
-                <a16:creationId xmlns:a16="http://schemas.microsoft.com/office/drawing/2014/main" id="{AAC46F27-251B-4685-9BA1-2BB78A86AB87}"/>
+          <p:cNvPr id="49" name="">
+            <a:extLst xmlns:a="http://schemas.openxmlformats.org/drawingml/2006/main">
+              <a:ext uri="{FF2B5EF4-FFF2-40B4-BE49-F238E27FC236}">
+                <a16:creationId xmlns:a16="http://schemas.microsoft.com/office/drawing/2014/main" id="{A7AC7A23-9A25-4A80-A1F2-81FF9FE42175}"/>
               </a:ext>
             </a:extLst>
           </p:cNvPr>
@@ -17303,10 +16571,10 @@
       </p:sp>
       <p:sp>
         <p:nvSpPr>
-          <p:cNvPr id="51" name="">
-            <a:extLst xmlns:a="http://schemas.openxmlformats.org/drawingml/2006/main">
-              <a:ext uri="{FF2B5EF4-FFF2-40B4-BE49-F238E27FC236}">
-                <a16:creationId xmlns:a16="http://schemas.microsoft.com/office/drawing/2014/main" id="{23B6C084-D2D1-43D2-8752-65F2DD7EBEE2}"/>
+          <p:cNvPr id="50" name="">
+            <a:extLst xmlns:a="http://schemas.openxmlformats.org/drawingml/2006/main">
+              <a:ext uri="{FF2B5EF4-FFF2-40B4-BE49-F238E27FC236}">
+                <a16:creationId xmlns:a16="http://schemas.microsoft.com/office/drawing/2014/main" id="{EE9E0D22-D671-4612-89E5-ED3AE7EE173B}"/>
               </a:ext>
             </a:extLst>
           </p:cNvPr>
@@ -17365,7 +16633,7 @@
     </p:spTree>
     <p:extLst>
       <p:ext uri="{BB962C8B-B14F-4D97-AF65-F5344CB8AC3E}">
-        <p14:creationId xmlns:p14="http://schemas.microsoft.com/office/powerpoint/2010/main" val="55529767"/>
+        <p14:creationId xmlns:p14="http://schemas.microsoft.com/office/powerpoint/2010/main" val="143177740"/>
       </p:ext>
     </p:extLst>
   </p:cSld>
@@ -17393,10 +16661,10 @@
       </p:grpSpPr>
       <p:cxnSp>
         <p:nvCxnSpPr>
-          <p:cNvPr id="16" name=""/>
+          <p:cNvPr id="15" name=""/>
           <p:cNvCxnSpPr>
-            <a:stCxn xmlns:a="http://schemas.openxmlformats.org/drawingml/2006/main" id="10" idx="3"/>
-            <a:endCxn xmlns:a="http://schemas.openxmlformats.org/drawingml/2006/main" id="11" idx="1"/>
+            <a:stCxn xmlns:a="http://schemas.openxmlformats.org/drawingml/2006/main" id="9" idx="3"/>
+            <a:endCxn xmlns:a="http://schemas.openxmlformats.org/drawingml/2006/main" id="10" idx="1"/>
           </p:cNvCxnSpPr>
           <p:nvPr/>
         </p:nvCxnSpPr>
@@ -17419,10 +16687,10 @@
       </p:cxnSp>
       <p:cxnSp>
         <p:nvCxnSpPr>
-          <p:cNvPr id="17" name=""/>
+          <p:cNvPr id="16" name=""/>
           <p:cNvCxnSpPr>
-            <a:stCxn xmlns:a="http://schemas.openxmlformats.org/drawingml/2006/main" id="9" idx="3"/>
-            <a:endCxn xmlns:a="http://schemas.openxmlformats.org/drawingml/2006/main" id="10" idx="1"/>
+            <a:stCxn xmlns:a="http://schemas.openxmlformats.org/drawingml/2006/main" id="8" idx="3"/>
+            <a:endCxn xmlns:a="http://schemas.openxmlformats.org/drawingml/2006/main" id="9" idx="1"/>
           </p:cNvCxnSpPr>
           <p:nvPr/>
         </p:nvCxnSpPr>
@@ -17445,10 +16713,10 @@
       </p:cxnSp>
       <p:sp>
         <p:nvSpPr>
-          <p:cNvPr id="18" name="">
-            <a:extLst xmlns:a="http://schemas.openxmlformats.org/drawingml/2006/main">
-              <a:ext uri="{FF2B5EF4-FFF2-40B4-BE49-F238E27FC236}">
-                <a16:creationId xmlns:a16="http://schemas.microsoft.com/office/drawing/2014/main" id="{25AEFA48-06B9-4945-9B09-186957877B91}"/>
+          <p:cNvPr id="17" name="">
+            <a:extLst xmlns:a="http://schemas.openxmlformats.org/drawingml/2006/main">
+              <a:ext uri="{FF2B5EF4-FFF2-40B4-BE49-F238E27FC236}">
+                <a16:creationId xmlns:a16="http://schemas.microsoft.com/office/drawing/2014/main" id="{BBB476A2-B014-424B-B615-E1FA4FFF451F}"/>
               </a:ext>
             </a:extLst>
           </p:cNvPr>
@@ -17481,7 +16749,7 @@
           <p:cNvPr id="2" name="">
             <a:extLst xmlns:a="http://schemas.openxmlformats.org/drawingml/2006/main">
               <a:ext uri="{FF2B5EF4-FFF2-40B4-BE49-F238E27FC236}">
-                <a16:creationId xmlns:a16="http://schemas.microsoft.com/office/drawing/2014/main" id="{B2F570EF-F3DC-4D1B-8397-CB75639B26E7}"/>
+                <a16:creationId xmlns:a16="http://schemas.microsoft.com/office/drawing/2014/main" id="{0EF6D980-8399-40B7-9516-7B8536159D9F}"/>
               </a:ext>
             </a:extLst>
           </p:cNvPr>
@@ -17511,14 +16779,14 @@
       </p:sp>
       <p:pic>
         <p:nvPicPr>
-          <p:cNvPr id="20" name=""/>
+          <p:cNvPr id="19" name=""/>
           <p:cNvPicPr>
             <a:picLocks xmlns:a="http://schemas.openxmlformats.org/drawingml/2006/main" noChangeAspect="1"/>
           </p:cNvPicPr>
           <p:nvPr/>
         </p:nvPicPr>
         <p:blipFill>
-          <a:blip xmlns:r="http://schemas.openxmlformats.org/officeDocument/2006/relationships" xmlns:a="http://schemas.openxmlformats.org/drawingml/2006/main" r:embed="Rf737d78375564a4f"/>
+          <a:blip xmlns:r="http://schemas.openxmlformats.org/officeDocument/2006/relationships" xmlns:a="http://schemas.openxmlformats.org/drawingml/2006/main" r:embed="R17905a5772424514"/>
           <a:stretch xmlns:a="http://schemas.openxmlformats.org/drawingml/2006/main"/>
         </p:blipFill>
         <p:spPr>
@@ -17536,7 +16804,7 @@
           <p:cNvPr id="4" name="">
             <a:extLst xmlns:a="http://schemas.openxmlformats.org/drawingml/2006/main">
               <a:ext uri="{FF2B5EF4-FFF2-40B4-BE49-F238E27FC236}">
-                <a16:creationId xmlns:a16="http://schemas.microsoft.com/office/drawing/2014/main" id="{38BAF4C7-3ECD-4524-B2DE-473F612DECC9}"/>
+                <a16:creationId xmlns:a16="http://schemas.microsoft.com/office/drawing/2014/main" id="{016A1667-ED9E-41FC-B5DB-58A7D61CDAE3}"/>
               </a:ext>
             </a:extLst>
           </p:cNvPr>
@@ -17597,7 +16865,7 @@
           <p:cNvPr id="5" name="">
             <a:extLst xmlns:a="http://schemas.openxmlformats.org/drawingml/2006/main">
               <a:ext uri="{FF2B5EF4-FFF2-40B4-BE49-F238E27FC236}">
-                <a16:creationId xmlns:a16="http://schemas.microsoft.com/office/drawing/2014/main" id="{991865F8-14BF-4A73-A176-A1FDD8C325E4}"/>
+                <a16:creationId xmlns:a16="http://schemas.microsoft.com/office/drawing/2014/main" id="{24642D5D-0C45-4C90-89E8-0DBB4BA864F6}"/>
               </a:ext>
             </a:extLst>
           </p:cNvPr>
@@ -17658,7 +16926,7 @@
           <p:cNvPr id="6" name="">
             <a:extLst xmlns:a="http://schemas.openxmlformats.org/drawingml/2006/main">
               <a:ext uri="{FF2B5EF4-FFF2-40B4-BE49-F238E27FC236}">
-                <a16:creationId xmlns:a16="http://schemas.microsoft.com/office/drawing/2014/main" id="{27700A70-D0B3-4718-A3A3-145F3AE71EFE}"/>
+                <a16:creationId xmlns:a16="http://schemas.microsoft.com/office/drawing/2014/main" id="{C4155CA5-3B1F-4964-AFA2-98DF3317A5A1}"/>
               </a:ext>
             </a:extLst>
           </p:cNvPr>
@@ -17691,68 +16959,7 @@
           <p:cNvPr id="7" name="">
             <a:extLst xmlns:a="http://schemas.openxmlformats.org/drawingml/2006/main">
               <a:ext uri="{FF2B5EF4-FFF2-40B4-BE49-F238E27FC236}">
-                <a16:creationId xmlns:a16="http://schemas.microsoft.com/office/drawing/2014/main" id="{0D0D5E2A-AB4B-435C-A4C5-989D1CC18775}"/>
-              </a:ext>
-            </a:extLst>
-          </p:cNvPr>
-          <p:cNvSpPr>
-            <a:spLocks xmlns:a="http://schemas.openxmlformats.org/drawingml/2006/main" noGrp="1"/>
-          </p:cNvSpPr>
-          <p:nvPr/>
-        </p:nvSpPr>
-        <p:spPr>
-          <a:xfrm xmlns:a="http://schemas.openxmlformats.org/drawingml/2006/main">
-            <a:off x="733425" y="6457950"/>
-            <a:ext cx="6191250" cy="209550"/>
-          </a:xfrm>
-          <a:prstGeom xmlns:a="http://schemas.openxmlformats.org/drawingml/2006/main" prst="rect">
-            <a:avLst/>
-          </a:prstGeom>
-          <a:noFill xmlns:a="http://schemas.openxmlformats.org/drawingml/2006/main"/>
-          <a:ln xmlns:a="http://schemas.openxmlformats.org/drawingml/2006/main" w="0">
-            <a:noFill/>
-          </a:ln>
-        </p:spPr>
-        <p:txBody>
-          <a:bodyPr xmlns:a="http://schemas.openxmlformats.org/drawingml/2006/main" lIns="19050" tIns="19050" rIns="19050" bIns="19050" anchor="ctr">
-            <a:normAutofit fontScale="100000"/>
-          </a:bodyPr>
-          <a:lstStyle xmlns:a="http://schemas.openxmlformats.org/drawingml/2006/main"/>
-          <a:p xmlns:a="http://schemas.openxmlformats.org/drawingml/2006/main">
-            <a:pPr algn="l">
-              <a:lnSpc>
-                <a:spcPct val="105000"/>
-              </a:lnSpc>
-              <a:buNone/>
-              <a:defRPr sz="1050" b="0">
-                <a:solidFill>
-                  <a:srgbClr val="E5EDFF"/>
-                </a:solidFill>
-                <a:latin typeface="PingFang SC"/>
-                <a:ea typeface="PingFang SC"/>
-                <a:cs typeface="PingFang SC"/>
-              </a:defRPr>
-            </a:pPr>
-            <a:r>
-              <a:rPr sz="1050" b="0">
-                <a:solidFill>
-                  <a:srgbClr val="E5EDFF"/>
-                </a:solidFill>
-                <a:latin typeface="PingFang SC"/>
-                <a:ea typeface="PingFang SC"/>
-                <a:cs typeface="PingFang SC"/>
-              </a:rPr>
-              <a:t>广东工业大学 · 学术研究汇报</a:t>
-            </a:r>
-          </a:p>
-        </p:txBody>
-      </p:sp>
-      <p:sp>
-        <p:nvSpPr>
-          <p:cNvPr id="8" name="">
-            <a:extLst xmlns:a="http://schemas.openxmlformats.org/drawingml/2006/main">
-              <a:ext uri="{FF2B5EF4-FFF2-40B4-BE49-F238E27FC236}">
-                <a16:creationId xmlns:a16="http://schemas.microsoft.com/office/drawing/2014/main" id="{34E769B6-0600-4BC6-9AD8-6E3A27C2F811}"/>
+                <a16:creationId xmlns:a16="http://schemas.microsoft.com/office/drawing/2014/main" id="{69D883F0-A067-43C4-BE09-CAABDC23110B}"/>
               </a:ext>
             </a:extLst>
           </p:cNvPr>
@@ -17810,10 +17017,10 @@
       </p:sp>
       <p:sp>
         <p:nvSpPr>
-          <p:cNvPr id="9" name="">
-            <a:extLst xmlns:a="http://schemas.openxmlformats.org/drawingml/2006/main">
-              <a:ext uri="{FF2B5EF4-FFF2-40B4-BE49-F238E27FC236}">
-                <a16:creationId xmlns:a16="http://schemas.microsoft.com/office/drawing/2014/main" id="{C9DEF0D5-2332-4B96-9E2F-152BC0BE3F26}"/>
+          <p:cNvPr id="8" name="">
+            <a:extLst xmlns:a="http://schemas.openxmlformats.org/drawingml/2006/main">
+              <a:ext uri="{FF2B5EF4-FFF2-40B4-BE49-F238E27FC236}">
+                <a16:creationId xmlns:a16="http://schemas.microsoft.com/office/drawing/2014/main" id="{C27BF675-2F1E-47DA-B926-D61700F5C740}"/>
               </a:ext>
             </a:extLst>
           </p:cNvPr>
@@ -17903,10 +17110,10 @@
       </p:sp>
       <p:sp>
         <p:nvSpPr>
-          <p:cNvPr id="10" name="">
-            <a:extLst xmlns:a="http://schemas.openxmlformats.org/drawingml/2006/main">
-              <a:ext uri="{FF2B5EF4-FFF2-40B4-BE49-F238E27FC236}">
-                <a16:creationId xmlns:a16="http://schemas.microsoft.com/office/drawing/2014/main" id="{9CBEFC36-CFA4-4278-A22D-234B0A1B5923}"/>
+          <p:cNvPr id="9" name="">
+            <a:extLst xmlns:a="http://schemas.openxmlformats.org/drawingml/2006/main">
+              <a:ext uri="{FF2B5EF4-FFF2-40B4-BE49-F238E27FC236}">
+                <a16:creationId xmlns:a16="http://schemas.microsoft.com/office/drawing/2014/main" id="{03523C59-6C54-47AB-B31B-41ABF1639403}"/>
               </a:ext>
             </a:extLst>
           </p:cNvPr>
@@ -17969,10 +17176,10 @@
       </p:sp>
       <p:sp>
         <p:nvSpPr>
-          <p:cNvPr id="11" name="">
-            <a:extLst xmlns:a="http://schemas.openxmlformats.org/drawingml/2006/main">
-              <a:ext uri="{FF2B5EF4-FFF2-40B4-BE49-F238E27FC236}">
-                <a16:creationId xmlns:a16="http://schemas.microsoft.com/office/drawing/2014/main" id="{3614D25E-5262-4C0D-B426-AC00FC19F868}"/>
+          <p:cNvPr id="10" name="">
+            <a:extLst xmlns:a="http://schemas.openxmlformats.org/drawingml/2006/main">
+              <a:ext uri="{FF2B5EF4-FFF2-40B4-BE49-F238E27FC236}">
+                <a16:creationId xmlns:a16="http://schemas.microsoft.com/office/drawing/2014/main" id="{AADE8C40-7259-47B6-B319-65EC6DB5BEB7}"/>
               </a:ext>
             </a:extLst>
           </p:cNvPr>
@@ -18062,10 +17269,10 @@
       </p:sp>
       <p:sp>
         <p:nvSpPr>
-          <p:cNvPr id="14" name="">
-            <a:extLst xmlns:a="http://schemas.openxmlformats.org/drawingml/2006/main">
-              <a:ext uri="{FF2B5EF4-FFF2-40B4-BE49-F238E27FC236}">
-                <a16:creationId xmlns:a16="http://schemas.microsoft.com/office/drawing/2014/main" id="{13D819F7-8CB3-41C7-B7A1-ADEF91A69EBB}"/>
+          <p:cNvPr id="13" name="">
+            <a:extLst xmlns:a="http://schemas.openxmlformats.org/drawingml/2006/main">
+              <a:ext uri="{FF2B5EF4-FFF2-40B4-BE49-F238E27FC236}">
+                <a16:creationId xmlns:a16="http://schemas.microsoft.com/office/drawing/2014/main" id="{5F1E82A5-3F23-4164-BFB2-E8415952401E}"/>
               </a:ext>
             </a:extLst>
           </p:cNvPr>
@@ -18123,10 +17330,10 @@
       </p:sp>
       <p:sp>
         <p:nvSpPr>
-          <p:cNvPr id="15" name="">
-            <a:extLst xmlns:a="http://schemas.openxmlformats.org/drawingml/2006/main">
-              <a:ext uri="{FF2B5EF4-FFF2-40B4-BE49-F238E27FC236}">
-                <a16:creationId xmlns:a16="http://schemas.microsoft.com/office/drawing/2014/main" id="{6F14AE1C-2D16-41DB-97B4-0C497F43ECC5}"/>
+          <p:cNvPr id="14" name="">
+            <a:extLst xmlns:a="http://schemas.openxmlformats.org/drawingml/2006/main">
+              <a:ext uri="{FF2B5EF4-FFF2-40B4-BE49-F238E27FC236}">
+                <a16:creationId xmlns:a16="http://schemas.microsoft.com/office/drawing/2014/main" id="{8DD340A0-D032-41B9-B79A-002AF362E477}"/>
               </a:ext>
             </a:extLst>
           </p:cNvPr>
@@ -18185,7 +17392,7 @@
     </p:spTree>
     <p:extLst>
       <p:ext uri="{BB962C8B-B14F-4D97-AF65-F5344CB8AC3E}">
-        <p14:creationId xmlns:p14="http://schemas.microsoft.com/office/powerpoint/2010/main" val="842367681"/>
+        <p14:creationId xmlns:p14="http://schemas.microsoft.com/office/powerpoint/2010/main" val="1216941593"/>
       </p:ext>
     </p:extLst>
   </p:cSld>
@@ -18213,10 +17420,10 @@
       </p:grpSpPr>
       <p:sp>
         <p:nvSpPr>
-          <p:cNvPr id="23" name="">
-            <a:extLst xmlns:a="http://schemas.openxmlformats.org/drawingml/2006/main">
-              <a:ext uri="{FF2B5EF4-FFF2-40B4-BE49-F238E27FC236}">
-                <a16:creationId xmlns:a16="http://schemas.microsoft.com/office/drawing/2014/main" id="{E7CE33EE-DDF7-47F8-81BC-93ABD3DCD348}"/>
+          <p:cNvPr id="22" name="">
+            <a:extLst xmlns:a="http://schemas.openxmlformats.org/drawingml/2006/main">
+              <a:ext uri="{FF2B5EF4-FFF2-40B4-BE49-F238E27FC236}">
+                <a16:creationId xmlns:a16="http://schemas.microsoft.com/office/drawing/2014/main" id="{F930B300-BA3C-4DD6-8F2E-955917505051}"/>
               </a:ext>
             </a:extLst>
           </p:cNvPr>
@@ -18249,7 +17456,7 @@
           <p:cNvPr id="2" name="">
             <a:extLst xmlns:a="http://schemas.openxmlformats.org/drawingml/2006/main">
               <a:ext uri="{FF2B5EF4-FFF2-40B4-BE49-F238E27FC236}">
-                <a16:creationId xmlns:a16="http://schemas.microsoft.com/office/drawing/2014/main" id="{12EC45E8-BE2E-4EB4-BAFA-324CE1623DF9}"/>
+                <a16:creationId xmlns:a16="http://schemas.microsoft.com/office/drawing/2014/main" id="{4A108F6F-1D9B-4103-B111-AB41D3C539A0}"/>
               </a:ext>
             </a:extLst>
           </p:cNvPr>
@@ -18279,14 +17486,14 @@
       </p:sp>
       <p:pic>
         <p:nvPicPr>
-          <p:cNvPr id="25" name=""/>
+          <p:cNvPr id="24" name=""/>
           <p:cNvPicPr>
             <a:picLocks xmlns:a="http://schemas.openxmlformats.org/drawingml/2006/main" noChangeAspect="1"/>
           </p:cNvPicPr>
           <p:nvPr/>
         </p:nvPicPr>
         <p:blipFill>
-          <a:blip xmlns:r="http://schemas.openxmlformats.org/officeDocument/2006/relationships" xmlns:a="http://schemas.openxmlformats.org/drawingml/2006/main" r:embed="Rac58ebf361124b49"/>
+          <a:blip xmlns:r="http://schemas.openxmlformats.org/officeDocument/2006/relationships" xmlns:a="http://schemas.openxmlformats.org/drawingml/2006/main" r:embed="R1cc65295d4854a46"/>
           <a:stretch xmlns:a="http://schemas.openxmlformats.org/drawingml/2006/main"/>
         </p:blipFill>
         <p:spPr>
@@ -18304,7 +17511,7 @@
           <p:cNvPr id="4" name="">
             <a:extLst xmlns:a="http://schemas.openxmlformats.org/drawingml/2006/main">
               <a:ext uri="{FF2B5EF4-FFF2-40B4-BE49-F238E27FC236}">
-                <a16:creationId xmlns:a16="http://schemas.microsoft.com/office/drawing/2014/main" id="{C49FD345-B0A4-43A1-B60A-EA16B378F5E6}"/>
+                <a16:creationId xmlns:a16="http://schemas.microsoft.com/office/drawing/2014/main" id="{9E7AD3DF-8C69-48D0-BDFE-2EAFCD91A0C6}"/>
               </a:ext>
             </a:extLst>
           </p:cNvPr>
@@ -18365,7 +17572,7 @@
           <p:cNvPr id="5" name="">
             <a:extLst xmlns:a="http://schemas.openxmlformats.org/drawingml/2006/main">
               <a:ext uri="{FF2B5EF4-FFF2-40B4-BE49-F238E27FC236}">
-                <a16:creationId xmlns:a16="http://schemas.microsoft.com/office/drawing/2014/main" id="{DDDFDBB3-80A6-4D51-93DF-0A5BA7771464}"/>
+                <a16:creationId xmlns:a16="http://schemas.microsoft.com/office/drawing/2014/main" id="{F2DA9678-15EC-408F-99A7-88CFA2C62EC7}"/>
               </a:ext>
             </a:extLst>
           </p:cNvPr>
@@ -18426,7 +17633,7 @@
           <p:cNvPr id="6" name="">
             <a:extLst xmlns:a="http://schemas.openxmlformats.org/drawingml/2006/main">
               <a:ext uri="{FF2B5EF4-FFF2-40B4-BE49-F238E27FC236}">
-                <a16:creationId xmlns:a16="http://schemas.microsoft.com/office/drawing/2014/main" id="{3B1A0053-FE99-4AF1-95DB-E08731712AAD}"/>
+                <a16:creationId xmlns:a16="http://schemas.microsoft.com/office/drawing/2014/main" id="{0F798254-3B96-4DF4-B7CD-47236AFC88A7}"/>
               </a:ext>
             </a:extLst>
           </p:cNvPr>
@@ -18459,68 +17666,7 @@
           <p:cNvPr id="7" name="">
             <a:extLst xmlns:a="http://schemas.openxmlformats.org/drawingml/2006/main">
               <a:ext uri="{FF2B5EF4-FFF2-40B4-BE49-F238E27FC236}">
-                <a16:creationId xmlns:a16="http://schemas.microsoft.com/office/drawing/2014/main" id="{19810A57-49B3-454E-AD66-7F7608E1B335}"/>
-              </a:ext>
-            </a:extLst>
-          </p:cNvPr>
-          <p:cNvSpPr>
-            <a:spLocks xmlns:a="http://schemas.openxmlformats.org/drawingml/2006/main" noGrp="1"/>
-          </p:cNvSpPr>
-          <p:nvPr/>
-        </p:nvSpPr>
-        <p:spPr>
-          <a:xfrm xmlns:a="http://schemas.openxmlformats.org/drawingml/2006/main">
-            <a:off x="733425" y="6457950"/>
-            <a:ext cx="6191250" cy="209550"/>
-          </a:xfrm>
-          <a:prstGeom xmlns:a="http://schemas.openxmlformats.org/drawingml/2006/main" prst="rect">
-            <a:avLst/>
-          </a:prstGeom>
-          <a:noFill xmlns:a="http://schemas.openxmlformats.org/drawingml/2006/main"/>
-          <a:ln xmlns:a="http://schemas.openxmlformats.org/drawingml/2006/main" w="0">
-            <a:noFill/>
-          </a:ln>
-        </p:spPr>
-        <p:txBody>
-          <a:bodyPr xmlns:a="http://schemas.openxmlformats.org/drawingml/2006/main" lIns="19050" tIns="19050" rIns="19050" bIns="19050" anchor="ctr">
-            <a:normAutofit fontScale="100000"/>
-          </a:bodyPr>
-          <a:lstStyle xmlns:a="http://schemas.openxmlformats.org/drawingml/2006/main"/>
-          <a:p xmlns:a="http://schemas.openxmlformats.org/drawingml/2006/main">
-            <a:pPr algn="l">
-              <a:lnSpc>
-                <a:spcPct val="105000"/>
-              </a:lnSpc>
-              <a:buNone/>
-              <a:defRPr sz="1050" b="0">
-                <a:solidFill>
-                  <a:srgbClr val="E5EDFF"/>
-                </a:solidFill>
-                <a:latin typeface="PingFang SC"/>
-                <a:ea typeface="PingFang SC"/>
-                <a:cs typeface="PingFang SC"/>
-              </a:defRPr>
-            </a:pPr>
-            <a:r>
-              <a:rPr sz="1050" b="0">
-                <a:solidFill>
-                  <a:srgbClr val="E5EDFF"/>
-                </a:solidFill>
-                <a:latin typeface="PingFang SC"/>
-                <a:ea typeface="PingFang SC"/>
-                <a:cs typeface="PingFang SC"/>
-              </a:rPr>
-              <a:t>广东工业大学 · 学术研究汇报</a:t>
-            </a:r>
-          </a:p>
-        </p:txBody>
-      </p:sp>
-      <p:sp>
-        <p:nvSpPr>
-          <p:cNvPr id="8" name="">
-            <a:extLst xmlns:a="http://schemas.openxmlformats.org/drawingml/2006/main">
-              <a:ext uri="{FF2B5EF4-FFF2-40B4-BE49-F238E27FC236}">
-                <a16:creationId xmlns:a16="http://schemas.microsoft.com/office/drawing/2014/main" id="{6823D4DB-0336-4A80-8FE9-FB068E2B364F}"/>
+                <a16:creationId xmlns:a16="http://schemas.microsoft.com/office/drawing/2014/main" id="{A4754E83-4699-41E8-944E-B614281138C0}"/>
               </a:ext>
             </a:extLst>
           </p:cNvPr>
@@ -18578,10 +17724,10 @@
       </p:sp>
       <p:sp>
         <p:nvSpPr>
-          <p:cNvPr id="9" name="">
-            <a:extLst xmlns:a="http://schemas.openxmlformats.org/drawingml/2006/main">
-              <a:ext uri="{FF2B5EF4-FFF2-40B4-BE49-F238E27FC236}">
-                <a16:creationId xmlns:a16="http://schemas.microsoft.com/office/drawing/2014/main" id="{6CA84618-37D9-416E-BE53-E21506A15CC0}"/>
+          <p:cNvPr id="8" name="">
+            <a:extLst xmlns:a="http://schemas.openxmlformats.org/drawingml/2006/main">
+              <a:ext uri="{FF2B5EF4-FFF2-40B4-BE49-F238E27FC236}">
+                <a16:creationId xmlns:a16="http://schemas.microsoft.com/office/drawing/2014/main" id="{C68B7FDD-43D2-408E-B219-A319608B2120}"/>
               </a:ext>
             </a:extLst>
           </p:cNvPr>
@@ -18639,10 +17785,10 @@
       </p:sp>
       <p:sp>
         <p:nvSpPr>
-          <p:cNvPr id="10" name="">
-            <a:extLst xmlns:a="http://schemas.openxmlformats.org/drawingml/2006/main">
-              <a:ext uri="{FF2B5EF4-FFF2-40B4-BE49-F238E27FC236}">
-                <a16:creationId xmlns:a16="http://schemas.microsoft.com/office/drawing/2014/main" id="{D52C2DF8-0FC4-4B3D-9916-EF004D2F450D}"/>
+          <p:cNvPr id="9" name="">
+            <a:extLst xmlns:a="http://schemas.openxmlformats.org/drawingml/2006/main">
+              <a:ext uri="{FF2B5EF4-FFF2-40B4-BE49-F238E27FC236}">
+                <a16:creationId xmlns:a16="http://schemas.microsoft.com/office/drawing/2014/main" id="{FD475EF0-050A-4CCD-ABCE-FF4606E1CB45}"/>
               </a:ext>
             </a:extLst>
           </p:cNvPr>
@@ -18700,10 +17846,10 @@
       </p:sp>
       <p:sp>
         <p:nvSpPr>
-          <p:cNvPr id="11" name="">
-            <a:extLst xmlns:a="http://schemas.openxmlformats.org/drawingml/2006/main">
-              <a:ext uri="{FF2B5EF4-FFF2-40B4-BE49-F238E27FC236}">
-                <a16:creationId xmlns:a16="http://schemas.microsoft.com/office/drawing/2014/main" id="{423F6725-5E9A-4933-B4EC-06D6BD988E75}"/>
+          <p:cNvPr id="10" name="">
+            <a:extLst xmlns:a="http://schemas.openxmlformats.org/drawingml/2006/main">
+              <a:ext uri="{FF2B5EF4-FFF2-40B4-BE49-F238E27FC236}">
+                <a16:creationId xmlns:a16="http://schemas.microsoft.com/office/drawing/2014/main" id="{B7757DF9-192A-4F77-B679-01894C008A6C}"/>
               </a:ext>
             </a:extLst>
           </p:cNvPr>
@@ -18733,10 +17879,10 @@
       </p:sp>
       <p:sp>
         <p:nvSpPr>
-          <p:cNvPr id="12" name="">
-            <a:extLst xmlns:a="http://schemas.openxmlformats.org/drawingml/2006/main">
-              <a:ext uri="{FF2B5EF4-FFF2-40B4-BE49-F238E27FC236}">
-                <a16:creationId xmlns:a16="http://schemas.microsoft.com/office/drawing/2014/main" id="{3FF41D77-5D47-4BFC-AFE6-6247395F559C}"/>
+          <p:cNvPr id="11" name="">
+            <a:extLst xmlns:a="http://schemas.openxmlformats.org/drawingml/2006/main">
+              <a:ext uri="{FF2B5EF4-FFF2-40B4-BE49-F238E27FC236}">
+                <a16:creationId xmlns:a16="http://schemas.microsoft.com/office/drawing/2014/main" id="{057B9AAF-3157-4971-BDD8-077A99153DCF}"/>
               </a:ext>
             </a:extLst>
           </p:cNvPr>
@@ -18794,10 +17940,10 @@
       </p:sp>
       <p:sp>
         <p:nvSpPr>
-          <p:cNvPr id="13" name="">
-            <a:extLst xmlns:a="http://schemas.openxmlformats.org/drawingml/2006/main">
-              <a:ext uri="{FF2B5EF4-FFF2-40B4-BE49-F238E27FC236}">
-                <a16:creationId xmlns:a16="http://schemas.microsoft.com/office/drawing/2014/main" id="{EB6B60B4-3FB9-49EB-AC9E-5837B52A3A06}"/>
+          <p:cNvPr id="12" name="">
+            <a:extLst xmlns:a="http://schemas.openxmlformats.org/drawingml/2006/main">
+              <a:ext uri="{FF2B5EF4-FFF2-40B4-BE49-F238E27FC236}">
+                <a16:creationId xmlns:a16="http://schemas.microsoft.com/office/drawing/2014/main" id="{93E1B7A6-709A-40F0-956D-1745721593AC}"/>
               </a:ext>
             </a:extLst>
           </p:cNvPr>
@@ -18855,10 +18001,10 @@
       </p:sp>
       <p:sp>
         <p:nvSpPr>
-          <p:cNvPr id="14" name="">
-            <a:extLst xmlns:a="http://schemas.openxmlformats.org/drawingml/2006/main">
-              <a:ext uri="{FF2B5EF4-FFF2-40B4-BE49-F238E27FC236}">
-                <a16:creationId xmlns:a16="http://schemas.microsoft.com/office/drawing/2014/main" id="{90FFCD1F-09CD-478C-BEEF-4C70CF785BFA}"/>
+          <p:cNvPr id="13" name="">
+            <a:extLst xmlns:a="http://schemas.openxmlformats.org/drawingml/2006/main">
+              <a:ext uri="{FF2B5EF4-FFF2-40B4-BE49-F238E27FC236}">
+                <a16:creationId xmlns:a16="http://schemas.microsoft.com/office/drawing/2014/main" id="{0937A7B5-0EEB-4718-9A15-4A00FA929828}"/>
               </a:ext>
             </a:extLst>
           </p:cNvPr>
@@ -18888,10 +18034,10 @@
       </p:sp>
       <p:sp>
         <p:nvSpPr>
-          <p:cNvPr id="15" name="">
-            <a:extLst xmlns:a="http://schemas.openxmlformats.org/drawingml/2006/main">
-              <a:ext uri="{FF2B5EF4-FFF2-40B4-BE49-F238E27FC236}">
-                <a16:creationId xmlns:a16="http://schemas.microsoft.com/office/drawing/2014/main" id="{D175C835-8043-4CFC-AE9F-9949DDA8F18D}"/>
+          <p:cNvPr id="14" name="">
+            <a:extLst xmlns:a="http://schemas.openxmlformats.org/drawingml/2006/main">
+              <a:ext uri="{FF2B5EF4-FFF2-40B4-BE49-F238E27FC236}">
+                <a16:creationId xmlns:a16="http://schemas.microsoft.com/office/drawing/2014/main" id="{4C1C40C6-CE76-426F-95AE-CE0A858BE3B6}"/>
               </a:ext>
             </a:extLst>
           </p:cNvPr>
@@ -18949,10 +18095,10 @@
       </p:sp>
       <p:sp>
         <p:nvSpPr>
-          <p:cNvPr id="16" name="">
-            <a:extLst xmlns:a="http://schemas.openxmlformats.org/drawingml/2006/main">
-              <a:ext uri="{FF2B5EF4-FFF2-40B4-BE49-F238E27FC236}">
-                <a16:creationId xmlns:a16="http://schemas.microsoft.com/office/drawing/2014/main" id="{7291F168-A669-4BE9-B024-29BAF0F5601E}"/>
+          <p:cNvPr id="15" name="">
+            <a:extLst xmlns:a="http://schemas.openxmlformats.org/drawingml/2006/main">
+              <a:ext uri="{FF2B5EF4-FFF2-40B4-BE49-F238E27FC236}">
+                <a16:creationId xmlns:a16="http://schemas.microsoft.com/office/drawing/2014/main" id="{C6945A0B-8CE3-4805-8ECA-75A486FA2A33}"/>
               </a:ext>
             </a:extLst>
           </p:cNvPr>
@@ -19010,10 +18156,10 @@
       </p:sp>
       <p:sp>
         <p:nvSpPr>
-          <p:cNvPr id="17" name="">
-            <a:extLst xmlns:a="http://schemas.openxmlformats.org/drawingml/2006/main">
-              <a:ext uri="{FF2B5EF4-FFF2-40B4-BE49-F238E27FC236}">
-                <a16:creationId xmlns:a16="http://schemas.microsoft.com/office/drawing/2014/main" id="{15821FE8-BF17-474F-BE8B-5E638A313217}"/>
+          <p:cNvPr id="16" name="">
+            <a:extLst xmlns:a="http://schemas.openxmlformats.org/drawingml/2006/main">
+              <a:ext uri="{FF2B5EF4-FFF2-40B4-BE49-F238E27FC236}">
+                <a16:creationId xmlns:a16="http://schemas.microsoft.com/office/drawing/2014/main" id="{76762FC3-402F-4B9F-96BB-4E31CFA9A5C6}"/>
               </a:ext>
             </a:extLst>
           </p:cNvPr>
@@ -19043,10 +18189,10 @@
       </p:sp>
       <p:sp>
         <p:nvSpPr>
-          <p:cNvPr id="18" name="">
-            <a:extLst xmlns:a="http://schemas.openxmlformats.org/drawingml/2006/main">
-              <a:ext uri="{FF2B5EF4-FFF2-40B4-BE49-F238E27FC236}">
-                <a16:creationId xmlns:a16="http://schemas.microsoft.com/office/drawing/2014/main" id="{3AE10C9B-BD47-456F-B471-741087FE34DB}"/>
+          <p:cNvPr id="17" name="">
+            <a:extLst xmlns:a="http://schemas.openxmlformats.org/drawingml/2006/main">
+              <a:ext uri="{FF2B5EF4-FFF2-40B4-BE49-F238E27FC236}">
+                <a16:creationId xmlns:a16="http://schemas.microsoft.com/office/drawing/2014/main" id="{CE977174-0862-4B01-ACDF-2494E9EC852C}"/>
               </a:ext>
             </a:extLst>
           </p:cNvPr>
@@ -19104,10 +18250,10 @@
       </p:sp>
       <p:sp>
         <p:nvSpPr>
-          <p:cNvPr id="19" name="">
-            <a:extLst xmlns:a="http://schemas.openxmlformats.org/drawingml/2006/main">
-              <a:ext uri="{FF2B5EF4-FFF2-40B4-BE49-F238E27FC236}">
-                <a16:creationId xmlns:a16="http://schemas.microsoft.com/office/drawing/2014/main" id="{5DA6F9B2-B108-43FA-B487-18B68B7F67EB}"/>
+          <p:cNvPr id="18" name="">
+            <a:extLst xmlns:a="http://schemas.openxmlformats.org/drawingml/2006/main">
+              <a:ext uri="{FF2B5EF4-FFF2-40B4-BE49-F238E27FC236}">
+                <a16:creationId xmlns:a16="http://schemas.microsoft.com/office/drawing/2014/main" id="{CA048FDA-1D30-4FF8-A21B-4A64BC37F3D1}"/>
               </a:ext>
             </a:extLst>
           </p:cNvPr>
@@ -19165,10 +18311,10 @@
       </p:sp>
       <p:sp>
         <p:nvSpPr>
-          <p:cNvPr id="20" name="">
-            <a:extLst xmlns:a="http://schemas.openxmlformats.org/drawingml/2006/main">
-              <a:ext uri="{FF2B5EF4-FFF2-40B4-BE49-F238E27FC236}">
-                <a16:creationId xmlns:a16="http://schemas.microsoft.com/office/drawing/2014/main" id="{953960B1-880E-4249-A0F6-4C26A58C62AB}"/>
+          <p:cNvPr id="19" name="">
+            <a:extLst xmlns:a="http://schemas.openxmlformats.org/drawingml/2006/main">
+              <a:ext uri="{FF2B5EF4-FFF2-40B4-BE49-F238E27FC236}">
+                <a16:creationId xmlns:a16="http://schemas.microsoft.com/office/drawing/2014/main" id="{AC83CB44-D1E1-4C1E-9C9B-5123BE81DEAF}"/>
               </a:ext>
             </a:extLst>
           </p:cNvPr>
@@ -19198,10 +18344,10 @@
       </p:sp>
       <p:sp>
         <p:nvSpPr>
-          <p:cNvPr id="21" name="">
-            <a:extLst xmlns:a="http://schemas.openxmlformats.org/drawingml/2006/main">
-              <a:ext uri="{FF2B5EF4-FFF2-40B4-BE49-F238E27FC236}">
-                <a16:creationId xmlns:a16="http://schemas.microsoft.com/office/drawing/2014/main" id="{17273024-209D-46C3-A108-62C928104AA2}"/>
+          <p:cNvPr id="20" name="">
+            <a:extLst xmlns:a="http://schemas.openxmlformats.org/drawingml/2006/main">
+              <a:ext uri="{FF2B5EF4-FFF2-40B4-BE49-F238E27FC236}">
+                <a16:creationId xmlns:a16="http://schemas.microsoft.com/office/drawing/2014/main" id="{678AC541-F3B1-4D6B-9B6C-1443426FB748}"/>
               </a:ext>
             </a:extLst>
           </p:cNvPr>
@@ -19259,10 +18405,10 @@
       </p:sp>
       <p:sp>
         <p:nvSpPr>
-          <p:cNvPr id="22" name="">
-            <a:extLst xmlns:a="http://schemas.openxmlformats.org/drawingml/2006/main">
-              <a:ext uri="{FF2B5EF4-FFF2-40B4-BE49-F238E27FC236}">
-                <a16:creationId xmlns:a16="http://schemas.microsoft.com/office/drawing/2014/main" id="{CA56AF70-39F4-42A6-9126-98F1014177E0}"/>
+          <p:cNvPr id="21" name="">
+            <a:extLst xmlns:a="http://schemas.openxmlformats.org/drawingml/2006/main">
+              <a:ext uri="{FF2B5EF4-FFF2-40B4-BE49-F238E27FC236}">
+                <a16:creationId xmlns:a16="http://schemas.microsoft.com/office/drawing/2014/main" id="{7D30F0B0-EADD-4C00-A9FF-FADC911F3521}"/>
               </a:ext>
             </a:extLst>
           </p:cNvPr>
@@ -19321,7 +18467,7 @@
     </p:spTree>
     <p:extLst>
       <p:ext uri="{BB962C8B-B14F-4D97-AF65-F5344CB8AC3E}">
-        <p14:creationId xmlns:p14="http://schemas.microsoft.com/office/powerpoint/2010/main" val="837698752"/>
+        <p14:creationId xmlns:p14="http://schemas.microsoft.com/office/powerpoint/2010/main" val="189915354"/>
       </p:ext>
     </p:extLst>
   </p:cSld>
@@ -19349,10 +18495,10 @@
       </p:grpSpPr>
       <p:cxnSp>
         <p:nvCxnSpPr>
-          <p:cNvPr id="17" name=""/>
+          <p:cNvPr id="16" name=""/>
           <p:cNvCxnSpPr>
-            <a:stCxn xmlns:a="http://schemas.openxmlformats.org/drawingml/2006/main" id="10" idx="3"/>
-            <a:endCxn xmlns:a="http://schemas.openxmlformats.org/drawingml/2006/main" id="11" idx="1"/>
+            <a:stCxn xmlns:a="http://schemas.openxmlformats.org/drawingml/2006/main" id="9" idx="3"/>
+            <a:endCxn xmlns:a="http://schemas.openxmlformats.org/drawingml/2006/main" id="10" idx="1"/>
           </p:cNvCxnSpPr>
           <p:nvPr/>
         </p:nvCxnSpPr>
@@ -19375,10 +18521,10 @@
       </p:cxnSp>
       <p:cxnSp>
         <p:nvCxnSpPr>
-          <p:cNvPr id="18" name=""/>
+          <p:cNvPr id="17" name=""/>
           <p:cNvCxnSpPr>
-            <a:stCxn xmlns:a="http://schemas.openxmlformats.org/drawingml/2006/main" id="9" idx="3"/>
-            <a:endCxn xmlns:a="http://schemas.openxmlformats.org/drawingml/2006/main" id="10" idx="1"/>
+            <a:stCxn xmlns:a="http://schemas.openxmlformats.org/drawingml/2006/main" id="8" idx="3"/>
+            <a:endCxn xmlns:a="http://schemas.openxmlformats.org/drawingml/2006/main" id="9" idx="1"/>
           </p:cNvCxnSpPr>
           <p:nvPr/>
         </p:nvCxnSpPr>
@@ -19401,10 +18547,10 @@
       </p:cxnSp>
       <p:sp>
         <p:nvSpPr>
-          <p:cNvPr id="19" name="">
-            <a:extLst xmlns:a="http://schemas.openxmlformats.org/drawingml/2006/main">
-              <a:ext uri="{FF2B5EF4-FFF2-40B4-BE49-F238E27FC236}">
-                <a16:creationId xmlns:a16="http://schemas.microsoft.com/office/drawing/2014/main" id="{E2FDE33F-071C-478B-B2FC-E09785C6C410}"/>
+          <p:cNvPr id="18" name="">
+            <a:extLst xmlns:a="http://schemas.openxmlformats.org/drawingml/2006/main">
+              <a:ext uri="{FF2B5EF4-FFF2-40B4-BE49-F238E27FC236}">
+                <a16:creationId xmlns:a16="http://schemas.microsoft.com/office/drawing/2014/main" id="{CCEBBF6D-DE08-45D2-BF09-817F4E61EBF7}"/>
               </a:ext>
             </a:extLst>
           </p:cNvPr>
@@ -19437,7 +18583,7 @@
           <p:cNvPr id="2" name="">
             <a:extLst xmlns:a="http://schemas.openxmlformats.org/drawingml/2006/main">
               <a:ext uri="{FF2B5EF4-FFF2-40B4-BE49-F238E27FC236}">
-                <a16:creationId xmlns:a16="http://schemas.microsoft.com/office/drawing/2014/main" id="{4F793ED8-BC60-4ABE-83CF-48A5A9F01C1D}"/>
+                <a16:creationId xmlns:a16="http://schemas.microsoft.com/office/drawing/2014/main" id="{A2BBF557-F10F-49B2-8C72-931E442AD0D5}"/>
               </a:ext>
             </a:extLst>
           </p:cNvPr>
@@ -19467,14 +18613,14 @@
       </p:sp>
       <p:pic>
         <p:nvPicPr>
-          <p:cNvPr id="21" name=""/>
+          <p:cNvPr id="20" name=""/>
           <p:cNvPicPr>
             <a:picLocks xmlns:a="http://schemas.openxmlformats.org/drawingml/2006/main" noChangeAspect="1"/>
           </p:cNvPicPr>
           <p:nvPr/>
         </p:nvPicPr>
         <p:blipFill>
-          <a:blip xmlns:r="http://schemas.openxmlformats.org/officeDocument/2006/relationships" xmlns:a="http://schemas.openxmlformats.org/drawingml/2006/main" r:embed="R0e02c2b67d064ee0"/>
+          <a:blip xmlns:r="http://schemas.openxmlformats.org/officeDocument/2006/relationships" xmlns:a="http://schemas.openxmlformats.org/drawingml/2006/main" r:embed="R0f4927f4c68c4056"/>
           <a:stretch xmlns:a="http://schemas.openxmlformats.org/drawingml/2006/main"/>
         </p:blipFill>
         <p:spPr>
@@ -19492,7 +18638,7 @@
           <p:cNvPr id="4" name="">
             <a:extLst xmlns:a="http://schemas.openxmlformats.org/drawingml/2006/main">
               <a:ext uri="{FF2B5EF4-FFF2-40B4-BE49-F238E27FC236}">
-                <a16:creationId xmlns:a16="http://schemas.microsoft.com/office/drawing/2014/main" id="{C1E9D338-37A7-43E5-9C50-9F84CF5D96FF}"/>
+                <a16:creationId xmlns:a16="http://schemas.microsoft.com/office/drawing/2014/main" id="{BB48E2C1-97CE-48C1-B018-FB93A5870442}"/>
               </a:ext>
             </a:extLst>
           </p:cNvPr>
@@ -19553,7 +18699,7 @@
           <p:cNvPr id="5" name="">
             <a:extLst xmlns:a="http://schemas.openxmlformats.org/drawingml/2006/main">
               <a:ext uri="{FF2B5EF4-FFF2-40B4-BE49-F238E27FC236}">
-                <a16:creationId xmlns:a16="http://schemas.microsoft.com/office/drawing/2014/main" id="{68271DA5-E181-4BEA-AA0E-BCFC30BA677C}"/>
+                <a16:creationId xmlns:a16="http://schemas.microsoft.com/office/drawing/2014/main" id="{534BEC1C-F848-4BB2-B9B3-655ED2F2D6B8}"/>
               </a:ext>
             </a:extLst>
           </p:cNvPr>
@@ -19614,7 +18760,7 @@
           <p:cNvPr id="6" name="">
             <a:extLst xmlns:a="http://schemas.openxmlformats.org/drawingml/2006/main">
               <a:ext uri="{FF2B5EF4-FFF2-40B4-BE49-F238E27FC236}">
-                <a16:creationId xmlns:a16="http://schemas.microsoft.com/office/drawing/2014/main" id="{34EF302A-4C3F-43FC-899C-81B17A9B5B1A}"/>
+                <a16:creationId xmlns:a16="http://schemas.microsoft.com/office/drawing/2014/main" id="{28A6C342-2F30-41DE-A606-D7430C179014}"/>
               </a:ext>
             </a:extLst>
           </p:cNvPr>
@@ -19647,68 +18793,7 @@
           <p:cNvPr id="7" name="">
             <a:extLst xmlns:a="http://schemas.openxmlformats.org/drawingml/2006/main">
               <a:ext uri="{FF2B5EF4-FFF2-40B4-BE49-F238E27FC236}">
-                <a16:creationId xmlns:a16="http://schemas.microsoft.com/office/drawing/2014/main" id="{4DB03E69-C2AC-49B1-A4DE-BBE7B311DD09}"/>
-              </a:ext>
-            </a:extLst>
-          </p:cNvPr>
-          <p:cNvSpPr>
-            <a:spLocks xmlns:a="http://schemas.openxmlformats.org/drawingml/2006/main" noGrp="1"/>
-          </p:cNvSpPr>
-          <p:nvPr/>
-        </p:nvSpPr>
-        <p:spPr>
-          <a:xfrm xmlns:a="http://schemas.openxmlformats.org/drawingml/2006/main">
-            <a:off x="733425" y="6457950"/>
-            <a:ext cx="6191250" cy="209550"/>
-          </a:xfrm>
-          <a:prstGeom xmlns:a="http://schemas.openxmlformats.org/drawingml/2006/main" prst="rect">
-            <a:avLst/>
-          </a:prstGeom>
-          <a:noFill xmlns:a="http://schemas.openxmlformats.org/drawingml/2006/main"/>
-          <a:ln xmlns:a="http://schemas.openxmlformats.org/drawingml/2006/main" w="0">
-            <a:noFill/>
-          </a:ln>
-        </p:spPr>
-        <p:txBody>
-          <a:bodyPr xmlns:a="http://schemas.openxmlformats.org/drawingml/2006/main" lIns="19050" tIns="19050" rIns="19050" bIns="19050" anchor="ctr">
-            <a:normAutofit fontScale="100000"/>
-          </a:bodyPr>
-          <a:lstStyle xmlns:a="http://schemas.openxmlformats.org/drawingml/2006/main"/>
-          <a:p xmlns:a="http://schemas.openxmlformats.org/drawingml/2006/main">
-            <a:pPr algn="l">
-              <a:lnSpc>
-                <a:spcPct val="105000"/>
-              </a:lnSpc>
-              <a:buNone/>
-              <a:defRPr sz="1050" b="0">
-                <a:solidFill>
-                  <a:srgbClr val="E5EDFF"/>
-                </a:solidFill>
-                <a:latin typeface="PingFang SC"/>
-                <a:ea typeface="PingFang SC"/>
-                <a:cs typeface="PingFang SC"/>
-              </a:defRPr>
-            </a:pPr>
-            <a:r>
-              <a:rPr sz="1050" b="0">
-                <a:solidFill>
-                  <a:srgbClr val="E5EDFF"/>
-                </a:solidFill>
-                <a:latin typeface="PingFang SC"/>
-                <a:ea typeface="PingFang SC"/>
-                <a:cs typeface="PingFang SC"/>
-              </a:rPr>
-              <a:t>广东工业大学 · 学术研究汇报</a:t>
-            </a:r>
-          </a:p>
-        </p:txBody>
-      </p:sp>
-      <p:sp>
-        <p:nvSpPr>
-          <p:cNvPr id="8" name="">
-            <a:extLst xmlns:a="http://schemas.openxmlformats.org/drawingml/2006/main">
-              <a:ext uri="{FF2B5EF4-FFF2-40B4-BE49-F238E27FC236}">
-                <a16:creationId xmlns:a16="http://schemas.microsoft.com/office/drawing/2014/main" id="{771ACAFC-9C5A-4ADC-A7E9-DC0ACDD37FCA}"/>
+                <a16:creationId xmlns:a16="http://schemas.microsoft.com/office/drawing/2014/main" id="{E44070B0-2E99-4029-8D88-17C0C1EA26E6}"/>
               </a:ext>
             </a:extLst>
           </p:cNvPr>
@@ -19766,10 +18851,10 @@
       </p:sp>
       <p:sp>
         <p:nvSpPr>
-          <p:cNvPr id="9" name="">
-            <a:extLst xmlns:a="http://schemas.openxmlformats.org/drawingml/2006/main">
-              <a:ext uri="{FF2B5EF4-FFF2-40B4-BE49-F238E27FC236}">
-                <a16:creationId xmlns:a16="http://schemas.microsoft.com/office/drawing/2014/main" id="{09E6542A-9905-4C41-858E-FDF2E7676163}"/>
+          <p:cNvPr id="8" name="">
+            <a:extLst xmlns:a="http://schemas.openxmlformats.org/drawingml/2006/main">
+              <a:ext uri="{FF2B5EF4-FFF2-40B4-BE49-F238E27FC236}">
+                <a16:creationId xmlns:a16="http://schemas.microsoft.com/office/drawing/2014/main" id="{ADBB37F4-645F-4893-B391-76AE4330038C}"/>
               </a:ext>
             </a:extLst>
           </p:cNvPr>
@@ -19859,10 +18944,10 @@
       </p:sp>
       <p:sp>
         <p:nvSpPr>
-          <p:cNvPr id="10" name="">
-            <a:extLst xmlns:a="http://schemas.openxmlformats.org/drawingml/2006/main">
-              <a:ext uri="{FF2B5EF4-FFF2-40B4-BE49-F238E27FC236}">
-                <a16:creationId xmlns:a16="http://schemas.microsoft.com/office/drawing/2014/main" id="{C5997029-8D23-4F61-BD7B-83F1EB9B9281}"/>
+          <p:cNvPr id="9" name="">
+            <a:extLst xmlns:a="http://schemas.openxmlformats.org/drawingml/2006/main">
+              <a:ext uri="{FF2B5EF4-FFF2-40B4-BE49-F238E27FC236}">
+                <a16:creationId xmlns:a16="http://schemas.microsoft.com/office/drawing/2014/main" id="{5EF2E540-3501-4B2A-82DD-0296EC16C693}"/>
               </a:ext>
             </a:extLst>
           </p:cNvPr>
@@ -19952,10 +19037,10 @@
       </p:sp>
       <p:sp>
         <p:nvSpPr>
-          <p:cNvPr id="11" name="">
-            <a:extLst xmlns:a="http://schemas.openxmlformats.org/drawingml/2006/main">
-              <a:ext uri="{FF2B5EF4-FFF2-40B4-BE49-F238E27FC236}">
-                <a16:creationId xmlns:a16="http://schemas.microsoft.com/office/drawing/2014/main" id="{74DC9F5B-07E4-4FE1-9BBB-2FF0FBB2A442}"/>
+          <p:cNvPr id="10" name="">
+            <a:extLst xmlns:a="http://schemas.openxmlformats.org/drawingml/2006/main">
+              <a:ext uri="{FF2B5EF4-FFF2-40B4-BE49-F238E27FC236}">
+                <a16:creationId xmlns:a16="http://schemas.microsoft.com/office/drawing/2014/main" id="{22126CC1-4D20-44D0-9620-E83B940FC164}"/>
               </a:ext>
             </a:extLst>
           </p:cNvPr>
@@ -20045,10 +19130,10 @@
       </p:sp>
       <p:sp>
         <p:nvSpPr>
-          <p:cNvPr id="14" name="">
-            <a:extLst xmlns:a="http://schemas.openxmlformats.org/drawingml/2006/main">
-              <a:ext uri="{FF2B5EF4-FFF2-40B4-BE49-F238E27FC236}">
-                <a16:creationId xmlns:a16="http://schemas.microsoft.com/office/drawing/2014/main" id="{2EEB2A6F-712F-48F5-A989-896B8853CF55}"/>
+          <p:cNvPr id="13" name="">
+            <a:extLst xmlns:a="http://schemas.openxmlformats.org/drawingml/2006/main">
+              <a:ext uri="{FF2B5EF4-FFF2-40B4-BE49-F238E27FC236}">
+                <a16:creationId xmlns:a16="http://schemas.microsoft.com/office/drawing/2014/main" id="{F36D0329-A84D-44A9-96E2-DE7731545AF5}"/>
               </a:ext>
             </a:extLst>
           </p:cNvPr>
@@ -20111,10 +19196,10 @@
       </p:sp>
       <p:sp>
         <p:nvSpPr>
-          <p:cNvPr id="15" name="">
-            <a:extLst xmlns:a="http://schemas.openxmlformats.org/drawingml/2006/main">
-              <a:ext uri="{FF2B5EF4-FFF2-40B4-BE49-F238E27FC236}">
-                <a16:creationId xmlns:a16="http://schemas.microsoft.com/office/drawing/2014/main" id="{F323EB54-335A-48BB-A421-50336C2B171F}"/>
+          <p:cNvPr id="14" name="">
+            <a:extLst xmlns:a="http://schemas.openxmlformats.org/drawingml/2006/main">
+              <a:ext uri="{FF2B5EF4-FFF2-40B4-BE49-F238E27FC236}">
+                <a16:creationId xmlns:a16="http://schemas.microsoft.com/office/drawing/2014/main" id="{D51BACE1-9D6F-4927-B561-1C81476E3AFC}"/>
               </a:ext>
             </a:extLst>
           </p:cNvPr>
@@ -20177,10 +19262,10 @@
       </p:sp>
       <p:sp>
         <p:nvSpPr>
-          <p:cNvPr id="16" name="">
-            <a:extLst xmlns:a="http://schemas.openxmlformats.org/drawingml/2006/main">
-              <a:ext uri="{FF2B5EF4-FFF2-40B4-BE49-F238E27FC236}">
-                <a16:creationId xmlns:a16="http://schemas.microsoft.com/office/drawing/2014/main" id="{9BFDC0ED-CD6E-4131-A64E-FA9B72A5C274}"/>
+          <p:cNvPr id="15" name="">
+            <a:extLst xmlns:a="http://schemas.openxmlformats.org/drawingml/2006/main">
+              <a:ext uri="{FF2B5EF4-FFF2-40B4-BE49-F238E27FC236}">
+                <a16:creationId xmlns:a16="http://schemas.microsoft.com/office/drawing/2014/main" id="{5E2B81C8-4430-4D1F-8DED-0FF15B359A97}"/>
               </a:ext>
             </a:extLst>
           </p:cNvPr>
@@ -20239,7 +19324,7 @@
     </p:spTree>
     <p:extLst>
       <p:ext uri="{BB962C8B-B14F-4D97-AF65-F5344CB8AC3E}">
-        <p14:creationId xmlns:p14="http://schemas.microsoft.com/office/powerpoint/2010/main" val="1201477865"/>
+        <p14:creationId xmlns:p14="http://schemas.microsoft.com/office/powerpoint/2010/main" val="744046942"/>
       </p:ext>
     </p:extLst>
   </p:cSld>
@@ -20267,10 +19352,10 @@
       </p:grpSpPr>
       <p:sp>
         <p:nvSpPr>
-          <p:cNvPr id="18" name="">
-            <a:extLst xmlns:a="http://schemas.openxmlformats.org/drawingml/2006/main">
-              <a:ext uri="{FF2B5EF4-FFF2-40B4-BE49-F238E27FC236}">
-                <a16:creationId xmlns:a16="http://schemas.microsoft.com/office/drawing/2014/main" id="{4445AE98-AB37-4D1E-B267-8F96F2046B10}"/>
+          <p:cNvPr id="17" name="">
+            <a:extLst xmlns:a="http://schemas.openxmlformats.org/drawingml/2006/main">
+              <a:ext uri="{FF2B5EF4-FFF2-40B4-BE49-F238E27FC236}">
+                <a16:creationId xmlns:a16="http://schemas.microsoft.com/office/drawing/2014/main" id="{C81993D8-B2C8-4243-B609-0B236355FE15}"/>
               </a:ext>
             </a:extLst>
           </p:cNvPr>
@@ -20303,7 +19388,7 @@
           <p:cNvPr id="2" name="">
             <a:extLst xmlns:a="http://schemas.openxmlformats.org/drawingml/2006/main">
               <a:ext uri="{FF2B5EF4-FFF2-40B4-BE49-F238E27FC236}">
-                <a16:creationId xmlns:a16="http://schemas.microsoft.com/office/drawing/2014/main" id="{C054D475-37F7-470A-82F3-35438F587DF6}"/>
+                <a16:creationId xmlns:a16="http://schemas.microsoft.com/office/drawing/2014/main" id="{2290CDB8-A289-4704-B42D-A4701F8DA779}"/>
               </a:ext>
             </a:extLst>
           </p:cNvPr>
@@ -20333,14 +19418,14 @@
       </p:sp>
       <p:pic>
         <p:nvPicPr>
-          <p:cNvPr id="20" name=""/>
+          <p:cNvPr id="19" name=""/>
           <p:cNvPicPr>
             <a:picLocks xmlns:a="http://schemas.openxmlformats.org/drawingml/2006/main" noChangeAspect="1"/>
           </p:cNvPicPr>
           <p:nvPr/>
         </p:nvPicPr>
         <p:blipFill>
-          <a:blip xmlns:r="http://schemas.openxmlformats.org/officeDocument/2006/relationships" xmlns:a="http://schemas.openxmlformats.org/drawingml/2006/main" r:embed="R59abbc23a02e4419"/>
+          <a:blip xmlns:r="http://schemas.openxmlformats.org/officeDocument/2006/relationships" xmlns:a="http://schemas.openxmlformats.org/drawingml/2006/main" r:embed="Rbd801f8d95e34beb"/>
           <a:stretch xmlns:a="http://schemas.openxmlformats.org/drawingml/2006/main"/>
         </p:blipFill>
         <p:spPr>
@@ -20358,7 +19443,7 @@
           <p:cNvPr id="4" name="">
             <a:extLst xmlns:a="http://schemas.openxmlformats.org/drawingml/2006/main">
               <a:ext uri="{FF2B5EF4-FFF2-40B4-BE49-F238E27FC236}">
-                <a16:creationId xmlns:a16="http://schemas.microsoft.com/office/drawing/2014/main" id="{2186C325-A1D6-406C-8687-1F82486983D7}"/>
+                <a16:creationId xmlns:a16="http://schemas.microsoft.com/office/drawing/2014/main" id="{E9F1DF22-BCDB-47A4-90CC-5CF6AEC40FA8}"/>
               </a:ext>
             </a:extLst>
           </p:cNvPr>
@@ -20419,7 +19504,7 @@
           <p:cNvPr id="5" name="">
             <a:extLst xmlns:a="http://schemas.openxmlformats.org/drawingml/2006/main">
               <a:ext uri="{FF2B5EF4-FFF2-40B4-BE49-F238E27FC236}">
-                <a16:creationId xmlns:a16="http://schemas.microsoft.com/office/drawing/2014/main" id="{48E874D0-C2FA-4891-952E-2092982350A1}"/>
+                <a16:creationId xmlns:a16="http://schemas.microsoft.com/office/drawing/2014/main" id="{479D0F3C-CF76-404F-94A0-DCE347465D38}"/>
               </a:ext>
             </a:extLst>
           </p:cNvPr>
@@ -20480,7 +19565,7 @@
           <p:cNvPr id="6" name="">
             <a:extLst xmlns:a="http://schemas.openxmlformats.org/drawingml/2006/main">
               <a:ext uri="{FF2B5EF4-FFF2-40B4-BE49-F238E27FC236}">
-                <a16:creationId xmlns:a16="http://schemas.microsoft.com/office/drawing/2014/main" id="{67E0CBAF-5878-4249-8540-C2FD182B02A1}"/>
+                <a16:creationId xmlns:a16="http://schemas.microsoft.com/office/drawing/2014/main" id="{3C03B902-083F-4CC2-932F-D58BFE094450}"/>
               </a:ext>
             </a:extLst>
           </p:cNvPr>
@@ -20513,68 +19598,7 @@
           <p:cNvPr id="7" name="">
             <a:extLst xmlns:a="http://schemas.openxmlformats.org/drawingml/2006/main">
               <a:ext uri="{FF2B5EF4-FFF2-40B4-BE49-F238E27FC236}">
-                <a16:creationId xmlns:a16="http://schemas.microsoft.com/office/drawing/2014/main" id="{758C38A8-CEA9-4CF7-82AD-8958AE652F78}"/>
-              </a:ext>
-            </a:extLst>
-          </p:cNvPr>
-          <p:cNvSpPr>
-            <a:spLocks xmlns:a="http://schemas.openxmlformats.org/drawingml/2006/main" noGrp="1"/>
-          </p:cNvSpPr>
-          <p:nvPr/>
-        </p:nvSpPr>
-        <p:spPr>
-          <a:xfrm xmlns:a="http://schemas.openxmlformats.org/drawingml/2006/main">
-            <a:off x="733425" y="6457950"/>
-            <a:ext cx="6191250" cy="209550"/>
-          </a:xfrm>
-          <a:prstGeom xmlns:a="http://schemas.openxmlformats.org/drawingml/2006/main" prst="rect">
-            <a:avLst/>
-          </a:prstGeom>
-          <a:noFill xmlns:a="http://schemas.openxmlformats.org/drawingml/2006/main"/>
-          <a:ln xmlns:a="http://schemas.openxmlformats.org/drawingml/2006/main" w="0">
-            <a:noFill/>
-          </a:ln>
-        </p:spPr>
-        <p:txBody>
-          <a:bodyPr xmlns:a="http://schemas.openxmlformats.org/drawingml/2006/main" lIns="19050" tIns="19050" rIns="19050" bIns="19050" anchor="ctr">
-            <a:normAutofit fontScale="100000"/>
-          </a:bodyPr>
-          <a:lstStyle xmlns:a="http://schemas.openxmlformats.org/drawingml/2006/main"/>
-          <a:p xmlns:a="http://schemas.openxmlformats.org/drawingml/2006/main">
-            <a:pPr algn="l">
-              <a:lnSpc>
-                <a:spcPct val="105000"/>
-              </a:lnSpc>
-              <a:buNone/>
-              <a:defRPr sz="1050" b="0">
-                <a:solidFill>
-                  <a:srgbClr val="E5EDFF"/>
-                </a:solidFill>
-                <a:latin typeface="PingFang SC"/>
-                <a:ea typeface="PingFang SC"/>
-                <a:cs typeface="PingFang SC"/>
-              </a:defRPr>
-            </a:pPr>
-            <a:r>
-              <a:rPr sz="1050" b="0">
-                <a:solidFill>
-                  <a:srgbClr val="E5EDFF"/>
-                </a:solidFill>
-                <a:latin typeface="PingFang SC"/>
-                <a:ea typeface="PingFang SC"/>
-                <a:cs typeface="PingFang SC"/>
-              </a:rPr>
-              <a:t>广东工业大学 · 学术研究汇报</a:t>
-            </a:r>
-          </a:p>
-        </p:txBody>
-      </p:sp>
-      <p:sp>
-        <p:nvSpPr>
-          <p:cNvPr id="8" name="">
-            <a:extLst xmlns:a="http://schemas.openxmlformats.org/drawingml/2006/main">
-              <a:ext uri="{FF2B5EF4-FFF2-40B4-BE49-F238E27FC236}">
-                <a16:creationId xmlns:a16="http://schemas.microsoft.com/office/drawing/2014/main" id="{76447059-F8AF-4539-A448-3E9D0186E293}"/>
+                <a16:creationId xmlns:a16="http://schemas.microsoft.com/office/drawing/2014/main" id="{AFBA7ABA-FB56-4DC7-AC54-355D9EB36593}"/>
               </a:ext>
             </a:extLst>
           </p:cNvPr>
@@ -20632,10 +19656,10 @@
       </p:sp>
       <p:sp>
         <p:nvSpPr>
-          <p:cNvPr id="9" name="">
-            <a:extLst xmlns:a="http://schemas.openxmlformats.org/drawingml/2006/main">
-              <a:ext uri="{FF2B5EF4-FFF2-40B4-BE49-F238E27FC236}">
-                <a16:creationId xmlns:a16="http://schemas.microsoft.com/office/drawing/2014/main" id="{EF44E346-2714-45D3-AEB0-644D0E95F6C6}"/>
+          <p:cNvPr id="8" name="">
+            <a:extLst xmlns:a="http://schemas.openxmlformats.org/drawingml/2006/main">
+              <a:ext uri="{FF2B5EF4-FFF2-40B4-BE49-F238E27FC236}">
+                <a16:creationId xmlns:a16="http://schemas.microsoft.com/office/drawing/2014/main" id="{A3FA8B39-8992-4AEC-897C-EFA4C1A1F38C}"/>
               </a:ext>
             </a:extLst>
           </p:cNvPr>
@@ -20698,10 +19722,10 @@
       </p:sp>
       <p:sp>
         <p:nvSpPr>
-          <p:cNvPr id="10" name="">
-            <a:extLst xmlns:a="http://schemas.openxmlformats.org/drawingml/2006/main">
-              <a:ext uri="{FF2B5EF4-FFF2-40B4-BE49-F238E27FC236}">
-                <a16:creationId xmlns:a16="http://schemas.microsoft.com/office/drawing/2014/main" id="{F36B4CEE-0A41-43E7-9BF5-340A01A3DD22}"/>
+          <p:cNvPr id="9" name="">
+            <a:extLst xmlns:a="http://schemas.openxmlformats.org/drawingml/2006/main">
+              <a:ext uri="{FF2B5EF4-FFF2-40B4-BE49-F238E27FC236}">
+                <a16:creationId xmlns:a16="http://schemas.microsoft.com/office/drawing/2014/main" id="{E133BE38-5EAF-42BC-A737-027CA486837B}"/>
               </a:ext>
             </a:extLst>
           </p:cNvPr>
@@ -20759,10 +19783,10 @@
       </p:sp>
       <p:sp>
         <p:nvSpPr>
-          <p:cNvPr id="11" name="">
-            <a:extLst xmlns:a="http://schemas.openxmlformats.org/drawingml/2006/main">
-              <a:ext uri="{FF2B5EF4-FFF2-40B4-BE49-F238E27FC236}">
-                <a16:creationId xmlns:a16="http://schemas.microsoft.com/office/drawing/2014/main" id="{ADA90FC2-6E38-4E7D-A6A4-F4D323558DC4}"/>
+          <p:cNvPr id="10" name="">
+            <a:extLst xmlns:a="http://schemas.openxmlformats.org/drawingml/2006/main">
+              <a:ext uri="{FF2B5EF4-FFF2-40B4-BE49-F238E27FC236}">
+                <a16:creationId xmlns:a16="http://schemas.microsoft.com/office/drawing/2014/main" id="{EF52DC77-0469-4358-9523-8429FB63ADA7}"/>
               </a:ext>
             </a:extLst>
           </p:cNvPr>
@@ -20825,10 +19849,10 @@
       </p:sp>
       <p:sp>
         <p:nvSpPr>
-          <p:cNvPr id="12" name="">
-            <a:extLst xmlns:a="http://schemas.openxmlformats.org/drawingml/2006/main">
-              <a:ext uri="{FF2B5EF4-FFF2-40B4-BE49-F238E27FC236}">
-                <a16:creationId xmlns:a16="http://schemas.microsoft.com/office/drawing/2014/main" id="{7E2F4465-EEE8-4C22-8A9A-FB106F762CFA}"/>
+          <p:cNvPr id="11" name="">
+            <a:extLst xmlns:a="http://schemas.openxmlformats.org/drawingml/2006/main">
+              <a:ext uri="{FF2B5EF4-FFF2-40B4-BE49-F238E27FC236}">
+                <a16:creationId xmlns:a16="http://schemas.microsoft.com/office/drawing/2014/main" id="{5FD2E0D5-7F9F-4C0E-856F-7390BEDF3F81}"/>
               </a:ext>
             </a:extLst>
           </p:cNvPr>
@@ -20886,10 +19910,10 @@
       </p:sp>
       <p:sp>
         <p:nvSpPr>
-          <p:cNvPr id="13" name="">
-            <a:extLst xmlns:a="http://schemas.openxmlformats.org/drawingml/2006/main">
-              <a:ext uri="{FF2B5EF4-FFF2-40B4-BE49-F238E27FC236}">
-                <a16:creationId xmlns:a16="http://schemas.microsoft.com/office/drawing/2014/main" id="{B4AFB3ED-498D-41D0-8881-5F1ADF133DEB}"/>
+          <p:cNvPr id="12" name="">
+            <a:extLst xmlns:a="http://schemas.openxmlformats.org/drawingml/2006/main">
+              <a:ext uri="{FF2B5EF4-FFF2-40B4-BE49-F238E27FC236}">
+                <a16:creationId xmlns:a16="http://schemas.microsoft.com/office/drawing/2014/main" id="{ABF68FA2-1EFA-4C9E-AFDE-1B722956B155}"/>
               </a:ext>
             </a:extLst>
           </p:cNvPr>
@@ -20952,10 +19976,10 @@
       </p:sp>
       <p:sp>
         <p:nvSpPr>
-          <p:cNvPr id="14" name="">
-            <a:extLst xmlns:a="http://schemas.openxmlformats.org/drawingml/2006/main">
-              <a:ext uri="{FF2B5EF4-FFF2-40B4-BE49-F238E27FC236}">
-                <a16:creationId xmlns:a16="http://schemas.microsoft.com/office/drawing/2014/main" id="{EC43270C-3804-42A6-83B9-95703B68A886}"/>
+          <p:cNvPr id="13" name="">
+            <a:extLst xmlns:a="http://schemas.openxmlformats.org/drawingml/2006/main">
+              <a:ext uri="{FF2B5EF4-FFF2-40B4-BE49-F238E27FC236}">
+                <a16:creationId xmlns:a16="http://schemas.microsoft.com/office/drawing/2014/main" id="{738BCCC1-7ECE-4E1D-AAF4-26C87DA40CC6}"/>
               </a:ext>
             </a:extLst>
           </p:cNvPr>
@@ -21013,10 +20037,10 @@
       </p:sp>
       <p:sp>
         <p:nvSpPr>
-          <p:cNvPr id="15" name="">
-            <a:extLst xmlns:a="http://schemas.openxmlformats.org/drawingml/2006/main">
-              <a:ext uri="{FF2B5EF4-FFF2-40B4-BE49-F238E27FC236}">
-                <a16:creationId xmlns:a16="http://schemas.microsoft.com/office/drawing/2014/main" id="{01F0A1C2-6598-4872-AE8F-D79D0D9D80FB}"/>
+          <p:cNvPr id="14" name="">
+            <a:extLst xmlns:a="http://schemas.openxmlformats.org/drawingml/2006/main">
+              <a:ext uri="{FF2B5EF4-FFF2-40B4-BE49-F238E27FC236}">
+                <a16:creationId xmlns:a16="http://schemas.microsoft.com/office/drawing/2014/main" id="{DE89C2AE-7690-4518-973C-65AC99E01CD1}"/>
               </a:ext>
             </a:extLst>
           </p:cNvPr>
@@ -21079,10 +20103,10 @@
       </p:sp>
       <p:sp>
         <p:nvSpPr>
-          <p:cNvPr id="16" name="">
-            <a:extLst xmlns:a="http://schemas.openxmlformats.org/drawingml/2006/main">
-              <a:ext uri="{FF2B5EF4-FFF2-40B4-BE49-F238E27FC236}">
-                <a16:creationId xmlns:a16="http://schemas.microsoft.com/office/drawing/2014/main" id="{C3163EB7-D0AD-442A-A0DF-1E2EC142D6E0}"/>
+          <p:cNvPr id="15" name="">
+            <a:extLst xmlns:a="http://schemas.openxmlformats.org/drawingml/2006/main">
+              <a:ext uri="{FF2B5EF4-FFF2-40B4-BE49-F238E27FC236}">
+                <a16:creationId xmlns:a16="http://schemas.microsoft.com/office/drawing/2014/main" id="{C7E5639A-8B32-4493-8527-4E19D1048172}"/>
               </a:ext>
             </a:extLst>
           </p:cNvPr>
@@ -21140,10 +20164,10 @@
       </p:sp>
       <p:sp>
         <p:nvSpPr>
-          <p:cNvPr id="17" name="">
-            <a:extLst xmlns:a="http://schemas.openxmlformats.org/drawingml/2006/main">
-              <a:ext uri="{FF2B5EF4-FFF2-40B4-BE49-F238E27FC236}">
-                <a16:creationId xmlns:a16="http://schemas.microsoft.com/office/drawing/2014/main" id="{541274FD-C0C7-4D7D-8E05-50159C982AA5}"/>
+          <p:cNvPr id="16" name="">
+            <a:extLst xmlns:a="http://schemas.openxmlformats.org/drawingml/2006/main">
+              <a:ext uri="{FF2B5EF4-FFF2-40B4-BE49-F238E27FC236}">
+                <a16:creationId xmlns:a16="http://schemas.microsoft.com/office/drawing/2014/main" id="{83166018-4A2E-4939-8266-0A6BDC07A9A4}"/>
               </a:ext>
             </a:extLst>
           </p:cNvPr>
@@ -21202,7 +20226,7 @@
     </p:spTree>
     <p:extLst>
       <p:ext uri="{BB962C8B-B14F-4D97-AF65-F5344CB8AC3E}">
-        <p14:creationId xmlns:p14="http://schemas.microsoft.com/office/powerpoint/2010/main" val="1321927280"/>
+        <p14:creationId xmlns:p14="http://schemas.microsoft.com/office/powerpoint/2010/main" val="504384369"/>
       </p:ext>
     </p:extLst>
   </p:cSld>
@@ -21230,10 +20254,10 @@
       </p:grpSpPr>
       <p:sp>
         <p:nvSpPr>
-          <p:cNvPr id="25" name="">
-            <a:extLst xmlns:a="http://schemas.openxmlformats.org/drawingml/2006/main">
-              <a:ext uri="{FF2B5EF4-FFF2-40B4-BE49-F238E27FC236}">
-                <a16:creationId xmlns:a16="http://schemas.microsoft.com/office/drawing/2014/main" id="{6E9BDF81-D066-41C6-8059-B068835C296C}"/>
+          <p:cNvPr id="24" name="">
+            <a:extLst xmlns:a="http://schemas.openxmlformats.org/drawingml/2006/main">
+              <a:ext uri="{FF2B5EF4-FFF2-40B4-BE49-F238E27FC236}">
+                <a16:creationId xmlns:a16="http://schemas.microsoft.com/office/drawing/2014/main" id="{0D1EA80F-5FED-4D09-8DCA-0F7A83D74605}"/>
               </a:ext>
             </a:extLst>
           </p:cNvPr>
@@ -21266,7 +20290,7 @@
           <p:cNvPr id="2" name="">
             <a:extLst xmlns:a="http://schemas.openxmlformats.org/drawingml/2006/main">
               <a:ext uri="{FF2B5EF4-FFF2-40B4-BE49-F238E27FC236}">
-                <a16:creationId xmlns:a16="http://schemas.microsoft.com/office/drawing/2014/main" id="{DC053E8A-3627-43C8-A821-8FADA0CBCC17}"/>
+                <a16:creationId xmlns:a16="http://schemas.microsoft.com/office/drawing/2014/main" id="{6E1AA674-7B8C-4D86-BB3C-3079FA3030D5}"/>
               </a:ext>
             </a:extLst>
           </p:cNvPr>
@@ -21296,14 +20320,14 @@
       </p:sp>
       <p:pic>
         <p:nvPicPr>
-          <p:cNvPr id="27" name=""/>
+          <p:cNvPr id="26" name=""/>
           <p:cNvPicPr>
             <a:picLocks xmlns:a="http://schemas.openxmlformats.org/drawingml/2006/main" noChangeAspect="1"/>
           </p:cNvPicPr>
           <p:nvPr/>
         </p:nvPicPr>
         <p:blipFill>
-          <a:blip xmlns:r="http://schemas.openxmlformats.org/officeDocument/2006/relationships" xmlns:a="http://schemas.openxmlformats.org/drawingml/2006/main" r:embed="Rc567145b2ce1488b"/>
+          <a:blip xmlns:r="http://schemas.openxmlformats.org/officeDocument/2006/relationships" xmlns:a="http://schemas.openxmlformats.org/drawingml/2006/main" r:embed="Rd88c495131c446ed"/>
           <a:stretch xmlns:a="http://schemas.openxmlformats.org/drawingml/2006/main"/>
         </p:blipFill>
         <p:spPr>
@@ -21321,7 +20345,7 @@
           <p:cNvPr id="4" name="">
             <a:extLst xmlns:a="http://schemas.openxmlformats.org/drawingml/2006/main">
               <a:ext uri="{FF2B5EF4-FFF2-40B4-BE49-F238E27FC236}">
-                <a16:creationId xmlns:a16="http://schemas.microsoft.com/office/drawing/2014/main" id="{321803C3-6A9A-4413-A899-227CD4CF078E}"/>
+                <a16:creationId xmlns:a16="http://schemas.microsoft.com/office/drawing/2014/main" id="{06C7D0D3-A173-4464-B92C-8B63B9FDA808}"/>
               </a:ext>
             </a:extLst>
           </p:cNvPr>
@@ -21382,7 +20406,7 @@
           <p:cNvPr id="5" name="">
             <a:extLst xmlns:a="http://schemas.openxmlformats.org/drawingml/2006/main">
               <a:ext uri="{FF2B5EF4-FFF2-40B4-BE49-F238E27FC236}">
-                <a16:creationId xmlns:a16="http://schemas.microsoft.com/office/drawing/2014/main" id="{6FC7CA2A-B2CA-451E-A451-19A6DC064B35}"/>
+                <a16:creationId xmlns:a16="http://schemas.microsoft.com/office/drawing/2014/main" id="{651C52C7-65C1-4BB7-8859-89827ADC7C33}"/>
               </a:ext>
             </a:extLst>
           </p:cNvPr>
@@ -21443,7 +20467,7 @@
           <p:cNvPr id="6" name="">
             <a:extLst xmlns:a="http://schemas.openxmlformats.org/drawingml/2006/main">
               <a:ext uri="{FF2B5EF4-FFF2-40B4-BE49-F238E27FC236}">
-                <a16:creationId xmlns:a16="http://schemas.microsoft.com/office/drawing/2014/main" id="{18DDDDCB-3BEB-4738-81EE-72ABD66CAE35}"/>
+                <a16:creationId xmlns:a16="http://schemas.microsoft.com/office/drawing/2014/main" id="{F02BF01D-2C38-43FA-BACF-7336BABC2F2F}"/>
               </a:ext>
             </a:extLst>
           </p:cNvPr>
@@ -21476,68 +20500,7 @@
           <p:cNvPr id="7" name="">
             <a:extLst xmlns:a="http://schemas.openxmlformats.org/drawingml/2006/main">
               <a:ext uri="{FF2B5EF4-FFF2-40B4-BE49-F238E27FC236}">
-                <a16:creationId xmlns:a16="http://schemas.microsoft.com/office/drawing/2014/main" id="{58016F5D-41A9-4DAE-9A70-0EF295BB16EA}"/>
-              </a:ext>
-            </a:extLst>
-          </p:cNvPr>
-          <p:cNvSpPr>
-            <a:spLocks xmlns:a="http://schemas.openxmlformats.org/drawingml/2006/main" noGrp="1"/>
-          </p:cNvSpPr>
-          <p:nvPr/>
-        </p:nvSpPr>
-        <p:spPr>
-          <a:xfrm xmlns:a="http://schemas.openxmlformats.org/drawingml/2006/main">
-            <a:off x="733425" y="6457950"/>
-            <a:ext cx="6191250" cy="209550"/>
-          </a:xfrm>
-          <a:prstGeom xmlns:a="http://schemas.openxmlformats.org/drawingml/2006/main" prst="rect">
-            <a:avLst/>
-          </a:prstGeom>
-          <a:noFill xmlns:a="http://schemas.openxmlformats.org/drawingml/2006/main"/>
-          <a:ln xmlns:a="http://schemas.openxmlformats.org/drawingml/2006/main" w="0">
-            <a:noFill/>
-          </a:ln>
-        </p:spPr>
-        <p:txBody>
-          <a:bodyPr xmlns:a="http://schemas.openxmlformats.org/drawingml/2006/main" lIns="19050" tIns="19050" rIns="19050" bIns="19050" anchor="ctr">
-            <a:normAutofit fontScale="100000"/>
-          </a:bodyPr>
-          <a:lstStyle xmlns:a="http://schemas.openxmlformats.org/drawingml/2006/main"/>
-          <a:p xmlns:a="http://schemas.openxmlformats.org/drawingml/2006/main">
-            <a:pPr algn="l">
-              <a:lnSpc>
-                <a:spcPct val="105000"/>
-              </a:lnSpc>
-              <a:buNone/>
-              <a:defRPr sz="1050" b="0">
-                <a:solidFill>
-                  <a:srgbClr val="E5EDFF"/>
-                </a:solidFill>
-                <a:latin typeface="PingFang SC"/>
-                <a:ea typeface="PingFang SC"/>
-                <a:cs typeface="PingFang SC"/>
-              </a:defRPr>
-            </a:pPr>
-            <a:r>
-              <a:rPr sz="1050" b="0">
-                <a:solidFill>
-                  <a:srgbClr val="E5EDFF"/>
-                </a:solidFill>
-                <a:latin typeface="PingFang SC"/>
-                <a:ea typeface="PingFang SC"/>
-                <a:cs typeface="PingFang SC"/>
-              </a:rPr>
-              <a:t>广东工业大学 · 学术研究汇报</a:t>
-            </a:r>
-          </a:p>
-        </p:txBody>
-      </p:sp>
-      <p:sp>
-        <p:nvSpPr>
-          <p:cNvPr id="8" name="">
-            <a:extLst xmlns:a="http://schemas.openxmlformats.org/drawingml/2006/main">
-              <a:ext uri="{FF2B5EF4-FFF2-40B4-BE49-F238E27FC236}">
-                <a16:creationId xmlns:a16="http://schemas.microsoft.com/office/drawing/2014/main" id="{760CEF82-1CB1-4857-A9F4-01F24625046D}"/>
+                <a16:creationId xmlns:a16="http://schemas.microsoft.com/office/drawing/2014/main" id="{AC414ECC-D6CC-4461-8FE1-5C04D8CA4B93}"/>
               </a:ext>
             </a:extLst>
           </p:cNvPr>
@@ -21595,10 +20558,10 @@
       </p:sp>
       <p:sp>
         <p:nvSpPr>
-          <p:cNvPr id="9" name="">
-            <a:extLst xmlns:a="http://schemas.openxmlformats.org/drawingml/2006/main">
-              <a:ext uri="{FF2B5EF4-FFF2-40B4-BE49-F238E27FC236}">
-                <a16:creationId xmlns:a16="http://schemas.microsoft.com/office/drawing/2014/main" id="{30F3349E-E999-4D05-B91F-725802A571AC}"/>
+          <p:cNvPr id="8" name="">
+            <a:extLst xmlns:a="http://schemas.openxmlformats.org/drawingml/2006/main">
+              <a:ext uri="{FF2B5EF4-FFF2-40B4-BE49-F238E27FC236}">
+                <a16:creationId xmlns:a16="http://schemas.microsoft.com/office/drawing/2014/main" id="{404BB510-EA56-4993-A403-E39B03FF1B48}"/>
               </a:ext>
             </a:extLst>
           </p:cNvPr>
@@ -21656,10 +20619,10 @@
       </p:sp>
       <p:sp>
         <p:nvSpPr>
-          <p:cNvPr id="10" name="">
-            <a:extLst xmlns:a="http://schemas.openxmlformats.org/drawingml/2006/main">
-              <a:ext uri="{FF2B5EF4-FFF2-40B4-BE49-F238E27FC236}">
-                <a16:creationId xmlns:a16="http://schemas.microsoft.com/office/drawing/2014/main" id="{CB33F776-AE74-445A-944A-8A39557F8465}"/>
+          <p:cNvPr id="9" name="">
+            <a:extLst xmlns:a="http://schemas.openxmlformats.org/drawingml/2006/main">
+              <a:ext uri="{FF2B5EF4-FFF2-40B4-BE49-F238E27FC236}">
+                <a16:creationId xmlns:a16="http://schemas.microsoft.com/office/drawing/2014/main" id="{D2B45996-CE45-49BA-989A-3D3E3047D05E}"/>
               </a:ext>
             </a:extLst>
           </p:cNvPr>
@@ -21717,10 +20680,10 @@
       </p:sp>
       <p:sp>
         <p:nvSpPr>
-          <p:cNvPr id="11" name="">
-            <a:extLst xmlns:a="http://schemas.openxmlformats.org/drawingml/2006/main">
-              <a:ext uri="{FF2B5EF4-FFF2-40B4-BE49-F238E27FC236}">
-                <a16:creationId xmlns:a16="http://schemas.microsoft.com/office/drawing/2014/main" id="{4FDBA85B-0AD2-4A56-B6F9-0D08FC0B1383}"/>
+          <p:cNvPr id="10" name="">
+            <a:extLst xmlns:a="http://schemas.openxmlformats.org/drawingml/2006/main">
+              <a:ext uri="{FF2B5EF4-FFF2-40B4-BE49-F238E27FC236}">
+                <a16:creationId xmlns:a16="http://schemas.microsoft.com/office/drawing/2014/main" id="{F2942F67-1B5E-4FBE-A2ED-2476F777CDBB}"/>
               </a:ext>
             </a:extLst>
           </p:cNvPr>
@@ -21778,10 +20741,10 @@
       </p:sp>
       <p:sp>
         <p:nvSpPr>
-          <p:cNvPr id="12" name="">
-            <a:extLst xmlns:a="http://schemas.openxmlformats.org/drawingml/2006/main">
-              <a:ext uri="{FF2B5EF4-FFF2-40B4-BE49-F238E27FC236}">
-                <a16:creationId xmlns:a16="http://schemas.microsoft.com/office/drawing/2014/main" id="{A1C7CD9D-08A4-4D46-A8AB-B473B959F85F}"/>
+          <p:cNvPr id="11" name="">
+            <a:extLst xmlns:a="http://schemas.openxmlformats.org/drawingml/2006/main">
+              <a:ext uri="{FF2B5EF4-FFF2-40B4-BE49-F238E27FC236}">
+                <a16:creationId xmlns:a16="http://schemas.microsoft.com/office/drawing/2014/main" id="{0BE3566E-2918-4151-BC6F-866E2D64BEFB}"/>
               </a:ext>
             </a:extLst>
           </p:cNvPr>
@@ -21839,10 +20802,10 @@
       </p:sp>
       <p:sp>
         <p:nvSpPr>
-          <p:cNvPr id="13" name="">
-            <a:extLst xmlns:a="http://schemas.openxmlformats.org/drawingml/2006/main">
-              <a:ext uri="{FF2B5EF4-FFF2-40B4-BE49-F238E27FC236}">
-                <a16:creationId xmlns:a16="http://schemas.microsoft.com/office/drawing/2014/main" id="{E94F904D-4C00-4AD6-84DC-4E669662C460}"/>
+          <p:cNvPr id="12" name="">
+            <a:extLst xmlns:a="http://schemas.openxmlformats.org/drawingml/2006/main">
+              <a:ext uri="{FF2B5EF4-FFF2-40B4-BE49-F238E27FC236}">
+                <a16:creationId xmlns:a16="http://schemas.microsoft.com/office/drawing/2014/main" id="{77194F6A-984F-438E-8E39-861193BF0323}"/>
               </a:ext>
             </a:extLst>
           </p:cNvPr>
@@ -21900,10 +20863,10 @@
       </p:sp>
       <p:sp>
         <p:nvSpPr>
-          <p:cNvPr id="14" name="">
-            <a:extLst xmlns:a="http://schemas.openxmlformats.org/drawingml/2006/main">
-              <a:ext uri="{FF2B5EF4-FFF2-40B4-BE49-F238E27FC236}">
-                <a16:creationId xmlns:a16="http://schemas.microsoft.com/office/drawing/2014/main" id="{54FE9EFB-6F87-448D-B2C8-4C314A8738B5}"/>
+          <p:cNvPr id="13" name="">
+            <a:extLst xmlns:a="http://schemas.openxmlformats.org/drawingml/2006/main">
+              <a:ext uri="{FF2B5EF4-FFF2-40B4-BE49-F238E27FC236}">
+                <a16:creationId xmlns:a16="http://schemas.microsoft.com/office/drawing/2014/main" id="{C442A9A3-8FA2-4F6F-9303-2D218014A985}"/>
               </a:ext>
             </a:extLst>
           </p:cNvPr>
@@ -21961,10 +20924,10 @@
       </p:sp>
       <p:sp>
         <p:nvSpPr>
-          <p:cNvPr id="15" name="">
-            <a:extLst xmlns:a="http://schemas.openxmlformats.org/drawingml/2006/main">
-              <a:ext uri="{FF2B5EF4-FFF2-40B4-BE49-F238E27FC236}">
-                <a16:creationId xmlns:a16="http://schemas.microsoft.com/office/drawing/2014/main" id="{9AE6A849-C304-403A-9564-89320B69E5B8}"/>
+          <p:cNvPr id="14" name="">
+            <a:extLst xmlns:a="http://schemas.openxmlformats.org/drawingml/2006/main">
+              <a:ext uri="{FF2B5EF4-FFF2-40B4-BE49-F238E27FC236}">
+                <a16:creationId xmlns:a16="http://schemas.microsoft.com/office/drawing/2014/main" id="{5E7483FE-B933-44BB-AA00-3AC044FF2C65}"/>
               </a:ext>
             </a:extLst>
           </p:cNvPr>
@@ -22022,10 +20985,10 @@
       </p:sp>
       <p:sp>
         <p:nvSpPr>
-          <p:cNvPr id="16" name="">
-            <a:extLst xmlns:a="http://schemas.openxmlformats.org/drawingml/2006/main">
-              <a:ext uri="{FF2B5EF4-FFF2-40B4-BE49-F238E27FC236}">
-                <a16:creationId xmlns:a16="http://schemas.microsoft.com/office/drawing/2014/main" id="{AAE8BE15-AE49-4B18-A249-7F2009FD9C8E}"/>
+          <p:cNvPr id="15" name="">
+            <a:extLst xmlns:a="http://schemas.openxmlformats.org/drawingml/2006/main">
+              <a:ext uri="{FF2B5EF4-FFF2-40B4-BE49-F238E27FC236}">
+                <a16:creationId xmlns:a16="http://schemas.microsoft.com/office/drawing/2014/main" id="{C628E2DF-44CC-494A-8867-168FDE8CEB16}"/>
               </a:ext>
             </a:extLst>
           </p:cNvPr>
@@ -22083,10 +21046,10 @@
       </p:sp>
       <p:sp>
         <p:nvSpPr>
-          <p:cNvPr id="17" name="">
-            <a:extLst xmlns:a="http://schemas.openxmlformats.org/drawingml/2006/main">
-              <a:ext uri="{FF2B5EF4-FFF2-40B4-BE49-F238E27FC236}">
-                <a16:creationId xmlns:a16="http://schemas.microsoft.com/office/drawing/2014/main" id="{67703FF0-10CB-4250-9C73-27DE1C41B5C1}"/>
+          <p:cNvPr id="16" name="">
+            <a:extLst xmlns:a="http://schemas.openxmlformats.org/drawingml/2006/main">
+              <a:ext uri="{FF2B5EF4-FFF2-40B4-BE49-F238E27FC236}">
+                <a16:creationId xmlns:a16="http://schemas.microsoft.com/office/drawing/2014/main" id="{E24F1760-21E7-437F-91C5-45C6B6B2105A}"/>
               </a:ext>
             </a:extLst>
           </p:cNvPr>
@@ -22144,10 +21107,10 @@
       </p:sp>
       <p:sp>
         <p:nvSpPr>
-          <p:cNvPr id="18" name="">
-            <a:extLst xmlns:a="http://schemas.openxmlformats.org/drawingml/2006/main">
-              <a:ext uri="{FF2B5EF4-FFF2-40B4-BE49-F238E27FC236}">
-                <a16:creationId xmlns:a16="http://schemas.microsoft.com/office/drawing/2014/main" id="{6642B942-A717-4678-B5C8-0C691DEBFA9C}"/>
+          <p:cNvPr id="17" name="">
+            <a:extLst xmlns:a="http://schemas.openxmlformats.org/drawingml/2006/main">
+              <a:ext uri="{FF2B5EF4-FFF2-40B4-BE49-F238E27FC236}">
+                <a16:creationId xmlns:a16="http://schemas.microsoft.com/office/drawing/2014/main" id="{C50D930A-9DD4-46FA-BFD7-C057557EC7BA}"/>
               </a:ext>
             </a:extLst>
           </p:cNvPr>
@@ -22205,10 +21168,10 @@
       </p:sp>
       <p:sp>
         <p:nvSpPr>
-          <p:cNvPr id="19" name="">
-            <a:extLst xmlns:a="http://schemas.openxmlformats.org/drawingml/2006/main">
-              <a:ext uri="{FF2B5EF4-FFF2-40B4-BE49-F238E27FC236}">
-                <a16:creationId xmlns:a16="http://schemas.microsoft.com/office/drawing/2014/main" id="{0C61ADB8-2FB6-447E-BFC3-33A17E2696DD}"/>
+          <p:cNvPr id="18" name="">
+            <a:extLst xmlns:a="http://schemas.openxmlformats.org/drawingml/2006/main">
+              <a:ext uri="{FF2B5EF4-FFF2-40B4-BE49-F238E27FC236}">
+                <a16:creationId xmlns:a16="http://schemas.microsoft.com/office/drawing/2014/main" id="{38183E76-CFE3-4F62-ABFE-78A0DDD4F61A}"/>
               </a:ext>
             </a:extLst>
           </p:cNvPr>
@@ -22266,10 +21229,10 @@
       </p:sp>
       <p:sp>
         <p:nvSpPr>
-          <p:cNvPr id="20" name="">
-            <a:extLst xmlns:a="http://schemas.openxmlformats.org/drawingml/2006/main">
-              <a:ext uri="{FF2B5EF4-FFF2-40B4-BE49-F238E27FC236}">
-                <a16:creationId xmlns:a16="http://schemas.microsoft.com/office/drawing/2014/main" id="{1FCDF4F8-4D67-4655-AB2D-54C9B543F5A7}"/>
+          <p:cNvPr id="19" name="">
+            <a:extLst xmlns:a="http://schemas.openxmlformats.org/drawingml/2006/main">
+              <a:ext uri="{FF2B5EF4-FFF2-40B4-BE49-F238E27FC236}">
+                <a16:creationId xmlns:a16="http://schemas.microsoft.com/office/drawing/2014/main" id="{E1A4F396-49E8-4FFB-8D04-A3F3F8FD9102}"/>
               </a:ext>
             </a:extLst>
           </p:cNvPr>
@@ -22327,10 +21290,10 @@
       </p:sp>
       <p:sp>
         <p:nvSpPr>
-          <p:cNvPr id="21" name="">
-            <a:extLst xmlns:a="http://schemas.openxmlformats.org/drawingml/2006/main">
-              <a:ext uri="{FF2B5EF4-FFF2-40B4-BE49-F238E27FC236}">
-                <a16:creationId xmlns:a16="http://schemas.microsoft.com/office/drawing/2014/main" id="{5099BA3D-8F8F-4758-966E-47748C863E81}"/>
+          <p:cNvPr id="20" name="">
+            <a:extLst xmlns:a="http://schemas.openxmlformats.org/drawingml/2006/main">
+              <a:ext uri="{FF2B5EF4-FFF2-40B4-BE49-F238E27FC236}">
+                <a16:creationId xmlns:a16="http://schemas.microsoft.com/office/drawing/2014/main" id="{66DD5A2B-D01B-4D4C-8227-3A626B1253FF}"/>
               </a:ext>
             </a:extLst>
           </p:cNvPr>
@@ -22388,10 +21351,10 @@
       </p:sp>
       <p:sp>
         <p:nvSpPr>
-          <p:cNvPr id="22" name="">
-            <a:extLst xmlns:a="http://schemas.openxmlformats.org/drawingml/2006/main">
-              <a:ext uri="{FF2B5EF4-FFF2-40B4-BE49-F238E27FC236}">
-                <a16:creationId xmlns:a16="http://schemas.microsoft.com/office/drawing/2014/main" id="{9675B3E7-60D2-4A90-8ED2-1A3B79DC0859}"/>
+          <p:cNvPr id="21" name="">
+            <a:extLst xmlns:a="http://schemas.openxmlformats.org/drawingml/2006/main">
+              <a:ext uri="{FF2B5EF4-FFF2-40B4-BE49-F238E27FC236}">
+                <a16:creationId xmlns:a16="http://schemas.microsoft.com/office/drawing/2014/main" id="{C517DE0A-B006-4313-8AB8-C4293A204D4D}"/>
               </a:ext>
             </a:extLst>
           </p:cNvPr>
@@ -22449,10 +21412,10 @@
       </p:sp>
       <p:sp>
         <p:nvSpPr>
-          <p:cNvPr id="23" name="">
-            <a:extLst xmlns:a="http://schemas.openxmlformats.org/drawingml/2006/main">
-              <a:ext uri="{FF2B5EF4-FFF2-40B4-BE49-F238E27FC236}">
-                <a16:creationId xmlns:a16="http://schemas.microsoft.com/office/drawing/2014/main" id="{7BD8AECF-96C9-4FDA-A639-6F2AD701FA7A}"/>
+          <p:cNvPr id="22" name="">
+            <a:extLst xmlns:a="http://schemas.openxmlformats.org/drawingml/2006/main">
+              <a:ext uri="{FF2B5EF4-FFF2-40B4-BE49-F238E27FC236}">
+                <a16:creationId xmlns:a16="http://schemas.microsoft.com/office/drawing/2014/main" id="{8D4DC3B6-F292-46C5-93AE-AEDC65D6FE89}"/>
               </a:ext>
             </a:extLst>
           </p:cNvPr>
@@ -22510,10 +21473,10 @@
       </p:sp>
       <p:sp>
         <p:nvSpPr>
-          <p:cNvPr id="24" name="">
-            <a:extLst xmlns:a="http://schemas.openxmlformats.org/drawingml/2006/main">
-              <a:ext uri="{FF2B5EF4-FFF2-40B4-BE49-F238E27FC236}">
-                <a16:creationId xmlns:a16="http://schemas.microsoft.com/office/drawing/2014/main" id="{1D6C15A8-7261-48FC-B1C8-FFF6806F2483}"/>
+          <p:cNvPr id="23" name="">
+            <a:extLst xmlns:a="http://schemas.openxmlformats.org/drawingml/2006/main">
+              <a:ext uri="{FF2B5EF4-FFF2-40B4-BE49-F238E27FC236}">
+                <a16:creationId xmlns:a16="http://schemas.microsoft.com/office/drawing/2014/main" id="{3EA5832D-A7E7-4F57-83A9-2A3977A6067C}"/>
               </a:ext>
             </a:extLst>
           </p:cNvPr>
@@ -22572,7 +21535,7 @@
     </p:spTree>
     <p:extLst>
       <p:ext uri="{BB962C8B-B14F-4D97-AF65-F5344CB8AC3E}">
-        <p14:creationId xmlns:p14="http://schemas.microsoft.com/office/powerpoint/2010/main" val="1478829986"/>
+        <p14:creationId xmlns:p14="http://schemas.microsoft.com/office/powerpoint/2010/main" val="1245952239"/>
       </p:ext>
     </p:extLst>
   </p:cSld>
@@ -22600,10 +21563,10 @@
       </p:grpSpPr>
       <p:cxnSp>
         <p:nvCxnSpPr>
-          <p:cNvPr id="16" name=""/>
+          <p:cNvPr id="15" name=""/>
           <p:cNvCxnSpPr>
-            <a:stCxn xmlns:a="http://schemas.openxmlformats.org/drawingml/2006/main" id="10" idx="3"/>
-            <a:endCxn xmlns:a="http://schemas.openxmlformats.org/drawingml/2006/main" id="11" idx="1"/>
+            <a:stCxn xmlns:a="http://schemas.openxmlformats.org/drawingml/2006/main" id="9" idx="3"/>
+            <a:endCxn xmlns:a="http://schemas.openxmlformats.org/drawingml/2006/main" id="10" idx="1"/>
           </p:cNvCxnSpPr>
           <p:nvPr/>
         </p:nvCxnSpPr>
@@ -22626,10 +21589,10 @@
       </p:cxnSp>
       <p:cxnSp>
         <p:nvCxnSpPr>
-          <p:cNvPr id="17" name=""/>
+          <p:cNvPr id="16" name=""/>
           <p:cNvCxnSpPr>
-            <a:stCxn xmlns:a="http://schemas.openxmlformats.org/drawingml/2006/main" id="9" idx="3"/>
-            <a:endCxn xmlns:a="http://schemas.openxmlformats.org/drawingml/2006/main" id="10" idx="1"/>
+            <a:stCxn xmlns:a="http://schemas.openxmlformats.org/drawingml/2006/main" id="8" idx="3"/>
+            <a:endCxn xmlns:a="http://schemas.openxmlformats.org/drawingml/2006/main" id="9" idx="1"/>
           </p:cNvCxnSpPr>
           <p:nvPr/>
         </p:nvCxnSpPr>
@@ -22652,10 +21615,10 @@
       </p:cxnSp>
       <p:sp>
         <p:nvSpPr>
-          <p:cNvPr id="18" name="">
-            <a:extLst xmlns:a="http://schemas.openxmlformats.org/drawingml/2006/main">
-              <a:ext uri="{FF2B5EF4-FFF2-40B4-BE49-F238E27FC236}">
-                <a16:creationId xmlns:a16="http://schemas.microsoft.com/office/drawing/2014/main" id="{E0B0AF12-C62B-4AE4-9C90-9E2622852FAA}"/>
+          <p:cNvPr id="17" name="">
+            <a:extLst xmlns:a="http://schemas.openxmlformats.org/drawingml/2006/main">
+              <a:ext uri="{FF2B5EF4-FFF2-40B4-BE49-F238E27FC236}">
+                <a16:creationId xmlns:a16="http://schemas.microsoft.com/office/drawing/2014/main" id="{D96974C7-320B-4154-B54E-6FAFB26C5690}"/>
               </a:ext>
             </a:extLst>
           </p:cNvPr>
@@ -22688,7 +21651,7 @@
           <p:cNvPr id="2" name="">
             <a:extLst xmlns:a="http://schemas.openxmlformats.org/drawingml/2006/main">
               <a:ext uri="{FF2B5EF4-FFF2-40B4-BE49-F238E27FC236}">
-                <a16:creationId xmlns:a16="http://schemas.microsoft.com/office/drawing/2014/main" id="{EE7E7FBC-30CA-4D83-A606-24993DE82C4B}"/>
+                <a16:creationId xmlns:a16="http://schemas.microsoft.com/office/drawing/2014/main" id="{A1AA74BD-FAC0-498A-8A2B-EB1F34E6572A}"/>
               </a:ext>
             </a:extLst>
           </p:cNvPr>
@@ -22718,14 +21681,14 @@
       </p:sp>
       <p:pic>
         <p:nvPicPr>
-          <p:cNvPr id="20" name=""/>
+          <p:cNvPr id="19" name=""/>
           <p:cNvPicPr>
             <a:picLocks xmlns:a="http://schemas.openxmlformats.org/drawingml/2006/main" noChangeAspect="1"/>
           </p:cNvPicPr>
           <p:nvPr/>
         </p:nvPicPr>
         <p:blipFill>
-          <a:blip xmlns:r="http://schemas.openxmlformats.org/officeDocument/2006/relationships" xmlns:a="http://schemas.openxmlformats.org/drawingml/2006/main" r:embed="R9a052d484c124556"/>
+          <a:blip xmlns:r="http://schemas.openxmlformats.org/officeDocument/2006/relationships" xmlns:a="http://schemas.openxmlformats.org/drawingml/2006/main" r:embed="Rb0fe6bb166f345fa"/>
           <a:stretch xmlns:a="http://schemas.openxmlformats.org/drawingml/2006/main"/>
         </p:blipFill>
         <p:spPr>
@@ -22743,7 +21706,7 @@
           <p:cNvPr id="4" name="">
             <a:extLst xmlns:a="http://schemas.openxmlformats.org/drawingml/2006/main">
               <a:ext uri="{FF2B5EF4-FFF2-40B4-BE49-F238E27FC236}">
-                <a16:creationId xmlns:a16="http://schemas.microsoft.com/office/drawing/2014/main" id="{526E9B6E-6A83-4004-AD34-E6B2E2F568D9}"/>
+                <a16:creationId xmlns:a16="http://schemas.microsoft.com/office/drawing/2014/main" id="{AF15EFE7-9FB7-4FA8-8DB0-C23E7D8D8A98}"/>
               </a:ext>
             </a:extLst>
           </p:cNvPr>
@@ -22804,7 +21767,7 @@
           <p:cNvPr id="5" name="">
             <a:extLst xmlns:a="http://schemas.openxmlformats.org/drawingml/2006/main">
               <a:ext uri="{FF2B5EF4-FFF2-40B4-BE49-F238E27FC236}">
-                <a16:creationId xmlns:a16="http://schemas.microsoft.com/office/drawing/2014/main" id="{A79119FF-1CF0-4534-B721-E8574675AA84}"/>
+                <a16:creationId xmlns:a16="http://schemas.microsoft.com/office/drawing/2014/main" id="{B870C74F-9B8B-4B60-87DB-08C97FE24B31}"/>
               </a:ext>
             </a:extLst>
           </p:cNvPr>
@@ -22865,7 +21828,7 @@
           <p:cNvPr id="6" name="">
             <a:extLst xmlns:a="http://schemas.openxmlformats.org/drawingml/2006/main">
               <a:ext uri="{FF2B5EF4-FFF2-40B4-BE49-F238E27FC236}">
-                <a16:creationId xmlns:a16="http://schemas.microsoft.com/office/drawing/2014/main" id="{C2025CF5-F1E5-4954-ACBA-C6A6CEB3F1AE}"/>
+                <a16:creationId xmlns:a16="http://schemas.microsoft.com/office/drawing/2014/main" id="{5C0E02F7-68B0-4697-AFEF-B7004CA7FA18}"/>
               </a:ext>
             </a:extLst>
           </p:cNvPr>
@@ -22898,68 +21861,7 @@
           <p:cNvPr id="7" name="">
             <a:extLst xmlns:a="http://schemas.openxmlformats.org/drawingml/2006/main">
               <a:ext uri="{FF2B5EF4-FFF2-40B4-BE49-F238E27FC236}">
-                <a16:creationId xmlns:a16="http://schemas.microsoft.com/office/drawing/2014/main" id="{0E68B4BC-6ED9-4D91-BEB2-CDC8519CBE0C}"/>
-              </a:ext>
-            </a:extLst>
-          </p:cNvPr>
-          <p:cNvSpPr>
-            <a:spLocks xmlns:a="http://schemas.openxmlformats.org/drawingml/2006/main" noGrp="1"/>
-          </p:cNvSpPr>
-          <p:nvPr/>
-        </p:nvSpPr>
-        <p:spPr>
-          <a:xfrm xmlns:a="http://schemas.openxmlformats.org/drawingml/2006/main">
-            <a:off x="733425" y="6457950"/>
-            <a:ext cx="6191250" cy="209550"/>
-          </a:xfrm>
-          <a:prstGeom xmlns:a="http://schemas.openxmlformats.org/drawingml/2006/main" prst="rect">
-            <a:avLst/>
-          </a:prstGeom>
-          <a:noFill xmlns:a="http://schemas.openxmlformats.org/drawingml/2006/main"/>
-          <a:ln xmlns:a="http://schemas.openxmlformats.org/drawingml/2006/main" w="0">
-            <a:noFill/>
-          </a:ln>
-        </p:spPr>
-        <p:txBody>
-          <a:bodyPr xmlns:a="http://schemas.openxmlformats.org/drawingml/2006/main" lIns="19050" tIns="19050" rIns="19050" bIns="19050" anchor="ctr">
-            <a:normAutofit fontScale="100000"/>
-          </a:bodyPr>
-          <a:lstStyle xmlns:a="http://schemas.openxmlformats.org/drawingml/2006/main"/>
-          <a:p xmlns:a="http://schemas.openxmlformats.org/drawingml/2006/main">
-            <a:pPr algn="l">
-              <a:lnSpc>
-                <a:spcPct val="105000"/>
-              </a:lnSpc>
-              <a:buNone/>
-              <a:defRPr sz="1050" b="0">
-                <a:solidFill>
-                  <a:srgbClr val="E5EDFF"/>
-                </a:solidFill>
-                <a:latin typeface="PingFang SC"/>
-                <a:ea typeface="PingFang SC"/>
-                <a:cs typeface="PingFang SC"/>
-              </a:defRPr>
-            </a:pPr>
-            <a:r>
-              <a:rPr sz="1050" b="0">
-                <a:solidFill>
-                  <a:srgbClr val="E5EDFF"/>
-                </a:solidFill>
-                <a:latin typeface="PingFang SC"/>
-                <a:ea typeface="PingFang SC"/>
-                <a:cs typeface="PingFang SC"/>
-              </a:rPr>
-              <a:t>广东工业大学 · 学术研究汇报</a:t>
-            </a:r>
-          </a:p>
-        </p:txBody>
-      </p:sp>
-      <p:sp>
-        <p:nvSpPr>
-          <p:cNvPr id="8" name="">
-            <a:extLst xmlns:a="http://schemas.openxmlformats.org/drawingml/2006/main">
-              <a:ext uri="{FF2B5EF4-FFF2-40B4-BE49-F238E27FC236}">
-                <a16:creationId xmlns:a16="http://schemas.microsoft.com/office/drawing/2014/main" id="{8883846C-76D1-499B-B571-98012703A2AB}"/>
+                <a16:creationId xmlns:a16="http://schemas.microsoft.com/office/drawing/2014/main" id="{CD372740-60D8-489C-8183-63828B97ADB8}"/>
               </a:ext>
             </a:extLst>
           </p:cNvPr>
@@ -23017,10 +21919,10 @@
       </p:sp>
       <p:sp>
         <p:nvSpPr>
-          <p:cNvPr id="9" name="">
-            <a:extLst xmlns:a="http://schemas.openxmlformats.org/drawingml/2006/main">
-              <a:ext uri="{FF2B5EF4-FFF2-40B4-BE49-F238E27FC236}">
-                <a16:creationId xmlns:a16="http://schemas.microsoft.com/office/drawing/2014/main" id="{8BB257C1-5C2A-4E5E-BAEE-B764E0B51595}"/>
+          <p:cNvPr id="8" name="">
+            <a:extLst xmlns:a="http://schemas.openxmlformats.org/drawingml/2006/main">
+              <a:ext uri="{FF2B5EF4-FFF2-40B4-BE49-F238E27FC236}">
+                <a16:creationId xmlns:a16="http://schemas.microsoft.com/office/drawing/2014/main" id="{CDAE8F32-6AC0-4B18-B25B-8083C11FAC26}"/>
               </a:ext>
             </a:extLst>
           </p:cNvPr>
@@ -23110,10 +22012,10 @@
       </p:sp>
       <p:sp>
         <p:nvSpPr>
-          <p:cNvPr id="10" name="">
-            <a:extLst xmlns:a="http://schemas.openxmlformats.org/drawingml/2006/main">
-              <a:ext uri="{FF2B5EF4-FFF2-40B4-BE49-F238E27FC236}">
-                <a16:creationId xmlns:a16="http://schemas.microsoft.com/office/drawing/2014/main" id="{B95C6DA7-EBC9-4049-B52B-F07846CC8A52}"/>
+          <p:cNvPr id="9" name="">
+            <a:extLst xmlns:a="http://schemas.openxmlformats.org/drawingml/2006/main">
+              <a:ext uri="{FF2B5EF4-FFF2-40B4-BE49-F238E27FC236}">
+                <a16:creationId xmlns:a16="http://schemas.microsoft.com/office/drawing/2014/main" id="{D6B19D2E-DE2D-4B54-A350-D7B4B816D088}"/>
               </a:ext>
             </a:extLst>
           </p:cNvPr>
@@ -23203,10 +22105,10 @@
       </p:sp>
       <p:sp>
         <p:nvSpPr>
-          <p:cNvPr id="11" name="">
-            <a:extLst xmlns:a="http://schemas.openxmlformats.org/drawingml/2006/main">
-              <a:ext uri="{FF2B5EF4-FFF2-40B4-BE49-F238E27FC236}">
-                <a16:creationId xmlns:a16="http://schemas.microsoft.com/office/drawing/2014/main" id="{A8AB9593-4C05-4705-8D4E-647C7B1A259F}"/>
+          <p:cNvPr id="10" name="">
+            <a:extLst xmlns:a="http://schemas.openxmlformats.org/drawingml/2006/main">
+              <a:ext uri="{FF2B5EF4-FFF2-40B4-BE49-F238E27FC236}">
+                <a16:creationId xmlns:a16="http://schemas.microsoft.com/office/drawing/2014/main" id="{946046F1-D39B-4CA8-BF4A-6775AFA89CBF}"/>
               </a:ext>
             </a:extLst>
           </p:cNvPr>
@@ -23296,10 +22198,10 @@
       </p:sp>
       <p:sp>
         <p:nvSpPr>
-          <p:cNvPr id="14" name="">
-            <a:extLst xmlns:a="http://schemas.openxmlformats.org/drawingml/2006/main">
-              <a:ext uri="{FF2B5EF4-FFF2-40B4-BE49-F238E27FC236}">
-                <a16:creationId xmlns:a16="http://schemas.microsoft.com/office/drawing/2014/main" id="{B6CE2A2D-19F7-48F0-A93F-DFBE10F0517C}"/>
+          <p:cNvPr id="13" name="">
+            <a:extLst xmlns:a="http://schemas.openxmlformats.org/drawingml/2006/main">
+              <a:ext uri="{FF2B5EF4-FFF2-40B4-BE49-F238E27FC236}">
+                <a16:creationId xmlns:a16="http://schemas.microsoft.com/office/drawing/2014/main" id="{D0CDB62B-A5B8-4E9B-AFB0-9108D8679547}"/>
               </a:ext>
             </a:extLst>
           </p:cNvPr>
@@ -23357,10 +22259,10 @@
       </p:sp>
       <p:sp>
         <p:nvSpPr>
-          <p:cNvPr id="15" name="">
-            <a:extLst xmlns:a="http://schemas.openxmlformats.org/drawingml/2006/main">
-              <a:ext uri="{FF2B5EF4-FFF2-40B4-BE49-F238E27FC236}">
-                <a16:creationId xmlns:a16="http://schemas.microsoft.com/office/drawing/2014/main" id="{B1A9324D-BC1F-4F8A-A64B-1F16082E4971}"/>
+          <p:cNvPr id="14" name="">
+            <a:extLst xmlns:a="http://schemas.openxmlformats.org/drawingml/2006/main">
+              <a:ext uri="{FF2B5EF4-FFF2-40B4-BE49-F238E27FC236}">
+                <a16:creationId xmlns:a16="http://schemas.microsoft.com/office/drawing/2014/main" id="{643EE072-E377-4E31-8985-F8D3C67AE2BE}"/>
               </a:ext>
             </a:extLst>
           </p:cNvPr>
@@ -23419,7 +22321,7 @@
     </p:spTree>
     <p:extLst>
       <p:ext uri="{BB962C8B-B14F-4D97-AF65-F5344CB8AC3E}">
-        <p14:creationId xmlns:p14="http://schemas.microsoft.com/office/powerpoint/2010/main" val="57282483"/>
+        <p14:creationId xmlns:p14="http://schemas.microsoft.com/office/powerpoint/2010/main" val="1382861111"/>
       </p:ext>
     </p:extLst>
   </p:cSld>
@@ -23447,10 +22349,10 @@
       </p:grpSpPr>
       <p:sp>
         <p:nvSpPr>
-          <p:cNvPr id="33" name="">
-            <a:extLst xmlns:a="http://schemas.openxmlformats.org/drawingml/2006/main">
-              <a:ext uri="{FF2B5EF4-FFF2-40B4-BE49-F238E27FC236}">
-                <a16:creationId xmlns:a16="http://schemas.microsoft.com/office/drawing/2014/main" id="{0F47E887-1E7D-4641-9647-6B421FC520E6}"/>
+          <p:cNvPr id="32" name="">
+            <a:extLst xmlns:a="http://schemas.openxmlformats.org/drawingml/2006/main">
+              <a:ext uri="{FF2B5EF4-FFF2-40B4-BE49-F238E27FC236}">
+                <a16:creationId xmlns:a16="http://schemas.microsoft.com/office/drawing/2014/main" id="{3D7FA7B2-E9C2-4B6F-8083-8C038F0494F6}"/>
               </a:ext>
             </a:extLst>
           </p:cNvPr>
@@ -23483,7 +22385,7 @@
           <p:cNvPr id="2" name="">
             <a:extLst xmlns:a="http://schemas.openxmlformats.org/drawingml/2006/main">
               <a:ext uri="{FF2B5EF4-FFF2-40B4-BE49-F238E27FC236}">
-                <a16:creationId xmlns:a16="http://schemas.microsoft.com/office/drawing/2014/main" id="{EC0097C8-1263-48EB-B44B-634925EF4D6C}"/>
+                <a16:creationId xmlns:a16="http://schemas.microsoft.com/office/drawing/2014/main" id="{408ACDBE-CD1F-4F82-AA0C-B1FECFF60DC7}"/>
               </a:ext>
             </a:extLst>
           </p:cNvPr>
@@ -23513,14 +22415,14 @@
       </p:sp>
       <p:pic>
         <p:nvPicPr>
-          <p:cNvPr id="35" name=""/>
+          <p:cNvPr id="34" name=""/>
           <p:cNvPicPr>
             <a:picLocks xmlns:a="http://schemas.openxmlformats.org/drawingml/2006/main" noChangeAspect="1"/>
           </p:cNvPicPr>
           <p:nvPr/>
         </p:nvPicPr>
         <p:blipFill>
-          <a:blip xmlns:r="http://schemas.openxmlformats.org/officeDocument/2006/relationships" xmlns:a="http://schemas.openxmlformats.org/drawingml/2006/main" r:embed="R7f03f03f18064974"/>
+          <a:blip xmlns:r="http://schemas.openxmlformats.org/officeDocument/2006/relationships" xmlns:a="http://schemas.openxmlformats.org/drawingml/2006/main" r:embed="Rf7fbd1494fb44512"/>
           <a:stretch xmlns:a="http://schemas.openxmlformats.org/drawingml/2006/main"/>
         </p:blipFill>
         <p:spPr>
@@ -23538,7 +22440,7 @@
           <p:cNvPr id="4" name="">
             <a:extLst xmlns:a="http://schemas.openxmlformats.org/drawingml/2006/main">
               <a:ext uri="{FF2B5EF4-FFF2-40B4-BE49-F238E27FC236}">
-                <a16:creationId xmlns:a16="http://schemas.microsoft.com/office/drawing/2014/main" id="{4896FF3F-A62A-4794-B7D2-CB5DDE2C5948}"/>
+                <a16:creationId xmlns:a16="http://schemas.microsoft.com/office/drawing/2014/main" id="{33AF610C-8677-4A4E-8922-122B57B14718}"/>
               </a:ext>
             </a:extLst>
           </p:cNvPr>
@@ -23599,7 +22501,7 @@
           <p:cNvPr id="5" name="">
             <a:extLst xmlns:a="http://schemas.openxmlformats.org/drawingml/2006/main">
               <a:ext uri="{FF2B5EF4-FFF2-40B4-BE49-F238E27FC236}">
-                <a16:creationId xmlns:a16="http://schemas.microsoft.com/office/drawing/2014/main" id="{65606BF9-96ED-43A9-B863-BE332039C757}"/>
+                <a16:creationId xmlns:a16="http://schemas.microsoft.com/office/drawing/2014/main" id="{0CD8A65E-D4C1-4358-86A4-448A3656C52A}"/>
               </a:ext>
             </a:extLst>
           </p:cNvPr>
@@ -23660,7 +22562,7 @@
           <p:cNvPr id="6" name="">
             <a:extLst xmlns:a="http://schemas.openxmlformats.org/drawingml/2006/main">
               <a:ext uri="{FF2B5EF4-FFF2-40B4-BE49-F238E27FC236}">
-                <a16:creationId xmlns:a16="http://schemas.microsoft.com/office/drawing/2014/main" id="{DB01A87E-A3F8-42F4-8064-2C409F532F57}"/>
+                <a16:creationId xmlns:a16="http://schemas.microsoft.com/office/drawing/2014/main" id="{23D5B601-6441-4747-AB1A-76140EFAC169}"/>
               </a:ext>
             </a:extLst>
           </p:cNvPr>
@@ -23693,68 +22595,7 @@
           <p:cNvPr id="7" name="">
             <a:extLst xmlns:a="http://schemas.openxmlformats.org/drawingml/2006/main">
               <a:ext uri="{FF2B5EF4-FFF2-40B4-BE49-F238E27FC236}">
-                <a16:creationId xmlns:a16="http://schemas.microsoft.com/office/drawing/2014/main" id="{5F0C0E38-E7D9-451C-9C52-72021B1E74F9}"/>
-              </a:ext>
-            </a:extLst>
-          </p:cNvPr>
-          <p:cNvSpPr>
-            <a:spLocks xmlns:a="http://schemas.openxmlformats.org/drawingml/2006/main" noGrp="1"/>
-          </p:cNvSpPr>
-          <p:nvPr/>
-        </p:nvSpPr>
-        <p:spPr>
-          <a:xfrm xmlns:a="http://schemas.openxmlformats.org/drawingml/2006/main">
-            <a:off x="733425" y="6457950"/>
-            <a:ext cx="6191250" cy="209550"/>
-          </a:xfrm>
-          <a:prstGeom xmlns:a="http://schemas.openxmlformats.org/drawingml/2006/main" prst="rect">
-            <a:avLst/>
-          </a:prstGeom>
-          <a:noFill xmlns:a="http://schemas.openxmlformats.org/drawingml/2006/main"/>
-          <a:ln xmlns:a="http://schemas.openxmlformats.org/drawingml/2006/main" w="0">
-            <a:noFill/>
-          </a:ln>
-        </p:spPr>
-        <p:txBody>
-          <a:bodyPr xmlns:a="http://schemas.openxmlformats.org/drawingml/2006/main" lIns="19050" tIns="19050" rIns="19050" bIns="19050" anchor="ctr">
-            <a:normAutofit fontScale="100000"/>
-          </a:bodyPr>
-          <a:lstStyle xmlns:a="http://schemas.openxmlformats.org/drawingml/2006/main"/>
-          <a:p xmlns:a="http://schemas.openxmlformats.org/drawingml/2006/main">
-            <a:pPr algn="l">
-              <a:lnSpc>
-                <a:spcPct val="105000"/>
-              </a:lnSpc>
-              <a:buNone/>
-              <a:defRPr sz="1050" b="0">
-                <a:solidFill>
-                  <a:srgbClr val="E5EDFF"/>
-                </a:solidFill>
-                <a:latin typeface="PingFang SC"/>
-                <a:ea typeface="PingFang SC"/>
-                <a:cs typeface="PingFang SC"/>
-              </a:defRPr>
-            </a:pPr>
-            <a:r>
-              <a:rPr sz="1050" b="0">
-                <a:solidFill>
-                  <a:srgbClr val="E5EDFF"/>
-                </a:solidFill>
-                <a:latin typeface="PingFang SC"/>
-                <a:ea typeface="PingFang SC"/>
-                <a:cs typeface="PingFang SC"/>
-              </a:rPr>
-              <a:t>广东工业大学 · 学术研究汇报</a:t>
-            </a:r>
-          </a:p>
-        </p:txBody>
-      </p:sp>
-      <p:sp>
-        <p:nvSpPr>
-          <p:cNvPr id="8" name="">
-            <a:extLst xmlns:a="http://schemas.openxmlformats.org/drawingml/2006/main">
-              <a:ext uri="{FF2B5EF4-FFF2-40B4-BE49-F238E27FC236}">
-                <a16:creationId xmlns:a16="http://schemas.microsoft.com/office/drawing/2014/main" id="{22DB28DF-7AE3-405C-8A7B-B263071B1545}"/>
+                <a16:creationId xmlns:a16="http://schemas.microsoft.com/office/drawing/2014/main" id="{599AE877-8A8D-49B3-943D-6C86F6C5107E}"/>
               </a:ext>
             </a:extLst>
           </p:cNvPr>
@@ -23812,10 +22653,10 @@
       </p:sp>
       <p:sp>
         <p:nvSpPr>
-          <p:cNvPr id="9" name="">
-            <a:extLst xmlns:a="http://schemas.openxmlformats.org/drawingml/2006/main">
-              <a:ext uri="{FF2B5EF4-FFF2-40B4-BE49-F238E27FC236}">
-                <a16:creationId xmlns:a16="http://schemas.microsoft.com/office/drawing/2014/main" id="{3497A9AE-EE69-48D5-A0FC-528CE19F96DE}"/>
+          <p:cNvPr id="8" name="">
+            <a:extLst xmlns:a="http://schemas.openxmlformats.org/drawingml/2006/main">
+              <a:ext uri="{FF2B5EF4-FFF2-40B4-BE49-F238E27FC236}">
+                <a16:creationId xmlns:a16="http://schemas.microsoft.com/office/drawing/2014/main" id="{A3F24704-67B9-4E24-BA42-DB017FEE9A32}"/>
               </a:ext>
             </a:extLst>
           </p:cNvPr>
@@ -23873,10 +22714,10 @@
       </p:sp>
       <p:sp>
         <p:nvSpPr>
-          <p:cNvPr id="10" name="">
-            <a:extLst xmlns:a="http://schemas.openxmlformats.org/drawingml/2006/main">
-              <a:ext uri="{FF2B5EF4-FFF2-40B4-BE49-F238E27FC236}">
-                <a16:creationId xmlns:a16="http://schemas.microsoft.com/office/drawing/2014/main" id="{ED1D7175-1718-464C-81B8-3D71EDFBCF3A}"/>
+          <p:cNvPr id="9" name="">
+            <a:extLst xmlns:a="http://schemas.openxmlformats.org/drawingml/2006/main">
+              <a:ext uri="{FF2B5EF4-FFF2-40B4-BE49-F238E27FC236}">
+                <a16:creationId xmlns:a16="http://schemas.microsoft.com/office/drawing/2014/main" id="{1F956B34-299F-4BE7-8C06-C35687AFE0D8}"/>
               </a:ext>
             </a:extLst>
           </p:cNvPr>
@@ -23934,10 +22775,10 @@
       </p:sp>
       <p:sp>
         <p:nvSpPr>
-          <p:cNvPr id="11" name="">
-            <a:extLst xmlns:a="http://schemas.openxmlformats.org/drawingml/2006/main">
-              <a:ext uri="{FF2B5EF4-FFF2-40B4-BE49-F238E27FC236}">
-                <a16:creationId xmlns:a16="http://schemas.microsoft.com/office/drawing/2014/main" id="{50E12720-AAAD-4188-B30F-A18006E8EC88}"/>
+          <p:cNvPr id="10" name="">
+            <a:extLst xmlns:a="http://schemas.openxmlformats.org/drawingml/2006/main">
+              <a:ext uri="{FF2B5EF4-FFF2-40B4-BE49-F238E27FC236}">
+                <a16:creationId xmlns:a16="http://schemas.microsoft.com/office/drawing/2014/main" id="{9780E3D9-423D-4E6D-8F88-D61CF695E9C9}"/>
               </a:ext>
             </a:extLst>
           </p:cNvPr>
@@ -23995,10 +22836,10 @@
       </p:sp>
       <p:sp>
         <p:nvSpPr>
-          <p:cNvPr id="12" name="">
-            <a:extLst xmlns:a="http://schemas.openxmlformats.org/drawingml/2006/main">
-              <a:ext uri="{FF2B5EF4-FFF2-40B4-BE49-F238E27FC236}">
-                <a16:creationId xmlns:a16="http://schemas.microsoft.com/office/drawing/2014/main" id="{C5F502EC-733B-47DD-A592-06298B86D0E4}"/>
+          <p:cNvPr id="11" name="">
+            <a:extLst xmlns:a="http://schemas.openxmlformats.org/drawingml/2006/main">
+              <a:ext uri="{FF2B5EF4-FFF2-40B4-BE49-F238E27FC236}">
+                <a16:creationId xmlns:a16="http://schemas.microsoft.com/office/drawing/2014/main" id="{7D41AF7F-8EDB-4114-9542-A1436C2AE656}"/>
               </a:ext>
             </a:extLst>
           </p:cNvPr>
@@ -24028,10 +22869,10 @@
       </p:sp>
       <p:sp>
         <p:nvSpPr>
-          <p:cNvPr id="13" name="">
-            <a:extLst xmlns:a="http://schemas.openxmlformats.org/drawingml/2006/main">
-              <a:ext uri="{FF2B5EF4-FFF2-40B4-BE49-F238E27FC236}">
-                <a16:creationId xmlns:a16="http://schemas.microsoft.com/office/drawing/2014/main" id="{D0D8DDE9-B1D7-48BF-8161-A6DE515E6816}"/>
+          <p:cNvPr id="12" name="">
+            <a:extLst xmlns:a="http://schemas.openxmlformats.org/drawingml/2006/main">
+              <a:ext uri="{FF2B5EF4-FFF2-40B4-BE49-F238E27FC236}">
+                <a16:creationId xmlns:a16="http://schemas.microsoft.com/office/drawing/2014/main" id="{C6816E2B-4437-4DA0-8374-32FEACD5BDA4}"/>
               </a:ext>
             </a:extLst>
           </p:cNvPr>
@@ -24089,10 +22930,10 @@
       </p:sp>
       <p:sp>
         <p:nvSpPr>
-          <p:cNvPr id="14" name="">
-            <a:extLst xmlns:a="http://schemas.openxmlformats.org/drawingml/2006/main">
-              <a:ext uri="{FF2B5EF4-FFF2-40B4-BE49-F238E27FC236}">
-                <a16:creationId xmlns:a16="http://schemas.microsoft.com/office/drawing/2014/main" id="{8E419151-E11C-4052-B4F4-6C93637CE401}"/>
+          <p:cNvPr id="13" name="">
+            <a:extLst xmlns:a="http://schemas.openxmlformats.org/drawingml/2006/main">
+              <a:ext uri="{FF2B5EF4-FFF2-40B4-BE49-F238E27FC236}">
+                <a16:creationId xmlns:a16="http://schemas.microsoft.com/office/drawing/2014/main" id="{2EC1D7B1-7A46-496A-A2D6-4557D4906172}"/>
               </a:ext>
             </a:extLst>
           </p:cNvPr>
@@ -24150,10 +22991,10 @@
       </p:sp>
       <p:sp>
         <p:nvSpPr>
-          <p:cNvPr id="15" name="">
-            <a:extLst xmlns:a="http://schemas.openxmlformats.org/drawingml/2006/main">
-              <a:ext uri="{FF2B5EF4-FFF2-40B4-BE49-F238E27FC236}">
-                <a16:creationId xmlns:a16="http://schemas.microsoft.com/office/drawing/2014/main" id="{1590BDE4-8BBE-4300-BF65-C82A595475A9}"/>
+          <p:cNvPr id="14" name="">
+            <a:extLst xmlns:a="http://schemas.openxmlformats.org/drawingml/2006/main">
+              <a:ext uri="{FF2B5EF4-FFF2-40B4-BE49-F238E27FC236}">
+                <a16:creationId xmlns:a16="http://schemas.microsoft.com/office/drawing/2014/main" id="{BAEADF0E-279A-46F1-A25D-CAD9B094E4CF}"/>
               </a:ext>
             </a:extLst>
           </p:cNvPr>
@@ -24211,10 +23052,10 @@
       </p:sp>
       <p:sp>
         <p:nvSpPr>
-          <p:cNvPr id="16" name="">
-            <a:extLst xmlns:a="http://schemas.openxmlformats.org/drawingml/2006/main">
-              <a:ext uri="{FF2B5EF4-FFF2-40B4-BE49-F238E27FC236}">
-                <a16:creationId xmlns:a16="http://schemas.microsoft.com/office/drawing/2014/main" id="{F7929DF4-F989-4158-9A05-D632207B3A2D}"/>
+          <p:cNvPr id="15" name="">
+            <a:extLst xmlns:a="http://schemas.openxmlformats.org/drawingml/2006/main">
+              <a:ext uri="{FF2B5EF4-FFF2-40B4-BE49-F238E27FC236}">
+                <a16:creationId xmlns:a16="http://schemas.microsoft.com/office/drawing/2014/main" id="{195B88C9-1BC9-49A5-9892-CFD17E72E244}"/>
               </a:ext>
             </a:extLst>
           </p:cNvPr>
@@ -24244,10 +23085,10 @@
       </p:sp>
       <p:sp>
         <p:nvSpPr>
-          <p:cNvPr id="17" name="">
-            <a:extLst xmlns:a="http://schemas.openxmlformats.org/drawingml/2006/main">
-              <a:ext uri="{FF2B5EF4-FFF2-40B4-BE49-F238E27FC236}">
-                <a16:creationId xmlns:a16="http://schemas.microsoft.com/office/drawing/2014/main" id="{E5753657-3BC9-4A43-81B7-399445B2514D}"/>
+          <p:cNvPr id="16" name="">
+            <a:extLst xmlns:a="http://schemas.openxmlformats.org/drawingml/2006/main">
+              <a:ext uri="{FF2B5EF4-FFF2-40B4-BE49-F238E27FC236}">
+                <a16:creationId xmlns:a16="http://schemas.microsoft.com/office/drawing/2014/main" id="{739A3880-63F9-4264-AF62-520080E9D080}"/>
               </a:ext>
             </a:extLst>
           </p:cNvPr>
@@ -24305,10 +23146,10 @@
       </p:sp>
       <p:sp>
         <p:nvSpPr>
-          <p:cNvPr id="18" name="">
-            <a:extLst xmlns:a="http://schemas.openxmlformats.org/drawingml/2006/main">
-              <a:ext uri="{FF2B5EF4-FFF2-40B4-BE49-F238E27FC236}">
-                <a16:creationId xmlns:a16="http://schemas.microsoft.com/office/drawing/2014/main" id="{2326CC84-3E3A-486A-B870-830A076FB6B7}"/>
+          <p:cNvPr id="17" name="">
+            <a:extLst xmlns:a="http://schemas.openxmlformats.org/drawingml/2006/main">
+              <a:ext uri="{FF2B5EF4-FFF2-40B4-BE49-F238E27FC236}">
+                <a16:creationId xmlns:a16="http://schemas.microsoft.com/office/drawing/2014/main" id="{19D012B2-A87F-4D79-841C-1D344F288E87}"/>
               </a:ext>
             </a:extLst>
           </p:cNvPr>
@@ -24366,10 +23207,10 @@
       </p:sp>
       <p:sp>
         <p:nvSpPr>
-          <p:cNvPr id="19" name="">
-            <a:extLst xmlns:a="http://schemas.openxmlformats.org/drawingml/2006/main">
-              <a:ext uri="{FF2B5EF4-FFF2-40B4-BE49-F238E27FC236}">
-                <a16:creationId xmlns:a16="http://schemas.microsoft.com/office/drawing/2014/main" id="{D8FC7874-CE01-45F2-BBF9-6E69A615D1C9}"/>
+          <p:cNvPr id="18" name="">
+            <a:extLst xmlns:a="http://schemas.openxmlformats.org/drawingml/2006/main">
+              <a:ext uri="{FF2B5EF4-FFF2-40B4-BE49-F238E27FC236}">
+                <a16:creationId xmlns:a16="http://schemas.microsoft.com/office/drawing/2014/main" id="{707A0AD9-7ECB-4AB7-A293-DB7C6A8021D6}"/>
               </a:ext>
             </a:extLst>
           </p:cNvPr>
@@ -24427,10 +23268,10 @@
       </p:sp>
       <p:sp>
         <p:nvSpPr>
-          <p:cNvPr id="20" name="">
-            <a:extLst xmlns:a="http://schemas.openxmlformats.org/drawingml/2006/main">
-              <a:ext uri="{FF2B5EF4-FFF2-40B4-BE49-F238E27FC236}">
-                <a16:creationId xmlns:a16="http://schemas.microsoft.com/office/drawing/2014/main" id="{97B509EC-9A89-46D0-B769-AFEAA77E6BB0}"/>
+          <p:cNvPr id="19" name="">
+            <a:extLst xmlns:a="http://schemas.openxmlformats.org/drawingml/2006/main">
+              <a:ext uri="{FF2B5EF4-FFF2-40B4-BE49-F238E27FC236}">
+                <a16:creationId xmlns:a16="http://schemas.microsoft.com/office/drawing/2014/main" id="{DC053E91-9B7B-4C90-A85C-676B9AA9E484}"/>
               </a:ext>
             </a:extLst>
           </p:cNvPr>
@@ -24460,10 +23301,10 @@
       </p:sp>
       <p:sp>
         <p:nvSpPr>
-          <p:cNvPr id="21" name="">
-            <a:extLst xmlns:a="http://schemas.openxmlformats.org/drawingml/2006/main">
-              <a:ext uri="{FF2B5EF4-FFF2-40B4-BE49-F238E27FC236}">
-                <a16:creationId xmlns:a16="http://schemas.microsoft.com/office/drawing/2014/main" id="{BD0A5D1B-B7A3-4A24-BAD4-12038816C453}"/>
+          <p:cNvPr id="20" name="">
+            <a:extLst xmlns:a="http://schemas.openxmlformats.org/drawingml/2006/main">
+              <a:ext uri="{FF2B5EF4-FFF2-40B4-BE49-F238E27FC236}">
+                <a16:creationId xmlns:a16="http://schemas.microsoft.com/office/drawing/2014/main" id="{3175B458-73BE-4F98-BF04-1A5422084D6F}"/>
               </a:ext>
             </a:extLst>
           </p:cNvPr>
@@ -24521,10 +23362,10 @@
       </p:sp>
       <p:sp>
         <p:nvSpPr>
-          <p:cNvPr id="22" name="">
-            <a:extLst xmlns:a="http://schemas.openxmlformats.org/drawingml/2006/main">
-              <a:ext uri="{FF2B5EF4-FFF2-40B4-BE49-F238E27FC236}">
-                <a16:creationId xmlns:a16="http://schemas.microsoft.com/office/drawing/2014/main" id="{085EAD29-9AF6-42F9-B83B-60DD1D195B2A}"/>
+          <p:cNvPr id="21" name="">
+            <a:extLst xmlns:a="http://schemas.openxmlformats.org/drawingml/2006/main">
+              <a:ext uri="{FF2B5EF4-FFF2-40B4-BE49-F238E27FC236}">
+                <a16:creationId xmlns:a16="http://schemas.microsoft.com/office/drawing/2014/main" id="{F86B72ED-A400-4811-865C-3FB0D8B65494}"/>
               </a:ext>
             </a:extLst>
           </p:cNvPr>
@@ -24582,10 +23423,10 @@
       </p:sp>
       <p:sp>
         <p:nvSpPr>
-          <p:cNvPr id="23" name="">
-            <a:extLst xmlns:a="http://schemas.openxmlformats.org/drawingml/2006/main">
-              <a:ext uri="{FF2B5EF4-FFF2-40B4-BE49-F238E27FC236}">
-                <a16:creationId xmlns:a16="http://schemas.microsoft.com/office/drawing/2014/main" id="{6B341F0F-5C32-4F07-BD1E-A1A5846D1D58}"/>
+          <p:cNvPr id="22" name="">
+            <a:extLst xmlns:a="http://schemas.openxmlformats.org/drawingml/2006/main">
+              <a:ext uri="{FF2B5EF4-FFF2-40B4-BE49-F238E27FC236}">
+                <a16:creationId xmlns:a16="http://schemas.microsoft.com/office/drawing/2014/main" id="{03A7991D-50D7-44AF-B0BE-2F0A607D7561}"/>
               </a:ext>
             </a:extLst>
           </p:cNvPr>
@@ -24643,10 +23484,10 @@
       </p:sp>
       <p:sp>
         <p:nvSpPr>
-          <p:cNvPr id="24" name="">
-            <a:extLst xmlns:a="http://schemas.openxmlformats.org/drawingml/2006/main">
-              <a:ext uri="{FF2B5EF4-FFF2-40B4-BE49-F238E27FC236}">
-                <a16:creationId xmlns:a16="http://schemas.microsoft.com/office/drawing/2014/main" id="{4D1DF6AA-BDD4-4C8F-91E0-252E96A218F6}"/>
+          <p:cNvPr id="23" name="">
+            <a:extLst xmlns:a="http://schemas.openxmlformats.org/drawingml/2006/main">
+              <a:ext uri="{FF2B5EF4-FFF2-40B4-BE49-F238E27FC236}">
+                <a16:creationId xmlns:a16="http://schemas.microsoft.com/office/drawing/2014/main" id="{2FC7E959-9C50-4A25-A536-3AC077BF1379}"/>
               </a:ext>
             </a:extLst>
           </p:cNvPr>
@@ -24676,10 +23517,10 @@
       </p:sp>
       <p:sp>
         <p:nvSpPr>
-          <p:cNvPr id="25" name="">
-            <a:extLst xmlns:a="http://schemas.openxmlformats.org/drawingml/2006/main">
-              <a:ext uri="{FF2B5EF4-FFF2-40B4-BE49-F238E27FC236}">
-                <a16:creationId xmlns:a16="http://schemas.microsoft.com/office/drawing/2014/main" id="{2678AEC0-2928-4F14-922C-D853CC0D3123}"/>
+          <p:cNvPr id="24" name="">
+            <a:extLst xmlns:a="http://schemas.openxmlformats.org/drawingml/2006/main">
+              <a:ext uri="{FF2B5EF4-FFF2-40B4-BE49-F238E27FC236}">
+                <a16:creationId xmlns:a16="http://schemas.microsoft.com/office/drawing/2014/main" id="{CC0EF794-0D27-4291-83B5-5A10FE0EB383}"/>
               </a:ext>
             </a:extLst>
           </p:cNvPr>
@@ -24737,10 +23578,10 @@
       </p:sp>
       <p:sp>
         <p:nvSpPr>
-          <p:cNvPr id="26" name="">
-            <a:extLst xmlns:a="http://schemas.openxmlformats.org/drawingml/2006/main">
-              <a:ext uri="{FF2B5EF4-FFF2-40B4-BE49-F238E27FC236}">
-                <a16:creationId xmlns:a16="http://schemas.microsoft.com/office/drawing/2014/main" id="{87377A9A-3445-48C3-BCD9-271FE90E8CE7}"/>
+          <p:cNvPr id="25" name="">
+            <a:extLst xmlns:a="http://schemas.openxmlformats.org/drawingml/2006/main">
+              <a:ext uri="{FF2B5EF4-FFF2-40B4-BE49-F238E27FC236}">
+                <a16:creationId xmlns:a16="http://schemas.microsoft.com/office/drawing/2014/main" id="{121B2BFA-A3B5-4E17-9ED9-71A0D4F66A51}"/>
               </a:ext>
             </a:extLst>
           </p:cNvPr>
@@ -24798,10 +23639,10 @@
       </p:sp>
       <p:sp>
         <p:nvSpPr>
-          <p:cNvPr id="27" name="">
-            <a:extLst xmlns:a="http://schemas.openxmlformats.org/drawingml/2006/main">
-              <a:ext uri="{FF2B5EF4-FFF2-40B4-BE49-F238E27FC236}">
-                <a16:creationId xmlns:a16="http://schemas.microsoft.com/office/drawing/2014/main" id="{9FB5982A-8CDF-4DFD-87C0-666C0F6D4683}"/>
+          <p:cNvPr id="26" name="">
+            <a:extLst xmlns:a="http://schemas.openxmlformats.org/drawingml/2006/main">
+              <a:ext uri="{FF2B5EF4-FFF2-40B4-BE49-F238E27FC236}">
+                <a16:creationId xmlns:a16="http://schemas.microsoft.com/office/drawing/2014/main" id="{5CBE23EA-6764-40A2-A2DC-8DCB45B52BE2}"/>
               </a:ext>
             </a:extLst>
           </p:cNvPr>
@@ -24859,10 +23700,10 @@
       </p:sp>
       <p:sp>
         <p:nvSpPr>
-          <p:cNvPr id="28" name="">
-            <a:extLst xmlns:a="http://schemas.openxmlformats.org/drawingml/2006/main">
-              <a:ext uri="{FF2B5EF4-FFF2-40B4-BE49-F238E27FC236}">
-                <a16:creationId xmlns:a16="http://schemas.microsoft.com/office/drawing/2014/main" id="{AF20385C-49CD-469D-BA7F-A2F5CD279CCF}"/>
+          <p:cNvPr id="27" name="">
+            <a:extLst xmlns:a="http://schemas.openxmlformats.org/drawingml/2006/main">
+              <a:ext uri="{FF2B5EF4-FFF2-40B4-BE49-F238E27FC236}">
+                <a16:creationId xmlns:a16="http://schemas.microsoft.com/office/drawing/2014/main" id="{D026C664-0633-4FB8-AF7C-07B13452DD82}"/>
               </a:ext>
             </a:extLst>
           </p:cNvPr>
@@ -24892,10 +23733,10 @@
       </p:sp>
       <p:sp>
         <p:nvSpPr>
-          <p:cNvPr id="29" name="">
-            <a:extLst xmlns:a="http://schemas.openxmlformats.org/drawingml/2006/main">
-              <a:ext uri="{FF2B5EF4-FFF2-40B4-BE49-F238E27FC236}">
-                <a16:creationId xmlns:a16="http://schemas.microsoft.com/office/drawing/2014/main" id="{25945BD6-FAD8-4446-AE86-5852C4959C35}"/>
+          <p:cNvPr id="28" name="">
+            <a:extLst xmlns:a="http://schemas.openxmlformats.org/drawingml/2006/main">
+              <a:ext uri="{FF2B5EF4-FFF2-40B4-BE49-F238E27FC236}">
+                <a16:creationId xmlns:a16="http://schemas.microsoft.com/office/drawing/2014/main" id="{41EE3874-A993-4E53-A31E-E68A4168829D}"/>
               </a:ext>
             </a:extLst>
           </p:cNvPr>
@@ -24953,10 +23794,10 @@
       </p:sp>
       <p:sp>
         <p:nvSpPr>
-          <p:cNvPr id="30" name="">
-            <a:extLst xmlns:a="http://schemas.openxmlformats.org/drawingml/2006/main">
-              <a:ext uri="{FF2B5EF4-FFF2-40B4-BE49-F238E27FC236}">
-                <a16:creationId xmlns:a16="http://schemas.microsoft.com/office/drawing/2014/main" id="{D8183855-7CF8-4635-B071-6A309E366736}"/>
+          <p:cNvPr id="29" name="">
+            <a:extLst xmlns:a="http://schemas.openxmlformats.org/drawingml/2006/main">
+              <a:ext uri="{FF2B5EF4-FFF2-40B4-BE49-F238E27FC236}">
+                <a16:creationId xmlns:a16="http://schemas.microsoft.com/office/drawing/2014/main" id="{42A9CD19-B07E-4E20-939C-0BFC949F0910}"/>
               </a:ext>
             </a:extLst>
           </p:cNvPr>
@@ -25014,10 +23855,10 @@
       </p:sp>
       <p:sp>
         <p:nvSpPr>
-          <p:cNvPr id="31" name="">
-            <a:extLst xmlns:a="http://schemas.openxmlformats.org/drawingml/2006/main">
-              <a:ext uri="{FF2B5EF4-FFF2-40B4-BE49-F238E27FC236}">
-                <a16:creationId xmlns:a16="http://schemas.microsoft.com/office/drawing/2014/main" id="{88F8ACAF-9E39-47C3-9F33-5847F4E01FCC}"/>
+          <p:cNvPr id="30" name="">
+            <a:extLst xmlns:a="http://schemas.openxmlformats.org/drawingml/2006/main">
+              <a:ext uri="{FF2B5EF4-FFF2-40B4-BE49-F238E27FC236}">
+                <a16:creationId xmlns:a16="http://schemas.microsoft.com/office/drawing/2014/main" id="{6E93755B-4948-4992-82FC-66485C3A01DE}"/>
               </a:ext>
             </a:extLst>
           </p:cNvPr>
@@ -25075,10 +23916,10 @@
       </p:sp>
       <p:sp>
         <p:nvSpPr>
-          <p:cNvPr id="32" name="">
-            <a:extLst xmlns:a="http://schemas.openxmlformats.org/drawingml/2006/main">
-              <a:ext uri="{FF2B5EF4-FFF2-40B4-BE49-F238E27FC236}">
-                <a16:creationId xmlns:a16="http://schemas.microsoft.com/office/drawing/2014/main" id="{7A3FF5D2-6ED1-42E4-B672-C3E932AF1B46}"/>
+          <p:cNvPr id="31" name="">
+            <a:extLst xmlns:a="http://schemas.openxmlformats.org/drawingml/2006/main">
+              <a:ext uri="{FF2B5EF4-FFF2-40B4-BE49-F238E27FC236}">
+                <a16:creationId xmlns:a16="http://schemas.microsoft.com/office/drawing/2014/main" id="{0461134F-0160-4B8C-9A89-53A7D4A0F81A}"/>
               </a:ext>
             </a:extLst>
           </p:cNvPr>
@@ -25137,7 +23978,7 @@
     </p:spTree>
     <p:extLst>
       <p:ext uri="{BB962C8B-B14F-4D97-AF65-F5344CB8AC3E}">
-        <p14:creationId xmlns:p14="http://schemas.microsoft.com/office/powerpoint/2010/main" val="659405355"/>
+        <p14:creationId xmlns:p14="http://schemas.microsoft.com/office/powerpoint/2010/main" val="788188519"/>
       </p:ext>
     </p:extLst>
   </p:cSld>
@@ -25165,10 +24006,10 @@
       </p:grpSpPr>
       <p:sp>
         <p:nvSpPr>
-          <p:cNvPr id="29" name="">
-            <a:extLst xmlns:a="http://schemas.openxmlformats.org/drawingml/2006/main">
-              <a:ext uri="{FF2B5EF4-FFF2-40B4-BE49-F238E27FC236}">
-                <a16:creationId xmlns:a16="http://schemas.microsoft.com/office/drawing/2014/main" id="{257FECC4-7A16-41C0-8A79-E20D77A70FED}"/>
+          <p:cNvPr id="28" name="">
+            <a:extLst xmlns:a="http://schemas.openxmlformats.org/drawingml/2006/main">
+              <a:ext uri="{FF2B5EF4-FFF2-40B4-BE49-F238E27FC236}">
+                <a16:creationId xmlns:a16="http://schemas.microsoft.com/office/drawing/2014/main" id="{4997D52A-8511-468C-86F5-2626C0113083}"/>
               </a:ext>
             </a:extLst>
           </p:cNvPr>
@@ -25201,7 +24042,7 @@
           <p:cNvPr id="2" name="">
             <a:extLst xmlns:a="http://schemas.openxmlformats.org/drawingml/2006/main">
               <a:ext uri="{FF2B5EF4-FFF2-40B4-BE49-F238E27FC236}">
-                <a16:creationId xmlns:a16="http://schemas.microsoft.com/office/drawing/2014/main" id="{8EC47744-6799-4958-B17F-AFEDBD11B376}"/>
+                <a16:creationId xmlns:a16="http://schemas.microsoft.com/office/drawing/2014/main" id="{F4FA38A3-6558-4715-9462-958FDF5ECA98}"/>
               </a:ext>
             </a:extLst>
           </p:cNvPr>
@@ -25231,14 +24072,14 @@
       </p:sp>
       <p:pic>
         <p:nvPicPr>
-          <p:cNvPr id="31" name=""/>
+          <p:cNvPr id="30" name=""/>
           <p:cNvPicPr>
             <a:picLocks xmlns:a="http://schemas.openxmlformats.org/drawingml/2006/main" noChangeAspect="1"/>
           </p:cNvPicPr>
           <p:nvPr/>
         </p:nvPicPr>
         <p:blipFill>
-          <a:blip xmlns:r="http://schemas.openxmlformats.org/officeDocument/2006/relationships" xmlns:a="http://schemas.openxmlformats.org/drawingml/2006/main" r:embed="Rbc093b2607ee4dc4"/>
+          <a:blip xmlns:r="http://schemas.openxmlformats.org/officeDocument/2006/relationships" xmlns:a="http://schemas.openxmlformats.org/drawingml/2006/main" r:embed="Ra519b4cb2b944f66"/>
           <a:stretch xmlns:a="http://schemas.openxmlformats.org/drawingml/2006/main"/>
         </p:blipFill>
         <p:spPr>
@@ -25256,7 +24097,7 @@
           <p:cNvPr id="4" name="">
             <a:extLst xmlns:a="http://schemas.openxmlformats.org/drawingml/2006/main">
               <a:ext uri="{FF2B5EF4-FFF2-40B4-BE49-F238E27FC236}">
-                <a16:creationId xmlns:a16="http://schemas.microsoft.com/office/drawing/2014/main" id="{02038304-3CD7-498B-BFA9-AA2FB2E03404}"/>
+                <a16:creationId xmlns:a16="http://schemas.microsoft.com/office/drawing/2014/main" id="{50A0CF1D-7E9A-4835-86C4-747BAAC3C100}"/>
               </a:ext>
             </a:extLst>
           </p:cNvPr>
@@ -25317,7 +24158,7 @@
           <p:cNvPr id="5" name="">
             <a:extLst xmlns:a="http://schemas.openxmlformats.org/drawingml/2006/main">
               <a:ext uri="{FF2B5EF4-FFF2-40B4-BE49-F238E27FC236}">
-                <a16:creationId xmlns:a16="http://schemas.microsoft.com/office/drawing/2014/main" id="{42D506F0-BB49-42C4-8F80-3ABA19EA2ED6}"/>
+                <a16:creationId xmlns:a16="http://schemas.microsoft.com/office/drawing/2014/main" id="{DEE8575A-9C41-4D71-9F06-C85B24F175BF}"/>
               </a:ext>
             </a:extLst>
           </p:cNvPr>
@@ -25378,7 +24219,7 @@
           <p:cNvPr id="6" name="">
             <a:extLst xmlns:a="http://schemas.openxmlformats.org/drawingml/2006/main">
               <a:ext uri="{FF2B5EF4-FFF2-40B4-BE49-F238E27FC236}">
-                <a16:creationId xmlns:a16="http://schemas.microsoft.com/office/drawing/2014/main" id="{8C530F75-2C88-4959-A87F-8C10B4090227}"/>
+                <a16:creationId xmlns:a16="http://schemas.microsoft.com/office/drawing/2014/main" id="{AF7411C9-2AB4-4F0D-8FC8-6D14EF46F9D5}"/>
               </a:ext>
             </a:extLst>
           </p:cNvPr>
@@ -25411,68 +24252,7 @@
           <p:cNvPr id="7" name="">
             <a:extLst xmlns:a="http://schemas.openxmlformats.org/drawingml/2006/main">
               <a:ext uri="{FF2B5EF4-FFF2-40B4-BE49-F238E27FC236}">
-                <a16:creationId xmlns:a16="http://schemas.microsoft.com/office/drawing/2014/main" id="{2FAA9CC6-4CB5-487D-912E-0429FD1A96B5}"/>
-              </a:ext>
-            </a:extLst>
-          </p:cNvPr>
-          <p:cNvSpPr>
-            <a:spLocks xmlns:a="http://schemas.openxmlformats.org/drawingml/2006/main" noGrp="1"/>
-          </p:cNvSpPr>
-          <p:nvPr/>
-        </p:nvSpPr>
-        <p:spPr>
-          <a:xfrm xmlns:a="http://schemas.openxmlformats.org/drawingml/2006/main">
-            <a:off x="733425" y="6457950"/>
-            <a:ext cx="6191250" cy="209550"/>
-          </a:xfrm>
-          <a:prstGeom xmlns:a="http://schemas.openxmlformats.org/drawingml/2006/main" prst="rect">
-            <a:avLst/>
-          </a:prstGeom>
-          <a:noFill xmlns:a="http://schemas.openxmlformats.org/drawingml/2006/main"/>
-          <a:ln xmlns:a="http://schemas.openxmlformats.org/drawingml/2006/main" w="0">
-            <a:noFill/>
-          </a:ln>
-        </p:spPr>
-        <p:txBody>
-          <a:bodyPr xmlns:a="http://schemas.openxmlformats.org/drawingml/2006/main" lIns="19050" tIns="19050" rIns="19050" bIns="19050" anchor="ctr">
-            <a:normAutofit fontScale="100000"/>
-          </a:bodyPr>
-          <a:lstStyle xmlns:a="http://schemas.openxmlformats.org/drawingml/2006/main"/>
-          <a:p xmlns:a="http://schemas.openxmlformats.org/drawingml/2006/main">
-            <a:pPr algn="l">
-              <a:lnSpc>
-                <a:spcPct val="105000"/>
-              </a:lnSpc>
-              <a:buNone/>
-              <a:defRPr sz="1050" b="0">
-                <a:solidFill>
-                  <a:srgbClr val="E5EDFF"/>
-                </a:solidFill>
-                <a:latin typeface="PingFang SC"/>
-                <a:ea typeface="PingFang SC"/>
-                <a:cs typeface="PingFang SC"/>
-              </a:defRPr>
-            </a:pPr>
-            <a:r>
-              <a:rPr sz="1050" b="0">
-                <a:solidFill>
-                  <a:srgbClr val="E5EDFF"/>
-                </a:solidFill>
-                <a:latin typeface="PingFang SC"/>
-                <a:ea typeface="PingFang SC"/>
-                <a:cs typeface="PingFang SC"/>
-              </a:rPr>
-              <a:t>广东工业大学 · 学术研究汇报</a:t>
-            </a:r>
-          </a:p>
-        </p:txBody>
-      </p:sp>
-      <p:sp>
-        <p:nvSpPr>
-          <p:cNvPr id="8" name="">
-            <a:extLst xmlns:a="http://schemas.openxmlformats.org/drawingml/2006/main">
-              <a:ext uri="{FF2B5EF4-FFF2-40B4-BE49-F238E27FC236}">
-                <a16:creationId xmlns:a16="http://schemas.microsoft.com/office/drawing/2014/main" id="{FF47FE68-B89B-4B15-8350-6A58EE14F434}"/>
+                <a16:creationId xmlns:a16="http://schemas.microsoft.com/office/drawing/2014/main" id="{7A6A6F4E-8B46-4D61-8B46-0401B7354A9E}"/>
               </a:ext>
             </a:extLst>
           </p:cNvPr>
@@ -25530,10 +24310,10 @@
       </p:sp>
       <p:sp>
         <p:nvSpPr>
-          <p:cNvPr id="9" name="">
-            <a:extLst xmlns:a="http://schemas.openxmlformats.org/drawingml/2006/main">
-              <a:ext uri="{FF2B5EF4-FFF2-40B4-BE49-F238E27FC236}">
-                <a16:creationId xmlns:a16="http://schemas.microsoft.com/office/drawing/2014/main" id="{DDE54D17-1649-4FE1-986F-DFDCD6111EF8}"/>
+          <p:cNvPr id="8" name="">
+            <a:extLst xmlns:a="http://schemas.openxmlformats.org/drawingml/2006/main">
+              <a:ext uri="{FF2B5EF4-FFF2-40B4-BE49-F238E27FC236}">
+                <a16:creationId xmlns:a16="http://schemas.microsoft.com/office/drawing/2014/main" id="{D16C99CF-43BF-49BE-89EE-0A1364780F2C}"/>
               </a:ext>
             </a:extLst>
           </p:cNvPr>
@@ -25591,10 +24371,10 @@
       </p:sp>
       <p:sp>
         <p:nvSpPr>
-          <p:cNvPr id="10" name="">
-            <a:extLst xmlns:a="http://schemas.openxmlformats.org/drawingml/2006/main">
-              <a:ext uri="{FF2B5EF4-FFF2-40B4-BE49-F238E27FC236}">
-                <a16:creationId xmlns:a16="http://schemas.microsoft.com/office/drawing/2014/main" id="{92569135-8AF7-4854-B18A-1CBFB35E6CD6}"/>
+          <p:cNvPr id="9" name="">
+            <a:extLst xmlns:a="http://schemas.openxmlformats.org/drawingml/2006/main">
+              <a:ext uri="{FF2B5EF4-FFF2-40B4-BE49-F238E27FC236}">
+                <a16:creationId xmlns:a16="http://schemas.microsoft.com/office/drawing/2014/main" id="{75D9A94F-D167-4ACF-AFE0-445B1ACD3641}"/>
               </a:ext>
             </a:extLst>
           </p:cNvPr>
@@ -25652,10 +24432,10 @@
       </p:sp>
       <p:sp>
         <p:nvSpPr>
-          <p:cNvPr id="11" name="">
-            <a:extLst xmlns:a="http://schemas.openxmlformats.org/drawingml/2006/main">
-              <a:ext uri="{FF2B5EF4-FFF2-40B4-BE49-F238E27FC236}">
-                <a16:creationId xmlns:a16="http://schemas.microsoft.com/office/drawing/2014/main" id="{80D1B15D-C465-4803-BE2F-CF02A5F227C2}"/>
+          <p:cNvPr id="10" name="">
+            <a:extLst xmlns:a="http://schemas.openxmlformats.org/drawingml/2006/main">
+              <a:ext uri="{FF2B5EF4-FFF2-40B4-BE49-F238E27FC236}">
+                <a16:creationId xmlns:a16="http://schemas.microsoft.com/office/drawing/2014/main" id="{2FDB9388-9A8C-4DF9-9365-6729F9C47D02}"/>
               </a:ext>
             </a:extLst>
           </p:cNvPr>
@@ -25713,10 +24493,10 @@
       </p:sp>
       <p:sp>
         <p:nvSpPr>
-          <p:cNvPr id="12" name="">
-            <a:extLst xmlns:a="http://schemas.openxmlformats.org/drawingml/2006/main">
-              <a:ext uri="{FF2B5EF4-FFF2-40B4-BE49-F238E27FC236}">
-                <a16:creationId xmlns:a16="http://schemas.microsoft.com/office/drawing/2014/main" id="{BB923763-DE11-433D-90BE-50773EC595A3}"/>
+          <p:cNvPr id="11" name="">
+            <a:extLst xmlns:a="http://schemas.openxmlformats.org/drawingml/2006/main">
+              <a:ext uri="{FF2B5EF4-FFF2-40B4-BE49-F238E27FC236}">
+                <a16:creationId xmlns:a16="http://schemas.microsoft.com/office/drawing/2014/main" id="{03811595-C37B-474A-8FDD-CC7F9C81B3FE}"/>
               </a:ext>
             </a:extLst>
           </p:cNvPr>
@@ -25746,10 +24526,10 @@
       </p:sp>
       <p:sp>
         <p:nvSpPr>
-          <p:cNvPr id="13" name="">
-            <a:extLst xmlns:a="http://schemas.openxmlformats.org/drawingml/2006/main">
-              <a:ext uri="{FF2B5EF4-FFF2-40B4-BE49-F238E27FC236}">
-                <a16:creationId xmlns:a16="http://schemas.microsoft.com/office/drawing/2014/main" id="{86A60F51-502C-47AB-ADE7-7AE7CCD47C16}"/>
+          <p:cNvPr id="12" name="">
+            <a:extLst xmlns:a="http://schemas.openxmlformats.org/drawingml/2006/main">
+              <a:ext uri="{FF2B5EF4-FFF2-40B4-BE49-F238E27FC236}">
+                <a16:creationId xmlns:a16="http://schemas.microsoft.com/office/drawing/2014/main" id="{ED94026C-41BD-4FC1-AF51-35F1188C61AD}"/>
               </a:ext>
             </a:extLst>
           </p:cNvPr>
@@ -25807,10 +24587,10 @@
       </p:sp>
       <p:sp>
         <p:nvSpPr>
-          <p:cNvPr id="14" name="">
-            <a:extLst xmlns:a="http://schemas.openxmlformats.org/drawingml/2006/main">
-              <a:ext uri="{FF2B5EF4-FFF2-40B4-BE49-F238E27FC236}">
-                <a16:creationId xmlns:a16="http://schemas.microsoft.com/office/drawing/2014/main" id="{34B153C1-AE85-4F48-8C1F-F23AB77F8381}"/>
+          <p:cNvPr id="13" name="">
+            <a:extLst xmlns:a="http://schemas.openxmlformats.org/drawingml/2006/main">
+              <a:ext uri="{FF2B5EF4-FFF2-40B4-BE49-F238E27FC236}">
+                <a16:creationId xmlns:a16="http://schemas.microsoft.com/office/drawing/2014/main" id="{0912EB8A-4E2B-45A3-8A3D-37E78985F82F}"/>
               </a:ext>
             </a:extLst>
           </p:cNvPr>
@@ -25868,10 +24648,10 @@
       </p:sp>
       <p:sp>
         <p:nvSpPr>
-          <p:cNvPr id="15" name="">
-            <a:extLst xmlns:a="http://schemas.openxmlformats.org/drawingml/2006/main">
-              <a:ext uri="{FF2B5EF4-FFF2-40B4-BE49-F238E27FC236}">
-                <a16:creationId xmlns:a16="http://schemas.microsoft.com/office/drawing/2014/main" id="{75545712-A41E-47A4-98EB-D0F62F549423}"/>
+          <p:cNvPr id="14" name="">
+            <a:extLst xmlns:a="http://schemas.openxmlformats.org/drawingml/2006/main">
+              <a:ext uri="{FF2B5EF4-FFF2-40B4-BE49-F238E27FC236}">
+                <a16:creationId xmlns:a16="http://schemas.microsoft.com/office/drawing/2014/main" id="{CBC09C80-7B1E-488F-A701-76692BD28385}"/>
               </a:ext>
             </a:extLst>
           </p:cNvPr>
@@ -25929,10 +24709,10 @@
       </p:sp>
       <p:sp>
         <p:nvSpPr>
-          <p:cNvPr id="16" name="">
-            <a:extLst xmlns:a="http://schemas.openxmlformats.org/drawingml/2006/main">
-              <a:ext uri="{FF2B5EF4-FFF2-40B4-BE49-F238E27FC236}">
-                <a16:creationId xmlns:a16="http://schemas.microsoft.com/office/drawing/2014/main" id="{4AF123FA-0FB6-4A36-BBEA-859C6F30C1C5}"/>
+          <p:cNvPr id="15" name="">
+            <a:extLst xmlns:a="http://schemas.openxmlformats.org/drawingml/2006/main">
+              <a:ext uri="{FF2B5EF4-FFF2-40B4-BE49-F238E27FC236}">
+                <a16:creationId xmlns:a16="http://schemas.microsoft.com/office/drawing/2014/main" id="{0CC74385-B6F8-4E45-BE78-ABDE5246E190}"/>
               </a:ext>
             </a:extLst>
           </p:cNvPr>
@@ -25962,10 +24742,10 @@
       </p:sp>
       <p:sp>
         <p:nvSpPr>
-          <p:cNvPr id="17" name="">
-            <a:extLst xmlns:a="http://schemas.openxmlformats.org/drawingml/2006/main">
-              <a:ext uri="{FF2B5EF4-FFF2-40B4-BE49-F238E27FC236}">
-                <a16:creationId xmlns:a16="http://schemas.microsoft.com/office/drawing/2014/main" id="{D401EDCE-6ACC-4123-8342-C3F1AE4A2382}"/>
+          <p:cNvPr id="16" name="">
+            <a:extLst xmlns:a="http://schemas.openxmlformats.org/drawingml/2006/main">
+              <a:ext uri="{FF2B5EF4-FFF2-40B4-BE49-F238E27FC236}">
+                <a16:creationId xmlns:a16="http://schemas.microsoft.com/office/drawing/2014/main" id="{564CAD0B-C9C7-4D99-9BA0-68EC06172055}"/>
               </a:ext>
             </a:extLst>
           </p:cNvPr>
@@ -26023,10 +24803,10 @@
       </p:sp>
       <p:sp>
         <p:nvSpPr>
-          <p:cNvPr id="18" name="">
-            <a:extLst xmlns:a="http://schemas.openxmlformats.org/drawingml/2006/main">
-              <a:ext uri="{FF2B5EF4-FFF2-40B4-BE49-F238E27FC236}">
-                <a16:creationId xmlns:a16="http://schemas.microsoft.com/office/drawing/2014/main" id="{B6DC5C4B-0264-415B-A9CF-6F7907C0F7FF}"/>
+          <p:cNvPr id="17" name="">
+            <a:extLst xmlns:a="http://schemas.openxmlformats.org/drawingml/2006/main">
+              <a:ext uri="{FF2B5EF4-FFF2-40B4-BE49-F238E27FC236}">
+                <a16:creationId xmlns:a16="http://schemas.microsoft.com/office/drawing/2014/main" id="{77047A91-D1B6-4CAC-B382-619E0EB3CAFA}"/>
               </a:ext>
             </a:extLst>
           </p:cNvPr>
@@ -26084,10 +24864,10 @@
       </p:sp>
       <p:sp>
         <p:nvSpPr>
-          <p:cNvPr id="19" name="">
-            <a:extLst xmlns:a="http://schemas.openxmlformats.org/drawingml/2006/main">
-              <a:ext uri="{FF2B5EF4-FFF2-40B4-BE49-F238E27FC236}">
-                <a16:creationId xmlns:a16="http://schemas.microsoft.com/office/drawing/2014/main" id="{0B6AC3D5-12F5-4642-B69C-E6C10C6A9BCE}"/>
+          <p:cNvPr id="18" name="">
+            <a:extLst xmlns:a="http://schemas.openxmlformats.org/drawingml/2006/main">
+              <a:ext uri="{FF2B5EF4-FFF2-40B4-BE49-F238E27FC236}">
+                <a16:creationId xmlns:a16="http://schemas.microsoft.com/office/drawing/2014/main" id="{5CCCBB9A-BDD7-44D0-A3D3-5207A53BC644}"/>
               </a:ext>
             </a:extLst>
           </p:cNvPr>
@@ -26145,10 +24925,10 @@
       </p:sp>
       <p:sp>
         <p:nvSpPr>
-          <p:cNvPr id="20" name="">
-            <a:extLst xmlns:a="http://schemas.openxmlformats.org/drawingml/2006/main">
-              <a:ext uri="{FF2B5EF4-FFF2-40B4-BE49-F238E27FC236}">
-                <a16:creationId xmlns:a16="http://schemas.microsoft.com/office/drawing/2014/main" id="{B6BE7E29-6F8F-4392-9D84-6881E60E1D9A}"/>
+          <p:cNvPr id="19" name="">
+            <a:extLst xmlns:a="http://schemas.openxmlformats.org/drawingml/2006/main">
+              <a:ext uri="{FF2B5EF4-FFF2-40B4-BE49-F238E27FC236}">
+                <a16:creationId xmlns:a16="http://schemas.microsoft.com/office/drawing/2014/main" id="{F7F38F1A-DC8D-4E3D-ABDD-07C63AA4921F}"/>
               </a:ext>
             </a:extLst>
           </p:cNvPr>
@@ -26178,10 +24958,10 @@
       </p:sp>
       <p:sp>
         <p:nvSpPr>
-          <p:cNvPr id="21" name="">
-            <a:extLst xmlns:a="http://schemas.openxmlformats.org/drawingml/2006/main">
-              <a:ext uri="{FF2B5EF4-FFF2-40B4-BE49-F238E27FC236}">
-                <a16:creationId xmlns:a16="http://schemas.microsoft.com/office/drawing/2014/main" id="{7006ECBA-7CA2-4C4F-AF6F-01BA11DF35AB}"/>
+          <p:cNvPr id="20" name="">
+            <a:extLst xmlns:a="http://schemas.openxmlformats.org/drawingml/2006/main">
+              <a:ext uri="{FF2B5EF4-FFF2-40B4-BE49-F238E27FC236}">
+                <a16:creationId xmlns:a16="http://schemas.microsoft.com/office/drawing/2014/main" id="{78FC4D92-081D-47EB-B84F-DF902FE9A253}"/>
               </a:ext>
             </a:extLst>
           </p:cNvPr>
@@ -26239,10 +25019,10 @@
       </p:sp>
       <p:sp>
         <p:nvSpPr>
-          <p:cNvPr id="22" name="">
-            <a:extLst xmlns:a="http://schemas.openxmlformats.org/drawingml/2006/main">
-              <a:ext uri="{FF2B5EF4-FFF2-40B4-BE49-F238E27FC236}">
-                <a16:creationId xmlns:a16="http://schemas.microsoft.com/office/drawing/2014/main" id="{EBDC0FCD-4AB9-4283-A6E0-25656B6142E3}"/>
+          <p:cNvPr id="21" name="">
+            <a:extLst xmlns:a="http://schemas.openxmlformats.org/drawingml/2006/main">
+              <a:ext uri="{FF2B5EF4-FFF2-40B4-BE49-F238E27FC236}">
+                <a16:creationId xmlns:a16="http://schemas.microsoft.com/office/drawing/2014/main" id="{1AD5968F-932D-4283-954E-4FC9A46DC68F}"/>
               </a:ext>
             </a:extLst>
           </p:cNvPr>
@@ -26300,10 +25080,10 @@
       </p:sp>
       <p:sp>
         <p:nvSpPr>
-          <p:cNvPr id="23" name="">
-            <a:extLst xmlns:a="http://schemas.openxmlformats.org/drawingml/2006/main">
-              <a:ext uri="{FF2B5EF4-FFF2-40B4-BE49-F238E27FC236}">
-                <a16:creationId xmlns:a16="http://schemas.microsoft.com/office/drawing/2014/main" id="{88FECF58-971D-4490-B0F9-22814F4895B2}"/>
+          <p:cNvPr id="22" name="">
+            <a:extLst xmlns:a="http://schemas.openxmlformats.org/drawingml/2006/main">
+              <a:ext uri="{FF2B5EF4-FFF2-40B4-BE49-F238E27FC236}">
+                <a16:creationId xmlns:a16="http://schemas.microsoft.com/office/drawing/2014/main" id="{CFB57748-3E46-45C5-BA49-50D61C77FE6F}"/>
               </a:ext>
             </a:extLst>
           </p:cNvPr>
@@ -26361,10 +25141,10 @@
       </p:sp>
       <p:sp>
         <p:nvSpPr>
-          <p:cNvPr id="24" name="">
-            <a:extLst xmlns:a="http://schemas.openxmlformats.org/drawingml/2006/main">
-              <a:ext uri="{FF2B5EF4-FFF2-40B4-BE49-F238E27FC236}">
-                <a16:creationId xmlns:a16="http://schemas.microsoft.com/office/drawing/2014/main" id="{9C3A9360-7694-45DC-99AC-6EA6835F02E2}"/>
+          <p:cNvPr id="23" name="">
+            <a:extLst xmlns:a="http://schemas.openxmlformats.org/drawingml/2006/main">
+              <a:ext uri="{FF2B5EF4-FFF2-40B4-BE49-F238E27FC236}">
+                <a16:creationId xmlns:a16="http://schemas.microsoft.com/office/drawing/2014/main" id="{03A2B686-AF9E-4AD4-A40B-AA2446F286DF}"/>
               </a:ext>
             </a:extLst>
           </p:cNvPr>
@@ -26394,10 +25174,10 @@
       </p:sp>
       <p:sp>
         <p:nvSpPr>
-          <p:cNvPr id="25" name="">
-            <a:extLst xmlns:a="http://schemas.openxmlformats.org/drawingml/2006/main">
-              <a:ext uri="{FF2B5EF4-FFF2-40B4-BE49-F238E27FC236}">
-                <a16:creationId xmlns:a16="http://schemas.microsoft.com/office/drawing/2014/main" id="{41EE2457-36BC-4916-9DFF-016D80855BA5}"/>
+          <p:cNvPr id="24" name="">
+            <a:extLst xmlns:a="http://schemas.openxmlformats.org/drawingml/2006/main">
+              <a:ext uri="{FF2B5EF4-FFF2-40B4-BE49-F238E27FC236}">
+                <a16:creationId xmlns:a16="http://schemas.microsoft.com/office/drawing/2014/main" id="{B39E4625-AD4A-4E97-9DC8-78E4C4CF64CF}"/>
               </a:ext>
             </a:extLst>
           </p:cNvPr>
@@ -26455,10 +25235,10 @@
       </p:sp>
       <p:sp>
         <p:nvSpPr>
-          <p:cNvPr id="26" name="">
-            <a:extLst xmlns:a="http://schemas.openxmlformats.org/drawingml/2006/main">
-              <a:ext uri="{FF2B5EF4-FFF2-40B4-BE49-F238E27FC236}">
-                <a16:creationId xmlns:a16="http://schemas.microsoft.com/office/drawing/2014/main" id="{E0AE8BBD-46BC-4239-9617-5BA48154C9F9}"/>
+          <p:cNvPr id="25" name="">
+            <a:extLst xmlns:a="http://schemas.openxmlformats.org/drawingml/2006/main">
+              <a:ext uri="{FF2B5EF4-FFF2-40B4-BE49-F238E27FC236}">
+                <a16:creationId xmlns:a16="http://schemas.microsoft.com/office/drawing/2014/main" id="{91FACEDA-2CB2-472D-8318-4D861381E55B}"/>
               </a:ext>
             </a:extLst>
           </p:cNvPr>
@@ -26516,10 +25296,10 @@
       </p:sp>
       <p:sp>
         <p:nvSpPr>
-          <p:cNvPr id="27" name="">
-            <a:extLst xmlns:a="http://schemas.openxmlformats.org/drawingml/2006/main">
-              <a:ext uri="{FF2B5EF4-FFF2-40B4-BE49-F238E27FC236}">
-                <a16:creationId xmlns:a16="http://schemas.microsoft.com/office/drawing/2014/main" id="{52FE255A-0F81-4BDF-84AF-4DBED6E1A3A8}"/>
+          <p:cNvPr id="26" name="">
+            <a:extLst xmlns:a="http://schemas.openxmlformats.org/drawingml/2006/main">
+              <a:ext uri="{FF2B5EF4-FFF2-40B4-BE49-F238E27FC236}">
+                <a16:creationId xmlns:a16="http://schemas.microsoft.com/office/drawing/2014/main" id="{81141656-B8AE-4FFD-B046-D8465554119D}"/>
               </a:ext>
             </a:extLst>
           </p:cNvPr>
@@ -26577,10 +25357,10 @@
       </p:sp>
       <p:sp>
         <p:nvSpPr>
-          <p:cNvPr id="28" name="">
-            <a:extLst xmlns:a="http://schemas.openxmlformats.org/drawingml/2006/main">
-              <a:ext uri="{FF2B5EF4-FFF2-40B4-BE49-F238E27FC236}">
-                <a16:creationId xmlns:a16="http://schemas.microsoft.com/office/drawing/2014/main" id="{66EBA9A0-06C7-4CE5-AB36-387BE30F89DA}"/>
+          <p:cNvPr id="27" name="">
+            <a:extLst xmlns:a="http://schemas.openxmlformats.org/drawingml/2006/main">
+              <a:ext uri="{FF2B5EF4-FFF2-40B4-BE49-F238E27FC236}">
+                <a16:creationId xmlns:a16="http://schemas.microsoft.com/office/drawing/2014/main" id="{44FE8CDA-D9EF-43D7-B038-0C37BCB493A3}"/>
               </a:ext>
             </a:extLst>
           </p:cNvPr>
@@ -26639,7 +25419,7 @@
     </p:spTree>
     <p:extLst>
       <p:ext uri="{BB962C8B-B14F-4D97-AF65-F5344CB8AC3E}">
-        <p14:creationId xmlns:p14="http://schemas.microsoft.com/office/powerpoint/2010/main" val="1630879881"/>
+        <p14:creationId xmlns:p14="http://schemas.microsoft.com/office/powerpoint/2010/main" val="674773673"/>
       </p:ext>
     </p:extLst>
   </p:cSld>
@@ -26667,10 +25447,10 @@
       </p:grpSpPr>
       <p:sp>
         <p:nvSpPr>
-          <p:cNvPr id="29" name="">
-            <a:extLst xmlns:a="http://schemas.openxmlformats.org/drawingml/2006/main">
-              <a:ext uri="{FF2B5EF4-FFF2-40B4-BE49-F238E27FC236}">
-                <a16:creationId xmlns:a16="http://schemas.microsoft.com/office/drawing/2014/main" id="{CAF4A854-C199-4D58-8A0E-63CA43CD7127}"/>
+          <p:cNvPr id="28" name="">
+            <a:extLst xmlns:a="http://schemas.openxmlformats.org/drawingml/2006/main">
+              <a:ext uri="{FF2B5EF4-FFF2-40B4-BE49-F238E27FC236}">
+                <a16:creationId xmlns:a16="http://schemas.microsoft.com/office/drawing/2014/main" id="{59AF87F2-389C-4F34-88FA-2A7B575FC1E5}"/>
               </a:ext>
             </a:extLst>
           </p:cNvPr>
@@ -26703,7 +25483,7 @@
           <p:cNvPr id="2" name="">
             <a:extLst xmlns:a="http://schemas.openxmlformats.org/drawingml/2006/main">
               <a:ext uri="{FF2B5EF4-FFF2-40B4-BE49-F238E27FC236}">
-                <a16:creationId xmlns:a16="http://schemas.microsoft.com/office/drawing/2014/main" id="{6E592E9E-CBF6-4447-9CBD-32C9DAA72B7A}"/>
+                <a16:creationId xmlns:a16="http://schemas.microsoft.com/office/drawing/2014/main" id="{DB458463-90A6-4C4D-BF52-8D6E34CC3FE1}"/>
               </a:ext>
             </a:extLst>
           </p:cNvPr>
@@ -26733,14 +25513,14 @@
       </p:sp>
       <p:pic>
         <p:nvPicPr>
-          <p:cNvPr id="31" name=""/>
+          <p:cNvPr id="30" name=""/>
           <p:cNvPicPr>
             <a:picLocks xmlns:a="http://schemas.openxmlformats.org/drawingml/2006/main" noChangeAspect="1"/>
           </p:cNvPicPr>
           <p:nvPr/>
         </p:nvPicPr>
         <p:blipFill>
-          <a:blip xmlns:r="http://schemas.openxmlformats.org/officeDocument/2006/relationships" xmlns:a="http://schemas.openxmlformats.org/drawingml/2006/main" r:embed="Rd61682aae69b4420"/>
+          <a:blip xmlns:r="http://schemas.openxmlformats.org/officeDocument/2006/relationships" xmlns:a="http://schemas.openxmlformats.org/drawingml/2006/main" r:embed="R8c006e2a7a9f4ae8"/>
           <a:stretch xmlns:a="http://schemas.openxmlformats.org/drawingml/2006/main"/>
         </p:blipFill>
         <p:spPr>
@@ -26758,7 +25538,7 @@
           <p:cNvPr id="4" name="">
             <a:extLst xmlns:a="http://schemas.openxmlformats.org/drawingml/2006/main">
               <a:ext uri="{FF2B5EF4-FFF2-40B4-BE49-F238E27FC236}">
-                <a16:creationId xmlns:a16="http://schemas.microsoft.com/office/drawing/2014/main" id="{3FD5E701-F713-4BCD-A7D8-D52B6A2E3477}"/>
+                <a16:creationId xmlns:a16="http://schemas.microsoft.com/office/drawing/2014/main" id="{44AE3A51-1650-4AD9-A2BD-99BFF4555D88}"/>
               </a:ext>
             </a:extLst>
           </p:cNvPr>
@@ -26819,7 +25599,7 @@
           <p:cNvPr id="5" name="">
             <a:extLst xmlns:a="http://schemas.openxmlformats.org/drawingml/2006/main">
               <a:ext uri="{FF2B5EF4-FFF2-40B4-BE49-F238E27FC236}">
-                <a16:creationId xmlns:a16="http://schemas.microsoft.com/office/drawing/2014/main" id="{EFBFE5F8-9FE8-4672-A736-E4883E6C31A3}"/>
+                <a16:creationId xmlns:a16="http://schemas.microsoft.com/office/drawing/2014/main" id="{9C079BDF-5E4A-4C06-98B1-51887F26F05B}"/>
               </a:ext>
             </a:extLst>
           </p:cNvPr>
@@ -26880,7 +25660,7 @@
           <p:cNvPr id="6" name="">
             <a:extLst xmlns:a="http://schemas.openxmlformats.org/drawingml/2006/main">
               <a:ext uri="{FF2B5EF4-FFF2-40B4-BE49-F238E27FC236}">
-                <a16:creationId xmlns:a16="http://schemas.microsoft.com/office/drawing/2014/main" id="{56A3E296-2CF1-4E27-B02A-B6DC556C0292}"/>
+                <a16:creationId xmlns:a16="http://schemas.microsoft.com/office/drawing/2014/main" id="{D58FEE5D-F9C1-49E5-B25F-FAB44CB2CB70}"/>
               </a:ext>
             </a:extLst>
           </p:cNvPr>
@@ -26913,68 +25693,7 @@
           <p:cNvPr id="7" name="">
             <a:extLst xmlns:a="http://schemas.openxmlformats.org/drawingml/2006/main">
               <a:ext uri="{FF2B5EF4-FFF2-40B4-BE49-F238E27FC236}">
-                <a16:creationId xmlns:a16="http://schemas.microsoft.com/office/drawing/2014/main" id="{CDD219C8-4F3E-4AA0-8EAA-66D473D08DA4}"/>
-              </a:ext>
-            </a:extLst>
-          </p:cNvPr>
-          <p:cNvSpPr>
-            <a:spLocks xmlns:a="http://schemas.openxmlformats.org/drawingml/2006/main" noGrp="1"/>
-          </p:cNvSpPr>
-          <p:nvPr/>
-        </p:nvSpPr>
-        <p:spPr>
-          <a:xfrm xmlns:a="http://schemas.openxmlformats.org/drawingml/2006/main">
-            <a:off x="733425" y="6457950"/>
-            <a:ext cx="6191250" cy="209550"/>
-          </a:xfrm>
-          <a:prstGeom xmlns:a="http://schemas.openxmlformats.org/drawingml/2006/main" prst="rect">
-            <a:avLst/>
-          </a:prstGeom>
-          <a:noFill xmlns:a="http://schemas.openxmlformats.org/drawingml/2006/main"/>
-          <a:ln xmlns:a="http://schemas.openxmlformats.org/drawingml/2006/main" w="0">
-            <a:noFill/>
-          </a:ln>
-        </p:spPr>
-        <p:txBody>
-          <a:bodyPr xmlns:a="http://schemas.openxmlformats.org/drawingml/2006/main" lIns="19050" tIns="19050" rIns="19050" bIns="19050" anchor="ctr">
-            <a:normAutofit fontScale="100000"/>
-          </a:bodyPr>
-          <a:lstStyle xmlns:a="http://schemas.openxmlformats.org/drawingml/2006/main"/>
-          <a:p xmlns:a="http://schemas.openxmlformats.org/drawingml/2006/main">
-            <a:pPr algn="l">
-              <a:lnSpc>
-                <a:spcPct val="105000"/>
-              </a:lnSpc>
-              <a:buNone/>
-              <a:defRPr sz="1050" b="0">
-                <a:solidFill>
-                  <a:srgbClr val="E5EDFF"/>
-                </a:solidFill>
-                <a:latin typeface="PingFang SC"/>
-                <a:ea typeface="PingFang SC"/>
-                <a:cs typeface="PingFang SC"/>
-              </a:defRPr>
-            </a:pPr>
-            <a:r>
-              <a:rPr sz="1050" b="0">
-                <a:solidFill>
-                  <a:srgbClr val="E5EDFF"/>
-                </a:solidFill>
-                <a:latin typeface="PingFang SC"/>
-                <a:ea typeface="PingFang SC"/>
-                <a:cs typeface="PingFang SC"/>
-              </a:rPr>
-              <a:t>广东工业大学 · 学术研究汇报</a:t>
-            </a:r>
-          </a:p>
-        </p:txBody>
-      </p:sp>
-      <p:sp>
-        <p:nvSpPr>
-          <p:cNvPr id="8" name="">
-            <a:extLst xmlns:a="http://schemas.openxmlformats.org/drawingml/2006/main">
-              <a:ext uri="{FF2B5EF4-FFF2-40B4-BE49-F238E27FC236}">
-                <a16:creationId xmlns:a16="http://schemas.microsoft.com/office/drawing/2014/main" id="{44465B77-4850-4DB5-A6B5-833AC286573D}"/>
+                <a16:creationId xmlns:a16="http://schemas.microsoft.com/office/drawing/2014/main" id="{89185328-9465-456A-9AFB-0215BDF32A80}"/>
               </a:ext>
             </a:extLst>
           </p:cNvPr>
@@ -27032,10 +25751,10 @@
       </p:sp>
       <p:sp>
         <p:nvSpPr>
-          <p:cNvPr id="9" name="">
-            <a:extLst xmlns:a="http://schemas.openxmlformats.org/drawingml/2006/main">
-              <a:ext uri="{FF2B5EF4-FFF2-40B4-BE49-F238E27FC236}">
-                <a16:creationId xmlns:a16="http://schemas.microsoft.com/office/drawing/2014/main" id="{5AA9F92B-9B45-4FC3-ABDA-BEC81EDC9B42}"/>
+          <p:cNvPr id="8" name="">
+            <a:extLst xmlns:a="http://schemas.openxmlformats.org/drawingml/2006/main">
+              <a:ext uri="{FF2B5EF4-FFF2-40B4-BE49-F238E27FC236}">
+                <a16:creationId xmlns:a16="http://schemas.microsoft.com/office/drawing/2014/main" id="{CEA7F3FD-EFFD-4851-837B-6A876C1378DC}"/>
               </a:ext>
             </a:extLst>
           </p:cNvPr>
@@ -27093,10 +25812,10 @@
       </p:sp>
       <p:sp>
         <p:nvSpPr>
-          <p:cNvPr id="10" name="">
-            <a:extLst xmlns:a="http://schemas.openxmlformats.org/drawingml/2006/main">
-              <a:ext uri="{FF2B5EF4-FFF2-40B4-BE49-F238E27FC236}">
-                <a16:creationId xmlns:a16="http://schemas.microsoft.com/office/drawing/2014/main" id="{213DF645-25A6-4D0B-86A7-592873DCEFA5}"/>
+          <p:cNvPr id="9" name="">
+            <a:extLst xmlns:a="http://schemas.openxmlformats.org/drawingml/2006/main">
+              <a:ext uri="{FF2B5EF4-FFF2-40B4-BE49-F238E27FC236}">
+                <a16:creationId xmlns:a16="http://schemas.microsoft.com/office/drawing/2014/main" id="{E41B58EA-B8A0-42E1-89FE-5D4ED572EA13}"/>
               </a:ext>
             </a:extLst>
           </p:cNvPr>
@@ -27154,10 +25873,10 @@
       </p:sp>
       <p:sp>
         <p:nvSpPr>
-          <p:cNvPr id="11" name="">
-            <a:extLst xmlns:a="http://schemas.openxmlformats.org/drawingml/2006/main">
-              <a:ext uri="{FF2B5EF4-FFF2-40B4-BE49-F238E27FC236}">
-                <a16:creationId xmlns:a16="http://schemas.microsoft.com/office/drawing/2014/main" id="{BF9F4D8C-4014-4222-AD62-78A297F32815}"/>
+          <p:cNvPr id="10" name="">
+            <a:extLst xmlns:a="http://schemas.openxmlformats.org/drawingml/2006/main">
+              <a:ext uri="{FF2B5EF4-FFF2-40B4-BE49-F238E27FC236}">
+                <a16:creationId xmlns:a16="http://schemas.microsoft.com/office/drawing/2014/main" id="{11F182BC-55CF-4E55-B8CB-25823C514DA4}"/>
               </a:ext>
             </a:extLst>
           </p:cNvPr>
@@ -27215,10 +25934,10 @@
       </p:sp>
       <p:sp>
         <p:nvSpPr>
-          <p:cNvPr id="12" name="">
-            <a:extLst xmlns:a="http://schemas.openxmlformats.org/drawingml/2006/main">
-              <a:ext uri="{FF2B5EF4-FFF2-40B4-BE49-F238E27FC236}">
-                <a16:creationId xmlns:a16="http://schemas.microsoft.com/office/drawing/2014/main" id="{A14EFD7C-5B6F-4948-BF6A-827AAD2ACA33}"/>
+          <p:cNvPr id="11" name="">
+            <a:extLst xmlns:a="http://schemas.openxmlformats.org/drawingml/2006/main">
+              <a:ext uri="{FF2B5EF4-FFF2-40B4-BE49-F238E27FC236}">
+                <a16:creationId xmlns:a16="http://schemas.microsoft.com/office/drawing/2014/main" id="{7F67DE76-51EE-40AF-BF93-C136B92F542D}"/>
               </a:ext>
             </a:extLst>
           </p:cNvPr>
@@ -27248,10 +25967,10 @@
       </p:sp>
       <p:sp>
         <p:nvSpPr>
-          <p:cNvPr id="13" name="">
-            <a:extLst xmlns:a="http://schemas.openxmlformats.org/drawingml/2006/main">
-              <a:ext uri="{FF2B5EF4-FFF2-40B4-BE49-F238E27FC236}">
-                <a16:creationId xmlns:a16="http://schemas.microsoft.com/office/drawing/2014/main" id="{8473E81C-27B3-40B8-AC69-4F350C35F208}"/>
+          <p:cNvPr id="12" name="">
+            <a:extLst xmlns:a="http://schemas.openxmlformats.org/drawingml/2006/main">
+              <a:ext uri="{FF2B5EF4-FFF2-40B4-BE49-F238E27FC236}">
+                <a16:creationId xmlns:a16="http://schemas.microsoft.com/office/drawing/2014/main" id="{6424E091-98ED-4E18-B602-1496CD6B2EFF}"/>
               </a:ext>
             </a:extLst>
           </p:cNvPr>
@@ -27309,10 +26028,10 @@
       </p:sp>
       <p:sp>
         <p:nvSpPr>
-          <p:cNvPr id="14" name="">
-            <a:extLst xmlns:a="http://schemas.openxmlformats.org/drawingml/2006/main">
-              <a:ext uri="{FF2B5EF4-FFF2-40B4-BE49-F238E27FC236}">
-                <a16:creationId xmlns:a16="http://schemas.microsoft.com/office/drawing/2014/main" id="{C3D1D936-EB3F-42BB-807E-FC9B8BECC889}"/>
+          <p:cNvPr id="13" name="">
+            <a:extLst xmlns:a="http://schemas.openxmlformats.org/drawingml/2006/main">
+              <a:ext uri="{FF2B5EF4-FFF2-40B4-BE49-F238E27FC236}">
+                <a16:creationId xmlns:a16="http://schemas.microsoft.com/office/drawing/2014/main" id="{5B55A349-50F9-495A-B17C-CD6F972A8EE0}"/>
               </a:ext>
             </a:extLst>
           </p:cNvPr>
@@ -27370,10 +26089,10 @@
       </p:sp>
       <p:sp>
         <p:nvSpPr>
-          <p:cNvPr id="15" name="">
-            <a:extLst xmlns:a="http://schemas.openxmlformats.org/drawingml/2006/main">
-              <a:ext uri="{FF2B5EF4-FFF2-40B4-BE49-F238E27FC236}">
-                <a16:creationId xmlns:a16="http://schemas.microsoft.com/office/drawing/2014/main" id="{C0C4F60F-728C-4A3B-A1A0-55197B4795FB}"/>
+          <p:cNvPr id="14" name="">
+            <a:extLst xmlns:a="http://schemas.openxmlformats.org/drawingml/2006/main">
+              <a:ext uri="{FF2B5EF4-FFF2-40B4-BE49-F238E27FC236}">
+                <a16:creationId xmlns:a16="http://schemas.microsoft.com/office/drawing/2014/main" id="{7097CF63-DAEB-48C3-AE63-512F1D4257F6}"/>
               </a:ext>
             </a:extLst>
           </p:cNvPr>
@@ -27431,10 +26150,10 @@
       </p:sp>
       <p:sp>
         <p:nvSpPr>
-          <p:cNvPr id="16" name="">
-            <a:extLst xmlns:a="http://schemas.openxmlformats.org/drawingml/2006/main">
-              <a:ext uri="{FF2B5EF4-FFF2-40B4-BE49-F238E27FC236}">
-                <a16:creationId xmlns:a16="http://schemas.microsoft.com/office/drawing/2014/main" id="{BA4CBEF5-84EA-4C49-B9E7-289797AD6CB5}"/>
+          <p:cNvPr id="15" name="">
+            <a:extLst xmlns:a="http://schemas.openxmlformats.org/drawingml/2006/main">
+              <a:ext uri="{FF2B5EF4-FFF2-40B4-BE49-F238E27FC236}">
+                <a16:creationId xmlns:a16="http://schemas.microsoft.com/office/drawing/2014/main" id="{F9B593CD-7DA2-420F-BB71-0581ABA33EA0}"/>
               </a:ext>
             </a:extLst>
           </p:cNvPr>
@@ -27464,10 +26183,10 @@
       </p:sp>
       <p:sp>
         <p:nvSpPr>
-          <p:cNvPr id="17" name="">
-            <a:extLst xmlns:a="http://schemas.openxmlformats.org/drawingml/2006/main">
-              <a:ext uri="{FF2B5EF4-FFF2-40B4-BE49-F238E27FC236}">
-                <a16:creationId xmlns:a16="http://schemas.microsoft.com/office/drawing/2014/main" id="{05761C57-6183-4EE0-B07A-C6B1BD45BA69}"/>
+          <p:cNvPr id="16" name="">
+            <a:extLst xmlns:a="http://schemas.openxmlformats.org/drawingml/2006/main">
+              <a:ext uri="{FF2B5EF4-FFF2-40B4-BE49-F238E27FC236}">
+                <a16:creationId xmlns:a16="http://schemas.microsoft.com/office/drawing/2014/main" id="{36043687-874E-43A3-8AC5-93167B761FBE}"/>
               </a:ext>
             </a:extLst>
           </p:cNvPr>
@@ -27525,10 +26244,10 @@
       </p:sp>
       <p:sp>
         <p:nvSpPr>
-          <p:cNvPr id="18" name="">
-            <a:extLst xmlns:a="http://schemas.openxmlformats.org/drawingml/2006/main">
-              <a:ext uri="{FF2B5EF4-FFF2-40B4-BE49-F238E27FC236}">
-                <a16:creationId xmlns:a16="http://schemas.microsoft.com/office/drawing/2014/main" id="{9CA552D1-83F7-4E9A-9D09-2C82155C9EE6}"/>
+          <p:cNvPr id="17" name="">
+            <a:extLst xmlns:a="http://schemas.openxmlformats.org/drawingml/2006/main">
+              <a:ext uri="{FF2B5EF4-FFF2-40B4-BE49-F238E27FC236}">
+                <a16:creationId xmlns:a16="http://schemas.microsoft.com/office/drawing/2014/main" id="{5406FF5E-E4EA-42B7-94AB-6C6E1966667E}"/>
               </a:ext>
             </a:extLst>
           </p:cNvPr>
@@ -27586,10 +26305,10 @@
       </p:sp>
       <p:sp>
         <p:nvSpPr>
-          <p:cNvPr id="19" name="">
-            <a:extLst xmlns:a="http://schemas.openxmlformats.org/drawingml/2006/main">
-              <a:ext uri="{FF2B5EF4-FFF2-40B4-BE49-F238E27FC236}">
-                <a16:creationId xmlns:a16="http://schemas.microsoft.com/office/drawing/2014/main" id="{9CEDD898-A2EC-4372-8231-40BD03BFBBEF}"/>
+          <p:cNvPr id="18" name="">
+            <a:extLst xmlns:a="http://schemas.openxmlformats.org/drawingml/2006/main">
+              <a:ext uri="{FF2B5EF4-FFF2-40B4-BE49-F238E27FC236}">
+                <a16:creationId xmlns:a16="http://schemas.microsoft.com/office/drawing/2014/main" id="{5285917B-FD1A-4BF1-87EB-51308E6FAD15}"/>
               </a:ext>
             </a:extLst>
           </p:cNvPr>
@@ -27647,10 +26366,10 @@
       </p:sp>
       <p:sp>
         <p:nvSpPr>
-          <p:cNvPr id="20" name="">
-            <a:extLst xmlns:a="http://schemas.openxmlformats.org/drawingml/2006/main">
-              <a:ext uri="{FF2B5EF4-FFF2-40B4-BE49-F238E27FC236}">
-                <a16:creationId xmlns:a16="http://schemas.microsoft.com/office/drawing/2014/main" id="{54164CBB-EEED-485E-BE3B-538D12968231}"/>
+          <p:cNvPr id="19" name="">
+            <a:extLst xmlns:a="http://schemas.openxmlformats.org/drawingml/2006/main">
+              <a:ext uri="{FF2B5EF4-FFF2-40B4-BE49-F238E27FC236}">
+                <a16:creationId xmlns:a16="http://schemas.microsoft.com/office/drawing/2014/main" id="{CA7DF2AE-85B1-456E-9AB7-EE768EF07B5D}"/>
               </a:ext>
             </a:extLst>
           </p:cNvPr>
@@ -27680,10 +26399,10 @@
       </p:sp>
       <p:sp>
         <p:nvSpPr>
-          <p:cNvPr id="21" name="">
-            <a:extLst xmlns:a="http://schemas.openxmlformats.org/drawingml/2006/main">
-              <a:ext uri="{FF2B5EF4-FFF2-40B4-BE49-F238E27FC236}">
-                <a16:creationId xmlns:a16="http://schemas.microsoft.com/office/drawing/2014/main" id="{942763AA-F5E7-47FF-B703-CB6AC0EE7DCD}"/>
+          <p:cNvPr id="20" name="">
+            <a:extLst xmlns:a="http://schemas.openxmlformats.org/drawingml/2006/main">
+              <a:ext uri="{FF2B5EF4-FFF2-40B4-BE49-F238E27FC236}">
+                <a16:creationId xmlns:a16="http://schemas.microsoft.com/office/drawing/2014/main" id="{6934B252-ED84-4A04-9037-6781004DFD6F}"/>
               </a:ext>
             </a:extLst>
           </p:cNvPr>
@@ -27741,10 +26460,10 @@
       </p:sp>
       <p:sp>
         <p:nvSpPr>
-          <p:cNvPr id="22" name="">
-            <a:extLst xmlns:a="http://schemas.openxmlformats.org/drawingml/2006/main">
-              <a:ext uri="{FF2B5EF4-FFF2-40B4-BE49-F238E27FC236}">
-                <a16:creationId xmlns:a16="http://schemas.microsoft.com/office/drawing/2014/main" id="{779D45E4-265B-4967-AFA2-2C47B4002F2E}"/>
+          <p:cNvPr id="21" name="">
+            <a:extLst xmlns:a="http://schemas.openxmlformats.org/drawingml/2006/main">
+              <a:ext uri="{FF2B5EF4-FFF2-40B4-BE49-F238E27FC236}">
+                <a16:creationId xmlns:a16="http://schemas.microsoft.com/office/drawing/2014/main" id="{9F043417-EA8D-4A0B-A594-2FBC98B528B6}"/>
               </a:ext>
             </a:extLst>
           </p:cNvPr>
@@ -27802,10 +26521,10 @@
       </p:sp>
       <p:sp>
         <p:nvSpPr>
-          <p:cNvPr id="23" name="">
-            <a:extLst xmlns:a="http://schemas.openxmlformats.org/drawingml/2006/main">
-              <a:ext uri="{FF2B5EF4-FFF2-40B4-BE49-F238E27FC236}">
-                <a16:creationId xmlns:a16="http://schemas.microsoft.com/office/drawing/2014/main" id="{9C77D026-9D37-48F5-83BD-EA10A4E01A18}"/>
+          <p:cNvPr id="22" name="">
+            <a:extLst xmlns:a="http://schemas.openxmlformats.org/drawingml/2006/main">
+              <a:ext uri="{FF2B5EF4-FFF2-40B4-BE49-F238E27FC236}">
+                <a16:creationId xmlns:a16="http://schemas.microsoft.com/office/drawing/2014/main" id="{05DA0A47-6744-4064-9F7C-AB3ABC34FFF5}"/>
               </a:ext>
             </a:extLst>
           </p:cNvPr>
@@ -27863,10 +26582,10 @@
       </p:sp>
       <p:sp>
         <p:nvSpPr>
-          <p:cNvPr id="24" name="">
-            <a:extLst xmlns:a="http://schemas.openxmlformats.org/drawingml/2006/main">
-              <a:ext uri="{FF2B5EF4-FFF2-40B4-BE49-F238E27FC236}">
-                <a16:creationId xmlns:a16="http://schemas.microsoft.com/office/drawing/2014/main" id="{C1D29D82-8318-421C-B53D-4B1D13422B60}"/>
+          <p:cNvPr id="23" name="">
+            <a:extLst xmlns:a="http://schemas.openxmlformats.org/drawingml/2006/main">
+              <a:ext uri="{FF2B5EF4-FFF2-40B4-BE49-F238E27FC236}">
+                <a16:creationId xmlns:a16="http://schemas.microsoft.com/office/drawing/2014/main" id="{0C8BA0A1-9C7A-41A4-8036-8B2841BE0C51}"/>
               </a:ext>
             </a:extLst>
           </p:cNvPr>
@@ -27896,10 +26615,10 @@
       </p:sp>
       <p:sp>
         <p:nvSpPr>
-          <p:cNvPr id="25" name="">
-            <a:extLst xmlns:a="http://schemas.openxmlformats.org/drawingml/2006/main">
-              <a:ext uri="{FF2B5EF4-FFF2-40B4-BE49-F238E27FC236}">
-                <a16:creationId xmlns:a16="http://schemas.microsoft.com/office/drawing/2014/main" id="{4A06F6D8-359F-4FFA-968F-97CD4289A436}"/>
+          <p:cNvPr id="24" name="">
+            <a:extLst xmlns:a="http://schemas.openxmlformats.org/drawingml/2006/main">
+              <a:ext uri="{FF2B5EF4-FFF2-40B4-BE49-F238E27FC236}">
+                <a16:creationId xmlns:a16="http://schemas.microsoft.com/office/drawing/2014/main" id="{627D519F-5F05-4798-A8A8-A7977B5A2A4E}"/>
               </a:ext>
             </a:extLst>
           </p:cNvPr>
@@ -27957,10 +26676,10 @@
       </p:sp>
       <p:sp>
         <p:nvSpPr>
-          <p:cNvPr id="26" name="">
-            <a:extLst xmlns:a="http://schemas.openxmlformats.org/drawingml/2006/main">
-              <a:ext uri="{FF2B5EF4-FFF2-40B4-BE49-F238E27FC236}">
-                <a16:creationId xmlns:a16="http://schemas.microsoft.com/office/drawing/2014/main" id="{C25EF48F-8C2F-4EAC-BFB2-04062370B42C}"/>
+          <p:cNvPr id="25" name="">
+            <a:extLst xmlns:a="http://schemas.openxmlformats.org/drawingml/2006/main">
+              <a:ext uri="{FF2B5EF4-FFF2-40B4-BE49-F238E27FC236}">
+                <a16:creationId xmlns:a16="http://schemas.microsoft.com/office/drawing/2014/main" id="{4B8CFB37-8FD9-4ED5-B758-40072F1177C0}"/>
               </a:ext>
             </a:extLst>
           </p:cNvPr>
@@ -28018,10 +26737,10 @@
       </p:sp>
       <p:sp>
         <p:nvSpPr>
-          <p:cNvPr id="27" name="">
-            <a:extLst xmlns:a="http://schemas.openxmlformats.org/drawingml/2006/main">
-              <a:ext uri="{FF2B5EF4-FFF2-40B4-BE49-F238E27FC236}">
-                <a16:creationId xmlns:a16="http://schemas.microsoft.com/office/drawing/2014/main" id="{16D44CB6-7476-4611-89A3-D4EB97066526}"/>
+          <p:cNvPr id="26" name="">
+            <a:extLst xmlns:a="http://schemas.openxmlformats.org/drawingml/2006/main">
+              <a:ext uri="{FF2B5EF4-FFF2-40B4-BE49-F238E27FC236}">
+                <a16:creationId xmlns:a16="http://schemas.microsoft.com/office/drawing/2014/main" id="{9F7AFA91-B2E8-4D99-B6FD-2B641411D117}"/>
               </a:ext>
             </a:extLst>
           </p:cNvPr>
@@ -28079,10 +26798,10 @@
       </p:sp>
       <p:sp>
         <p:nvSpPr>
-          <p:cNvPr id="28" name="">
-            <a:extLst xmlns:a="http://schemas.openxmlformats.org/drawingml/2006/main">
-              <a:ext uri="{FF2B5EF4-FFF2-40B4-BE49-F238E27FC236}">
-                <a16:creationId xmlns:a16="http://schemas.microsoft.com/office/drawing/2014/main" id="{EB3662CA-C5A1-419A-A6B9-D4AB37AF4B66}"/>
+          <p:cNvPr id="27" name="">
+            <a:extLst xmlns:a="http://schemas.openxmlformats.org/drawingml/2006/main">
+              <a:ext uri="{FF2B5EF4-FFF2-40B4-BE49-F238E27FC236}">
+                <a16:creationId xmlns:a16="http://schemas.microsoft.com/office/drawing/2014/main" id="{34EA3257-FBD5-4DAE-A574-3F371960884C}"/>
               </a:ext>
             </a:extLst>
           </p:cNvPr>
@@ -28141,7 +26860,7 @@
     </p:spTree>
     <p:extLst>
       <p:ext uri="{BB962C8B-B14F-4D97-AF65-F5344CB8AC3E}">
-        <p14:creationId xmlns:p14="http://schemas.microsoft.com/office/powerpoint/2010/main" val="895474149"/>
+        <p14:creationId xmlns:p14="http://schemas.microsoft.com/office/powerpoint/2010/main" val="1900257006"/>
       </p:ext>
     </p:extLst>
   </p:cSld>
@@ -28169,10 +26888,10 @@
       </p:grpSpPr>
       <p:sp>
         <p:nvSpPr>
-          <p:cNvPr id="87" name="">
-            <a:extLst xmlns:a="http://schemas.openxmlformats.org/drawingml/2006/main">
-              <a:ext uri="{FF2B5EF4-FFF2-40B4-BE49-F238E27FC236}">
-                <a16:creationId xmlns:a16="http://schemas.microsoft.com/office/drawing/2014/main" id="{8E7C3A37-A1B2-4034-A806-E3C3B27AB05D}"/>
+          <p:cNvPr id="86" name="">
+            <a:extLst xmlns:a="http://schemas.openxmlformats.org/drawingml/2006/main">
+              <a:ext uri="{FF2B5EF4-FFF2-40B4-BE49-F238E27FC236}">
+                <a16:creationId xmlns:a16="http://schemas.microsoft.com/office/drawing/2014/main" id="{FE57D528-10EC-40A7-965B-8D523E292379}"/>
               </a:ext>
             </a:extLst>
           </p:cNvPr>
@@ -28205,7 +26924,7 @@
           <p:cNvPr id="2" name="">
             <a:extLst xmlns:a="http://schemas.openxmlformats.org/drawingml/2006/main">
               <a:ext uri="{FF2B5EF4-FFF2-40B4-BE49-F238E27FC236}">
-                <a16:creationId xmlns:a16="http://schemas.microsoft.com/office/drawing/2014/main" id="{54267483-695F-4021-8FBB-848AD97E1D24}"/>
+                <a16:creationId xmlns:a16="http://schemas.microsoft.com/office/drawing/2014/main" id="{9E83F0A5-B1A2-4720-8A38-DD9127D13782}"/>
               </a:ext>
             </a:extLst>
           </p:cNvPr>
@@ -28235,14 +26954,14 @@
       </p:sp>
       <p:pic>
         <p:nvPicPr>
-          <p:cNvPr id="89" name=""/>
+          <p:cNvPr id="88" name=""/>
           <p:cNvPicPr>
             <a:picLocks xmlns:a="http://schemas.openxmlformats.org/drawingml/2006/main" noChangeAspect="1"/>
           </p:cNvPicPr>
           <p:nvPr/>
         </p:nvPicPr>
         <p:blipFill>
-          <a:blip xmlns:r="http://schemas.openxmlformats.org/officeDocument/2006/relationships" xmlns:a="http://schemas.openxmlformats.org/drawingml/2006/main" r:embed="R17c0a6eb04e5453b"/>
+          <a:blip xmlns:r="http://schemas.openxmlformats.org/officeDocument/2006/relationships" xmlns:a="http://schemas.openxmlformats.org/drawingml/2006/main" r:embed="Reba77d6dc20e4fa1"/>
           <a:stretch xmlns:a="http://schemas.openxmlformats.org/drawingml/2006/main"/>
         </p:blipFill>
         <p:spPr>
@@ -28260,7 +26979,7 @@
           <p:cNvPr id="4" name="">
             <a:extLst xmlns:a="http://schemas.openxmlformats.org/drawingml/2006/main">
               <a:ext uri="{FF2B5EF4-FFF2-40B4-BE49-F238E27FC236}">
-                <a16:creationId xmlns:a16="http://schemas.microsoft.com/office/drawing/2014/main" id="{FA88A88F-1C61-4BCC-A9BD-6748BE469C09}"/>
+                <a16:creationId xmlns:a16="http://schemas.microsoft.com/office/drawing/2014/main" id="{6317CA46-F016-4055-9694-7F17DA839417}"/>
               </a:ext>
             </a:extLst>
           </p:cNvPr>
@@ -28321,7 +27040,7 @@
           <p:cNvPr id="5" name="">
             <a:extLst xmlns:a="http://schemas.openxmlformats.org/drawingml/2006/main">
               <a:ext uri="{FF2B5EF4-FFF2-40B4-BE49-F238E27FC236}">
-                <a16:creationId xmlns:a16="http://schemas.microsoft.com/office/drawing/2014/main" id="{D88B491C-6DCC-4835-85FF-E7B29AE62B72}"/>
+                <a16:creationId xmlns:a16="http://schemas.microsoft.com/office/drawing/2014/main" id="{8DAB21D2-0384-4EFF-9849-51DF007084E3}"/>
               </a:ext>
             </a:extLst>
           </p:cNvPr>
@@ -28382,7 +27101,7 @@
           <p:cNvPr id="6" name="">
             <a:extLst xmlns:a="http://schemas.openxmlformats.org/drawingml/2006/main">
               <a:ext uri="{FF2B5EF4-FFF2-40B4-BE49-F238E27FC236}">
-                <a16:creationId xmlns:a16="http://schemas.microsoft.com/office/drawing/2014/main" id="{5D0F5E99-A08A-42D1-A05D-BEDE41A7F1A3}"/>
+                <a16:creationId xmlns:a16="http://schemas.microsoft.com/office/drawing/2014/main" id="{E2D1B75B-6A79-4DA6-9363-A20814500B31}"/>
               </a:ext>
             </a:extLst>
           </p:cNvPr>
@@ -28415,68 +27134,7 @@
           <p:cNvPr id="7" name="">
             <a:extLst xmlns:a="http://schemas.openxmlformats.org/drawingml/2006/main">
               <a:ext uri="{FF2B5EF4-FFF2-40B4-BE49-F238E27FC236}">
-                <a16:creationId xmlns:a16="http://schemas.microsoft.com/office/drawing/2014/main" id="{AC672038-48F7-4A6B-B144-C2A26DCF9DB3}"/>
-              </a:ext>
-            </a:extLst>
-          </p:cNvPr>
-          <p:cNvSpPr>
-            <a:spLocks xmlns:a="http://schemas.openxmlformats.org/drawingml/2006/main" noGrp="1"/>
-          </p:cNvSpPr>
-          <p:nvPr/>
-        </p:nvSpPr>
-        <p:spPr>
-          <a:xfrm xmlns:a="http://schemas.openxmlformats.org/drawingml/2006/main">
-            <a:off x="733425" y="6457950"/>
-            <a:ext cx="6191250" cy="209550"/>
-          </a:xfrm>
-          <a:prstGeom xmlns:a="http://schemas.openxmlformats.org/drawingml/2006/main" prst="rect">
-            <a:avLst/>
-          </a:prstGeom>
-          <a:noFill xmlns:a="http://schemas.openxmlformats.org/drawingml/2006/main"/>
-          <a:ln xmlns:a="http://schemas.openxmlformats.org/drawingml/2006/main" w="0">
-            <a:noFill/>
-          </a:ln>
-        </p:spPr>
-        <p:txBody>
-          <a:bodyPr xmlns:a="http://schemas.openxmlformats.org/drawingml/2006/main" lIns="19050" tIns="19050" rIns="19050" bIns="19050" anchor="ctr">
-            <a:normAutofit fontScale="100000"/>
-          </a:bodyPr>
-          <a:lstStyle xmlns:a="http://schemas.openxmlformats.org/drawingml/2006/main"/>
-          <a:p xmlns:a="http://schemas.openxmlformats.org/drawingml/2006/main">
-            <a:pPr algn="l">
-              <a:lnSpc>
-                <a:spcPct val="105000"/>
-              </a:lnSpc>
-              <a:buNone/>
-              <a:defRPr sz="1050" b="0">
-                <a:solidFill>
-                  <a:srgbClr val="E5EDFF"/>
-                </a:solidFill>
-                <a:latin typeface="PingFang SC"/>
-                <a:ea typeface="PingFang SC"/>
-                <a:cs typeface="PingFang SC"/>
-              </a:defRPr>
-            </a:pPr>
-            <a:r>
-              <a:rPr sz="1050" b="0">
-                <a:solidFill>
-                  <a:srgbClr val="E5EDFF"/>
-                </a:solidFill>
-                <a:latin typeface="PingFang SC"/>
-                <a:ea typeface="PingFang SC"/>
-                <a:cs typeface="PingFang SC"/>
-              </a:rPr>
-              <a:t>广东工业大学 · 学术研究汇报</a:t>
-            </a:r>
-          </a:p>
-        </p:txBody>
-      </p:sp>
-      <p:sp>
-        <p:nvSpPr>
-          <p:cNvPr id="8" name="">
-            <a:extLst xmlns:a="http://schemas.openxmlformats.org/drawingml/2006/main">
-              <a:ext uri="{FF2B5EF4-FFF2-40B4-BE49-F238E27FC236}">
-                <a16:creationId xmlns:a16="http://schemas.microsoft.com/office/drawing/2014/main" id="{35931ABC-34C1-43A5-8797-5E37C643D7BD}"/>
+                <a16:creationId xmlns:a16="http://schemas.microsoft.com/office/drawing/2014/main" id="{0CAB4A67-B56E-463D-A1B4-A61A86C8E1A6}"/>
               </a:ext>
             </a:extLst>
           </p:cNvPr>
@@ -28534,10 +27192,10 @@
       </p:sp>
       <p:sp>
         <p:nvSpPr>
-          <p:cNvPr id="9" name="">
-            <a:extLst xmlns:a="http://schemas.openxmlformats.org/drawingml/2006/main">
-              <a:ext uri="{FF2B5EF4-FFF2-40B4-BE49-F238E27FC236}">
-                <a16:creationId xmlns:a16="http://schemas.microsoft.com/office/drawing/2014/main" id="{45B3B00B-A861-4C2E-82DE-9D01161EEC4E}"/>
+          <p:cNvPr id="8" name="">
+            <a:extLst xmlns:a="http://schemas.openxmlformats.org/drawingml/2006/main">
+              <a:ext uri="{FF2B5EF4-FFF2-40B4-BE49-F238E27FC236}">
+                <a16:creationId xmlns:a16="http://schemas.microsoft.com/office/drawing/2014/main" id="{FDC23D48-F4E9-4DB0-8F2B-B07FC5164A06}"/>
               </a:ext>
             </a:extLst>
           </p:cNvPr>
@@ -28595,10 +27253,10 @@
       </p:sp>
       <p:sp>
         <p:nvSpPr>
-          <p:cNvPr id="10" name="">
-            <a:extLst xmlns:a="http://schemas.openxmlformats.org/drawingml/2006/main">
-              <a:ext uri="{FF2B5EF4-FFF2-40B4-BE49-F238E27FC236}">
-                <a16:creationId xmlns:a16="http://schemas.microsoft.com/office/drawing/2014/main" id="{7D86B399-2688-4CEA-9A55-5F3CD38134F9}"/>
+          <p:cNvPr id="9" name="">
+            <a:extLst xmlns:a="http://schemas.openxmlformats.org/drawingml/2006/main">
+              <a:ext uri="{FF2B5EF4-FFF2-40B4-BE49-F238E27FC236}">
+                <a16:creationId xmlns:a16="http://schemas.microsoft.com/office/drawing/2014/main" id="{B2B1C5E5-B64C-4336-9105-A148868D8E51}"/>
               </a:ext>
             </a:extLst>
           </p:cNvPr>
@@ -28656,10 +27314,10 @@
       </p:sp>
       <p:sp>
         <p:nvSpPr>
-          <p:cNvPr id="11" name="">
-            <a:extLst xmlns:a="http://schemas.openxmlformats.org/drawingml/2006/main">
-              <a:ext uri="{FF2B5EF4-FFF2-40B4-BE49-F238E27FC236}">
-                <a16:creationId xmlns:a16="http://schemas.microsoft.com/office/drawing/2014/main" id="{33C167AD-8582-4277-B958-B2E5B94671BB}"/>
+          <p:cNvPr id="10" name="">
+            <a:extLst xmlns:a="http://schemas.openxmlformats.org/drawingml/2006/main">
+              <a:ext uri="{FF2B5EF4-FFF2-40B4-BE49-F238E27FC236}">
+                <a16:creationId xmlns:a16="http://schemas.microsoft.com/office/drawing/2014/main" id="{490F73D1-BAC0-4D57-A755-411613917986}"/>
               </a:ext>
             </a:extLst>
           </p:cNvPr>
@@ -28717,10 +27375,10 @@
       </p:sp>
       <p:sp>
         <p:nvSpPr>
-          <p:cNvPr id="12" name="">
-            <a:extLst xmlns:a="http://schemas.openxmlformats.org/drawingml/2006/main">
-              <a:ext uri="{FF2B5EF4-FFF2-40B4-BE49-F238E27FC236}">
-                <a16:creationId xmlns:a16="http://schemas.microsoft.com/office/drawing/2014/main" id="{ABBCB631-3F61-4305-91B7-D8B4D103C659}"/>
+          <p:cNvPr id="11" name="">
+            <a:extLst xmlns:a="http://schemas.openxmlformats.org/drawingml/2006/main">
+              <a:ext uri="{FF2B5EF4-FFF2-40B4-BE49-F238E27FC236}">
+                <a16:creationId xmlns:a16="http://schemas.microsoft.com/office/drawing/2014/main" id="{A8935873-1BA4-42DE-B250-68FA7DF7699A}"/>
               </a:ext>
             </a:extLst>
           </p:cNvPr>
@@ -28778,10 +27436,10 @@
       </p:sp>
       <p:sp>
         <p:nvSpPr>
-          <p:cNvPr id="13" name="">
-            <a:extLst xmlns:a="http://schemas.openxmlformats.org/drawingml/2006/main">
-              <a:ext uri="{FF2B5EF4-FFF2-40B4-BE49-F238E27FC236}">
-                <a16:creationId xmlns:a16="http://schemas.microsoft.com/office/drawing/2014/main" id="{5EB48BC1-74CA-486B-97EC-F34AEB431061}"/>
+          <p:cNvPr id="12" name="">
+            <a:extLst xmlns:a="http://schemas.openxmlformats.org/drawingml/2006/main">
+              <a:ext uri="{FF2B5EF4-FFF2-40B4-BE49-F238E27FC236}">
+                <a16:creationId xmlns:a16="http://schemas.microsoft.com/office/drawing/2014/main" id="{E7699750-2DAB-418E-8614-8B8729B8C3AA}"/>
               </a:ext>
             </a:extLst>
           </p:cNvPr>
@@ -28839,10 +27497,10 @@
       </p:sp>
       <p:sp>
         <p:nvSpPr>
-          <p:cNvPr id="14" name="">
-            <a:extLst xmlns:a="http://schemas.openxmlformats.org/drawingml/2006/main">
-              <a:ext uri="{FF2B5EF4-FFF2-40B4-BE49-F238E27FC236}">
-                <a16:creationId xmlns:a16="http://schemas.microsoft.com/office/drawing/2014/main" id="{F474107B-8071-4F2C-8736-8CF1390FBF8C}"/>
+          <p:cNvPr id="13" name="">
+            <a:extLst xmlns:a="http://schemas.openxmlformats.org/drawingml/2006/main">
+              <a:ext uri="{FF2B5EF4-FFF2-40B4-BE49-F238E27FC236}">
+                <a16:creationId xmlns:a16="http://schemas.microsoft.com/office/drawing/2014/main" id="{00ACF6CF-01AD-488E-823B-0A44B9199E03}"/>
               </a:ext>
             </a:extLst>
           </p:cNvPr>
@@ -28900,10 +27558,10 @@
       </p:sp>
       <p:sp>
         <p:nvSpPr>
-          <p:cNvPr id="15" name="">
-            <a:extLst xmlns:a="http://schemas.openxmlformats.org/drawingml/2006/main">
-              <a:ext uri="{FF2B5EF4-FFF2-40B4-BE49-F238E27FC236}">
-                <a16:creationId xmlns:a16="http://schemas.microsoft.com/office/drawing/2014/main" id="{C18AA831-C421-4CAF-8020-B4EA2B6EC31A}"/>
+          <p:cNvPr id="14" name="">
+            <a:extLst xmlns:a="http://schemas.openxmlformats.org/drawingml/2006/main">
+              <a:ext uri="{FF2B5EF4-FFF2-40B4-BE49-F238E27FC236}">
+                <a16:creationId xmlns:a16="http://schemas.microsoft.com/office/drawing/2014/main" id="{A742FB93-FF9C-4D53-8FE4-7D4C3BC37655}"/>
               </a:ext>
             </a:extLst>
           </p:cNvPr>
@@ -28961,10 +27619,10 @@
       </p:sp>
       <p:sp>
         <p:nvSpPr>
-          <p:cNvPr id="16" name="">
-            <a:extLst xmlns:a="http://schemas.openxmlformats.org/drawingml/2006/main">
-              <a:ext uri="{FF2B5EF4-FFF2-40B4-BE49-F238E27FC236}">
-                <a16:creationId xmlns:a16="http://schemas.microsoft.com/office/drawing/2014/main" id="{DA8CA3AE-A632-4974-8F99-884F9428688D}"/>
+          <p:cNvPr id="15" name="">
+            <a:extLst xmlns:a="http://schemas.openxmlformats.org/drawingml/2006/main">
+              <a:ext uri="{FF2B5EF4-FFF2-40B4-BE49-F238E27FC236}">
+                <a16:creationId xmlns:a16="http://schemas.microsoft.com/office/drawing/2014/main" id="{6092DF4E-98CF-44CF-83C5-0B8EA7A66BD2}"/>
               </a:ext>
             </a:extLst>
           </p:cNvPr>
@@ -29022,10 +27680,10 @@
       </p:sp>
       <p:sp>
         <p:nvSpPr>
-          <p:cNvPr id="17" name="">
-            <a:extLst xmlns:a="http://schemas.openxmlformats.org/drawingml/2006/main">
-              <a:ext uri="{FF2B5EF4-FFF2-40B4-BE49-F238E27FC236}">
-                <a16:creationId xmlns:a16="http://schemas.microsoft.com/office/drawing/2014/main" id="{98C5373A-DAA1-4B04-A5D5-941782D57062}"/>
+          <p:cNvPr id="16" name="">
+            <a:extLst xmlns:a="http://schemas.openxmlformats.org/drawingml/2006/main">
+              <a:ext uri="{FF2B5EF4-FFF2-40B4-BE49-F238E27FC236}">
+                <a16:creationId xmlns:a16="http://schemas.microsoft.com/office/drawing/2014/main" id="{0C1D2791-7680-4FE4-91CD-277A0467F3AF}"/>
               </a:ext>
             </a:extLst>
           </p:cNvPr>
@@ -29083,10 +27741,10 @@
       </p:sp>
       <p:sp>
         <p:nvSpPr>
-          <p:cNvPr id="18" name="">
-            <a:extLst xmlns:a="http://schemas.openxmlformats.org/drawingml/2006/main">
-              <a:ext uri="{FF2B5EF4-FFF2-40B4-BE49-F238E27FC236}">
-                <a16:creationId xmlns:a16="http://schemas.microsoft.com/office/drawing/2014/main" id="{6CCD20D4-3CB7-4157-A6EC-9B75826ABF76}"/>
+          <p:cNvPr id="17" name="">
+            <a:extLst xmlns:a="http://schemas.openxmlformats.org/drawingml/2006/main">
+              <a:ext uri="{FF2B5EF4-FFF2-40B4-BE49-F238E27FC236}">
+                <a16:creationId xmlns:a16="http://schemas.microsoft.com/office/drawing/2014/main" id="{143D97F4-D6C3-4B09-BC00-0585C8A60CCB}"/>
               </a:ext>
             </a:extLst>
           </p:cNvPr>
@@ -29144,10 +27802,10 @@
       </p:sp>
       <p:sp>
         <p:nvSpPr>
-          <p:cNvPr id="19" name="">
-            <a:extLst xmlns:a="http://schemas.openxmlformats.org/drawingml/2006/main">
-              <a:ext uri="{FF2B5EF4-FFF2-40B4-BE49-F238E27FC236}">
-                <a16:creationId xmlns:a16="http://schemas.microsoft.com/office/drawing/2014/main" id="{96BB34A3-DB3D-44A2-8251-5D3B15E35A83}"/>
+          <p:cNvPr id="18" name="">
+            <a:extLst xmlns:a="http://schemas.openxmlformats.org/drawingml/2006/main">
+              <a:ext uri="{FF2B5EF4-FFF2-40B4-BE49-F238E27FC236}">
+                <a16:creationId xmlns:a16="http://schemas.microsoft.com/office/drawing/2014/main" id="{79038F2F-FA4C-4F8D-91DE-91D88C9F6724}"/>
               </a:ext>
             </a:extLst>
           </p:cNvPr>
@@ -29205,10 +27863,10 @@
       </p:sp>
       <p:sp>
         <p:nvSpPr>
-          <p:cNvPr id="20" name="">
-            <a:extLst xmlns:a="http://schemas.openxmlformats.org/drawingml/2006/main">
-              <a:ext uri="{FF2B5EF4-FFF2-40B4-BE49-F238E27FC236}">
-                <a16:creationId xmlns:a16="http://schemas.microsoft.com/office/drawing/2014/main" id="{FDCAB746-DEBF-4BE2-8DE1-861E8CA8299D}"/>
+          <p:cNvPr id="19" name="">
+            <a:extLst xmlns:a="http://schemas.openxmlformats.org/drawingml/2006/main">
+              <a:ext uri="{FF2B5EF4-FFF2-40B4-BE49-F238E27FC236}">
+                <a16:creationId xmlns:a16="http://schemas.microsoft.com/office/drawing/2014/main" id="{90561C7B-FB69-41D8-ABDB-0AF8CBB7469A}"/>
               </a:ext>
             </a:extLst>
           </p:cNvPr>
@@ -29266,10 +27924,10 @@
       </p:sp>
       <p:sp>
         <p:nvSpPr>
-          <p:cNvPr id="21" name="">
-            <a:extLst xmlns:a="http://schemas.openxmlformats.org/drawingml/2006/main">
-              <a:ext uri="{FF2B5EF4-FFF2-40B4-BE49-F238E27FC236}">
-                <a16:creationId xmlns:a16="http://schemas.microsoft.com/office/drawing/2014/main" id="{700C82AE-4A06-4DD6-AA89-32313DABED95}"/>
+          <p:cNvPr id="20" name="">
+            <a:extLst xmlns:a="http://schemas.openxmlformats.org/drawingml/2006/main">
+              <a:ext uri="{FF2B5EF4-FFF2-40B4-BE49-F238E27FC236}">
+                <a16:creationId xmlns:a16="http://schemas.microsoft.com/office/drawing/2014/main" id="{DCC5C025-75F8-4942-B940-CD7FA3479806}"/>
               </a:ext>
             </a:extLst>
           </p:cNvPr>
@@ -29299,10 +27957,10 @@
       </p:sp>
       <p:sp>
         <p:nvSpPr>
-          <p:cNvPr id="22" name="">
-            <a:extLst xmlns:a="http://schemas.openxmlformats.org/drawingml/2006/main">
-              <a:ext uri="{FF2B5EF4-FFF2-40B4-BE49-F238E27FC236}">
-                <a16:creationId xmlns:a16="http://schemas.microsoft.com/office/drawing/2014/main" id="{5B3AEA3C-18B6-46A3-B5FC-C1BE8414E282}"/>
+          <p:cNvPr id="21" name="">
+            <a:extLst xmlns:a="http://schemas.openxmlformats.org/drawingml/2006/main">
+              <a:ext uri="{FF2B5EF4-FFF2-40B4-BE49-F238E27FC236}">
+                <a16:creationId xmlns:a16="http://schemas.microsoft.com/office/drawing/2014/main" id="{0AFC9255-6CB1-4286-9B98-E73DE070BBA1}"/>
               </a:ext>
             </a:extLst>
           </p:cNvPr>
@@ -29360,10 +28018,10 @@
       </p:sp>
       <p:sp>
         <p:nvSpPr>
-          <p:cNvPr id="23" name="">
-            <a:extLst xmlns:a="http://schemas.openxmlformats.org/drawingml/2006/main">
-              <a:ext uri="{FF2B5EF4-FFF2-40B4-BE49-F238E27FC236}">
-                <a16:creationId xmlns:a16="http://schemas.microsoft.com/office/drawing/2014/main" id="{95B71514-80BF-474D-A96C-AFA349117EAA}"/>
+          <p:cNvPr id="22" name="">
+            <a:extLst xmlns:a="http://schemas.openxmlformats.org/drawingml/2006/main">
+              <a:ext uri="{FF2B5EF4-FFF2-40B4-BE49-F238E27FC236}">
+                <a16:creationId xmlns:a16="http://schemas.microsoft.com/office/drawing/2014/main" id="{4EE97F51-2EB7-411F-8798-7679A445AABC}"/>
               </a:ext>
             </a:extLst>
           </p:cNvPr>
@@ -29421,10 +28079,10 @@
       </p:sp>
       <p:sp>
         <p:nvSpPr>
-          <p:cNvPr id="24" name="">
-            <a:extLst xmlns:a="http://schemas.openxmlformats.org/drawingml/2006/main">
-              <a:ext uri="{FF2B5EF4-FFF2-40B4-BE49-F238E27FC236}">
-                <a16:creationId xmlns:a16="http://schemas.microsoft.com/office/drawing/2014/main" id="{FA57E7C5-A3F2-4D6B-AAE9-8767B2BB2054}"/>
+          <p:cNvPr id="23" name="">
+            <a:extLst xmlns:a="http://schemas.openxmlformats.org/drawingml/2006/main">
+              <a:ext uri="{FF2B5EF4-FFF2-40B4-BE49-F238E27FC236}">
+                <a16:creationId xmlns:a16="http://schemas.microsoft.com/office/drawing/2014/main" id="{496231EF-A9C2-4837-8B23-34645C342456}"/>
               </a:ext>
             </a:extLst>
           </p:cNvPr>
@@ -29482,10 +28140,10 @@
       </p:sp>
       <p:sp>
         <p:nvSpPr>
-          <p:cNvPr id="25" name="">
-            <a:extLst xmlns:a="http://schemas.openxmlformats.org/drawingml/2006/main">
-              <a:ext uri="{FF2B5EF4-FFF2-40B4-BE49-F238E27FC236}">
-                <a16:creationId xmlns:a16="http://schemas.microsoft.com/office/drawing/2014/main" id="{F059153F-CF2A-4871-91CA-4EDA43FA8C7A}"/>
+          <p:cNvPr id="24" name="">
+            <a:extLst xmlns:a="http://schemas.openxmlformats.org/drawingml/2006/main">
+              <a:ext uri="{FF2B5EF4-FFF2-40B4-BE49-F238E27FC236}">
+                <a16:creationId xmlns:a16="http://schemas.microsoft.com/office/drawing/2014/main" id="{98E52547-46A9-4A2F-96BE-77755CC61FB7}"/>
               </a:ext>
             </a:extLst>
           </p:cNvPr>
@@ -29543,10 +28201,10 @@
       </p:sp>
       <p:sp>
         <p:nvSpPr>
-          <p:cNvPr id="26" name="">
-            <a:extLst xmlns:a="http://schemas.openxmlformats.org/drawingml/2006/main">
-              <a:ext uri="{FF2B5EF4-FFF2-40B4-BE49-F238E27FC236}">
-                <a16:creationId xmlns:a16="http://schemas.microsoft.com/office/drawing/2014/main" id="{71B22932-4F29-4386-8A79-6844CADDFA37}"/>
+          <p:cNvPr id="25" name="">
+            <a:extLst xmlns:a="http://schemas.openxmlformats.org/drawingml/2006/main">
+              <a:ext uri="{FF2B5EF4-FFF2-40B4-BE49-F238E27FC236}">
+                <a16:creationId xmlns:a16="http://schemas.microsoft.com/office/drawing/2014/main" id="{F9089244-024E-44B6-8479-25AF2EA22D1A}"/>
               </a:ext>
             </a:extLst>
           </p:cNvPr>
@@ -29604,10 +28262,10 @@
       </p:sp>
       <p:sp>
         <p:nvSpPr>
-          <p:cNvPr id="27" name="">
-            <a:extLst xmlns:a="http://schemas.openxmlformats.org/drawingml/2006/main">
-              <a:ext uri="{FF2B5EF4-FFF2-40B4-BE49-F238E27FC236}">
-                <a16:creationId xmlns:a16="http://schemas.microsoft.com/office/drawing/2014/main" id="{7A10398A-4E93-49C8-8FDB-12BD904A8513}"/>
+          <p:cNvPr id="26" name="">
+            <a:extLst xmlns:a="http://schemas.openxmlformats.org/drawingml/2006/main">
+              <a:ext uri="{FF2B5EF4-FFF2-40B4-BE49-F238E27FC236}">
+                <a16:creationId xmlns:a16="http://schemas.microsoft.com/office/drawing/2014/main" id="{030FC519-B37F-4256-939F-99B45C4C1573}"/>
               </a:ext>
             </a:extLst>
           </p:cNvPr>
@@ -29665,10 +28323,10 @@
       </p:sp>
       <p:sp>
         <p:nvSpPr>
-          <p:cNvPr id="28" name="">
-            <a:extLst xmlns:a="http://schemas.openxmlformats.org/drawingml/2006/main">
-              <a:ext uri="{FF2B5EF4-FFF2-40B4-BE49-F238E27FC236}">
-                <a16:creationId xmlns:a16="http://schemas.microsoft.com/office/drawing/2014/main" id="{028E0322-9B37-4AC5-AACB-8E72D77EF463}"/>
+          <p:cNvPr id="27" name="">
+            <a:extLst xmlns:a="http://schemas.openxmlformats.org/drawingml/2006/main">
+              <a:ext uri="{FF2B5EF4-FFF2-40B4-BE49-F238E27FC236}">
+                <a16:creationId xmlns:a16="http://schemas.microsoft.com/office/drawing/2014/main" id="{3EEBFBDA-9BD7-473E-B8F8-4F704CF54FC8}"/>
               </a:ext>
             </a:extLst>
           </p:cNvPr>
@@ -29698,10 +28356,10 @@
       </p:sp>
       <p:sp>
         <p:nvSpPr>
-          <p:cNvPr id="29" name="">
-            <a:extLst xmlns:a="http://schemas.openxmlformats.org/drawingml/2006/main">
-              <a:ext uri="{FF2B5EF4-FFF2-40B4-BE49-F238E27FC236}">
-                <a16:creationId xmlns:a16="http://schemas.microsoft.com/office/drawing/2014/main" id="{2663D86A-9E1D-4E39-ACA6-7D511D388841}"/>
+          <p:cNvPr id="28" name="">
+            <a:extLst xmlns:a="http://schemas.openxmlformats.org/drawingml/2006/main">
+              <a:ext uri="{FF2B5EF4-FFF2-40B4-BE49-F238E27FC236}">
+                <a16:creationId xmlns:a16="http://schemas.microsoft.com/office/drawing/2014/main" id="{EE5A2CB3-1399-43AB-9A62-CF697F910504}"/>
               </a:ext>
             </a:extLst>
           </p:cNvPr>
@@ -29759,10 +28417,10 @@
       </p:sp>
       <p:sp>
         <p:nvSpPr>
-          <p:cNvPr id="30" name="">
-            <a:extLst xmlns:a="http://schemas.openxmlformats.org/drawingml/2006/main">
-              <a:ext uri="{FF2B5EF4-FFF2-40B4-BE49-F238E27FC236}">
-                <a16:creationId xmlns:a16="http://schemas.microsoft.com/office/drawing/2014/main" id="{B72A3C2A-826B-42AB-A161-80EED8CBC2C1}"/>
+          <p:cNvPr id="29" name="">
+            <a:extLst xmlns:a="http://schemas.openxmlformats.org/drawingml/2006/main">
+              <a:ext uri="{FF2B5EF4-FFF2-40B4-BE49-F238E27FC236}">
+                <a16:creationId xmlns:a16="http://schemas.microsoft.com/office/drawing/2014/main" id="{443082F4-C759-4A34-BED0-2FDE6B6133AD}"/>
               </a:ext>
             </a:extLst>
           </p:cNvPr>
@@ -29820,10 +28478,10 @@
       </p:sp>
       <p:sp>
         <p:nvSpPr>
-          <p:cNvPr id="31" name="">
-            <a:extLst xmlns:a="http://schemas.openxmlformats.org/drawingml/2006/main">
-              <a:ext uri="{FF2B5EF4-FFF2-40B4-BE49-F238E27FC236}">
-                <a16:creationId xmlns:a16="http://schemas.microsoft.com/office/drawing/2014/main" id="{31C56F85-14B3-40D1-9F5F-6803A2BF2767}"/>
+          <p:cNvPr id="30" name="">
+            <a:extLst xmlns:a="http://schemas.openxmlformats.org/drawingml/2006/main">
+              <a:ext uri="{FF2B5EF4-FFF2-40B4-BE49-F238E27FC236}">
+                <a16:creationId xmlns:a16="http://schemas.microsoft.com/office/drawing/2014/main" id="{8E2230E4-B2DF-4457-9AF4-F37BA199D198}"/>
               </a:ext>
             </a:extLst>
           </p:cNvPr>
@@ -29881,10 +28539,10 @@
       </p:sp>
       <p:sp>
         <p:nvSpPr>
-          <p:cNvPr id="32" name="">
-            <a:extLst xmlns:a="http://schemas.openxmlformats.org/drawingml/2006/main">
-              <a:ext uri="{FF2B5EF4-FFF2-40B4-BE49-F238E27FC236}">
-                <a16:creationId xmlns:a16="http://schemas.microsoft.com/office/drawing/2014/main" id="{260BAB58-0F7A-4B9D-8F13-725A6028B1FD}"/>
+          <p:cNvPr id="31" name="">
+            <a:extLst xmlns:a="http://schemas.openxmlformats.org/drawingml/2006/main">
+              <a:ext uri="{FF2B5EF4-FFF2-40B4-BE49-F238E27FC236}">
+                <a16:creationId xmlns:a16="http://schemas.microsoft.com/office/drawing/2014/main" id="{57645E63-65A1-4A48-AD99-856934AD9750}"/>
               </a:ext>
             </a:extLst>
           </p:cNvPr>
@@ -29942,10 +28600,10 @@
       </p:sp>
       <p:sp>
         <p:nvSpPr>
-          <p:cNvPr id="33" name="">
-            <a:extLst xmlns:a="http://schemas.openxmlformats.org/drawingml/2006/main">
-              <a:ext uri="{FF2B5EF4-FFF2-40B4-BE49-F238E27FC236}">
-                <a16:creationId xmlns:a16="http://schemas.microsoft.com/office/drawing/2014/main" id="{B985C89A-04FB-4A19-81BA-E4EC592198E9}"/>
+          <p:cNvPr id="32" name="">
+            <a:extLst xmlns:a="http://schemas.openxmlformats.org/drawingml/2006/main">
+              <a:ext uri="{FF2B5EF4-FFF2-40B4-BE49-F238E27FC236}">
+                <a16:creationId xmlns:a16="http://schemas.microsoft.com/office/drawing/2014/main" id="{05276D3A-4362-4AF7-A770-F5E4473A372D}"/>
               </a:ext>
             </a:extLst>
           </p:cNvPr>
@@ -30003,10 +28661,10 @@
       </p:sp>
       <p:sp>
         <p:nvSpPr>
-          <p:cNvPr id="34" name="">
-            <a:extLst xmlns:a="http://schemas.openxmlformats.org/drawingml/2006/main">
-              <a:ext uri="{FF2B5EF4-FFF2-40B4-BE49-F238E27FC236}">
-                <a16:creationId xmlns:a16="http://schemas.microsoft.com/office/drawing/2014/main" id="{0AEEAAC2-1DA8-472C-A0D1-D18EFC04DAF5}"/>
+          <p:cNvPr id="33" name="">
+            <a:extLst xmlns:a="http://schemas.openxmlformats.org/drawingml/2006/main">
+              <a:ext uri="{FF2B5EF4-FFF2-40B4-BE49-F238E27FC236}">
+                <a16:creationId xmlns:a16="http://schemas.microsoft.com/office/drawing/2014/main" id="{A26F5A1C-4093-4E58-BE87-1ADD5B4C45B1}"/>
               </a:ext>
             </a:extLst>
           </p:cNvPr>
@@ -30064,10 +28722,10 @@
       </p:sp>
       <p:sp>
         <p:nvSpPr>
-          <p:cNvPr id="35" name="">
-            <a:extLst xmlns:a="http://schemas.openxmlformats.org/drawingml/2006/main">
-              <a:ext uri="{FF2B5EF4-FFF2-40B4-BE49-F238E27FC236}">
-                <a16:creationId xmlns:a16="http://schemas.microsoft.com/office/drawing/2014/main" id="{E17CB308-53AC-4EA3-9DFF-5A1F991D9F63}"/>
+          <p:cNvPr id="34" name="">
+            <a:extLst xmlns:a="http://schemas.openxmlformats.org/drawingml/2006/main">
+              <a:ext uri="{FF2B5EF4-FFF2-40B4-BE49-F238E27FC236}">
+                <a16:creationId xmlns:a16="http://schemas.microsoft.com/office/drawing/2014/main" id="{1DC9F0C5-AF9E-4130-8815-2E7ABC63FB34}"/>
               </a:ext>
             </a:extLst>
           </p:cNvPr>
@@ -30097,10 +28755,10 @@
       </p:sp>
       <p:sp>
         <p:nvSpPr>
-          <p:cNvPr id="36" name="">
-            <a:extLst xmlns:a="http://schemas.openxmlformats.org/drawingml/2006/main">
-              <a:ext uri="{FF2B5EF4-FFF2-40B4-BE49-F238E27FC236}">
-                <a16:creationId xmlns:a16="http://schemas.microsoft.com/office/drawing/2014/main" id="{340C9947-E946-45C7-A032-7EE071878E72}"/>
+          <p:cNvPr id="35" name="">
+            <a:extLst xmlns:a="http://schemas.openxmlformats.org/drawingml/2006/main">
+              <a:ext uri="{FF2B5EF4-FFF2-40B4-BE49-F238E27FC236}">
+                <a16:creationId xmlns:a16="http://schemas.microsoft.com/office/drawing/2014/main" id="{EC46C762-D723-4BCC-8677-63FFDF0123BF}"/>
               </a:ext>
             </a:extLst>
           </p:cNvPr>
@@ -30158,10 +28816,10 @@
       </p:sp>
       <p:sp>
         <p:nvSpPr>
-          <p:cNvPr id="37" name="">
-            <a:extLst xmlns:a="http://schemas.openxmlformats.org/drawingml/2006/main">
-              <a:ext uri="{FF2B5EF4-FFF2-40B4-BE49-F238E27FC236}">
-                <a16:creationId xmlns:a16="http://schemas.microsoft.com/office/drawing/2014/main" id="{27BA25E7-196C-45AB-97F4-27D0C4EFCE0F}"/>
+          <p:cNvPr id="36" name="">
+            <a:extLst xmlns:a="http://schemas.openxmlformats.org/drawingml/2006/main">
+              <a:ext uri="{FF2B5EF4-FFF2-40B4-BE49-F238E27FC236}">
+                <a16:creationId xmlns:a16="http://schemas.microsoft.com/office/drawing/2014/main" id="{5329131A-7E60-4214-83E5-C7A3DD48EABD}"/>
               </a:ext>
             </a:extLst>
           </p:cNvPr>
@@ -30219,10 +28877,10 @@
       </p:sp>
       <p:sp>
         <p:nvSpPr>
-          <p:cNvPr id="38" name="">
-            <a:extLst xmlns:a="http://schemas.openxmlformats.org/drawingml/2006/main">
-              <a:ext uri="{FF2B5EF4-FFF2-40B4-BE49-F238E27FC236}">
-                <a16:creationId xmlns:a16="http://schemas.microsoft.com/office/drawing/2014/main" id="{FD095C24-A4DB-436D-A126-F60DFABE46F6}"/>
+          <p:cNvPr id="37" name="">
+            <a:extLst xmlns:a="http://schemas.openxmlformats.org/drawingml/2006/main">
+              <a:ext uri="{FF2B5EF4-FFF2-40B4-BE49-F238E27FC236}">
+                <a16:creationId xmlns:a16="http://schemas.microsoft.com/office/drawing/2014/main" id="{304735BD-4439-4174-96AA-BD7915C375A3}"/>
               </a:ext>
             </a:extLst>
           </p:cNvPr>
@@ -30280,10 +28938,10 @@
       </p:sp>
       <p:sp>
         <p:nvSpPr>
-          <p:cNvPr id="39" name="">
-            <a:extLst xmlns:a="http://schemas.openxmlformats.org/drawingml/2006/main">
-              <a:ext uri="{FF2B5EF4-FFF2-40B4-BE49-F238E27FC236}">
-                <a16:creationId xmlns:a16="http://schemas.microsoft.com/office/drawing/2014/main" id="{C9060DE6-2BBC-435C-9F37-D22AA2A31E33}"/>
+          <p:cNvPr id="38" name="">
+            <a:extLst xmlns:a="http://schemas.openxmlformats.org/drawingml/2006/main">
+              <a:ext uri="{FF2B5EF4-FFF2-40B4-BE49-F238E27FC236}">
+                <a16:creationId xmlns:a16="http://schemas.microsoft.com/office/drawing/2014/main" id="{C05D19E4-900A-438C-AFB5-50A955B7120F}"/>
               </a:ext>
             </a:extLst>
           </p:cNvPr>
@@ -30341,10 +28999,10 @@
       </p:sp>
       <p:sp>
         <p:nvSpPr>
-          <p:cNvPr id="40" name="">
-            <a:extLst xmlns:a="http://schemas.openxmlformats.org/drawingml/2006/main">
-              <a:ext uri="{FF2B5EF4-FFF2-40B4-BE49-F238E27FC236}">
-                <a16:creationId xmlns:a16="http://schemas.microsoft.com/office/drawing/2014/main" id="{9666A212-03D3-42B6-B6C2-3F8210F5CA64}"/>
+          <p:cNvPr id="39" name="">
+            <a:extLst xmlns:a="http://schemas.openxmlformats.org/drawingml/2006/main">
+              <a:ext uri="{FF2B5EF4-FFF2-40B4-BE49-F238E27FC236}">
+                <a16:creationId xmlns:a16="http://schemas.microsoft.com/office/drawing/2014/main" id="{C7BD47AA-E5E2-4B9B-A9CF-FFBAC095E9F4}"/>
               </a:ext>
             </a:extLst>
           </p:cNvPr>
@@ -30402,10 +29060,10 @@
       </p:sp>
       <p:sp>
         <p:nvSpPr>
-          <p:cNvPr id="41" name="">
-            <a:extLst xmlns:a="http://schemas.openxmlformats.org/drawingml/2006/main">
-              <a:ext uri="{FF2B5EF4-FFF2-40B4-BE49-F238E27FC236}">
-                <a16:creationId xmlns:a16="http://schemas.microsoft.com/office/drawing/2014/main" id="{4485B33B-69E6-41EB-870E-B3B19492FD0B}"/>
+          <p:cNvPr id="40" name="">
+            <a:extLst xmlns:a="http://schemas.openxmlformats.org/drawingml/2006/main">
+              <a:ext uri="{FF2B5EF4-FFF2-40B4-BE49-F238E27FC236}">
+                <a16:creationId xmlns:a16="http://schemas.microsoft.com/office/drawing/2014/main" id="{B7830CF1-E5F0-4180-9C81-EC75681AAE72}"/>
               </a:ext>
             </a:extLst>
           </p:cNvPr>
@@ -30463,10 +29121,10 @@
       </p:sp>
       <p:sp>
         <p:nvSpPr>
-          <p:cNvPr id="42" name="">
-            <a:extLst xmlns:a="http://schemas.openxmlformats.org/drawingml/2006/main">
-              <a:ext uri="{FF2B5EF4-FFF2-40B4-BE49-F238E27FC236}">
-                <a16:creationId xmlns:a16="http://schemas.microsoft.com/office/drawing/2014/main" id="{D6E37817-3626-4827-853A-9D1734B9B17B}"/>
+          <p:cNvPr id="41" name="">
+            <a:extLst xmlns:a="http://schemas.openxmlformats.org/drawingml/2006/main">
+              <a:ext uri="{FF2B5EF4-FFF2-40B4-BE49-F238E27FC236}">
+                <a16:creationId xmlns:a16="http://schemas.microsoft.com/office/drawing/2014/main" id="{9E5680F5-D4E3-4A58-A8A7-9D9D578C4399}"/>
               </a:ext>
             </a:extLst>
           </p:cNvPr>
@@ -30496,10 +29154,10 @@
       </p:sp>
       <p:sp>
         <p:nvSpPr>
-          <p:cNvPr id="43" name="">
-            <a:extLst xmlns:a="http://schemas.openxmlformats.org/drawingml/2006/main">
-              <a:ext uri="{FF2B5EF4-FFF2-40B4-BE49-F238E27FC236}">
-                <a16:creationId xmlns:a16="http://schemas.microsoft.com/office/drawing/2014/main" id="{906899C0-FFF2-40F3-983C-4EE85DC7752E}"/>
+          <p:cNvPr id="42" name="">
+            <a:extLst xmlns:a="http://schemas.openxmlformats.org/drawingml/2006/main">
+              <a:ext uri="{FF2B5EF4-FFF2-40B4-BE49-F238E27FC236}">
+                <a16:creationId xmlns:a16="http://schemas.microsoft.com/office/drawing/2014/main" id="{F0643853-E004-45EC-826E-7CA41AD9031D}"/>
               </a:ext>
             </a:extLst>
           </p:cNvPr>
@@ -30557,10 +29215,10 @@
       </p:sp>
       <p:sp>
         <p:nvSpPr>
-          <p:cNvPr id="44" name="">
-            <a:extLst xmlns:a="http://schemas.openxmlformats.org/drawingml/2006/main">
-              <a:ext uri="{FF2B5EF4-FFF2-40B4-BE49-F238E27FC236}">
-                <a16:creationId xmlns:a16="http://schemas.microsoft.com/office/drawing/2014/main" id="{95028567-80C4-4747-9111-1FB21ED29728}"/>
+          <p:cNvPr id="43" name="">
+            <a:extLst xmlns:a="http://schemas.openxmlformats.org/drawingml/2006/main">
+              <a:ext uri="{FF2B5EF4-FFF2-40B4-BE49-F238E27FC236}">
+                <a16:creationId xmlns:a16="http://schemas.microsoft.com/office/drawing/2014/main" id="{B9A9F77A-CFA9-42D6-8484-6ACA4BB39A51}"/>
               </a:ext>
             </a:extLst>
           </p:cNvPr>
@@ -30618,10 +29276,10 @@
       </p:sp>
       <p:sp>
         <p:nvSpPr>
-          <p:cNvPr id="45" name="">
-            <a:extLst xmlns:a="http://schemas.openxmlformats.org/drawingml/2006/main">
-              <a:ext uri="{FF2B5EF4-FFF2-40B4-BE49-F238E27FC236}">
-                <a16:creationId xmlns:a16="http://schemas.microsoft.com/office/drawing/2014/main" id="{24F56A0D-24CB-4D1C-83B5-7F8DAD6FCB5C}"/>
+          <p:cNvPr id="44" name="">
+            <a:extLst xmlns:a="http://schemas.openxmlformats.org/drawingml/2006/main">
+              <a:ext uri="{FF2B5EF4-FFF2-40B4-BE49-F238E27FC236}">
+                <a16:creationId xmlns:a16="http://schemas.microsoft.com/office/drawing/2014/main" id="{C8E00D41-04D9-4DD7-8C6B-1CEC698FC030}"/>
               </a:ext>
             </a:extLst>
           </p:cNvPr>
@@ -30679,10 +29337,10 @@
       </p:sp>
       <p:sp>
         <p:nvSpPr>
-          <p:cNvPr id="46" name="">
-            <a:extLst xmlns:a="http://schemas.openxmlformats.org/drawingml/2006/main">
-              <a:ext uri="{FF2B5EF4-FFF2-40B4-BE49-F238E27FC236}">
-                <a16:creationId xmlns:a16="http://schemas.microsoft.com/office/drawing/2014/main" id="{B5C72A73-AB94-42BF-A7D6-DABE6913E44C}"/>
+          <p:cNvPr id="45" name="">
+            <a:extLst xmlns:a="http://schemas.openxmlformats.org/drawingml/2006/main">
+              <a:ext uri="{FF2B5EF4-FFF2-40B4-BE49-F238E27FC236}">
+                <a16:creationId xmlns:a16="http://schemas.microsoft.com/office/drawing/2014/main" id="{7B00270D-106D-4C40-B536-58C89BB8EAAF}"/>
               </a:ext>
             </a:extLst>
           </p:cNvPr>
@@ -30740,10 +29398,10 @@
       </p:sp>
       <p:sp>
         <p:nvSpPr>
-          <p:cNvPr id="47" name="">
-            <a:extLst xmlns:a="http://schemas.openxmlformats.org/drawingml/2006/main">
-              <a:ext uri="{FF2B5EF4-FFF2-40B4-BE49-F238E27FC236}">
-                <a16:creationId xmlns:a16="http://schemas.microsoft.com/office/drawing/2014/main" id="{D4EE9AFE-6383-4EFC-9D39-432045EBEC78}"/>
+          <p:cNvPr id="46" name="">
+            <a:extLst xmlns:a="http://schemas.openxmlformats.org/drawingml/2006/main">
+              <a:ext uri="{FF2B5EF4-FFF2-40B4-BE49-F238E27FC236}">
+                <a16:creationId xmlns:a16="http://schemas.microsoft.com/office/drawing/2014/main" id="{39192B95-7A94-4A09-9C58-EAA6C1EA14DE}"/>
               </a:ext>
             </a:extLst>
           </p:cNvPr>
@@ -30801,10 +29459,10 @@
       </p:sp>
       <p:sp>
         <p:nvSpPr>
-          <p:cNvPr id="48" name="">
-            <a:extLst xmlns:a="http://schemas.openxmlformats.org/drawingml/2006/main">
-              <a:ext uri="{FF2B5EF4-FFF2-40B4-BE49-F238E27FC236}">
-                <a16:creationId xmlns:a16="http://schemas.microsoft.com/office/drawing/2014/main" id="{2948ECD1-BA0C-47A9-8D16-E6CA0FB21173}"/>
+          <p:cNvPr id="47" name="">
+            <a:extLst xmlns:a="http://schemas.openxmlformats.org/drawingml/2006/main">
+              <a:ext uri="{FF2B5EF4-FFF2-40B4-BE49-F238E27FC236}">
+                <a16:creationId xmlns:a16="http://schemas.microsoft.com/office/drawing/2014/main" id="{94393240-44BF-4673-A2F3-FE25D7FAA8ED}"/>
               </a:ext>
             </a:extLst>
           </p:cNvPr>
@@ -30862,10 +29520,10 @@
       </p:sp>
       <p:sp>
         <p:nvSpPr>
-          <p:cNvPr id="49" name="">
-            <a:extLst xmlns:a="http://schemas.openxmlformats.org/drawingml/2006/main">
-              <a:ext uri="{FF2B5EF4-FFF2-40B4-BE49-F238E27FC236}">
-                <a16:creationId xmlns:a16="http://schemas.microsoft.com/office/drawing/2014/main" id="{FED5DEF8-9BE9-4153-92F0-2FC66DA0844C}"/>
+          <p:cNvPr id="48" name="">
+            <a:extLst xmlns:a="http://schemas.openxmlformats.org/drawingml/2006/main">
+              <a:ext uri="{FF2B5EF4-FFF2-40B4-BE49-F238E27FC236}">
+                <a16:creationId xmlns:a16="http://schemas.microsoft.com/office/drawing/2014/main" id="{5643E5D7-2B34-46E9-9B1C-E2CBFCA2C049}"/>
               </a:ext>
             </a:extLst>
           </p:cNvPr>
@@ -30895,10 +29553,10 @@
       </p:sp>
       <p:sp>
         <p:nvSpPr>
-          <p:cNvPr id="50" name="">
-            <a:extLst xmlns:a="http://schemas.openxmlformats.org/drawingml/2006/main">
-              <a:ext uri="{FF2B5EF4-FFF2-40B4-BE49-F238E27FC236}">
-                <a16:creationId xmlns:a16="http://schemas.microsoft.com/office/drawing/2014/main" id="{5EB205F0-E9A0-47A3-8016-AD7F6C966A8F}"/>
+          <p:cNvPr id="49" name="">
+            <a:extLst xmlns:a="http://schemas.openxmlformats.org/drawingml/2006/main">
+              <a:ext uri="{FF2B5EF4-FFF2-40B4-BE49-F238E27FC236}">
+                <a16:creationId xmlns:a16="http://schemas.microsoft.com/office/drawing/2014/main" id="{75EDF09B-A6B5-42CB-9A92-04621368713B}"/>
               </a:ext>
             </a:extLst>
           </p:cNvPr>
@@ -30956,10 +29614,10 @@
       </p:sp>
       <p:sp>
         <p:nvSpPr>
-          <p:cNvPr id="51" name="">
-            <a:extLst xmlns:a="http://schemas.openxmlformats.org/drawingml/2006/main">
-              <a:ext uri="{FF2B5EF4-FFF2-40B4-BE49-F238E27FC236}">
-                <a16:creationId xmlns:a16="http://schemas.microsoft.com/office/drawing/2014/main" id="{C05E7257-4CC4-46E6-A68A-93642474B501}"/>
+          <p:cNvPr id="50" name="">
+            <a:extLst xmlns:a="http://schemas.openxmlformats.org/drawingml/2006/main">
+              <a:ext uri="{FF2B5EF4-FFF2-40B4-BE49-F238E27FC236}">
+                <a16:creationId xmlns:a16="http://schemas.microsoft.com/office/drawing/2014/main" id="{94013883-7CAD-44D1-941C-4208A96D2D4B}"/>
               </a:ext>
             </a:extLst>
           </p:cNvPr>
@@ -31017,10 +29675,10 @@
       </p:sp>
       <p:sp>
         <p:nvSpPr>
-          <p:cNvPr id="52" name="">
-            <a:extLst xmlns:a="http://schemas.openxmlformats.org/drawingml/2006/main">
-              <a:ext uri="{FF2B5EF4-FFF2-40B4-BE49-F238E27FC236}">
-                <a16:creationId xmlns:a16="http://schemas.microsoft.com/office/drawing/2014/main" id="{E3F6BD11-F9BB-42B7-88FF-BD48EB42E3B1}"/>
+          <p:cNvPr id="51" name="">
+            <a:extLst xmlns:a="http://schemas.openxmlformats.org/drawingml/2006/main">
+              <a:ext uri="{FF2B5EF4-FFF2-40B4-BE49-F238E27FC236}">
+                <a16:creationId xmlns:a16="http://schemas.microsoft.com/office/drawing/2014/main" id="{1B188A84-25C5-4620-9CF5-DFDF8E0E68D2}"/>
               </a:ext>
             </a:extLst>
           </p:cNvPr>
@@ -31078,10 +29736,10 @@
       </p:sp>
       <p:sp>
         <p:nvSpPr>
-          <p:cNvPr id="53" name="">
-            <a:extLst xmlns:a="http://schemas.openxmlformats.org/drawingml/2006/main">
-              <a:ext uri="{FF2B5EF4-FFF2-40B4-BE49-F238E27FC236}">
-                <a16:creationId xmlns:a16="http://schemas.microsoft.com/office/drawing/2014/main" id="{66C9C746-BCFF-4779-A22A-747D90825262}"/>
+          <p:cNvPr id="52" name="">
+            <a:extLst xmlns:a="http://schemas.openxmlformats.org/drawingml/2006/main">
+              <a:ext uri="{FF2B5EF4-FFF2-40B4-BE49-F238E27FC236}">
+                <a16:creationId xmlns:a16="http://schemas.microsoft.com/office/drawing/2014/main" id="{04A753F2-E855-47D4-865F-EBF620D77ED0}"/>
               </a:ext>
             </a:extLst>
           </p:cNvPr>
@@ -31139,10 +29797,10 @@
       </p:sp>
       <p:sp>
         <p:nvSpPr>
-          <p:cNvPr id="54" name="">
-            <a:extLst xmlns:a="http://schemas.openxmlformats.org/drawingml/2006/main">
-              <a:ext uri="{FF2B5EF4-FFF2-40B4-BE49-F238E27FC236}">
-                <a16:creationId xmlns:a16="http://schemas.microsoft.com/office/drawing/2014/main" id="{D638D1E2-9615-41AB-853C-C1A2C2925E1C}"/>
+          <p:cNvPr id="53" name="">
+            <a:extLst xmlns:a="http://schemas.openxmlformats.org/drawingml/2006/main">
+              <a:ext uri="{FF2B5EF4-FFF2-40B4-BE49-F238E27FC236}">
+                <a16:creationId xmlns:a16="http://schemas.microsoft.com/office/drawing/2014/main" id="{01C660E7-20DF-4B12-AAD3-E578DF17A1ED}"/>
               </a:ext>
             </a:extLst>
           </p:cNvPr>
@@ -31200,10 +29858,10 @@
       </p:sp>
       <p:sp>
         <p:nvSpPr>
-          <p:cNvPr id="55" name="">
-            <a:extLst xmlns:a="http://schemas.openxmlformats.org/drawingml/2006/main">
-              <a:ext uri="{FF2B5EF4-FFF2-40B4-BE49-F238E27FC236}">
-                <a16:creationId xmlns:a16="http://schemas.microsoft.com/office/drawing/2014/main" id="{62F5171E-E325-4473-AC13-E5E99AA62945}"/>
+          <p:cNvPr id="54" name="">
+            <a:extLst xmlns:a="http://schemas.openxmlformats.org/drawingml/2006/main">
+              <a:ext uri="{FF2B5EF4-FFF2-40B4-BE49-F238E27FC236}">
+                <a16:creationId xmlns:a16="http://schemas.microsoft.com/office/drawing/2014/main" id="{0EF4B688-84F6-45D2-9DD1-FA40924688FA}"/>
               </a:ext>
             </a:extLst>
           </p:cNvPr>
@@ -31261,10 +29919,10 @@
       </p:sp>
       <p:sp>
         <p:nvSpPr>
-          <p:cNvPr id="56" name="">
-            <a:extLst xmlns:a="http://schemas.openxmlformats.org/drawingml/2006/main">
-              <a:ext uri="{FF2B5EF4-FFF2-40B4-BE49-F238E27FC236}">
-                <a16:creationId xmlns:a16="http://schemas.microsoft.com/office/drawing/2014/main" id="{87DA370D-15D6-467B-9B06-4672F8CC2F70}"/>
+          <p:cNvPr id="55" name="">
+            <a:extLst xmlns:a="http://schemas.openxmlformats.org/drawingml/2006/main">
+              <a:ext uri="{FF2B5EF4-FFF2-40B4-BE49-F238E27FC236}">
+                <a16:creationId xmlns:a16="http://schemas.microsoft.com/office/drawing/2014/main" id="{8D0CBA93-AB02-4FDA-8A98-A9BBD400D7E2}"/>
               </a:ext>
             </a:extLst>
           </p:cNvPr>
@@ -31294,10 +29952,10 @@
       </p:sp>
       <p:sp>
         <p:nvSpPr>
-          <p:cNvPr id="57" name="">
-            <a:extLst xmlns:a="http://schemas.openxmlformats.org/drawingml/2006/main">
-              <a:ext uri="{FF2B5EF4-FFF2-40B4-BE49-F238E27FC236}">
-                <a16:creationId xmlns:a16="http://schemas.microsoft.com/office/drawing/2014/main" id="{01C796A5-439F-40B1-8510-58A98ED74E6D}"/>
+          <p:cNvPr id="56" name="">
+            <a:extLst xmlns:a="http://schemas.openxmlformats.org/drawingml/2006/main">
+              <a:ext uri="{FF2B5EF4-FFF2-40B4-BE49-F238E27FC236}">
+                <a16:creationId xmlns:a16="http://schemas.microsoft.com/office/drawing/2014/main" id="{AEEBF487-C591-4B46-B920-79318EBF8568}"/>
               </a:ext>
             </a:extLst>
           </p:cNvPr>
@@ -31355,10 +30013,10 @@
       </p:sp>
       <p:sp>
         <p:nvSpPr>
-          <p:cNvPr id="58" name="">
-            <a:extLst xmlns:a="http://schemas.openxmlformats.org/drawingml/2006/main">
-              <a:ext uri="{FF2B5EF4-FFF2-40B4-BE49-F238E27FC236}">
-                <a16:creationId xmlns:a16="http://schemas.microsoft.com/office/drawing/2014/main" id="{A4BA2F2B-9C95-4F0C-9C01-BC2C3C4E29B7}"/>
+          <p:cNvPr id="57" name="">
+            <a:extLst xmlns:a="http://schemas.openxmlformats.org/drawingml/2006/main">
+              <a:ext uri="{FF2B5EF4-FFF2-40B4-BE49-F238E27FC236}">
+                <a16:creationId xmlns:a16="http://schemas.microsoft.com/office/drawing/2014/main" id="{8813CA03-9519-489F-B23F-18BEA0175000}"/>
               </a:ext>
             </a:extLst>
           </p:cNvPr>
@@ -31416,10 +30074,10 @@
       </p:sp>
       <p:sp>
         <p:nvSpPr>
-          <p:cNvPr id="59" name="">
-            <a:extLst xmlns:a="http://schemas.openxmlformats.org/drawingml/2006/main">
-              <a:ext uri="{FF2B5EF4-FFF2-40B4-BE49-F238E27FC236}">
-                <a16:creationId xmlns:a16="http://schemas.microsoft.com/office/drawing/2014/main" id="{9463AF28-3D84-4670-8287-CC1AD2271551}"/>
+          <p:cNvPr id="58" name="">
+            <a:extLst xmlns:a="http://schemas.openxmlformats.org/drawingml/2006/main">
+              <a:ext uri="{FF2B5EF4-FFF2-40B4-BE49-F238E27FC236}">
+                <a16:creationId xmlns:a16="http://schemas.microsoft.com/office/drawing/2014/main" id="{96C248BD-8852-4031-B12C-08D15D8D2B15}"/>
               </a:ext>
             </a:extLst>
           </p:cNvPr>
@@ -31477,10 +30135,10 @@
       </p:sp>
       <p:sp>
         <p:nvSpPr>
-          <p:cNvPr id="60" name="">
-            <a:extLst xmlns:a="http://schemas.openxmlformats.org/drawingml/2006/main">
-              <a:ext uri="{FF2B5EF4-FFF2-40B4-BE49-F238E27FC236}">
-                <a16:creationId xmlns:a16="http://schemas.microsoft.com/office/drawing/2014/main" id="{161AEC4B-1041-4C66-BF9F-214B0E9C6720}"/>
+          <p:cNvPr id="59" name="">
+            <a:extLst xmlns:a="http://schemas.openxmlformats.org/drawingml/2006/main">
+              <a:ext uri="{FF2B5EF4-FFF2-40B4-BE49-F238E27FC236}">
+                <a16:creationId xmlns:a16="http://schemas.microsoft.com/office/drawing/2014/main" id="{5D0CFDEF-ED39-4893-9197-5192E721D964}"/>
               </a:ext>
             </a:extLst>
           </p:cNvPr>
@@ -31538,10 +30196,10 @@
       </p:sp>
       <p:sp>
         <p:nvSpPr>
-          <p:cNvPr id="61" name="">
-            <a:extLst xmlns:a="http://schemas.openxmlformats.org/drawingml/2006/main">
-              <a:ext uri="{FF2B5EF4-FFF2-40B4-BE49-F238E27FC236}">
-                <a16:creationId xmlns:a16="http://schemas.microsoft.com/office/drawing/2014/main" id="{37D72AF5-CBFD-43AE-8140-DE449CA6A29E}"/>
+          <p:cNvPr id="60" name="">
+            <a:extLst xmlns:a="http://schemas.openxmlformats.org/drawingml/2006/main">
+              <a:ext uri="{FF2B5EF4-FFF2-40B4-BE49-F238E27FC236}">
+                <a16:creationId xmlns:a16="http://schemas.microsoft.com/office/drawing/2014/main" id="{D8D86999-0FE5-4DEE-8317-F09733393268}"/>
               </a:ext>
             </a:extLst>
           </p:cNvPr>
@@ -31599,10 +30257,10 @@
       </p:sp>
       <p:sp>
         <p:nvSpPr>
-          <p:cNvPr id="62" name="">
-            <a:extLst xmlns:a="http://schemas.openxmlformats.org/drawingml/2006/main">
-              <a:ext uri="{FF2B5EF4-FFF2-40B4-BE49-F238E27FC236}">
-                <a16:creationId xmlns:a16="http://schemas.microsoft.com/office/drawing/2014/main" id="{70F0D5F7-88D5-46AF-A001-1AAD77BC708A}"/>
+          <p:cNvPr id="61" name="">
+            <a:extLst xmlns:a="http://schemas.openxmlformats.org/drawingml/2006/main">
+              <a:ext uri="{FF2B5EF4-FFF2-40B4-BE49-F238E27FC236}">
+                <a16:creationId xmlns:a16="http://schemas.microsoft.com/office/drawing/2014/main" id="{EA3F1408-D053-4513-A8D0-98C4C769039A}"/>
               </a:ext>
             </a:extLst>
           </p:cNvPr>
@@ -31660,10 +30318,10 @@
       </p:sp>
       <p:sp>
         <p:nvSpPr>
-          <p:cNvPr id="63" name="">
-            <a:extLst xmlns:a="http://schemas.openxmlformats.org/drawingml/2006/main">
-              <a:ext uri="{FF2B5EF4-FFF2-40B4-BE49-F238E27FC236}">
-                <a16:creationId xmlns:a16="http://schemas.microsoft.com/office/drawing/2014/main" id="{479F91D9-3774-43CB-991F-1EE496FA4133}"/>
+          <p:cNvPr id="62" name="">
+            <a:extLst xmlns:a="http://schemas.openxmlformats.org/drawingml/2006/main">
+              <a:ext uri="{FF2B5EF4-FFF2-40B4-BE49-F238E27FC236}">
+                <a16:creationId xmlns:a16="http://schemas.microsoft.com/office/drawing/2014/main" id="{3B42351D-D5FE-4EF4-89CB-D5AE52FF8B46}"/>
               </a:ext>
             </a:extLst>
           </p:cNvPr>
@@ -31693,10 +30351,10 @@
       </p:sp>
       <p:sp>
         <p:nvSpPr>
-          <p:cNvPr id="64" name="">
-            <a:extLst xmlns:a="http://schemas.openxmlformats.org/drawingml/2006/main">
-              <a:ext uri="{FF2B5EF4-FFF2-40B4-BE49-F238E27FC236}">
-                <a16:creationId xmlns:a16="http://schemas.microsoft.com/office/drawing/2014/main" id="{3C123028-7185-4F95-8350-F48A91F6F39F}"/>
+          <p:cNvPr id="63" name="">
+            <a:extLst xmlns:a="http://schemas.openxmlformats.org/drawingml/2006/main">
+              <a:ext uri="{FF2B5EF4-FFF2-40B4-BE49-F238E27FC236}">
+                <a16:creationId xmlns:a16="http://schemas.microsoft.com/office/drawing/2014/main" id="{A410D354-0D3E-47DE-A2AD-4191991F6A43}"/>
               </a:ext>
             </a:extLst>
           </p:cNvPr>
@@ -31754,10 +30412,10 @@
       </p:sp>
       <p:sp>
         <p:nvSpPr>
-          <p:cNvPr id="65" name="">
-            <a:extLst xmlns:a="http://schemas.openxmlformats.org/drawingml/2006/main">
-              <a:ext uri="{FF2B5EF4-FFF2-40B4-BE49-F238E27FC236}">
-                <a16:creationId xmlns:a16="http://schemas.microsoft.com/office/drawing/2014/main" id="{69A153DB-505D-44DC-874F-E0563007CCFB}"/>
+          <p:cNvPr id="64" name="">
+            <a:extLst xmlns:a="http://schemas.openxmlformats.org/drawingml/2006/main">
+              <a:ext uri="{FF2B5EF4-FFF2-40B4-BE49-F238E27FC236}">
+                <a16:creationId xmlns:a16="http://schemas.microsoft.com/office/drawing/2014/main" id="{F82F54DF-E897-4B38-8840-C5C1207B1F9A}"/>
               </a:ext>
             </a:extLst>
           </p:cNvPr>
@@ -31815,10 +30473,10 @@
       </p:sp>
       <p:sp>
         <p:nvSpPr>
-          <p:cNvPr id="66" name="">
-            <a:extLst xmlns:a="http://schemas.openxmlformats.org/drawingml/2006/main">
-              <a:ext uri="{FF2B5EF4-FFF2-40B4-BE49-F238E27FC236}">
-                <a16:creationId xmlns:a16="http://schemas.microsoft.com/office/drawing/2014/main" id="{9F00B332-AA5F-4FC4-A11E-0A460577168A}"/>
+          <p:cNvPr id="65" name="">
+            <a:extLst xmlns:a="http://schemas.openxmlformats.org/drawingml/2006/main">
+              <a:ext uri="{FF2B5EF4-FFF2-40B4-BE49-F238E27FC236}">
+                <a16:creationId xmlns:a16="http://schemas.microsoft.com/office/drawing/2014/main" id="{9757A801-7322-4B70-BEDF-122B1F769C91}"/>
               </a:ext>
             </a:extLst>
           </p:cNvPr>
@@ -31876,10 +30534,10 @@
       </p:sp>
       <p:sp>
         <p:nvSpPr>
-          <p:cNvPr id="67" name="">
-            <a:extLst xmlns:a="http://schemas.openxmlformats.org/drawingml/2006/main">
-              <a:ext uri="{FF2B5EF4-FFF2-40B4-BE49-F238E27FC236}">
-                <a16:creationId xmlns:a16="http://schemas.microsoft.com/office/drawing/2014/main" id="{20C26251-6A9E-4F69-B8C3-62270DB2761A}"/>
+          <p:cNvPr id="66" name="">
+            <a:extLst xmlns:a="http://schemas.openxmlformats.org/drawingml/2006/main">
+              <a:ext uri="{FF2B5EF4-FFF2-40B4-BE49-F238E27FC236}">
+                <a16:creationId xmlns:a16="http://schemas.microsoft.com/office/drawing/2014/main" id="{C005EDE2-C259-43A6-9321-851E8F864766}"/>
               </a:ext>
             </a:extLst>
           </p:cNvPr>
@@ -31937,10 +30595,10 @@
       </p:sp>
       <p:sp>
         <p:nvSpPr>
-          <p:cNvPr id="68" name="">
-            <a:extLst xmlns:a="http://schemas.openxmlformats.org/drawingml/2006/main">
-              <a:ext uri="{FF2B5EF4-FFF2-40B4-BE49-F238E27FC236}">
-                <a16:creationId xmlns:a16="http://schemas.microsoft.com/office/drawing/2014/main" id="{3152F949-752C-4946-B83F-45F622AEC8C4}"/>
+          <p:cNvPr id="67" name="">
+            <a:extLst xmlns:a="http://schemas.openxmlformats.org/drawingml/2006/main">
+              <a:ext uri="{FF2B5EF4-FFF2-40B4-BE49-F238E27FC236}">
+                <a16:creationId xmlns:a16="http://schemas.microsoft.com/office/drawing/2014/main" id="{6CC33FFA-542A-41F2-B473-362922DE78D0}"/>
               </a:ext>
             </a:extLst>
           </p:cNvPr>
@@ -31998,10 +30656,10 @@
       </p:sp>
       <p:sp>
         <p:nvSpPr>
-          <p:cNvPr id="69" name="">
-            <a:extLst xmlns:a="http://schemas.openxmlformats.org/drawingml/2006/main">
-              <a:ext uri="{FF2B5EF4-FFF2-40B4-BE49-F238E27FC236}">
-                <a16:creationId xmlns:a16="http://schemas.microsoft.com/office/drawing/2014/main" id="{7C12AEDC-B746-45E2-95D6-BACF78E0EFE7}"/>
+          <p:cNvPr id="68" name="">
+            <a:extLst xmlns:a="http://schemas.openxmlformats.org/drawingml/2006/main">
+              <a:ext uri="{FF2B5EF4-FFF2-40B4-BE49-F238E27FC236}">
+                <a16:creationId xmlns:a16="http://schemas.microsoft.com/office/drawing/2014/main" id="{E1F9A00F-4C52-4FB9-B43D-14D687943FDB}"/>
               </a:ext>
             </a:extLst>
           </p:cNvPr>
@@ -32059,10 +30717,10 @@
       </p:sp>
       <p:sp>
         <p:nvSpPr>
-          <p:cNvPr id="70" name="">
-            <a:extLst xmlns:a="http://schemas.openxmlformats.org/drawingml/2006/main">
-              <a:ext uri="{FF2B5EF4-FFF2-40B4-BE49-F238E27FC236}">
-                <a16:creationId xmlns:a16="http://schemas.microsoft.com/office/drawing/2014/main" id="{1A72C46A-EB0E-43D0-8190-DB69A4EB8C59}"/>
+          <p:cNvPr id="69" name="">
+            <a:extLst xmlns:a="http://schemas.openxmlformats.org/drawingml/2006/main">
+              <a:ext uri="{FF2B5EF4-FFF2-40B4-BE49-F238E27FC236}">
+                <a16:creationId xmlns:a16="http://schemas.microsoft.com/office/drawing/2014/main" id="{B31F3C1A-DCFC-4AFA-8E6E-88454BD594B1}"/>
               </a:ext>
             </a:extLst>
           </p:cNvPr>
@@ -32092,10 +30750,10 @@
       </p:sp>
       <p:sp>
         <p:nvSpPr>
-          <p:cNvPr id="71" name="">
-            <a:extLst xmlns:a="http://schemas.openxmlformats.org/drawingml/2006/main">
-              <a:ext uri="{FF2B5EF4-FFF2-40B4-BE49-F238E27FC236}">
-                <a16:creationId xmlns:a16="http://schemas.microsoft.com/office/drawing/2014/main" id="{25020958-5E62-47E0-9BA6-D0AC4F70FE67}"/>
+          <p:cNvPr id="70" name="">
+            <a:extLst xmlns:a="http://schemas.openxmlformats.org/drawingml/2006/main">
+              <a:ext uri="{FF2B5EF4-FFF2-40B4-BE49-F238E27FC236}">
+                <a16:creationId xmlns:a16="http://schemas.microsoft.com/office/drawing/2014/main" id="{1268CE22-46DF-4643-AE3A-9D0FDBD016C5}"/>
               </a:ext>
             </a:extLst>
           </p:cNvPr>
@@ -32153,10 +30811,10 @@
       </p:sp>
       <p:sp>
         <p:nvSpPr>
-          <p:cNvPr id="72" name="">
-            <a:extLst xmlns:a="http://schemas.openxmlformats.org/drawingml/2006/main">
-              <a:ext uri="{FF2B5EF4-FFF2-40B4-BE49-F238E27FC236}">
-                <a16:creationId xmlns:a16="http://schemas.microsoft.com/office/drawing/2014/main" id="{DF853EEA-9E68-4421-A4C3-0C16003CA299}"/>
+          <p:cNvPr id="71" name="">
+            <a:extLst xmlns:a="http://schemas.openxmlformats.org/drawingml/2006/main">
+              <a:ext uri="{FF2B5EF4-FFF2-40B4-BE49-F238E27FC236}">
+                <a16:creationId xmlns:a16="http://schemas.microsoft.com/office/drawing/2014/main" id="{7A5269C3-AAE2-48A0-81AD-B6BE9D2C8343}"/>
               </a:ext>
             </a:extLst>
           </p:cNvPr>
@@ -32214,10 +30872,10 @@
       </p:sp>
       <p:sp>
         <p:nvSpPr>
-          <p:cNvPr id="73" name="">
-            <a:extLst xmlns:a="http://schemas.openxmlformats.org/drawingml/2006/main">
-              <a:ext uri="{FF2B5EF4-FFF2-40B4-BE49-F238E27FC236}">
-                <a16:creationId xmlns:a16="http://schemas.microsoft.com/office/drawing/2014/main" id="{97B9626E-154E-4A1D-9ECB-3D2F3DCE6B3D}"/>
+          <p:cNvPr id="72" name="">
+            <a:extLst xmlns:a="http://schemas.openxmlformats.org/drawingml/2006/main">
+              <a:ext uri="{FF2B5EF4-FFF2-40B4-BE49-F238E27FC236}">
+                <a16:creationId xmlns:a16="http://schemas.microsoft.com/office/drawing/2014/main" id="{C935F5D3-CAFF-4FA6-9D40-1C8634B225CD}"/>
               </a:ext>
             </a:extLst>
           </p:cNvPr>
@@ -32275,10 +30933,10 @@
       </p:sp>
       <p:sp>
         <p:nvSpPr>
-          <p:cNvPr id="74" name="">
-            <a:extLst xmlns:a="http://schemas.openxmlformats.org/drawingml/2006/main">
-              <a:ext uri="{FF2B5EF4-FFF2-40B4-BE49-F238E27FC236}">
-                <a16:creationId xmlns:a16="http://schemas.microsoft.com/office/drawing/2014/main" id="{717F7363-411A-4BE6-9A67-1404D3444993}"/>
+          <p:cNvPr id="73" name="">
+            <a:extLst xmlns:a="http://schemas.openxmlformats.org/drawingml/2006/main">
+              <a:ext uri="{FF2B5EF4-FFF2-40B4-BE49-F238E27FC236}">
+                <a16:creationId xmlns:a16="http://schemas.microsoft.com/office/drawing/2014/main" id="{6528D262-C121-415D-ABBA-1A11F26A4F14}"/>
               </a:ext>
             </a:extLst>
           </p:cNvPr>
@@ -32336,10 +30994,10 @@
       </p:sp>
       <p:sp>
         <p:nvSpPr>
-          <p:cNvPr id="75" name="">
-            <a:extLst xmlns:a="http://schemas.openxmlformats.org/drawingml/2006/main">
-              <a:ext uri="{FF2B5EF4-FFF2-40B4-BE49-F238E27FC236}">
-                <a16:creationId xmlns:a16="http://schemas.microsoft.com/office/drawing/2014/main" id="{F25CFBD6-4C44-4A10-97CD-A50012EB6ACE}"/>
+          <p:cNvPr id="74" name="">
+            <a:extLst xmlns:a="http://schemas.openxmlformats.org/drawingml/2006/main">
+              <a:ext uri="{FF2B5EF4-FFF2-40B4-BE49-F238E27FC236}">
+                <a16:creationId xmlns:a16="http://schemas.microsoft.com/office/drawing/2014/main" id="{A6934398-CDFA-44C3-BB30-03E84F7A967C}"/>
               </a:ext>
             </a:extLst>
           </p:cNvPr>
@@ -32397,10 +31055,10 @@
       </p:sp>
       <p:sp>
         <p:nvSpPr>
-          <p:cNvPr id="76" name="">
-            <a:extLst xmlns:a="http://schemas.openxmlformats.org/drawingml/2006/main">
-              <a:ext uri="{FF2B5EF4-FFF2-40B4-BE49-F238E27FC236}">
-                <a16:creationId xmlns:a16="http://schemas.microsoft.com/office/drawing/2014/main" id="{7D80F946-C194-4F71-96A3-8A4FC9C07EDE}"/>
+          <p:cNvPr id="75" name="">
+            <a:extLst xmlns:a="http://schemas.openxmlformats.org/drawingml/2006/main">
+              <a:ext uri="{FF2B5EF4-FFF2-40B4-BE49-F238E27FC236}">
+                <a16:creationId xmlns:a16="http://schemas.microsoft.com/office/drawing/2014/main" id="{73AF3946-ECC3-488A-9718-DC1CEC26B01E}"/>
               </a:ext>
             </a:extLst>
           </p:cNvPr>
@@ -32458,10 +31116,10 @@
       </p:sp>
       <p:sp>
         <p:nvSpPr>
-          <p:cNvPr id="77" name="">
-            <a:extLst xmlns:a="http://schemas.openxmlformats.org/drawingml/2006/main">
-              <a:ext uri="{FF2B5EF4-FFF2-40B4-BE49-F238E27FC236}">
-                <a16:creationId xmlns:a16="http://schemas.microsoft.com/office/drawing/2014/main" id="{E24C2078-77C2-4980-AEDD-9271E2A40200}"/>
+          <p:cNvPr id="76" name="">
+            <a:extLst xmlns:a="http://schemas.openxmlformats.org/drawingml/2006/main">
+              <a:ext uri="{FF2B5EF4-FFF2-40B4-BE49-F238E27FC236}">
+                <a16:creationId xmlns:a16="http://schemas.microsoft.com/office/drawing/2014/main" id="{27A15238-C5CD-4319-BCED-A34B9DB44D8A}"/>
               </a:ext>
             </a:extLst>
           </p:cNvPr>
@@ -32491,10 +31149,10 @@
       </p:sp>
       <p:sp>
         <p:nvSpPr>
-          <p:cNvPr id="78" name="">
-            <a:extLst xmlns:a="http://schemas.openxmlformats.org/drawingml/2006/main">
-              <a:ext uri="{FF2B5EF4-FFF2-40B4-BE49-F238E27FC236}">
-                <a16:creationId xmlns:a16="http://schemas.microsoft.com/office/drawing/2014/main" id="{FE2C38CB-AB5E-4D84-B1F2-28CFF48D8CB4}"/>
+          <p:cNvPr id="77" name="">
+            <a:extLst xmlns:a="http://schemas.openxmlformats.org/drawingml/2006/main">
+              <a:ext uri="{FF2B5EF4-FFF2-40B4-BE49-F238E27FC236}">
+                <a16:creationId xmlns:a16="http://schemas.microsoft.com/office/drawing/2014/main" id="{116358C2-BB90-4729-AB3A-BBE34E79094D}"/>
               </a:ext>
             </a:extLst>
           </p:cNvPr>
@@ -32524,10 +31182,10 @@
       </p:sp>
       <p:sp>
         <p:nvSpPr>
-          <p:cNvPr id="79" name="">
-            <a:extLst xmlns:a="http://schemas.openxmlformats.org/drawingml/2006/main">
-              <a:ext uri="{FF2B5EF4-FFF2-40B4-BE49-F238E27FC236}">
-                <a16:creationId xmlns:a16="http://schemas.microsoft.com/office/drawing/2014/main" id="{84AC157B-C9DB-47B8-929E-2821C2AADE4F}"/>
+          <p:cNvPr id="78" name="">
+            <a:extLst xmlns:a="http://schemas.openxmlformats.org/drawingml/2006/main">
+              <a:ext uri="{FF2B5EF4-FFF2-40B4-BE49-F238E27FC236}">
+                <a16:creationId xmlns:a16="http://schemas.microsoft.com/office/drawing/2014/main" id="{9FCE8DBE-B7B2-40EA-9B61-874CA9334731}"/>
               </a:ext>
             </a:extLst>
           </p:cNvPr>
@@ -32585,10 +31243,10 @@
       </p:sp>
       <p:sp>
         <p:nvSpPr>
-          <p:cNvPr id="80" name="">
-            <a:extLst xmlns:a="http://schemas.openxmlformats.org/drawingml/2006/main">
-              <a:ext uri="{FF2B5EF4-FFF2-40B4-BE49-F238E27FC236}">
-                <a16:creationId xmlns:a16="http://schemas.microsoft.com/office/drawing/2014/main" id="{5E39A8A7-E3C4-40EC-A11A-F48A07168B6F}"/>
+          <p:cNvPr id="79" name="">
+            <a:extLst xmlns:a="http://schemas.openxmlformats.org/drawingml/2006/main">
+              <a:ext uri="{FF2B5EF4-FFF2-40B4-BE49-F238E27FC236}">
+                <a16:creationId xmlns:a16="http://schemas.microsoft.com/office/drawing/2014/main" id="{34632DD1-CBBC-491A-9085-DE3FD4183FD7}"/>
               </a:ext>
             </a:extLst>
           </p:cNvPr>
@@ -32646,10 +31304,10 @@
       </p:sp>
       <p:sp>
         <p:nvSpPr>
-          <p:cNvPr id="81" name="">
-            <a:extLst xmlns:a="http://schemas.openxmlformats.org/drawingml/2006/main">
-              <a:ext uri="{FF2B5EF4-FFF2-40B4-BE49-F238E27FC236}">
-                <a16:creationId xmlns:a16="http://schemas.microsoft.com/office/drawing/2014/main" id="{E31C0064-EE79-475C-AC1A-3BAB9F28956A}"/>
+          <p:cNvPr id="80" name="">
+            <a:extLst xmlns:a="http://schemas.openxmlformats.org/drawingml/2006/main">
+              <a:ext uri="{FF2B5EF4-FFF2-40B4-BE49-F238E27FC236}">
+                <a16:creationId xmlns:a16="http://schemas.microsoft.com/office/drawing/2014/main" id="{0F1F43A8-E4D8-423F-A417-636E5EE6A756}"/>
               </a:ext>
             </a:extLst>
           </p:cNvPr>
@@ -32707,10 +31365,10 @@
       </p:sp>
       <p:sp>
         <p:nvSpPr>
-          <p:cNvPr id="82" name="">
-            <a:extLst xmlns:a="http://schemas.openxmlformats.org/drawingml/2006/main">
-              <a:ext uri="{FF2B5EF4-FFF2-40B4-BE49-F238E27FC236}">
-                <a16:creationId xmlns:a16="http://schemas.microsoft.com/office/drawing/2014/main" id="{92CB011B-7098-4009-80B4-7CB29A5E5904}"/>
+          <p:cNvPr id="81" name="">
+            <a:extLst xmlns:a="http://schemas.openxmlformats.org/drawingml/2006/main">
+              <a:ext uri="{FF2B5EF4-FFF2-40B4-BE49-F238E27FC236}">
+                <a16:creationId xmlns:a16="http://schemas.microsoft.com/office/drawing/2014/main" id="{7941E330-9B94-469E-855F-696216C17014}"/>
               </a:ext>
             </a:extLst>
           </p:cNvPr>
@@ -32768,10 +31426,10 @@
       </p:sp>
       <p:sp>
         <p:nvSpPr>
-          <p:cNvPr id="83" name="">
-            <a:extLst xmlns:a="http://schemas.openxmlformats.org/drawingml/2006/main">
-              <a:ext uri="{FF2B5EF4-FFF2-40B4-BE49-F238E27FC236}">
-                <a16:creationId xmlns:a16="http://schemas.microsoft.com/office/drawing/2014/main" id="{61077541-5478-453D-B93B-1910D3AFEDEC}"/>
+          <p:cNvPr id="82" name="">
+            <a:extLst xmlns:a="http://schemas.openxmlformats.org/drawingml/2006/main">
+              <a:ext uri="{FF2B5EF4-FFF2-40B4-BE49-F238E27FC236}">
+                <a16:creationId xmlns:a16="http://schemas.microsoft.com/office/drawing/2014/main" id="{833CC009-1828-4CC1-A8D5-E0514E8E5B73}"/>
               </a:ext>
             </a:extLst>
           </p:cNvPr>
@@ -32829,10 +31487,10 @@
       </p:sp>
       <p:sp>
         <p:nvSpPr>
-          <p:cNvPr id="84" name="">
-            <a:extLst xmlns:a="http://schemas.openxmlformats.org/drawingml/2006/main">
-              <a:ext uri="{FF2B5EF4-FFF2-40B4-BE49-F238E27FC236}">
-                <a16:creationId xmlns:a16="http://schemas.microsoft.com/office/drawing/2014/main" id="{41302DD9-C2FE-425B-8814-C88AF75BAD14}"/>
+          <p:cNvPr id="83" name="">
+            <a:extLst xmlns:a="http://schemas.openxmlformats.org/drawingml/2006/main">
+              <a:ext uri="{FF2B5EF4-FFF2-40B4-BE49-F238E27FC236}">
+                <a16:creationId xmlns:a16="http://schemas.microsoft.com/office/drawing/2014/main" id="{53DF3230-1756-4A14-A641-A4B2DC8D30E5}"/>
               </a:ext>
             </a:extLst>
           </p:cNvPr>
@@ -32890,10 +31548,10 @@
       </p:sp>
       <p:sp>
         <p:nvSpPr>
-          <p:cNvPr id="85" name="">
-            <a:extLst xmlns:a="http://schemas.openxmlformats.org/drawingml/2006/main">
-              <a:ext uri="{FF2B5EF4-FFF2-40B4-BE49-F238E27FC236}">
-                <a16:creationId xmlns:a16="http://schemas.microsoft.com/office/drawing/2014/main" id="{C9A5855B-89B7-4C11-88F7-3D55749B106F}"/>
+          <p:cNvPr id="84" name="">
+            <a:extLst xmlns:a="http://schemas.openxmlformats.org/drawingml/2006/main">
+              <a:ext uri="{FF2B5EF4-FFF2-40B4-BE49-F238E27FC236}">
+                <a16:creationId xmlns:a16="http://schemas.microsoft.com/office/drawing/2014/main" id="{1D25A8C1-8EB2-44F6-B909-7F253F06C4D5}"/>
               </a:ext>
             </a:extLst>
           </p:cNvPr>
@@ -32951,10 +31609,10 @@
       </p:sp>
       <p:sp>
         <p:nvSpPr>
-          <p:cNvPr id="86" name="">
-            <a:extLst xmlns:a="http://schemas.openxmlformats.org/drawingml/2006/main">
-              <a:ext uri="{FF2B5EF4-FFF2-40B4-BE49-F238E27FC236}">
-                <a16:creationId xmlns:a16="http://schemas.microsoft.com/office/drawing/2014/main" id="{DB54DAFB-03AC-49AE-8ED5-48C6AE155F10}"/>
+          <p:cNvPr id="85" name="">
+            <a:extLst xmlns:a="http://schemas.openxmlformats.org/drawingml/2006/main">
+              <a:ext uri="{FF2B5EF4-FFF2-40B4-BE49-F238E27FC236}">
+                <a16:creationId xmlns:a16="http://schemas.microsoft.com/office/drawing/2014/main" id="{75332480-F26E-497E-917D-6F43DC7DF645}"/>
               </a:ext>
             </a:extLst>
           </p:cNvPr>
@@ -33013,7 +31671,7 @@
     </p:spTree>
     <p:extLst>
       <p:ext uri="{BB962C8B-B14F-4D97-AF65-F5344CB8AC3E}">
-        <p14:creationId xmlns:p14="http://schemas.microsoft.com/office/powerpoint/2010/main" val="1493383706"/>
+        <p14:creationId xmlns:p14="http://schemas.microsoft.com/office/powerpoint/2010/main" val="1125001268"/>
       </p:ext>
     </p:extLst>
   </p:cSld>
@@ -33041,10 +31699,10 @@
       </p:grpSpPr>
       <p:cxnSp>
         <p:nvCxnSpPr>
-          <p:cNvPr id="15" name=""/>
+          <p:cNvPr id="14" name=""/>
           <p:cNvCxnSpPr>
-            <a:stCxn xmlns:a="http://schemas.openxmlformats.org/drawingml/2006/main" id="10" idx="3"/>
-            <a:endCxn xmlns:a="http://schemas.openxmlformats.org/drawingml/2006/main" id="11" idx="1"/>
+            <a:stCxn xmlns:a="http://schemas.openxmlformats.org/drawingml/2006/main" id="9" idx="3"/>
+            <a:endCxn xmlns:a="http://schemas.openxmlformats.org/drawingml/2006/main" id="10" idx="1"/>
           </p:cNvCxnSpPr>
           <p:nvPr/>
         </p:nvCxnSpPr>
@@ -33067,10 +31725,10 @@
       </p:cxnSp>
       <p:cxnSp>
         <p:nvCxnSpPr>
-          <p:cNvPr id="16" name=""/>
+          <p:cNvPr id="15" name=""/>
           <p:cNvCxnSpPr>
-            <a:stCxn xmlns:a="http://schemas.openxmlformats.org/drawingml/2006/main" id="9" idx="3"/>
-            <a:endCxn xmlns:a="http://schemas.openxmlformats.org/drawingml/2006/main" id="10" idx="1"/>
+            <a:stCxn xmlns:a="http://schemas.openxmlformats.org/drawingml/2006/main" id="8" idx="3"/>
+            <a:endCxn xmlns:a="http://schemas.openxmlformats.org/drawingml/2006/main" id="9" idx="1"/>
           </p:cNvCxnSpPr>
           <p:nvPr/>
         </p:nvCxnSpPr>
@@ -33093,10 +31751,10 @@
       </p:cxnSp>
       <p:sp>
         <p:nvSpPr>
-          <p:cNvPr id="17" name="">
-            <a:extLst xmlns:a="http://schemas.openxmlformats.org/drawingml/2006/main">
-              <a:ext uri="{FF2B5EF4-FFF2-40B4-BE49-F238E27FC236}">
-                <a16:creationId xmlns:a16="http://schemas.microsoft.com/office/drawing/2014/main" id="{544E8E5E-9B00-4858-BB4E-94E2E386E777}"/>
+          <p:cNvPr id="16" name="">
+            <a:extLst xmlns:a="http://schemas.openxmlformats.org/drawingml/2006/main">
+              <a:ext uri="{FF2B5EF4-FFF2-40B4-BE49-F238E27FC236}">
+                <a16:creationId xmlns:a16="http://schemas.microsoft.com/office/drawing/2014/main" id="{CA0CB9F5-8745-4D66-AF65-A3340A8283B8}"/>
               </a:ext>
             </a:extLst>
           </p:cNvPr>
@@ -33129,7 +31787,7 @@
           <p:cNvPr id="2" name="">
             <a:extLst xmlns:a="http://schemas.openxmlformats.org/drawingml/2006/main">
               <a:ext uri="{FF2B5EF4-FFF2-40B4-BE49-F238E27FC236}">
-                <a16:creationId xmlns:a16="http://schemas.microsoft.com/office/drawing/2014/main" id="{BC08AEB9-04A3-43F6-AC47-54DA43ADE6A4}"/>
+                <a16:creationId xmlns:a16="http://schemas.microsoft.com/office/drawing/2014/main" id="{384A34D8-E5F5-4EAD-A1AC-AA2A94C7330A}"/>
               </a:ext>
             </a:extLst>
           </p:cNvPr>
@@ -33159,14 +31817,14 @@
       </p:sp>
       <p:pic>
         <p:nvPicPr>
-          <p:cNvPr id="19" name=""/>
+          <p:cNvPr id="18" name=""/>
           <p:cNvPicPr>
             <a:picLocks xmlns:a="http://schemas.openxmlformats.org/drawingml/2006/main" noChangeAspect="1"/>
           </p:cNvPicPr>
           <p:nvPr/>
         </p:nvPicPr>
         <p:blipFill>
-          <a:blip xmlns:r="http://schemas.openxmlformats.org/officeDocument/2006/relationships" xmlns:a="http://schemas.openxmlformats.org/drawingml/2006/main" r:embed="R058136e60a4b4847"/>
+          <a:blip xmlns:r="http://schemas.openxmlformats.org/officeDocument/2006/relationships" xmlns:a="http://schemas.openxmlformats.org/drawingml/2006/main" r:embed="Rb8f3a5cd843a4a96"/>
           <a:stretch xmlns:a="http://schemas.openxmlformats.org/drawingml/2006/main"/>
         </p:blipFill>
         <p:spPr>
@@ -33184,7 +31842,7 @@
           <p:cNvPr id="4" name="">
             <a:extLst xmlns:a="http://schemas.openxmlformats.org/drawingml/2006/main">
               <a:ext uri="{FF2B5EF4-FFF2-40B4-BE49-F238E27FC236}">
-                <a16:creationId xmlns:a16="http://schemas.microsoft.com/office/drawing/2014/main" id="{11628983-AF7B-4ADE-8A11-52B3273F24B3}"/>
+                <a16:creationId xmlns:a16="http://schemas.microsoft.com/office/drawing/2014/main" id="{C5E61A89-CE48-4B6F-A2AB-A71EA607ACEF}"/>
               </a:ext>
             </a:extLst>
           </p:cNvPr>
@@ -33245,7 +31903,7 @@
           <p:cNvPr id="5" name="">
             <a:extLst xmlns:a="http://schemas.openxmlformats.org/drawingml/2006/main">
               <a:ext uri="{FF2B5EF4-FFF2-40B4-BE49-F238E27FC236}">
-                <a16:creationId xmlns:a16="http://schemas.microsoft.com/office/drawing/2014/main" id="{ED98629D-DCE4-4ADA-9F74-7ED61807C4CF}"/>
+                <a16:creationId xmlns:a16="http://schemas.microsoft.com/office/drawing/2014/main" id="{763457E0-D95E-4BFD-B865-8030DAB82EA1}"/>
               </a:ext>
             </a:extLst>
           </p:cNvPr>
@@ -33306,7 +31964,7 @@
           <p:cNvPr id="6" name="">
             <a:extLst xmlns:a="http://schemas.openxmlformats.org/drawingml/2006/main">
               <a:ext uri="{FF2B5EF4-FFF2-40B4-BE49-F238E27FC236}">
-                <a16:creationId xmlns:a16="http://schemas.microsoft.com/office/drawing/2014/main" id="{20EF4EE9-A073-4879-9A56-77BEA56F3CB8}"/>
+                <a16:creationId xmlns:a16="http://schemas.microsoft.com/office/drawing/2014/main" id="{60ED3C6A-DD29-4A2B-8BFF-FCED958264A3}"/>
               </a:ext>
             </a:extLst>
           </p:cNvPr>
@@ -33339,68 +31997,7 @@
           <p:cNvPr id="7" name="">
             <a:extLst xmlns:a="http://schemas.openxmlformats.org/drawingml/2006/main">
               <a:ext uri="{FF2B5EF4-FFF2-40B4-BE49-F238E27FC236}">
-                <a16:creationId xmlns:a16="http://schemas.microsoft.com/office/drawing/2014/main" id="{292DCF97-3373-4872-9737-1AE175F9B78E}"/>
-              </a:ext>
-            </a:extLst>
-          </p:cNvPr>
-          <p:cNvSpPr>
-            <a:spLocks xmlns:a="http://schemas.openxmlformats.org/drawingml/2006/main" noGrp="1"/>
-          </p:cNvSpPr>
-          <p:nvPr/>
-        </p:nvSpPr>
-        <p:spPr>
-          <a:xfrm xmlns:a="http://schemas.openxmlformats.org/drawingml/2006/main">
-            <a:off x="733425" y="6457950"/>
-            <a:ext cx="6191250" cy="209550"/>
-          </a:xfrm>
-          <a:prstGeom xmlns:a="http://schemas.openxmlformats.org/drawingml/2006/main" prst="rect">
-            <a:avLst/>
-          </a:prstGeom>
-          <a:noFill xmlns:a="http://schemas.openxmlformats.org/drawingml/2006/main"/>
-          <a:ln xmlns:a="http://schemas.openxmlformats.org/drawingml/2006/main" w="0">
-            <a:noFill/>
-          </a:ln>
-        </p:spPr>
-        <p:txBody>
-          <a:bodyPr xmlns:a="http://schemas.openxmlformats.org/drawingml/2006/main" lIns="19050" tIns="19050" rIns="19050" bIns="19050" anchor="ctr">
-            <a:normAutofit fontScale="100000"/>
-          </a:bodyPr>
-          <a:lstStyle xmlns:a="http://schemas.openxmlformats.org/drawingml/2006/main"/>
-          <a:p xmlns:a="http://schemas.openxmlformats.org/drawingml/2006/main">
-            <a:pPr algn="l">
-              <a:lnSpc>
-                <a:spcPct val="105000"/>
-              </a:lnSpc>
-              <a:buNone/>
-              <a:defRPr sz="1050" b="0">
-                <a:solidFill>
-                  <a:srgbClr val="E5EDFF"/>
-                </a:solidFill>
-                <a:latin typeface="PingFang SC"/>
-                <a:ea typeface="PingFang SC"/>
-                <a:cs typeface="PingFang SC"/>
-              </a:defRPr>
-            </a:pPr>
-            <a:r>
-              <a:rPr sz="1050" b="0">
-                <a:solidFill>
-                  <a:srgbClr val="E5EDFF"/>
-                </a:solidFill>
-                <a:latin typeface="PingFang SC"/>
-                <a:ea typeface="PingFang SC"/>
-                <a:cs typeface="PingFang SC"/>
-              </a:rPr>
-              <a:t>广东工业大学 · 学术研究汇报</a:t>
-            </a:r>
-          </a:p>
-        </p:txBody>
-      </p:sp>
-      <p:sp>
-        <p:nvSpPr>
-          <p:cNvPr id="8" name="">
-            <a:extLst xmlns:a="http://schemas.openxmlformats.org/drawingml/2006/main">
-              <a:ext uri="{FF2B5EF4-FFF2-40B4-BE49-F238E27FC236}">
-                <a16:creationId xmlns:a16="http://schemas.microsoft.com/office/drawing/2014/main" id="{D6FA6375-C59F-4387-BF81-550D36F02181}"/>
+                <a16:creationId xmlns:a16="http://schemas.microsoft.com/office/drawing/2014/main" id="{81707126-C6EA-4CF0-BDC3-B6FF7B9BBBC8}"/>
               </a:ext>
             </a:extLst>
           </p:cNvPr>
@@ -33458,10 +32055,10 @@
       </p:sp>
       <p:sp>
         <p:nvSpPr>
-          <p:cNvPr id="9" name="">
-            <a:extLst xmlns:a="http://schemas.openxmlformats.org/drawingml/2006/main">
-              <a:ext uri="{FF2B5EF4-FFF2-40B4-BE49-F238E27FC236}">
-                <a16:creationId xmlns:a16="http://schemas.microsoft.com/office/drawing/2014/main" id="{C64E4EED-79D8-4F9F-8F7F-723EEE7F56C5}"/>
+          <p:cNvPr id="8" name="">
+            <a:extLst xmlns:a="http://schemas.openxmlformats.org/drawingml/2006/main">
+              <a:ext uri="{FF2B5EF4-FFF2-40B4-BE49-F238E27FC236}">
+                <a16:creationId xmlns:a16="http://schemas.microsoft.com/office/drawing/2014/main" id="{0139EF13-D2E8-4D89-90F9-62B2F66747AE}"/>
               </a:ext>
             </a:extLst>
           </p:cNvPr>
@@ -33551,10 +32148,10 @@
       </p:sp>
       <p:sp>
         <p:nvSpPr>
-          <p:cNvPr id="10" name="">
-            <a:extLst xmlns:a="http://schemas.openxmlformats.org/drawingml/2006/main">
-              <a:ext uri="{FF2B5EF4-FFF2-40B4-BE49-F238E27FC236}">
-                <a16:creationId xmlns:a16="http://schemas.microsoft.com/office/drawing/2014/main" id="{93002EFD-01AC-433C-954D-5AA07B591B19}"/>
+          <p:cNvPr id="9" name="">
+            <a:extLst xmlns:a="http://schemas.openxmlformats.org/drawingml/2006/main">
+              <a:ext uri="{FF2B5EF4-FFF2-40B4-BE49-F238E27FC236}">
+                <a16:creationId xmlns:a16="http://schemas.microsoft.com/office/drawing/2014/main" id="{11DF7BE2-412C-4AE3-B554-2434054C382A}"/>
               </a:ext>
             </a:extLst>
           </p:cNvPr>
@@ -33644,10 +32241,10 @@
       </p:sp>
       <p:sp>
         <p:nvSpPr>
-          <p:cNvPr id="11" name="">
-            <a:extLst xmlns:a="http://schemas.openxmlformats.org/drawingml/2006/main">
-              <a:ext uri="{FF2B5EF4-FFF2-40B4-BE49-F238E27FC236}">
-                <a16:creationId xmlns:a16="http://schemas.microsoft.com/office/drawing/2014/main" id="{BD2E7387-35E0-4377-9216-092B452EE20D}"/>
+          <p:cNvPr id="10" name="">
+            <a:extLst xmlns:a="http://schemas.openxmlformats.org/drawingml/2006/main">
+              <a:ext uri="{FF2B5EF4-FFF2-40B4-BE49-F238E27FC236}">
+                <a16:creationId xmlns:a16="http://schemas.microsoft.com/office/drawing/2014/main" id="{D96F7020-C561-4BAD-A9A1-5C0C3C1BE7C6}"/>
               </a:ext>
             </a:extLst>
           </p:cNvPr>
@@ -33737,10 +32334,10 @@
       </p:sp>
       <p:sp>
         <p:nvSpPr>
-          <p:cNvPr id="14" name="">
-            <a:extLst xmlns:a="http://schemas.openxmlformats.org/drawingml/2006/main">
-              <a:ext uri="{FF2B5EF4-FFF2-40B4-BE49-F238E27FC236}">
-                <a16:creationId xmlns:a16="http://schemas.microsoft.com/office/drawing/2014/main" id="{5CC55287-2DDB-43A5-92AD-7DD1A9DE4AB7}"/>
+          <p:cNvPr id="13" name="">
+            <a:extLst xmlns:a="http://schemas.openxmlformats.org/drawingml/2006/main">
+              <a:ext uri="{FF2B5EF4-FFF2-40B4-BE49-F238E27FC236}">
+                <a16:creationId xmlns:a16="http://schemas.microsoft.com/office/drawing/2014/main" id="{67CB331E-8AAC-4E43-AC5E-6F5D76B2A842}"/>
               </a:ext>
             </a:extLst>
           </p:cNvPr>
@@ -33799,7 +32396,7 @@
     </p:spTree>
     <p:extLst>
       <p:ext uri="{BB962C8B-B14F-4D97-AF65-F5344CB8AC3E}">
-        <p14:creationId xmlns:p14="http://schemas.microsoft.com/office/powerpoint/2010/main" val="740420224"/>
+        <p14:creationId xmlns:p14="http://schemas.microsoft.com/office/powerpoint/2010/main" val="861543169"/>
       </p:ext>
     </p:extLst>
   </p:cSld>
@@ -33827,10 +32424,10 @@
       </p:grpSpPr>
       <p:sp>
         <p:nvSpPr>
-          <p:cNvPr id="16" name="">
-            <a:extLst xmlns:a="http://schemas.openxmlformats.org/drawingml/2006/main">
-              <a:ext uri="{FF2B5EF4-FFF2-40B4-BE49-F238E27FC236}">
-                <a16:creationId xmlns:a16="http://schemas.microsoft.com/office/drawing/2014/main" id="{1BA1C16A-94C7-44E5-A89B-84816E93D7D2}"/>
+          <p:cNvPr id="15" name="">
+            <a:extLst xmlns:a="http://schemas.openxmlformats.org/drawingml/2006/main">
+              <a:ext uri="{FF2B5EF4-FFF2-40B4-BE49-F238E27FC236}">
+                <a16:creationId xmlns:a16="http://schemas.microsoft.com/office/drawing/2014/main" id="{A7D6A59A-62F3-40B6-BD49-CBCC8DC76416}"/>
               </a:ext>
             </a:extLst>
           </p:cNvPr>
@@ -33863,7 +32460,7 @@
           <p:cNvPr id="2" name="">
             <a:extLst xmlns:a="http://schemas.openxmlformats.org/drawingml/2006/main">
               <a:ext uri="{FF2B5EF4-FFF2-40B4-BE49-F238E27FC236}">
-                <a16:creationId xmlns:a16="http://schemas.microsoft.com/office/drawing/2014/main" id="{DC8CD0A7-6251-4B89-9C7C-58E269FDAC3E}"/>
+                <a16:creationId xmlns:a16="http://schemas.microsoft.com/office/drawing/2014/main" id="{7A1B8D12-E7B8-4761-AE72-F5D0F7D1E945}"/>
               </a:ext>
             </a:extLst>
           </p:cNvPr>
@@ -33893,14 +32490,14 @@
       </p:sp>
       <p:pic>
         <p:nvPicPr>
-          <p:cNvPr id="18" name=""/>
+          <p:cNvPr id="17" name=""/>
           <p:cNvPicPr>
             <a:picLocks xmlns:a="http://schemas.openxmlformats.org/drawingml/2006/main" noChangeAspect="1"/>
           </p:cNvPicPr>
           <p:nvPr/>
         </p:nvPicPr>
         <p:blipFill>
-          <a:blip xmlns:r="http://schemas.openxmlformats.org/officeDocument/2006/relationships" xmlns:a="http://schemas.openxmlformats.org/drawingml/2006/main" r:embed="Rbc95f374cf964bb1"/>
+          <a:blip xmlns:r="http://schemas.openxmlformats.org/officeDocument/2006/relationships" xmlns:a="http://schemas.openxmlformats.org/drawingml/2006/main" r:embed="R89ae019da7b7436e"/>
           <a:stretch xmlns:a="http://schemas.openxmlformats.org/drawingml/2006/main"/>
         </p:blipFill>
         <p:spPr>
@@ -33918,7 +32515,7 @@
           <p:cNvPr id="4" name="">
             <a:extLst xmlns:a="http://schemas.openxmlformats.org/drawingml/2006/main">
               <a:ext uri="{FF2B5EF4-FFF2-40B4-BE49-F238E27FC236}">
-                <a16:creationId xmlns:a16="http://schemas.microsoft.com/office/drawing/2014/main" id="{C08AF174-A64E-4BE3-BCCD-D34610346133}"/>
+                <a16:creationId xmlns:a16="http://schemas.microsoft.com/office/drawing/2014/main" id="{6301BE82-5D7F-4D34-9473-7BBDAEC8C3CD}"/>
               </a:ext>
             </a:extLst>
           </p:cNvPr>
@@ -33979,7 +32576,7 @@
           <p:cNvPr id="5" name="">
             <a:extLst xmlns:a="http://schemas.openxmlformats.org/drawingml/2006/main">
               <a:ext uri="{FF2B5EF4-FFF2-40B4-BE49-F238E27FC236}">
-                <a16:creationId xmlns:a16="http://schemas.microsoft.com/office/drawing/2014/main" id="{93FFE0ED-99F4-4F3C-8DC2-CAF9B5AB9E87}"/>
+                <a16:creationId xmlns:a16="http://schemas.microsoft.com/office/drawing/2014/main" id="{07A08F78-D969-4B69-AB0B-2DC18B2B4290}"/>
               </a:ext>
             </a:extLst>
           </p:cNvPr>
@@ -34040,7 +32637,7 @@
           <p:cNvPr id="6" name="">
             <a:extLst xmlns:a="http://schemas.openxmlformats.org/drawingml/2006/main">
               <a:ext uri="{FF2B5EF4-FFF2-40B4-BE49-F238E27FC236}">
-                <a16:creationId xmlns:a16="http://schemas.microsoft.com/office/drawing/2014/main" id="{3BE516E5-EFF4-42AB-A0E1-20003F28A3E7}"/>
+                <a16:creationId xmlns:a16="http://schemas.microsoft.com/office/drawing/2014/main" id="{A200E68C-DFDA-4CC5-8EB8-06D5BCF88EC4}"/>
               </a:ext>
             </a:extLst>
           </p:cNvPr>
@@ -34073,68 +32670,7 @@
           <p:cNvPr id="7" name="">
             <a:extLst xmlns:a="http://schemas.openxmlformats.org/drawingml/2006/main">
               <a:ext uri="{FF2B5EF4-FFF2-40B4-BE49-F238E27FC236}">
-                <a16:creationId xmlns:a16="http://schemas.microsoft.com/office/drawing/2014/main" id="{08EC1392-99CF-4C8B-83EC-E94259C2FA87}"/>
-              </a:ext>
-            </a:extLst>
-          </p:cNvPr>
-          <p:cNvSpPr>
-            <a:spLocks xmlns:a="http://schemas.openxmlformats.org/drawingml/2006/main" noGrp="1"/>
-          </p:cNvSpPr>
-          <p:nvPr/>
-        </p:nvSpPr>
-        <p:spPr>
-          <a:xfrm xmlns:a="http://schemas.openxmlformats.org/drawingml/2006/main">
-            <a:off x="733425" y="6457950"/>
-            <a:ext cx="6191250" cy="209550"/>
-          </a:xfrm>
-          <a:prstGeom xmlns:a="http://schemas.openxmlformats.org/drawingml/2006/main" prst="rect">
-            <a:avLst/>
-          </a:prstGeom>
-          <a:noFill xmlns:a="http://schemas.openxmlformats.org/drawingml/2006/main"/>
-          <a:ln xmlns:a="http://schemas.openxmlformats.org/drawingml/2006/main" w="0">
-            <a:noFill/>
-          </a:ln>
-        </p:spPr>
-        <p:txBody>
-          <a:bodyPr xmlns:a="http://schemas.openxmlformats.org/drawingml/2006/main" lIns="19050" tIns="19050" rIns="19050" bIns="19050" anchor="ctr">
-            <a:normAutofit fontScale="100000"/>
-          </a:bodyPr>
-          <a:lstStyle xmlns:a="http://schemas.openxmlformats.org/drawingml/2006/main"/>
-          <a:p xmlns:a="http://schemas.openxmlformats.org/drawingml/2006/main">
-            <a:pPr algn="l">
-              <a:lnSpc>
-                <a:spcPct val="105000"/>
-              </a:lnSpc>
-              <a:buNone/>
-              <a:defRPr sz="1050" b="0">
-                <a:solidFill>
-                  <a:srgbClr val="E5EDFF"/>
-                </a:solidFill>
-                <a:latin typeface="PingFang SC"/>
-                <a:ea typeface="PingFang SC"/>
-                <a:cs typeface="PingFang SC"/>
-              </a:defRPr>
-            </a:pPr>
-            <a:r>
-              <a:rPr sz="1050" b="0">
-                <a:solidFill>
-                  <a:srgbClr val="E5EDFF"/>
-                </a:solidFill>
-                <a:latin typeface="PingFang SC"/>
-                <a:ea typeface="PingFang SC"/>
-                <a:cs typeface="PingFang SC"/>
-              </a:rPr>
-              <a:t>广东工业大学 · 学术研究汇报</a:t>
-            </a:r>
-          </a:p>
-        </p:txBody>
-      </p:sp>
-      <p:sp>
-        <p:nvSpPr>
-          <p:cNvPr id="8" name="">
-            <a:extLst xmlns:a="http://schemas.openxmlformats.org/drawingml/2006/main">
-              <a:ext uri="{FF2B5EF4-FFF2-40B4-BE49-F238E27FC236}">
-                <a16:creationId xmlns:a16="http://schemas.microsoft.com/office/drawing/2014/main" id="{3682211E-0D60-49A2-84C4-44D0D2B5C837}"/>
+                <a16:creationId xmlns:a16="http://schemas.microsoft.com/office/drawing/2014/main" id="{0817D833-3D42-4A4B-8175-9A6F60B1E44D}"/>
               </a:ext>
             </a:extLst>
           </p:cNvPr>
@@ -34192,10 +32728,10 @@
       </p:sp>
       <p:sp>
         <p:nvSpPr>
-          <p:cNvPr id="9" name="">
-            <a:extLst xmlns:a="http://schemas.openxmlformats.org/drawingml/2006/main">
-              <a:ext uri="{FF2B5EF4-FFF2-40B4-BE49-F238E27FC236}">
-                <a16:creationId xmlns:a16="http://schemas.microsoft.com/office/drawing/2014/main" id="{5048067A-4982-4FBD-BF25-074D6901A875}"/>
+          <p:cNvPr id="8" name="">
+            <a:extLst xmlns:a="http://schemas.openxmlformats.org/drawingml/2006/main">
+              <a:ext uri="{FF2B5EF4-FFF2-40B4-BE49-F238E27FC236}">
+                <a16:creationId xmlns:a16="http://schemas.microsoft.com/office/drawing/2014/main" id="{00DF78F1-2E19-45EF-BBF0-49128DB5318E}"/>
               </a:ext>
             </a:extLst>
           </p:cNvPr>
@@ -34258,10 +32794,10 @@
       </p:sp>
       <p:sp>
         <p:nvSpPr>
-          <p:cNvPr id="10" name="">
-            <a:extLst xmlns:a="http://schemas.openxmlformats.org/drawingml/2006/main">
-              <a:ext uri="{FF2B5EF4-FFF2-40B4-BE49-F238E27FC236}">
-                <a16:creationId xmlns:a16="http://schemas.microsoft.com/office/drawing/2014/main" id="{9DA6FB4B-47B7-4E49-8696-47457C91BBD6}"/>
+          <p:cNvPr id="9" name="">
+            <a:extLst xmlns:a="http://schemas.openxmlformats.org/drawingml/2006/main">
+              <a:ext uri="{FF2B5EF4-FFF2-40B4-BE49-F238E27FC236}">
+                <a16:creationId xmlns:a16="http://schemas.microsoft.com/office/drawing/2014/main" id="{D906567F-0893-41C5-A0C0-1D3C55C22E77}"/>
               </a:ext>
             </a:extLst>
           </p:cNvPr>
@@ -34319,10 +32855,10 @@
       </p:sp>
       <p:sp>
         <p:nvSpPr>
-          <p:cNvPr id="11" name="">
-            <a:extLst xmlns:a="http://schemas.openxmlformats.org/drawingml/2006/main">
-              <a:ext uri="{FF2B5EF4-FFF2-40B4-BE49-F238E27FC236}">
-                <a16:creationId xmlns:a16="http://schemas.microsoft.com/office/drawing/2014/main" id="{D9EFE982-BCAA-4D8F-B648-FC4B07B82267}"/>
+          <p:cNvPr id="10" name="">
+            <a:extLst xmlns:a="http://schemas.openxmlformats.org/drawingml/2006/main">
+              <a:ext uri="{FF2B5EF4-FFF2-40B4-BE49-F238E27FC236}">
+                <a16:creationId xmlns:a16="http://schemas.microsoft.com/office/drawing/2014/main" id="{1A5CD7DC-FF8C-432D-97E6-735B2E28D142}"/>
               </a:ext>
             </a:extLst>
           </p:cNvPr>
@@ -34385,10 +32921,10 @@
       </p:sp>
       <p:sp>
         <p:nvSpPr>
-          <p:cNvPr id="12" name="">
-            <a:extLst xmlns:a="http://schemas.openxmlformats.org/drawingml/2006/main">
-              <a:ext uri="{FF2B5EF4-FFF2-40B4-BE49-F238E27FC236}">
-                <a16:creationId xmlns:a16="http://schemas.microsoft.com/office/drawing/2014/main" id="{833F76EB-7A89-422E-9F65-2419EE35465B}"/>
+          <p:cNvPr id="11" name="">
+            <a:extLst xmlns:a="http://schemas.openxmlformats.org/drawingml/2006/main">
+              <a:ext uri="{FF2B5EF4-FFF2-40B4-BE49-F238E27FC236}">
+                <a16:creationId xmlns:a16="http://schemas.microsoft.com/office/drawing/2014/main" id="{97F36E83-8209-48F1-84E5-3F38D0327AF2}"/>
               </a:ext>
             </a:extLst>
           </p:cNvPr>
@@ -34446,10 +32982,10 @@
       </p:sp>
       <p:sp>
         <p:nvSpPr>
-          <p:cNvPr id="13" name="">
-            <a:extLst xmlns:a="http://schemas.openxmlformats.org/drawingml/2006/main">
-              <a:ext uri="{FF2B5EF4-FFF2-40B4-BE49-F238E27FC236}">
-                <a16:creationId xmlns:a16="http://schemas.microsoft.com/office/drawing/2014/main" id="{5B667531-025F-43CB-94BE-D08AD8B940BE}"/>
+          <p:cNvPr id="12" name="">
+            <a:extLst xmlns:a="http://schemas.openxmlformats.org/drawingml/2006/main">
+              <a:ext uri="{FF2B5EF4-FFF2-40B4-BE49-F238E27FC236}">
+                <a16:creationId xmlns:a16="http://schemas.microsoft.com/office/drawing/2014/main" id="{AB29F053-239D-43C3-8264-A35AD5E20B3D}"/>
               </a:ext>
             </a:extLst>
           </p:cNvPr>
@@ -34512,10 +33048,10 @@
       </p:sp>
       <p:sp>
         <p:nvSpPr>
-          <p:cNvPr id="14" name="">
-            <a:extLst xmlns:a="http://schemas.openxmlformats.org/drawingml/2006/main">
-              <a:ext uri="{FF2B5EF4-FFF2-40B4-BE49-F238E27FC236}">
-                <a16:creationId xmlns:a16="http://schemas.microsoft.com/office/drawing/2014/main" id="{705D9EC3-9687-46A2-A3CF-FC0939067718}"/>
+          <p:cNvPr id="13" name="">
+            <a:extLst xmlns:a="http://schemas.openxmlformats.org/drawingml/2006/main">
+              <a:ext uri="{FF2B5EF4-FFF2-40B4-BE49-F238E27FC236}">
+                <a16:creationId xmlns:a16="http://schemas.microsoft.com/office/drawing/2014/main" id="{F172AB17-7B31-4B70-8090-D91B2DC5DA29}"/>
               </a:ext>
             </a:extLst>
           </p:cNvPr>
@@ -34573,10 +33109,10 @@
       </p:sp>
       <p:sp>
         <p:nvSpPr>
-          <p:cNvPr id="15" name="">
-            <a:extLst xmlns:a="http://schemas.openxmlformats.org/drawingml/2006/main">
-              <a:ext uri="{FF2B5EF4-FFF2-40B4-BE49-F238E27FC236}">
-                <a16:creationId xmlns:a16="http://schemas.microsoft.com/office/drawing/2014/main" id="{A4A26C8C-ACCE-4E3D-9F65-5EDA307E3A79}"/>
+          <p:cNvPr id="14" name="">
+            <a:extLst xmlns:a="http://schemas.openxmlformats.org/drawingml/2006/main">
+              <a:ext uri="{FF2B5EF4-FFF2-40B4-BE49-F238E27FC236}">
+                <a16:creationId xmlns:a16="http://schemas.microsoft.com/office/drawing/2014/main" id="{55490A42-90C0-4F68-88EF-4A8FA1872FE8}"/>
               </a:ext>
             </a:extLst>
           </p:cNvPr>
@@ -34635,7 +33171,7 @@
     </p:spTree>
     <p:extLst>
       <p:ext uri="{BB962C8B-B14F-4D97-AF65-F5344CB8AC3E}">
-        <p14:creationId xmlns:p14="http://schemas.microsoft.com/office/powerpoint/2010/main" val="1392009551"/>
+        <p14:creationId xmlns:p14="http://schemas.microsoft.com/office/powerpoint/2010/main" val="1423997000"/>
       </p:ext>
     </p:extLst>
   </p:cSld>
